--- a/docs/academic/TeslimEdilecekler/Sunumlar/02_Literatur_Taramasi_Sunumu.pptx
+++ b/docs/academic/TeslimEdilecekler/Sunumlar/02_Literatur_Taramasi_Sunumu.pptx
@@ -3258,7 +3258,7 @@
                   <a:srgbClr val="333333"/>
                 </a:solidFill>
               </a:rPr>
-              <a:t>Güncel oran           :  %74 son 5 yıl içinde yayımlanmış (GUJSA eşiği: %30)</a:t>
+              <a:t>Güncel oran           :  %74 son 5 yıl içinde (GUJSA eşiği: %30)</a:t>
             </a:r>
           </a:p>
           <a:p>
@@ -3363,7 +3363,7 @@
                   <a:srgbClr val="333333"/>
                 </a:solidFill>
               </a:rPr>
-              <a:t>Temel tespit: Müzik için ensemble + SHAP yaklaşımı literatürde henüz yok.</a:t>
+              <a:t>Temel tespit: Müzik için ensemble + SHAP yaklaşımı literatürde henüz eksik.</a:t>
             </a:r>
           </a:p>
         </p:txBody>
@@ -5704,7 +5704,7 @@
                   <a:srgbClr val="333333"/>
                 </a:solidFill>
               </a:rPr>
-              <a:t>64k örnekli büyük ölçekli benchmark</a:t>
+              <a:t>Büyük ölçekli benchmark</a:t>
             </a:r>
           </a:p>
         </p:txBody>
@@ -5894,7 +5894,7 @@
                   <a:srgbClr val="333333"/>
                 </a:solidFill>
               </a:rPr>
-              <a:t>  MusicGen (Copet vd., 2023) — Meta, transformer</a:t>
+              <a:t>  MusicGen (Copet vd., 2023) — Meta</a:t>
             </a:r>
           </a:p>
           <a:p>
@@ -5969,7 +5969,7 @@
                   <a:srgbClr val="333333"/>
                 </a:solidFill>
               </a:rPr>
-              <a:t>  Afchar vd. (ICASSP 2025) — MFCC+CNN</a:t>
+              <a:t>  Afchar vd. (ICASSP 2025) — oto-kodlayıcı</a:t>
             </a:r>
           </a:p>
           <a:p>
@@ -6044,9 +6044,32 @@
                   <a:srgbClr val="333333"/>
                 </a:solidFill>
               </a:rPr>
-              <a:t>  SONICS (ICLR 2025) — 97k şarkı</a:t>
-            </a:r>
-          </a:p>
+              <a:t>  SONICS (ICLR 2025), FakeMusicCaps (2025)</a:t>
+            </a:r>
+          </a:p>
+        </p:txBody>
+      </p:sp>
+      <p:sp>
+        <p:nvSpPr>
+          <p:cNvPr id="5" name="TextBox 4"/>
+          <p:cNvSpPr txBox="1"/>
+          <p:nvPr/>
+        </p:nvSpPr>
+        <p:spPr>
+          <a:xfrm>
+            <a:off x="6217920" y="1554480"/>
+            <a:ext cx="5577840" cy="4754880"/>
+          </a:xfrm>
+          <a:prstGeom prst="rect">
+            <a:avLst/>
+          </a:prstGeom>
+          <a:noFill/>
+        </p:spPr>
+        <p:txBody>
+          <a:bodyPr wrap="square">
+            <a:spAutoFit/>
+          </a:bodyPr>
+          <a:lstStyle/>
           <a:p>
             <a:pPr>
               <a:spcAft>
@@ -6059,32 +6082,9 @@
                   <a:srgbClr val="333333"/>
                 </a:solidFill>
               </a:rPr>
-              <a:t>  FakeMusicCaps (J. Imaging 2025)</a:t>
-            </a:r>
-          </a:p>
-        </p:txBody>
-      </p:sp>
-      <p:sp>
-        <p:nvSpPr>
-          <p:cNvPr id="5" name="TextBox 4"/>
-          <p:cNvSpPr txBox="1"/>
-          <p:nvPr/>
-        </p:nvSpPr>
-        <p:spPr>
-          <a:xfrm>
-            <a:off x="6217920" y="1554480"/>
-            <a:ext cx="5577840" cy="4754880"/>
-          </a:xfrm>
-          <a:prstGeom prst="rect">
-            <a:avLst/>
-          </a:prstGeom>
-          <a:noFill/>
-        </p:spPr>
-        <p:txBody>
-          <a:bodyPr wrap="square">
-            <a:spAutoFit/>
-          </a:bodyPr>
-          <a:lstStyle/>
+              <a:t>Literatür Boşlukları:</a:t>
+            </a:r>
+          </a:p>
           <a:p>
             <a:pPr>
               <a:spcAft>
@@ -6097,7 +6097,7 @@
                   <a:srgbClr val="333333"/>
                 </a:solidFill>
               </a:rPr>
-              <a:t>Literatür Boşlukları:</a:t>
+              <a:t/>
             </a:r>
           </a:p>
           <a:p>
@@ -6112,7 +6112,7 @@
                   <a:srgbClr val="333333"/>
                 </a:solidFill>
               </a:rPr>
-              <a:t/>
+              <a:t>✗  Müzik için topluluk (ensemble) yetersiz</a:t>
             </a:r>
           </a:p>
           <a:p>
@@ -6127,7 +6127,7 @@
                   <a:srgbClr val="333333"/>
                 </a:solidFill>
               </a:rPr>
-              <a:t>✗  Müzik için topluluk (ensemble) yok</a:t>
+              <a:t>✗  47 boyutlu heterojen öznitelik yok</a:t>
             </a:r>
           </a:p>
           <a:p>
@@ -6142,7 +6142,7 @@
                   <a:srgbClr val="333333"/>
                 </a:solidFill>
               </a:rPr>
-              <a:t>✗  47 boyutlu heterojen öznitelik yok</a:t>
+              <a:t>✗  Kaynak bazlı performans analizi yok</a:t>
             </a:r>
           </a:p>
           <a:p>
@@ -6157,7 +6157,7 @@
                   <a:srgbClr val="333333"/>
                 </a:solidFill>
               </a:rPr>
-              <a:t>✗  Kaynak bazlı performans analizi yok</a:t>
+              <a:t>✗  SHAP açıklanabilirlik uygulanmamış</a:t>
             </a:r>
           </a:p>
           <a:p>
@@ -6172,7 +6172,7 @@
                   <a:srgbClr val="333333"/>
                 </a:solidFill>
               </a:rPr>
-              <a:t>✗  SHAP açıklanabilirlik uygulanmamış</a:t>
+              <a:t>✗  Youden J eşik optimizasyonu yok</a:t>
             </a:r>
           </a:p>
           <a:p>
@@ -6187,7 +6187,7 @@
                   <a:srgbClr val="333333"/>
                 </a:solidFill>
               </a:rPr>
-              <a:t>✗  Youden J eşik optimizasyonu yok</a:t>
+              <a:t/>
             </a:r>
           </a:p>
           <a:p>
@@ -6202,7 +6202,7 @@
                   <a:srgbClr val="333333"/>
                 </a:solidFill>
               </a:rPr>
-              <a:t/>
+              <a:t>AURIS bu 5 boşluğu dolduruyor.</a:t>
             </a:r>
           </a:p>
           <a:p>
@@ -6217,7 +6217,7 @@
                   <a:srgbClr val="333333"/>
                 </a:solidFill>
               </a:rPr>
-              <a:t>AURIS bu 5 boşluğu dolduruyor.</a:t>
+              <a:t/>
             </a:r>
           </a:p>
           <a:p>
@@ -6232,37 +6232,7 @@
                   <a:srgbClr val="333333"/>
                 </a:solidFill>
               </a:rPr>
-              <a:t/>
-            </a:r>
-          </a:p>
-          <a:p>
-            <a:pPr>
-              <a:spcAft>
-                <a:spcPts val="400"/>
-              </a:spcAft>
-            </a:pPr>
-            <a:r>
-              <a:rPr sz="1300">
-                <a:solidFill>
-                  <a:srgbClr val="333333"/>
-                </a:solidFill>
-              </a:rPr>
-              <a:t>Referans sayısı: 39</a:t>
-            </a:r>
-          </a:p>
-          <a:p>
-            <a:pPr>
-              <a:spcAft>
-                <a:spcPts val="400"/>
-              </a:spcAft>
-            </a:pPr>
-            <a:r>
-              <a:rPr sz="1300">
-                <a:solidFill>
-                  <a:srgbClr val="333333"/>
-                </a:solidFill>
-              </a:rPr>
-              <a:t>Güncel oran   : %74 (2021-2026)</a:t>
+              <a:t>Referans: 39  |  Güncel oran: %74</a:t>
             </a:r>
           </a:p>
         </p:txBody>

--- a/docs/academic/TeslimEdilecekler/Sunumlar/02_Literatur_Taramasi_Sunumu.pptx
+++ b/docs/academic/TeslimEdilecekler/Sunumlar/02_Literatur_Taramasi_Sunumu.pptx
@@ -9,6 +9,7 @@
     <p:sldId id="257" r:id="rId8"/>
     <p:sldId id="258" r:id="rId9"/>
     <p:sldId id="259" r:id="rId10"/>
+    <p:sldId id="260" r:id="rId11"/>
   </p:sldIdLst>
   <p:sldSz cx="12188952" cy="6858000" type="screen4x3"/>
   <p:notesSz cx="6858000" cy="9144000"/>
@@ -3108,7 +3109,7 @@
         <p:spPr>
           <a:xfrm>
             <a:off x="0" y="0"/>
-            <a:ext cx="12188952" cy="1417320"/>
+            <a:ext cx="12188952" cy="2468880"/>
           </a:xfrm>
           <a:prstGeom prst="rect">
             <a:avLst/>
@@ -3144,14 +3145,57 @@
       </p:sp>
       <p:sp>
         <p:nvSpPr>
-          <p:cNvPr id="3" name="TextBox 2"/>
-          <p:cNvSpPr txBox="1"/>
-          <p:nvPr/>
-        </p:nvSpPr>
-        <p:spPr>
-          <a:xfrm>
-            <a:off x="320040" y="91440"/>
-            <a:ext cx="11521440" cy="822960"/>
+          <p:cNvPr id="3" name="Rectangle 2"/>
+          <p:cNvSpPr/>
+          <p:nvPr/>
+        </p:nvSpPr>
+        <p:spPr>
+          <a:xfrm>
+            <a:off x="0" y="2468880"/>
+            <a:ext cx="12188952" cy="64008"/>
+          </a:xfrm>
+          <a:prstGeom prst="rect">
+            <a:avLst/>
+          </a:prstGeom>
+          <a:solidFill>
+            <a:srgbClr val="E0A800"/>
+          </a:solidFill>
+          <a:ln>
+            <a:noFill/>
+          </a:ln>
+        </p:spPr>
+        <p:style>
+          <a:lnRef idx="1">
+            <a:schemeClr val="accent1"/>
+          </a:lnRef>
+          <a:fillRef idx="3">
+            <a:schemeClr val="accent1"/>
+          </a:fillRef>
+          <a:effectRef idx="2">
+            <a:schemeClr val="accent1"/>
+          </a:effectRef>
+          <a:fontRef idx="minor">
+            <a:schemeClr val="lt1"/>
+          </a:fontRef>
+        </p:style>
+        <p:txBody>
+          <a:bodyPr rtlCol="0" anchor="ctr"/>
+          <a:lstStyle/>
+          <a:p>
+            <a:pPr algn="ctr"/>
+          </a:p>
+        </p:txBody>
+      </p:sp>
+      <p:sp>
+        <p:nvSpPr>
+          <p:cNvPr id="4" name="TextBox 3"/>
+          <p:cNvSpPr txBox="1"/>
+          <p:nvPr/>
+        </p:nvSpPr>
+        <p:spPr>
+          <a:xfrm>
+            <a:off x="548640" y="411480"/>
+            <a:ext cx="10972800" cy="365760"/>
           </a:xfrm>
           <a:prstGeom prst="rect">
             <a:avLst/>
@@ -3166,26 +3210,60 @@
           <a:p>
             <a:pPr algn="l"/>
             <a:r>
-              <a:rPr sz="2500" b="1">
+              <a:rPr sz="1300" b="1" i="0">
+                <a:solidFill>
+                  <a:srgbClr val="E0A800"/>
+                </a:solidFill>
+              </a:rPr>
+              <a:t>02 — LİTERATÜR TARAMASI</a:t>
+            </a:r>
+          </a:p>
+        </p:txBody>
+      </p:sp>
+      <p:sp>
+        <p:nvSpPr>
+          <p:cNvPr id="5" name="TextBox 4"/>
+          <p:cNvSpPr txBox="1"/>
+          <p:nvPr/>
+        </p:nvSpPr>
+        <p:spPr>
+          <a:xfrm>
+            <a:off x="548640" y="868680"/>
+            <a:ext cx="10972800" cy="914400"/>
+          </a:xfrm>
+          <a:prstGeom prst="rect">
+            <a:avLst/>
+          </a:prstGeom>
+          <a:noFill/>
+        </p:spPr>
+        <p:txBody>
+          <a:bodyPr wrap="square">
+            <a:spAutoFit/>
+          </a:bodyPr>
+          <a:lstStyle/>
+          <a:p>
+            <a:pPr algn="l"/>
+            <a:r>
+              <a:rPr sz="3400" b="1" i="0">
                 <a:solidFill>
                   <a:srgbClr val="FFFFFF"/>
                 </a:solidFill>
               </a:rPr>
-              <a:t>02 — Literatür Taraması</a:t>
-            </a:r>
-          </a:p>
-        </p:txBody>
-      </p:sp>
-      <p:sp>
-        <p:nvSpPr>
-          <p:cNvPr id="4" name="TextBox 3"/>
-          <p:cNvSpPr txBox="1"/>
-          <p:nvPr/>
-        </p:nvSpPr>
-        <p:spPr>
-          <a:xfrm>
-            <a:off x="320040" y="841248"/>
-            <a:ext cx="11521440" cy="457200"/>
+              <a:t>İlgili Çalışmalar</a:t>
+            </a:r>
+          </a:p>
+        </p:txBody>
+      </p:sp>
+      <p:sp>
+        <p:nvSpPr>
+          <p:cNvPr id="6" name="TextBox 5"/>
+          <p:cNvSpPr txBox="1"/>
+          <p:nvPr/>
+        </p:nvSpPr>
+        <p:spPr>
+          <a:xfrm>
+            <a:off x="548640" y="1691640"/>
+            <a:ext cx="10972800" cy="548640"/>
           </a:xfrm>
           <a:prstGeom prst="rect">
             <a:avLst/>
@@ -3200,26 +3278,359 @@
           <a:p>
             <a:pPr algn="l"/>
             <a:r>
-              <a:rPr sz="1200" b="0">
-                <a:solidFill>
-                  <a:srgbClr val="B0C8D8"/>
-                </a:solidFill>
-              </a:rPr>
-              <a:t>Kapsam ve yöntem</a:t>
-            </a:r>
-          </a:p>
-        </p:txBody>
-      </p:sp>
-      <p:sp>
-        <p:nvSpPr>
-          <p:cNvPr id="5" name="TextBox 4"/>
-          <p:cNvSpPr txBox="1"/>
-          <p:nvPr/>
-        </p:nvSpPr>
-        <p:spPr>
-          <a:xfrm>
-            <a:off x="457200" y="1554480"/>
-            <a:ext cx="11247120" cy="4389120"/>
+              <a:rPr sz="1600" b="0" i="0">
+                <a:solidFill>
+                  <a:srgbClr val="AEC6D6"/>
+                </a:solidFill>
+              </a:rPr>
+              <a:t>39 kaynak · üç araştırma alanı · sistematik boşluk analizi</a:t>
+            </a:r>
+          </a:p>
+        </p:txBody>
+      </p:sp>
+      <p:sp>
+        <p:nvSpPr>
+          <p:cNvPr id="7" name="Rectangle 6"/>
+          <p:cNvSpPr/>
+          <p:nvPr/>
+        </p:nvSpPr>
+        <p:spPr>
+          <a:xfrm>
+            <a:off x="640080" y="2971800"/>
+            <a:ext cx="3520440" cy="1051560"/>
+          </a:xfrm>
+          <a:prstGeom prst="rect">
+            <a:avLst/>
+          </a:prstGeom>
+          <a:solidFill>
+            <a:srgbClr val="0D2B55"/>
+          </a:solidFill>
+          <a:ln>
+            <a:noFill/>
+          </a:ln>
+        </p:spPr>
+        <p:style>
+          <a:lnRef idx="1">
+            <a:schemeClr val="accent1"/>
+          </a:lnRef>
+          <a:fillRef idx="3">
+            <a:schemeClr val="accent1"/>
+          </a:fillRef>
+          <a:effectRef idx="2">
+            <a:schemeClr val="accent1"/>
+          </a:effectRef>
+          <a:fontRef idx="minor">
+            <a:schemeClr val="lt1"/>
+          </a:fontRef>
+        </p:style>
+        <p:txBody>
+          <a:bodyPr rtlCol="0" anchor="ctr"/>
+          <a:lstStyle/>
+          <a:p>
+            <a:pPr algn="ctr"/>
+          </a:p>
+        </p:txBody>
+      </p:sp>
+      <p:sp>
+        <p:nvSpPr>
+          <p:cNvPr id="8" name="TextBox 7"/>
+          <p:cNvSpPr txBox="1"/>
+          <p:nvPr/>
+        </p:nvSpPr>
+        <p:spPr>
+          <a:xfrm>
+            <a:off x="640080" y="3108502"/>
+            <a:ext cx="3520440" cy="525780"/>
+          </a:xfrm>
+          <a:prstGeom prst="rect">
+            <a:avLst/>
+          </a:prstGeom>
+          <a:noFill/>
+        </p:spPr>
+        <p:txBody>
+          <a:bodyPr wrap="square">
+            <a:spAutoFit/>
+          </a:bodyPr>
+          <a:lstStyle/>
+          <a:p>
+            <a:pPr algn="ctr"/>
+            <a:r>
+              <a:rPr sz="3000" b="1" i="0">
+                <a:solidFill>
+                  <a:srgbClr val="E0A800"/>
+                </a:solidFill>
+              </a:rPr>
+              <a:t>39</a:t>
+            </a:r>
+          </a:p>
+        </p:txBody>
+      </p:sp>
+      <p:sp>
+        <p:nvSpPr>
+          <p:cNvPr id="9" name="TextBox 8"/>
+          <p:cNvSpPr txBox="1"/>
+          <p:nvPr/>
+        </p:nvSpPr>
+        <p:spPr>
+          <a:xfrm>
+            <a:off x="640080" y="3623767"/>
+            <a:ext cx="3520440" cy="336499"/>
+          </a:xfrm>
+          <a:prstGeom prst="rect">
+            <a:avLst/>
+          </a:prstGeom>
+          <a:noFill/>
+        </p:spPr>
+        <p:txBody>
+          <a:bodyPr wrap="square">
+            <a:spAutoFit/>
+          </a:bodyPr>
+          <a:lstStyle/>
+          <a:p>
+            <a:pPr algn="ctr"/>
+            <a:r>
+              <a:rPr sz="1100" b="0" i="0">
+                <a:solidFill>
+                  <a:srgbClr val="FFFFFF"/>
+                </a:solidFill>
+              </a:rPr>
+              <a:t>Taranan kaynak</a:t>
+            </a:r>
+          </a:p>
+        </p:txBody>
+      </p:sp>
+      <p:sp>
+        <p:nvSpPr>
+          <p:cNvPr id="10" name="Rectangle 9"/>
+          <p:cNvSpPr/>
+          <p:nvPr/>
+        </p:nvSpPr>
+        <p:spPr>
+          <a:xfrm>
+            <a:off x="4343400" y="2971800"/>
+            <a:ext cx="3520440" cy="1051560"/>
+          </a:xfrm>
+          <a:prstGeom prst="rect">
+            <a:avLst/>
+          </a:prstGeom>
+          <a:solidFill>
+            <a:srgbClr val="0D2B55"/>
+          </a:solidFill>
+          <a:ln>
+            <a:noFill/>
+          </a:ln>
+        </p:spPr>
+        <p:style>
+          <a:lnRef idx="1">
+            <a:schemeClr val="accent1"/>
+          </a:lnRef>
+          <a:fillRef idx="3">
+            <a:schemeClr val="accent1"/>
+          </a:fillRef>
+          <a:effectRef idx="2">
+            <a:schemeClr val="accent1"/>
+          </a:effectRef>
+          <a:fontRef idx="minor">
+            <a:schemeClr val="lt1"/>
+          </a:fontRef>
+        </p:style>
+        <p:txBody>
+          <a:bodyPr rtlCol="0" anchor="ctr"/>
+          <a:lstStyle/>
+          <a:p>
+            <a:pPr algn="ctr"/>
+          </a:p>
+        </p:txBody>
+      </p:sp>
+      <p:sp>
+        <p:nvSpPr>
+          <p:cNvPr id="11" name="TextBox 10"/>
+          <p:cNvSpPr txBox="1"/>
+          <p:nvPr/>
+        </p:nvSpPr>
+        <p:spPr>
+          <a:xfrm>
+            <a:off x="4343400" y="3108502"/>
+            <a:ext cx="3520440" cy="525780"/>
+          </a:xfrm>
+          <a:prstGeom prst="rect">
+            <a:avLst/>
+          </a:prstGeom>
+          <a:noFill/>
+        </p:spPr>
+        <p:txBody>
+          <a:bodyPr wrap="square">
+            <a:spAutoFit/>
+          </a:bodyPr>
+          <a:lstStyle/>
+          <a:p>
+            <a:pPr algn="ctr"/>
+            <a:r>
+              <a:rPr sz="3000" b="1" i="0">
+                <a:solidFill>
+                  <a:srgbClr val="1A6B3A"/>
+                </a:solidFill>
+              </a:rPr>
+              <a:t>%74</a:t>
+            </a:r>
+          </a:p>
+        </p:txBody>
+      </p:sp>
+      <p:sp>
+        <p:nvSpPr>
+          <p:cNvPr id="12" name="TextBox 11"/>
+          <p:cNvSpPr txBox="1"/>
+          <p:nvPr/>
+        </p:nvSpPr>
+        <p:spPr>
+          <a:xfrm>
+            <a:off x="4343400" y="3623767"/>
+            <a:ext cx="3520440" cy="336499"/>
+          </a:xfrm>
+          <a:prstGeom prst="rect">
+            <a:avLst/>
+          </a:prstGeom>
+          <a:noFill/>
+        </p:spPr>
+        <p:txBody>
+          <a:bodyPr wrap="square">
+            <a:spAutoFit/>
+          </a:bodyPr>
+          <a:lstStyle/>
+          <a:p>
+            <a:pPr algn="ctr"/>
+            <a:r>
+              <a:rPr sz="1100" b="0" i="0">
+                <a:solidFill>
+                  <a:srgbClr val="FFFFFF"/>
+                </a:solidFill>
+              </a:rPr>
+              <a:t>Son 5 yıl (2021+)</a:t>
+            </a:r>
+          </a:p>
+        </p:txBody>
+      </p:sp>
+      <p:sp>
+        <p:nvSpPr>
+          <p:cNvPr id="13" name="Rectangle 12"/>
+          <p:cNvSpPr/>
+          <p:nvPr/>
+        </p:nvSpPr>
+        <p:spPr>
+          <a:xfrm>
+            <a:off x="8046720" y="2971800"/>
+            <a:ext cx="3520440" cy="1051560"/>
+          </a:xfrm>
+          <a:prstGeom prst="rect">
+            <a:avLst/>
+          </a:prstGeom>
+          <a:solidFill>
+            <a:srgbClr val="0D2B55"/>
+          </a:solidFill>
+          <a:ln>
+            <a:noFill/>
+          </a:ln>
+        </p:spPr>
+        <p:style>
+          <a:lnRef idx="1">
+            <a:schemeClr val="accent1"/>
+          </a:lnRef>
+          <a:fillRef idx="3">
+            <a:schemeClr val="accent1"/>
+          </a:fillRef>
+          <a:effectRef idx="2">
+            <a:schemeClr val="accent1"/>
+          </a:effectRef>
+          <a:fontRef idx="minor">
+            <a:schemeClr val="lt1"/>
+          </a:fontRef>
+        </p:style>
+        <p:txBody>
+          <a:bodyPr rtlCol="0" anchor="ctr"/>
+          <a:lstStyle/>
+          <a:p>
+            <a:pPr algn="ctr"/>
+          </a:p>
+        </p:txBody>
+      </p:sp>
+      <p:sp>
+        <p:nvSpPr>
+          <p:cNvPr id="14" name="TextBox 13"/>
+          <p:cNvSpPr txBox="1"/>
+          <p:nvPr/>
+        </p:nvSpPr>
+        <p:spPr>
+          <a:xfrm>
+            <a:off x="8046720" y="3108502"/>
+            <a:ext cx="3520440" cy="525780"/>
+          </a:xfrm>
+          <a:prstGeom prst="rect">
+            <a:avLst/>
+          </a:prstGeom>
+          <a:noFill/>
+        </p:spPr>
+        <p:txBody>
+          <a:bodyPr wrap="square">
+            <a:spAutoFit/>
+          </a:bodyPr>
+          <a:lstStyle/>
+          <a:p>
+            <a:pPr algn="ctr"/>
+            <a:r>
+              <a:rPr sz="3000" b="1" i="0">
+                <a:solidFill>
+                  <a:srgbClr val="E0A800"/>
+                </a:solidFill>
+              </a:rPr>
+              <a:t>3</a:t>
+            </a:r>
+          </a:p>
+        </p:txBody>
+      </p:sp>
+      <p:sp>
+        <p:nvSpPr>
+          <p:cNvPr id="15" name="TextBox 14"/>
+          <p:cNvSpPr txBox="1"/>
+          <p:nvPr/>
+        </p:nvSpPr>
+        <p:spPr>
+          <a:xfrm>
+            <a:off x="8046720" y="3623767"/>
+            <a:ext cx="3520440" cy="336499"/>
+          </a:xfrm>
+          <a:prstGeom prst="rect">
+            <a:avLst/>
+          </a:prstGeom>
+          <a:noFill/>
+        </p:spPr>
+        <p:txBody>
+          <a:bodyPr wrap="square">
+            <a:spAutoFit/>
+          </a:bodyPr>
+          <a:lstStyle/>
+          <a:p>
+            <a:pPr algn="ctr"/>
+            <a:r>
+              <a:rPr sz="1100" b="0" i="0">
+                <a:solidFill>
+                  <a:srgbClr val="FFFFFF"/>
+                </a:solidFill>
+              </a:rPr>
+              <a:t>Araştırma alanı</a:t>
+            </a:r>
+          </a:p>
+        </p:txBody>
+      </p:sp>
+      <p:sp>
+        <p:nvSpPr>
+          <p:cNvPr id="16" name="TextBox 15"/>
+          <p:cNvSpPr txBox="1"/>
+          <p:nvPr/>
+        </p:nvSpPr>
+        <p:spPr>
+          <a:xfrm>
+            <a:off x="640080" y="4389120"/>
+            <a:ext cx="10972800" cy="2011680"/>
           </a:xfrm>
           <a:prstGeom prst="rect">
             <a:avLst/>
@@ -3234,150 +3645,60 @@
           <a:p>
             <a:pPr>
               <a:spcAft>
-                <a:spcPts val="400"/>
+                <a:spcPts val="900"/>
               </a:spcAft>
             </a:pPr>
             <a:r>
-              <a:rPr sz="1500">
-                <a:solidFill>
-                  <a:srgbClr val="333333"/>
-                </a:solidFill>
-              </a:rPr>
-              <a:t>Taranan kaynak sayısı :  39 makale (2020-2026)</a:t>
+              <a:rPr sz="1300">
+                <a:solidFill>
+                  <a:srgbClr val="2A2A2A"/>
+                </a:solidFill>
+              </a:rPr>
+              <a:t>—  GUJSA kuralı referansların en az %30'unun güncel olmasını şart koşar — AURIS %74 ile bu eşiği fazlasıyla aşar.</a:t>
             </a:r>
           </a:p>
           <a:p>
             <a:pPr>
               <a:spcAft>
-                <a:spcPts val="400"/>
+                <a:spcPts val="900"/>
               </a:spcAft>
             </a:pPr>
             <a:r>
-              <a:rPr sz="1500">
-                <a:solidFill>
-                  <a:srgbClr val="333333"/>
-                </a:solidFill>
-              </a:rPr>
-              <a:t>Güncel oran           :  %74 son 5 yıl içinde (GUJSA eşiği: %30)</a:t>
+              <a:rPr sz="1300">
+                <a:solidFill>
+                  <a:srgbClr val="2A2A2A"/>
+                </a:solidFill>
+              </a:rPr>
+              <a:t>—  Tarama üç eksende yürütüldü: ses deepfake tespiti, üretken müzik sistemleri ve YZ müzik tespiti.</a:t>
             </a:r>
           </a:p>
           <a:p>
             <a:pPr>
               <a:spcAft>
-                <a:spcPts val="400"/>
+                <a:spcPts val="900"/>
               </a:spcAft>
             </a:pPr>
             <a:r>
-              <a:rPr sz="1500">
-                <a:solidFill>
-                  <a:srgbClr val="333333"/>
-                </a:solidFill>
-              </a:rPr>
-              <a:t/>
-            </a:r>
-          </a:p>
-          <a:p>
-            <a:pPr>
-              <a:spcAft>
-                <a:spcPts val="400"/>
-              </a:spcAft>
-            </a:pPr>
-            <a:r>
-              <a:rPr sz="1500">
-                <a:solidFill>
-                  <a:srgbClr val="333333"/>
-                </a:solidFill>
-              </a:rPr>
-              <a:t>3 ana araştırma alanı:</a:t>
-            </a:r>
-          </a:p>
-          <a:p>
-            <a:pPr>
-              <a:spcAft>
-                <a:spcPts val="400"/>
-              </a:spcAft>
-            </a:pPr>
-            <a:r>
-              <a:rPr sz="1500">
-                <a:solidFill>
-                  <a:srgbClr val="333333"/>
-                </a:solidFill>
-              </a:rPr>
-              <a:t>  1.  Ses Derin Sahte Tespiti (Audio Deepfake Detection)</a:t>
-            </a:r>
-          </a:p>
-          <a:p>
-            <a:pPr>
-              <a:spcAft>
-                <a:spcPts val="400"/>
-              </a:spcAft>
-            </a:pPr>
-            <a:r>
-              <a:rPr sz="1500">
-                <a:solidFill>
-                  <a:srgbClr val="333333"/>
-                </a:solidFill>
-              </a:rPr>
-              <a:t>  2.  GenAI Müzik Üretici Sistemleri</a:t>
-            </a:r>
-          </a:p>
-          <a:p>
-            <a:pPr>
-              <a:spcAft>
-                <a:spcPts val="400"/>
-              </a:spcAft>
-            </a:pPr>
-            <a:r>
-              <a:rPr sz="1500">
-                <a:solidFill>
-                  <a:srgbClr val="333333"/>
-                </a:solidFill>
-              </a:rPr>
-              <a:t>  3.  GenAI Müzik Tespitinde Güncel Gelişmeler</a:t>
-            </a:r>
-          </a:p>
-          <a:p>
-            <a:pPr>
-              <a:spcAft>
-                <a:spcPts val="400"/>
-              </a:spcAft>
-            </a:pPr>
-            <a:r>
-              <a:rPr sz="1500">
-                <a:solidFill>
-                  <a:srgbClr val="333333"/>
-                </a:solidFill>
-              </a:rPr>
-              <a:t/>
-            </a:r>
-          </a:p>
-          <a:p>
-            <a:pPr>
-              <a:spcAft>
-                <a:spcPts val="400"/>
-              </a:spcAft>
-            </a:pPr>
-            <a:r>
-              <a:rPr sz="1500">
-                <a:solidFill>
-                  <a:srgbClr val="333333"/>
-                </a:solidFill>
-              </a:rPr>
-              <a:t>Temel tespit: Müzik için ensemble + SHAP yaklaşımı literatürde henüz eksik.</a:t>
-            </a:r>
-          </a:p>
-        </p:txBody>
-      </p:sp>
-      <p:sp>
-        <p:nvSpPr>
-          <p:cNvPr id="6" name="TextBox 5"/>
-          <p:cNvSpPr txBox="1"/>
-          <p:nvPr/>
-        </p:nvSpPr>
-        <p:spPr>
-          <a:xfrm>
-            <a:off x="0" y="6510528"/>
-            <a:ext cx="12188952" cy="301752"/>
+              <a:rPr sz="1300">
+                <a:solidFill>
+                  <a:srgbClr val="2A2A2A"/>
+                </a:solidFill>
+              </a:rPr>
+              <a:t>—  Temel bulgu: müzik için topluluk öğrenmesi + SHAP açıklanabilirliğini birleştiren çalışma literatürde eksik.</a:t>
+            </a:r>
+          </a:p>
+        </p:txBody>
+      </p:sp>
+      <p:sp>
+        <p:nvSpPr>
+          <p:cNvPr id="17" name="TextBox 16"/>
+          <p:cNvSpPr txBox="1"/>
+          <p:nvPr/>
+        </p:nvSpPr>
+        <p:spPr>
+          <a:xfrm>
+            <a:off x="365760" y="6510528"/>
+            <a:ext cx="8229600" cy="301752"/>
           </a:xfrm>
           <a:prstGeom prst="rect">
             <a:avLst/>
@@ -3390,14 +3711,48 @@
           </a:bodyPr>
           <a:lstStyle/>
           <a:p>
-            <a:pPr algn="ctr"/>
-            <a:r>
-              <a:rPr sz="900" b="0">
-                <a:solidFill>
-                  <a:srgbClr val="8899AA"/>
-                </a:solidFill>
-              </a:rPr>
-              <a:t>Hasan Arthur Altuntaş  |  BM498  |  Düzce Üniversitesi  |  2025-2026</a:t>
+            <a:pPr algn="l"/>
+            <a:r>
+              <a:rPr sz="900" b="0" i="0">
+                <a:solidFill>
+                  <a:srgbClr val="66707A"/>
+                </a:solidFill>
+              </a:rPr>
+              <a:t>AURIS  ·  Hasan Arthur Altuntaş  ·  BM498 Mezuniyet Tezi</a:t>
+            </a:r>
+          </a:p>
+        </p:txBody>
+      </p:sp>
+      <p:sp>
+        <p:nvSpPr>
+          <p:cNvPr id="18" name="TextBox 17"/>
+          <p:cNvSpPr txBox="1"/>
+          <p:nvPr/>
+        </p:nvSpPr>
+        <p:spPr>
+          <a:xfrm>
+            <a:off x="8595360" y="6510528"/>
+            <a:ext cx="3200400" cy="301752"/>
+          </a:xfrm>
+          <a:prstGeom prst="rect">
+            <a:avLst/>
+          </a:prstGeom>
+          <a:noFill/>
+        </p:spPr>
+        <p:txBody>
+          <a:bodyPr wrap="square">
+            <a:spAutoFit/>
+          </a:bodyPr>
+          <a:lstStyle/>
+          <a:p>
+            <a:pPr algn="r"/>
+            <a:r>
+              <a:rPr sz="900" b="0" i="0">
+                <a:solidFill>
+                  <a:srgbClr val="66707A"/>
+                </a:solidFill>
+              </a:rPr>
+              <a:t>Düzce Üniversitesi · 2025-2026</a:t>
             </a:r>
           </a:p>
         </p:txBody>
@@ -3437,7 +3792,7 @@
         <p:spPr>
           <a:xfrm>
             <a:off x="0" y="0"/>
-            <a:ext cx="12188952" cy="1417320"/>
+            <a:ext cx="12188952" cy="1371600"/>
           </a:xfrm>
           <a:prstGeom prst="rect">
             <a:avLst/>
@@ -3473,14 +3828,57 @@
       </p:sp>
       <p:sp>
         <p:nvSpPr>
-          <p:cNvPr id="3" name="TextBox 2"/>
-          <p:cNvSpPr txBox="1"/>
-          <p:nvPr/>
-        </p:nvSpPr>
-        <p:spPr>
-          <a:xfrm>
-            <a:off x="320040" y="91440"/>
-            <a:ext cx="11521440" cy="822960"/>
+          <p:cNvPr id="3" name="Rectangle 2"/>
+          <p:cNvSpPr/>
+          <p:nvPr/>
+        </p:nvSpPr>
+        <p:spPr>
+          <a:xfrm>
+            <a:off x="0" y="1371600"/>
+            <a:ext cx="12188952" cy="54864"/>
+          </a:xfrm>
+          <a:prstGeom prst="rect">
+            <a:avLst/>
+          </a:prstGeom>
+          <a:solidFill>
+            <a:srgbClr val="E0A800"/>
+          </a:solidFill>
+          <a:ln>
+            <a:noFill/>
+          </a:ln>
+        </p:spPr>
+        <p:style>
+          <a:lnRef idx="1">
+            <a:schemeClr val="accent1"/>
+          </a:lnRef>
+          <a:fillRef idx="3">
+            <a:schemeClr val="accent1"/>
+          </a:fillRef>
+          <a:effectRef idx="2">
+            <a:schemeClr val="accent1"/>
+          </a:effectRef>
+          <a:fontRef idx="minor">
+            <a:schemeClr val="lt1"/>
+          </a:fontRef>
+        </p:style>
+        <p:txBody>
+          <a:bodyPr rtlCol="0" anchor="ctr"/>
+          <a:lstStyle/>
+          <a:p>
+            <a:pPr algn="ctr"/>
+          </a:p>
+        </p:txBody>
+      </p:sp>
+      <p:sp>
+        <p:nvSpPr>
+          <p:cNvPr id="4" name="TextBox 3"/>
+          <p:cNvSpPr txBox="1"/>
+          <p:nvPr/>
+        </p:nvSpPr>
+        <p:spPr>
+          <a:xfrm>
+            <a:off x="365760" y="109728"/>
+            <a:ext cx="11430000" cy="320040"/>
           </a:xfrm>
           <a:prstGeom prst="rect">
             <a:avLst/>
@@ -3495,26 +3893,94 @@
           <a:p>
             <a:pPr algn="l"/>
             <a:r>
-              <a:rPr sz="2500" b="1">
+              <a:rPr sz="1100" b="1" i="0">
+                <a:solidFill>
+                  <a:srgbClr val="E0A800"/>
+                </a:solidFill>
+              </a:rPr>
+              <a:t>ALAN 1</a:t>
+            </a:r>
+          </a:p>
+        </p:txBody>
+      </p:sp>
+      <p:sp>
+        <p:nvSpPr>
+          <p:cNvPr id="5" name="TextBox 4"/>
+          <p:cNvSpPr txBox="1"/>
+          <p:nvPr/>
+        </p:nvSpPr>
+        <p:spPr>
+          <a:xfrm>
+            <a:off x="365760" y="402336"/>
+            <a:ext cx="11430000" cy="640080"/>
+          </a:xfrm>
+          <a:prstGeom prst="rect">
+            <a:avLst/>
+          </a:prstGeom>
+          <a:noFill/>
+        </p:spPr>
+        <p:txBody>
+          <a:bodyPr wrap="square">
+            <a:spAutoFit/>
+          </a:bodyPr>
+          <a:lstStyle/>
+          <a:p>
+            <a:pPr algn="l"/>
+            <a:r>
+              <a:rPr sz="2400" b="1" i="0">
                 <a:solidFill>
                   <a:srgbClr val="FFFFFF"/>
                 </a:solidFill>
               </a:rPr>
-              <a:t>Alan 1: Ses Derin Sahte Tespiti</a:t>
-            </a:r>
-          </a:p>
-        </p:txBody>
-      </p:sp>
-      <p:sp>
-        <p:nvSpPr>
-          <p:cNvPr id="4" name="Rectangle 3"/>
+              <a:t>Ses Derin Sahte Tespiti (Audio Deepfake Detection)</a:t>
+            </a:r>
+          </a:p>
+        </p:txBody>
+      </p:sp>
+      <p:sp>
+        <p:nvSpPr>
+          <p:cNvPr id="6" name="TextBox 5"/>
+          <p:cNvSpPr txBox="1"/>
+          <p:nvPr/>
+        </p:nvSpPr>
+        <p:spPr>
+          <a:xfrm>
+            <a:off x="365760" y="987552"/>
+            <a:ext cx="11430000" cy="365760"/>
+          </a:xfrm>
+          <a:prstGeom prst="rect">
+            <a:avLst/>
+          </a:prstGeom>
+          <a:noFill/>
+        </p:spPr>
+        <p:txBody>
+          <a:bodyPr wrap="square">
+            <a:spAutoFit/>
+          </a:bodyPr>
+          <a:lstStyle/>
+          <a:p>
+            <a:pPr algn="l"/>
+            <a:r>
+              <a:rPr sz="1250" b="0" i="0">
+                <a:solidFill>
+                  <a:srgbClr val="AEC6D6"/>
+                </a:solidFill>
+              </a:rPr>
+              <a:t>GenAI müzik tespiti için en olgun komşu alan</a:t>
+            </a:r>
+          </a:p>
+        </p:txBody>
+      </p:sp>
+      <p:sp>
+        <p:nvSpPr>
+          <p:cNvPr id="7" name="Rectangle 6"/>
           <p:cNvSpPr/>
           <p:nvPr/>
         </p:nvSpPr>
         <p:spPr>
           <a:xfrm>
-            <a:off x="320040" y="1600200"/>
-            <a:ext cx="2560320" cy="384048"/>
+            <a:off x="365760" y="1600200"/>
+            <a:ext cx="2286000" cy="411480"/>
           </a:xfrm>
           <a:prstGeom prst="rect">
             <a:avLst/>
@@ -3550,14 +4016,14 @@
       </p:sp>
       <p:sp>
         <p:nvSpPr>
-          <p:cNvPr id="5" name="TextBox 4"/>
-          <p:cNvSpPr txBox="1"/>
-          <p:nvPr/>
-        </p:nvSpPr>
-        <p:spPr>
-          <a:xfrm>
-            <a:off x="365759" y="1627632"/>
-            <a:ext cx="2468879" cy="329184"/>
+          <p:cNvPr id="8" name="TextBox 7"/>
+          <p:cNvSpPr txBox="1"/>
+          <p:nvPr/>
+        </p:nvSpPr>
+        <p:spPr>
+          <a:xfrm>
+            <a:off x="438912" y="1636776"/>
+            <a:ext cx="2176272" cy="347472"/>
           </a:xfrm>
           <a:prstGeom prst="rect">
             <a:avLst/>
@@ -3570,9 +4036,9 @@
           </a:bodyPr>
           <a:lstStyle/>
           <a:p>
-            <a:pPr algn="ctr"/>
-            <a:r>
-              <a:rPr sz="1200" b="1">
+            <a:pPr algn="l"/>
+            <a:r>
+              <a:rPr sz="1200" b="1" i="0">
                 <a:solidFill>
                   <a:srgbClr val="FFFFFF"/>
                 </a:solidFill>
@@ -3584,14 +4050,14 @@
       </p:sp>
       <p:sp>
         <p:nvSpPr>
-          <p:cNvPr id="6" name="Rectangle 5"/>
+          <p:cNvPr id="9" name="Rectangle 8"/>
           <p:cNvSpPr/>
           <p:nvPr/>
         </p:nvSpPr>
         <p:spPr>
           <a:xfrm>
-            <a:off x="2926080" y="1600200"/>
-            <a:ext cx="2286000" cy="384048"/>
+            <a:off x="2651760" y="1600200"/>
+            <a:ext cx="2011680" cy="411480"/>
           </a:xfrm>
           <a:prstGeom prst="rect">
             <a:avLst/>
@@ -3627,14 +4093,14 @@
       </p:sp>
       <p:sp>
         <p:nvSpPr>
-          <p:cNvPr id="7" name="TextBox 6"/>
-          <p:cNvSpPr txBox="1"/>
-          <p:nvPr/>
-        </p:nvSpPr>
-        <p:spPr>
-          <a:xfrm>
-            <a:off x="2971800" y="1627632"/>
-            <a:ext cx="2194560" cy="329184"/>
+          <p:cNvPr id="10" name="TextBox 9"/>
+          <p:cNvSpPr txBox="1"/>
+          <p:nvPr/>
+        </p:nvSpPr>
+        <p:spPr>
+          <a:xfrm>
+            <a:off x="2724912" y="1636776"/>
+            <a:ext cx="1901952" cy="347472"/>
           </a:xfrm>
           <a:prstGeom prst="rect">
             <a:avLst/>
@@ -3647,9 +4113,9 @@
           </a:bodyPr>
           <a:lstStyle/>
           <a:p>
-            <a:pPr algn="ctr"/>
-            <a:r>
-              <a:rPr sz="1200" b="1">
+            <a:pPr algn="l"/>
+            <a:r>
+              <a:rPr sz="1200" b="1" i="0">
                 <a:solidFill>
                   <a:srgbClr val="FFFFFF"/>
                 </a:solidFill>
@@ -3661,14 +4127,14 @@
       </p:sp>
       <p:sp>
         <p:nvSpPr>
-          <p:cNvPr id="8" name="Rectangle 7"/>
+          <p:cNvPr id="11" name="Rectangle 10"/>
           <p:cNvSpPr/>
           <p:nvPr/>
         </p:nvSpPr>
         <p:spPr>
           <a:xfrm>
-            <a:off x="5257800" y="1600200"/>
-            <a:ext cx="1097280" cy="384048"/>
+            <a:off x="4663440" y="1600200"/>
+            <a:ext cx="822960" cy="411480"/>
           </a:xfrm>
           <a:prstGeom prst="rect">
             <a:avLst/>
@@ -3704,14 +4170,14 @@
       </p:sp>
       <p:sp>
         <p:nvSpPr>
-          <p:cNvPr id="9" name="TextBox 8"/>
-          <p:cNvSpPr txBox="1"/>
-          <p:nvPr/>
-        </p:nvSpPr>
-        <p:spPr>
-          <a:xfrm>
-            <a:off x="5303520" y="1627632"/>
-            <a:ext cx="1005839" cy="329184"/>
+          <p:cNvPr id="12" name="TextBox 11"/>
+          <p:cNvSpPr txBox="1"/>
+          <p:nvPr/>
+        </p:nvSpPr>
+        <p:spPr>
+          <a:xfrm>
+            <a:off x="4736592" y="1636776"/>
+            <a:ext cx="713232" cy="347472"/>
           </a:xfrm>
           <a:prstGeom prst="rect">
             <a:avLst/>
@@ -3724,9 +4190,9 @@
           </a:bodyPr>
           <a:lstStyle/>
           <a:p>
-            <a:pPr algn="ctr"/>
-            <a:r>
-              <a:rPr sz="1200" b="1">
+            <a:pPr algn="l"/>
+            <a:r>
+              <a:rPr sz="1200" b="1" i="0">
                 <a:solidFill>
                   <a:srgbClr val="FFFFFF"/>
                 </a:solidFill>
@@ -3738,14 +4204,14 @@
       </p:sp>
       <p:sp>
         <p:nvSpPr>
-          <p:cNvPr id="10" name="Rectangle 9"/>
+          <p:cNvPr id="13" name="Rectangle 12"/>
           <p:cNvSpPr/>
           <p:nvPr/>
         </p:nvSpPr>
         <p:spPr>
           <a:xfrm>
-            <a:off x="6400800" y="1600200"/>
-            <a:ext cx="5943600" cy="384048"/>
+            <a:off x="5486400" y="1600200"/>
+            <a:ext cx="6309360" cy="411480"/>
           </a:xfrm>
           <a:prstGeom prst="rect">
             <a:avLst/>
@@ -3781,14 +4247,14 @@
       </p:sp>
       <p:sp>
         <p:nvSpPr>
-          <p:cNvPr id="11" name="TextBox 10"/>
-          <p:cNvSpPr txBox="1"/>
-          <p:nvPr/>
-        </p:nvSpPr>
-        <p:spPr>
-          <a:xfrm>
-            <a:off x="6446520" y="1627632"/>
-            <a:ext cx="5852160" cy="329184"/>
+          <p:cNvPr id="14" name="TextBox 13"/>
+          <p:cNvSpPr txBox="1"/>
+          <p:nvPr/>
+        </p:nvSpPr>
+        <p:spPr>
+          <a:xfrm>
+            <a:off x="5559552" y="1636776"/>
+            <a:ext cx="6199632" cy="347472"/>
           </a:xfrm>
           <a:prstGeom prst="rect">
             <a:avLst/>
@@ -3801,28 +4267,28 @@
           </a:bodyPr>
           <a:lstStyle/>
           <a:p>
-            <a:pPr algn="ctr"/>
-            <a:r>
-              <a:rPr sz="1200" b="1">
+            <a:pPr algn="l"/>
+            <a:r>
+              <a:rPr sz="1200" b="1" i="0">
                 <a:solidFill>
                   <a:srgbClr val="FFFFFF"/>
                 </a:solidFill>
               </a:rPr>
-              <a:t>Katkı</a:t>
-            </a:r>
-          </a:p>
-        </p:txBody>
-      </p:sp>
-      <p:sp>
-        <p:nvSpPr>
-          <p:cNvPr id="12" name="Rectangle 11"/>
+              <a:t>Yaklaşım ve Katkı</a:t>
+            </a:r>
+          </a:p>
+        </p:txBody>
+      </p:sp>
+      <p:sp>
+        <p:nvSpPr>
+          <p:cNvPr id="15" name="Rectangle 14"/>
           <p:cNvSpPr/>
           <p:nvPr/>
         </p:nvSpPr>
         <p:spPr>
           <a:xfrm>
-            <a:off x="320040" y="2029968"/>
-            <a:ext cx="2560320" cy="594360"/>
+            <a:off x="365760" y="2057400"/>
+            <a:ext cx="2286000" cy="621792"/>
           </a:xfrm>
           <a:prstGeom prst="rect">
             <a:avLst/>
@@ -3830,9 +4296,9 @@
           <a:solidFill>
             <a:srgbClr val="FFFFFF"/>
           </a:solidFill>
-          <a:ln>
+          <a:ln w="12700">
             <a:solidFill>
-              <a:srgbClr val="CCCCCC"/>
+              <a:srgbClr val="D5D9DD"/>
             </a:solidFill>
           </a:ln>
         </p:spPr>
@@ -3860,48 +4326,48 @@
       </p:sp>
       <p:sp>
         <p:nvSpPr>
-          <p:cNvPr id="13" name="TextBox 12"/>
-          <p:cNvSpPr txBox="1"/>
-          <p:nvPr/>
-        </p:nvSpPr>
-        <p:spPr>
-          <a:xfrm>
-            <a:off x="365759" y="2139696"/>
-            <a:ext cx="2468879" cy="384048"/>
-          </a:xfrm>
-          <a:prstGeom prst="rect">
-            <a:avLst/>
-          </a:prstGeom>
-          <a:noFill/>
-        </p:spPr>
-        <p:txBody>
-          <a:bodyPr wrap="square">
+          <p:cNvPr id="16" name="TextBox 15"/>
+          <p:cNvSpPr txBox="1"/>
+          <p:nvPr/>
+        </p:nvSpPr>
+        <p:spPr>
+          <a:xfrm>
+            <a:off x="457200" y="2130552"/>
+            <a:ext cx="2121408" cy="493776"/>
+          </a:xfrm>
+          <a:prstGeom prst="rect">
+            <a:avLst/>
+          </a:prstGeom>
+          <a:noFill/>
+        </p:spPr>
+        <p:txBody>
+          <a:bodyPr wrap="square" anchor="ctr">
             <a:spAutoFit/>
           </a:bodyPr>
           <a:lstStyle/>
           <a:p>
             <a:pPr algn="ctr"/>
             <a:r>
-              <a:rPr sz="1200" b="0">
-                <a:solidFill>
-                  <a:srgbClr val="333333"/>
-                </a:solidFill>
-              </a:rPr>
-              <a:t>AASIST</a:t>
-            </a:r>
-          </a:p>
-        </p:txBody>
-      </p:sp>
-      <p:sp>
-        <p:nvSpPr>
-          <p:cNvPr id="14" name="Rectangle 13"/>
+              <a:rPr sz="1100" b="1" i="0">
+                <a:solidFill>
+                  <a:srgbClr val="2A2A2A"/>
+                </a:solidFill>
+              </a:rPr>
+              <a:t>AASIST [10]</a:t>
+            </a:r>
+          </a:p>
+        </p:txBody>
+      </p:sp>
+      <p:sp>
+        <p:nvSpPr>
+          <p:cNvPr id="17" name="Rectangle 16"/>
           <p:cNvSpPr/>
           <p:nvPr/>
         </p:nvSpPr>
         <p:spPr>
           <a:xfrm>
-            <a:off x="2926080" y="2029968"/>
-            <a:ext cx="2286000" cy="594360"/>
+            <a:off x="2651760" y="2057400"/>
+            <a:ext cx="2011680" cy="621792"/>
           </a:xfrm>
           <a:prstGeom prst="rect">
             <a:avLst/>
@@ -3909,9 +4375,9 @@
           <a:solidFill>
             <a:srgbClr val="FFFFFF"/>
           </a:solidFill>
-          <a:ln>
+          <a:ln w="12700">
             <a:solidFill>
-              <a:srgbClr val="CCCCCC"/>
+              <a:srgbClr val="D5D9DD"/>
             </a:solidFill>
           </a:ln>
         </p:spPr>
@@ -3939,31 +4405,31 @@
       </p:sp>
       <p:sp>
         <p:nvSpPr>
-          <p:cNvPr id="15" name="TextBox 14"/>
-          <p:cNvSpPr txBox="1"/>
-          <p:nvPr/>
-        </p:nvSpPr>
-        <p:spPr>
-          <a:xfrm>
-            <a:off x="2971800" y="2139696"/>
-            <a:ext cx="2194560" cy="384048"/>
-          </a:xfrm>
-          <a:prstGeom prst="rect">
-            <a:avLst/>
-          </a:prstGeom>
-          <a:noFill/>
-        </p:spPr>
-        <p:txBody>
-          <a:bodyPr wrap="square">
+          <p:cNvPr id="18" name="TextBox 17"/>
+          <p:cNvSpPr txBox="1"/>
+          <p:nvPr/>
+        </p:nvSpPr>
+        <p:spPr>
+          <a:xfrm>
+            <a:off x="2743200" y="2130552"/>
+            <a:ext cx="1847088" cy="493776"/>
+          </a:xfrm>
+          <a:prstGeom prst="rect">
+            <a:avLst/>
+          </a:prstGeom>
+          <a:noFill/>
+        </p:spPr>
+        <p:txBody>
+          <a:bodyPr wrap="square" anchor="ctr">
             <a:spAutoFit/>
           </a:bodyPr>
           <a:lstStyle/>
           <a:p>
             <a:pPr algn="ctr"/>
             <a:r>
-              <a:rPr sz="1200" b="0">
-                <a:solidFill>
-                  <a:srgbClr val="333333"/>
+              <a:rPr sz="1100" b="0" i="0">
+                <a:solidFill>
+                  <a:srgbClr val="2A2A2A"/>
                 </a:solidFill>
               </a:rPr>
               <a:t>Jung vd.</a:t>
@@ -3973,14 +4439,14 @@
       </p:sp>
       <p:sp>
         <p:nvSpPr>
-          <p:cNvPr id="16" name="Rectangle 15"/>
+          <p:cNvPr id="19" name="Rectangle 18"/>
           <p:cNvSpPr/>
           <p:nvPr/>
         </p:nvSpPr>
         <p:spPr>
           <a:xfrm>
-            <a:off x="5257800" y="2029968"/>
-            <a:ext cx="1097280" cy="594360"/>
+            <a:off x="4663440" y="2057400"/>
+            <a:ext cx="822960" cy="621792"/>
           </a:xfrm>
           <a:prstGeom prst="rect">
             <a:avLst/>
@@ -3988,9 +4454,9 @@
           <a:solidFill>
             <a:srgbClr val="FFFFFF"/>
           </a:solidFill>
-          <a:ln>
+          <a:ln w="12700">
             <a:solidFill>
-              <a:srgbClr val="CCCCCC"/>
+              <a:srgbClr val="D5D9DD"/>
             </a:solidFill>
           </a:ln>
         </p:spPr>
@@ -4018,31 +4484,31 @@
       </p:sp>
       <p:sp>
         <p:nvSpPr>
-          <p:cNvPr id="17" name="TextBox 16"/>
-          <p:cNvSpPr txBox="1"/>
-          <p:nvPr/>
-        </p:nvSpPr>
-        <p:spPr>
-          <a:xfrm>
-            <a:off x="5303520" y="2139696"/>
-            <a:ext cx="1005839" cy="384048"/>
-          </a:xfrm>
-          <a:prstGeom prst="rect">
-            <a:avLst/>
-          </a:prstGeom>
-          <a:noFill/>
-        </p:spPr>
-        <p:txBody>
-          <a:bodyPr wrap="square">
+          <p:cNvPr id="20" name="TextBox 19"/>
+          <p:cNvSpPr txBox="1"/>
+          <p:nvPr/>
+        </p:nvSpPr>
+        <p:spPr>
+          <a:xfrm>
+            <a:off x="4754879" y="2130552"/>
+            <a:ext cx="658368" cy="493776"/>
+          </a:xfrm>
+          <a:prstGeom prst="rect">
+            <a:avLst/>
+          </a:prstGeom>
+          <a:noFill/>
+        </p:spPr>
+        <p:txBody>
+          <a:bodyPr wrap="square" anchor="ctr">
             <a:spAutoFit/>
           </a:bodyPr>
           <a:lstStyle/>
           <a:p>
             <a:pPr algn="ctr"/>
             <a:r>
-              <a:rPr sz="1200" b="0">
-                <a:solidFill>
-                  <a:srgbClr val="333333"/>
+              <a:rPr sz="1100" b="0" i="0">
+                <a:solidFill>
+                  <a:srgbClr val="2A2A2A"/>
                 </a:solidFill>
               </a:rPr>
               <a:t>2022</a:t>
@@ -4052,14 +4518,14 @@
       </p:sp>
       <p:sp>
         <p:nvSpPr>
-          <p:cNvPr id="18" name="Rectangle 17"/>
+          <p:cNvPr id="21" name="Rectangle 20"/>
           <p:cNvSpPr/>
           <p:nvPr/>
         </p:nvSpPr>
         <p:spPr>
           <a:xfrm>
-            <a:off x="6400800" y="2029968"/>
-            <a:ext cx="5943600" cy="594360"/>
+            <a:off x="5486400" y="2057400"/>
+            <a:ext cx="6309360" cy="621792"/>
           </a:xfrm>
           <a:prstGeom prst="rect">
             <a:avLst/>
@@ -4067,9 +4533,9 @@
           <a:solidFill>
             <a:srgbClr val="FFFFFF"/>
           </a:solidFill>
-          <a:ln>
+          <a:ln w="12700">
             <a:solidFill>
-              <a:srgbClr val="CCCCCC"/>
+              <a:srgbClr val="D5D9DD"/>
             </a:solidFill>
           </a:ln>
         </p:spPr>
@@ -4097,58 +4563,58 @@
       </p:sp>
       <p:sp>
         <p:nvSpPr>
-          <p:cNvPr id="19" name="TextBox 18"/>
-          <p:cNvSpPr txBox="1"/>
-          <p:nvPr/>
-        </p:nvSpPr>
-        <p:spPr>
-          <a:xfrm>
-            <a:off x="6446520" y="2139696"/>
-            <a:ext cx="5852160" cy="384048"/>
-          </a:xfrm>
-          <a:prstGeom prst="rect">
-            <a:avLst/>
-          </a:prstGeom>
-          <a:noFill/>
-        </p:spPr>
-        <p:txBody>
-          <a:bodyPr wrap="square">
-            <a:spAutoFit/>
-          </a:bodyPr>
-          <a:lstStyle/>
-          <a:p>
-            <a:pPr algn="ctr"/>
-            <a:r>
-              <a:rPr sz="1200" b="0">
-                <a:solidFill>
-                  <a:srgbClr val="333333"/>
-                </a:solidFill>
-              </a:rPr>
-              <a:t>Spektro-temporal GAT — ASVspoof 2019</a:t>
-            </a:r>
-          </a:p>
-        </p:txBody>
-      </p:sp>
-      <p:sp>
-        <p:nvSpPr>
-          <p:cNvPr id="20" name="Rectangle 19"/>
+          <p:cNvPr id="22" name="TextBox 21"/>
+          <p:cNvSpPr txBox="1"/>
+          <p:nvPr/>
+        </p:nvSpPr>
+        <p:spPr>
+          <a:xfrm>
+            <a:off x="5577840" y="2130552"/>
+            <a:ext cx="6144768" cy="493776"/>
+          </a:xfrm>
+          <a:prstGeom prst="rect">
+            <a:avLst/>
+          </a:prstGeom>
+          <a:noFill/>
+        </p:spPr>
+        <p:txBody>
+          <a:bodyPr wrap="square" anchor="ctr">
+            <a:spAutoFit/>
+          </a:bodyPr>
+          <a:lstStyle/>
+          <a:p>
+            <a:pPr algn="l"/>
+            <a:r>
+              <a:rPr sz="1100" b="0" i="0">
+                <a:solidFill>
+                  <a:srgbClr val="2A2A2A"/>
+                </a:solidFill>
+              </a:rPr>
+              <a:t>Bütünleşik spektro-temporal graf dikkat ağı; ASVspoof 2019'da güçlü sonuç</a:t>
+            </a:r>
+          </a:p>
+        </p:txBody>
+      </p:sp>
+      <p:sp>
+        <p:nvSpPr>
+          <p:cNvPr id="23" name="Rectangle 22"/>
           <p:cNvSpPr/>
           <p:nvPr/>
         </p:nvSpPr>
         <p:spPr>
           <a:xfrm>
-            <a:off x="320040" y="2688336"/>
-            <a:ext cx="2560320" cy="594360"/>
+            <a:off x="365760" y="2734056"/>
+            <a:ext cx="2286000" cy="621792"/>
           </a:xfrm>
           <a:prstGeom prst="rect">
             <a:avLst/>
           </a:prstGeom>
           <a:solidFill>
-            <a:srgbClr val="F4F6F8"/>
+            <a:srgbClr val="E8ECF0"/>
           </a:solidFill>
-          <a:ln>
+          <a:ln w="12700">
             <a:solidFill>
-              <a:srgbClr val="CCCCCC"/>
+              <a:srgbClr val="D5D9DD"/>
             </a:solidFill>
           </a:ln>
         </p:spPr>
@@ -4176,58 +4642,58 @@
       </p:sp>
       <p:sp>
         <p:nvSpPr>
-          <p:cNvPr id="21" name="TextBox 20"/>
-          <p:cNvSpPr txBox="1"/>
-          <p:nvPr/>
-        </p:nvSpPr>
-        <p:spPr>
-          <a:xfrm>
-            <a:off x="365759" y="2798064"/>
-            <a:ext cx="2468879" cy="384048"/>
-          </a:xfrm>
-          <a:prstGeom prst="rect">
-            <a:avLst/>
-          </a:prstGeom>
-          <a:noFill/>
-        </p:spPr>
-        <p:txBody>
-          <a:bodyPr wrap="square">
+          <p:cNvPr id="24" name="TextBox 23"/>
+          <p:cNvSpPr txBox="1"/>
+          <p:nvPr/>
+        </p:nvSpPr>
+        <p:spPr>
+          <a:xfrm>
+            <a:off x="457200" y="2807208"/>
+            <a:ext cx="2121408" cy="493776"/>
+          </a:xfrm>
+          <a:prstGeom prst="rect">
+            <a:avLst/>
+          </a:prstGeom>
+          <a:noFill/>
+        </p:spPr>
+        <p:txBody>
+          <a:bodyPr wrap="square" anchor="ctr">
             <a:spAutoFit/>
           </a:bodyPr>
           <a:lstStyle/>
           <a:p>
             <a:pPr algn="ctr"/>
             <a:r>
-              <a:rPr sz="1200" b="0">
-                <a:solidFill>
-                  <a:srgbClr val="333333"/>
-                </a:solidFill>
-              </a:rPr>
-              <a:t>RawNet2</a:t>
-            </a:r>
-          </a:p>
-        </p:txBody>
-      </p:sp>
-      <p:sp>
-        <p:nvSpPr>
-          <p:cNvPr id="22" name="Rectangle 21"/>
+              <a:rPr sz="1100" b="1" i="0">
+                <a:solidFill>
+                  <a:srgbClr val="2A2A2A"/>
+                </a:solidFill>
+              </a:rPr>
+              <a:t>RawNet2 [11]</a:t>
+            </a:r>
+          </a:p>
+        </p:txBody>
+      </p:sp>
+      <p:sp>
+        <p:nvSpPr>
+          <p:cNvPr id="25" name="Rectangle 24"/>
           <p:cNvSpPr/>
           <p:nvPr/>
         </p:nvSpPr>
         <p:spPr>
           <a:xfrm>
-            <a:off x="2926080" y="2688336"/>
-            <a:ext cx="2286000" cy="594360"/>
+            <a:off x="2651760" y="2734056"/>
+            <a:ext cx="2011680" cy="621792"/>
           </a:xfrm>
           <a:prstGeom prst="rect">
             <a:avLst/>
           </a:prstGeom>
           <a:solidFill>
-            <a:srgbClr val="F4F6F8"/>
+            <a:srgbClr val="E8ECF0"/>
           </a:solidFill>
-          <a:ln>
+          <a:ln w="12700">
             <a:solidFill>
-              <a:srgbClr val="CCCCCC"/>
+              <a:srgbClr val="D5D9DD"/>
             </a:solidFill>
           </a:ln>
         </p:spPr>
@@ -4255,31 +4721,31 @@
       </p:sp>
       <p:sp>
         <p:nvSpPr>
-          <p:cNvPr id="23" name="TextBox 22"/>
-          <p:cNvSpPr txBox="1"/>
-          <p:nvPr/>
-        </p:nvSpPr>
-        <p:spPr>
-          <a:xfrm>
-            <a:off x="2971800" y="2798064"/>
-            <a:ext cx="2194560" cy="384048"/>
-          </a:xfrm>
-          <a:prstGeom prst="rect">
-            <a:avLst/>
-          </a:prstGeom>
-          <a:noFill/>
-        </p:spPr>
-        <p:txBody>
-          <a:bodyPr wrap="square">
+          <p:cNvPr id="26" name="TextBox 25"/>
+          <p:cNvSpPr txBox="1"/>
+          <p:nvPr/>
+        </p:nvSpPr>
+        <p:spPr>
+          <a:xfrm>
+            <a:off x="2743200" y="2807208"/>
+            <a:ext cx="1847088" cy="493776"/>
+          </a:xfrm>
+          <a:prstGeom prst="rect">
+            <a:avLst/>
+          </a:prstGeom>
+          <a:noFill/>
+        </p:spPr>
+        <p:txBody>
+          <a:bodyPr wrap="square" anchor="ctr">
             <a:spAutoFit/>
           </a:bodyPr>
           <a:lstStyle/>
           <a:p>
             <a:pPr algn="ctr"/>
             <a:r>
-              <a:rPr sz="1200" b="0">
-                <a:solidFill>
-                  <a:srgbClr val="333333"/>
+              <a:rPr sz="1100" b="0" i="0">
+                <a:solidFill>
+                  <a:srgbClr val="2A2A2A"/>
                 </a:solidFill>
               </a:rPr>
               <a:t>Tak vd.</a:t>
@@ -4289,24 +4755,24 @@
       </p:sp>
       <p:sp>
         <p:nvSpPr>
-          <p:cNvPr id="24" name="Rectangle 23"/>
+          <p:cNvPr id="27" name="Rectangle 26"/>
           <p:cNvSpPr/>
           <p:nvPr/>
         </p:nvSpPr>
         <p:spPr>
           <a:xfrm>
-            <a:off x="5257800" y="2688336"/>
-            <a:ext cx="1097280" cy="594360"/>
+            <a:off x="4663440" y="2734056"/>
+            <a:ext cx="822960" cy="621792"/>
           </a:xfrm>
           <a:prstGeom prst="rect">
             <a:avLst/>
           </a:prstGeom>
           <a:solidFill>
-            <a:srgbClr val="F4F6F8"/>
+            <a:srgbClr val="E8ECF0"/>
           </a:solidFill>
-          <a:ln>
+          <a:ln w="12700">
             <a:solidFill>
-              <a:srgbClr val="CCCCCC"/>
+              <a:srgbClr val="D5D9DD"/>
             </a:solidFill>
           </a:ln>
         </p:spPr>
@@ -4334,31 +4800,31 @@
       </p:sp>
       <p:sp>
         <p:nvSpPr>
-          <p:cNvPr id="25" name="TextBox 24"/>
-          <p:cNvSpPr txBox="1"/>
-          <p:nvPr/>
-        </p:nvSpPr>
-        <p:spPr>
-          <a:xfrm>
-            <a:off x="5303520" y="2798064"/>
-            <a:ext cx="1005839" cy="384048"/>
-          </a:xfrm>
-          <a:prstGeom prst="rect">
-            <a:avLst/>
-          </a:prstGeom>
-          <a:noFill/>
-        </p:spPr>
-        <p:txBody>
-          <a:bodyPr wrap="square">
+          <p:cNvPr id="28" name="TextBox 27"/>
+          <p:cNvSpPr txBox="1"/>
+          <p:nvPr/>
+        </p:nvSpPr>
+        <p:spPr>
+          <a:xfrm>
+            <a:off x="4754879" y="2807208"/>
+            <a:ext cx="658368" cy="493776"/>
+          </a:xfrm>
+          <a:prstGeom prst="rect">
+            <a:avLst/>
+          </a:prstGeom>
+          <a:noFill/>
+        </p:spPr>
+        <p:txBody>
+          <a:bodyPr wrap="square" anchor="ctr">
             <a:spAutoFit/>
           </a:bodyPr>
           <a:lstStyle/>
           <a:p>
             <a:pPr algn="ctr"/>
             <a:r>
-              <a:rPr sz="1200" b="0">
-                <a:solidFill>
-                  <a:srgbClr val="333333"/>
+              <a:rPr sz="1100" b="0" i="0">
+                <a:solidFill>
+                  <a:srgbClr val="2A2A2A"/>
                 </a:solidFill>
               </a:rPr>
               <a:t>2021</a:t>
@@ -4368,24 +4834,24 @@
       </p:sp>
       <p:sp>
         <p:nvSpPr>
-          <p:cNvPr id="26" name="Rectangle 25"/>
+          <p:cNvPr id="29" name="Rectangle 28"/>
           <p:cNvSpPr/>
           <p:nvPr/>
         </p:nvSpPr>
         <p:spPr>
           <a:xfrm>
-            <a:off x="6400800" y="2688336"/>
-            <a:ext cx="5943600" cy="594360"/>
+            <a:off x="5486400" y="2734056"/>
+            <a:ext cx="6309360" cy="621792"/>
           </a:xfrm>
           <a:prstGeom prst="rect">
             <a:avLst/>
           </a:prstGeom>
           <a:solidFill>
-            <a:srgbClr val="F4F6F8"/>
+            <a:srgbClr val="E8ECF0"/>
           </a:solidFill>
-          <a:ln>
+          <a:ln w="12700">
             <a:solidFill>
-              <a:srgbClr val="CCCCCC"/>
+              <a:srgbClr val="D5D9DD"/>
             </a:solidFill>
           </a:ln>
         </p:spPr>
@@ -4413,48 +4879,48 @@
       </p:sp>
       <p:sp>
         <p:nvSpPr>
-          <p:cNvPr id="27" name="TextBox 26"/>
-          <p:cNvSpPr txBox="1"/>
-          <p:nvPr/>
-        </p:nvSpPr>
-        <p:spPr>
-          <a:xfrm>
-            <a:off x="6446520" y="2798064"/>
-            <a:ext cx="5852160" cy="384048"/>
-          </a:xfrm>
-          <a:prstGeom prst="rect">
-            <a:avLst/>
-          </a:prstGeom>
-          <a:noFill/>
-        </p:spPr>
-        <p:txBody>
-          <a:bodyPr wrap="square">
-            <a:spAutoFit/>
-          </a:bodyPr>
-          <a:lstStyle/>
-          <a:p>
-            <a:pPr algn="ctr"/>
-            <a:r>
-              <a:rPr sz="1200" b="0">
-                <a:solidFill>
-                  <a:srgbClr val="333333"/>
-                </a:solidFill>
-              </a:rPr>
-              <a:t>Ham dalga formu, uçtan uca</a:t>
-            </a:r>
-          </a:p>
-        </p:txBody>
-      </p:sp>
-      <p:sp>
-        <p:nvSpPr>
-          <p:cNvPr id="28" name="Rectangle 27"/>
+          <p:cNvPr id="30" name="TextBox 29"/>
+          <p:cNvSpPr txBox="1"/>
+          <p:nvPr/>
+        </p:nvSpPr>
+        <p:spPr>
+          <a:xfrm>
+            <a:off x="5577840" y="2807208"/>
+            <a:ext cx="6144768" cy="493776"/>
+          </a:xfrm>
+          <a:prstGeom prst="rect">
+            <a:avLst/>
+          </a:prstGeom>
+          <a:noFill/>
+        </p:spPr>
+        <p:txBody>
+          <a:bodyPr wrap="square" anchor="ctr">
+            <a:spAutoFit/>
+          </a:bodyPr>
+          <a:lstStyle/>
+          <a:p>
+            <a:pPr algn="l"/>
+            <a:r>
+              <a:rPr sz="1100" b="0" i="0">
+                <a:solidFill>
+                  <a:srgbClr val="2A2A2A"/>
+                </a:solidFill>
+              </a:rPr>
+              <a:t>Ham dalga formundan uçtan uca öğrenme; öznitelik mühendisliği gerektirmez</a:t>
+            </a:r>
+          </a:p>
+        </p:txBody>
+      </p:sp>
+      <p:sp>
+        <p:nvSpPr>
+          <p:cNvPr id="31" name="Rectangle 30"/>
           <p:cNvSpPr/>
           <p:nvPr/>
         </p:nvSpPr>
         <p:spPr>
           <a:xfrm>
-            <a:off x="320040" y="3346704"/>
-            <a:ext cx="2560320" cy="594360"/>
+            <a:off x="365760" y="3410712"/>
+            <a:ext cx="2286000" cy="621792"/>
           </a:xfrm>
           <a:prstGeom prst="rect">
             <a:avLst/>
@@ -4462,9 +4928,9 @@
           <a:solidFill>
             <a:srgbClr val="FFFFFF"/>
           </a:solidFill>
-          <a:ln>
+          <a:ln w="12700">
             <a:solidFill>
-              <a:srgbClr val="CCCCCC"/>
+              <a:srgbClr val="D5D9DD"/>
             </a:solidFill>
           </a:ln>
         </p:spPr>
@@ -4492,48 +4958,48 @@
       </p:sp>
       <p:sp>
         <p:nvSpPr>
-          <p:cNvPr id="29" name="TextBox 28"/>
-          <p:cNvSpPr txBox="1"/>
-          <p:nvPr/>
-        </p:nvSpPr>
-        <p:spPr>
-          <a:xfrm>
-            <a:off x="365759" y="3456432"/>
-            <a:ext cx="2468879" cy="384048"/>
-          </a:xfrm>
-          <a:prstGeom prst="rect">
-            <a:avLst/>
-          </a:prstGeom>
-          <a:noFill/>
-        </p:spPr>
-        <p:txBody>
-          <a:bodyPr wrap="square">
+          <p:cNvPr id="32" name="TextBox 31"/>
+          <p:cNvSpPr txBox="1"/>
+          <p:nvPr/>
+        </p:nvSpPr>
+        <p:spPr>
+          <a:xfrm>
+            <a:off x="457200" y="3483864"/>
+            <a:ext cx="2121408" cy="493776"/>
+          </a:xfrm>
+          <a:prstGeom prst="rect">
+            <a:avLst/>
+          </a:prstGeom>
+          <a:noFill/>
+        </p:spPr>
+        <p:txBody>
+          <a:bodyPr wrap="square" anchor="ctr">
             <a:spAutoFit/>
           </a:bodyPr>
           <a:lstStyle/>
           <a:p>
             <a:pPr algn="ctr"/>
             <a:r>
-              <a:rPr sz="1200" b="0">
-                <a:solidFill>
-                  <a:srgbClr val="333333"/>
-                </a:solidFill>
-              </a:rPr>
-              <a:t>wav2vec 2.0</a:t>
-            </a:r>
-          </a:p>
-        </p:txBody>
-      </p:sp>
-      <p:sp>
-        <p:nvSpPr>
-          <p:cNvPr id="30" name="Rectangle 29"/>
+              <a:rPr sz="1100" b="1" i="0">
+                <a:solidFill>
+                  <a:srgbClr val="2A2A2A"/>
+                </a:solidFill>
+              </a:rPr>
+              <a:t>wav2vec 2.0 [13]</a:t>
+            </a:r>
+          </a:p>
+        </p:txBody>
+      </p:sp>
+      <p:sp>
+        <p:nvSpPr>
+          <p:cNvPr id="33" name="Rectangle 32"/>
           <p:cNvSpPr/>
           <p:nvPr/>
         </p:nvSpPr>
         <p:spPr>
           <a:xfrm>
-            <a:off x="2926080" y="3346704"/>
-            <a:ext cx="2286000" cy="594360"/>
+            <a:off x="2651760" y="3410712"/>
+            <a:ext cx="2011680" cy="621792"/>
           </a:xfrm>
           <a:prstGeom prst="rect">
             <a:avLst/>
@@ -4541,9 +5007,9 @@
           <a:solidFill>
             <a:srgbClr val="FFFFFF"/>
           </a:solidFill>
-          <a:ln>
+          <a:ln w="12700">
             <a:solidFill>
-              <a:srgbClr val="CCCCCC"/>
+              <a:srgbClr val="D5D9DD"/>
             </a:solidFill>
           </a:ln>
         </p:spPr>
@@ -4571,31 +5037,31 @@
       </p:sp>
       <p:sp>
         <p:nvSpPr>
-          <p:cNvPr id="31" name="TextBox 30"/>
-          <p:cNvSpPr txBox="1"/>
-          <p:nvPr/>
-        </p:nvSpPr>
-        <p:spPr>
-          <a:xfrm>
-            <a:off x="2971800" y="3456432"/>
-            <a:ext cx="2194560" cy="384048"/>
-          </a:xfrm>
-          <a:prstGeom prst="rect">
-            <a:avLst/>
-          </a:prstGeom>
-          <a:noFill/>
-        </p:spPr>
-        <p:txBody>
-          <a:bodyPr wrap="square">
+          <p:cNvPr id="34" name="TextBox 33"/>
+          <p:cNvSpPr txBox="1"/>
+          <p:nvPr/>
+        </p:nvSpPr>
+        <p:spPr>
+          <a:xfrm>
+            <a:off x="2743200" y="3483864"/>
+            <a:ext cx="1847088" cy="493776"/>
+          </a:xfrm>
+          <a:prstGeom prst="rect">
+            <a:avLst/>
+          </a:prstGeom>
+          <a:noFill/>
+        </p:spPr>
+        <p:txBody>
+          <a:bodyPr wrap="square" anchor="ctr">
             <a:spAutoFit/>
           </a:bodyPr>
           <a:lstStyle/>
           <a:p>
             <a:pPr algn="ctr"/>
             <a:r>
-              <a:rPr sz="1200" b="0">
-                <a:solidFill>
-                  <a:srgbClr val="333333"/>
+              <a:rPr sz="1100" b="0" i="0">
+                <a:solidFill>
+                  <a:srgbClr val="2A2A2A"/>
                 </a:solidFill>
               </a:rPr>
               <a:t>Baevski vd.</a:t>
@@ -4605,14 +5071,14 @@
       </p:sp>
       <p:sp>
         <p:nvSpPr>
-          <p:cNvPr id="32" name="Rectangle 31"/>
+          <p:cNvPr id="35" name="Rectangle 34"/>
           <p:cNvSpPr/>
           <p:nvPr/>
         </p:nvSpPr>
         <p:spPr>
           <a:xfrm>
-            <a:off x="5257800" y="3346704"/>
-            <a:ext cx="1097280" cy="594360"/>
+            <a:off x="4663440" y="3410712"/>
+            <a:ext cx="822960" cy="621792"/>
           </a:xfrm>
           <a:prstGeom prst="rect">
             <a:avLst/>
@@ -4620,9 +5086,9 @@
           <a:solidFill>
             <a:srgbClr val="FFFFFF"/>
           </a:solidFill>
-          <a:ln>
+          <a:ln w="12700">
             <a:solidFill>
-              <a:srgbClr val="CCCCCC"/>
+              <a:srgbClr val="D5D9DD"/>
             </a:solidFill>
           </a:ln>
         </p:spPr>
@@ -4650,31 +5116,31 @@
       </p:sp>
       <p:sp>
         <p:nvSpPr>
-          <p:cNvPr id="33" name="TextBox 32"/>
-          <p:cNvSpPr txBox="1"/>
-          <p:nvPr/>
-        </p:nvSpPr>
-        <p:spPr>
-          <a:xfrm>
-            <a:off x="5303520" y="3456432"/>
-            <a:ext cx="1005839" cy="384048"/>
-          </a:xfrm>
-          <a:prstGeom prst="rect">
-            <a:avLst/>
-          </a:prstGeom>
-          <a:noFill/>
-        </p:spPr>
-        <p:txBody>
-          <a:bodyPr wrap="square">
+          <p:cNvPr id="36" name="TextBox 35"/>
+          <p:cNvSpPr txBox="1"/>
+          <p:nvPr/>
+        </p:nvSpPr>
+        <p:spPr>
+          <a:xfrm>
+            <a:off x="4754879" y="3483864"/>
+            <a:ext cx="658368" cy="493776"/>
+          </a:xfrm>
+          <a:prstGeom prst="rect">
+            <a:avLst/>
+          </a:prstGeom>
+          <a:noFill/>
+        </p:spPr>
+        <p:txBody>
+          <a:bodyPr wrap="square" anchor="ctr">
             <a:spAutoFit/>
           </a:bodyPr>
           <a:lstStyle/>
           <a:p>
             <a:pPr algn="ctr"/>
             <a:r>
-              <a:rPr sz="1200" b="0">
-                <a:solidFill>
-                  <a:srgbClr val="333333"/>
+              <a:rPr sz="1100" b="0" i="0">
+                <a:solidFill>
+                  <a:srgbClr val="2A2A2A"/>
                 </a:solidFill>
               </a:rPr>
               <a:t>2020</a:t>
@@ -4684,14 +5150,14 @@
       </p:sp>
       <p:sp>
         <p:nvSpPr>
-          <p:cNvPr id="34" name="Rectangle 33"/>
+          <p:cNvPr id="37" name="Rectangle 36"/>
           <p:cNvSpPr/>
           <p:nvPr/>
         </p:nvSpPr>
         <p:spPr>
           <a:xfrm>
-            <a:off x="6400800" y="3346704"/>
-            <a:ext cx="5943600" cy="594360"/>
+            <a:off x="5486400" y="3410712"/>
+            <a:ext cx="6309360" cy="621792"/>
           </a:xfrm>
           <a:prstGeom prst="rect">
             <a:avLst/>
@@ -4699,9 +5165,9 @@
           <a:solidFill>
             <a:srgbClr val="FFFFFF"/>
           </a:solidFill>
-          <a:ln>
+          <a:ln w="12700">
             <a:solidFill>
-              <a:srgbClr val="CCCCCC"/>
+              <a:srgbClr val="D5D9DD"/>
             </a:solidFill>
           </a:ln>
         </p:spPr>
@@ -4729,58 +5195,58 @@
       </p:sp>
       <p:sp>
         <p:nvSpPr>
-          <p:cNvPr id="35" name="TextBox 34"/>
-          <p:cNvSpPr txBox="1"/>
-          <p:nvPr/>
-        </p:nvSpPr>
-        <p:spPr>
-          <a:xfrm>
-            <a:off x="6446520" y="3456432"/>
-            <a:ext cx="5852160" cy="384048"/>
-          </a:xfrm>
-          <a:prstGeom prst="rect">
-            <a:avLst/>
-          </a:prstGeom>
-          <a:noFill/>
-        </p:spPr>
-        <p:txBody>
-          <a:bodyPr wrap="square">
-            <a:spAutoFit/>
-          </a:bodyPr>
-          <a:lstStyle/>
-          <a:p>
-            <a:pPr algn="ctr"/>
-            <a:r>
-              <a:rPr sz="1200" b="0">
-                <a:solidFill>
-                  <a:srgbClr val="333333"/>
-                </a:solidFill>
-              </a:rPr>
-              <a:t>Öz-denetimli temsil öğrenmesi</a:t>
-            </a:r>
-          </a:p>
-        </p:txBody>
-      </p:sp>
-      <p:sp>
-        <p:nvSpPr>
-          <p:cNvPr id="36" name="Rectangle 35"/>
+          <p:cNvPr id="38" name="TextBox 37"/>
+          <p:cNvSpPr txBox="1"/>
+          <p:nvPr/>
+        </p:nvSpPr>
+        <p:spPr>
+          <a:xfrm>
+            <a:off x="5577840" y="3483864"/>
+            <a:ext cx="6144768" cy="493776"/>
+          </a:xfrm>
+          <a:prstGeom prst="rect">
+            <a:avLst/>
+          </a:prstGeom>
+          <a:noFill/>
+        </p:spPr>
+        <p:txBody>
+          <a:bodyPr wrap="square" anchor="ctr">
+            <a:spAutoFit/>
+          </a:bodyPr>
+          <a:lstStyle/>
+          <a:p>
+            <a:pPr algn="l"/>
+            <a:r>
+              <a:rPr sz="1100" b="0" i="0">
+                <a:solidFill>
+                  <a:srgbClr val="2A2A2A"/>
+                </a:solidFill>
+              </a:rPr>
+              <a:t>Öz-denetimli ses temsili; transfer öğrenme için güçlü taban</a:t>
+            </a:r>
+          </a:p>
+        </p:txBody>
+      </p:sp>
+      <p:sp>
+        <p:nvSpPr>
+          <p:cNvPr id="39" name="Rectangle 38"/>
           <p:cNvSpPr/>
           <p:nvPr/>
         </p:nvSpPr>
         <p:spPr>
           <a:xfrm>
-            <a:off x="320040" y="4005072"/>
-            <a:ext cx="2560320" cy="594360"/>
+            <a:off x="365760" y="4087368"/>
+            <a:ext cx="2286000" cy="621792"/>
           </a:xfrm>
           <a:prstGeom prst="rect">
             <a:avLst/>
           </a:prstGeom>
           <a:solidFill>
-            <a:srgbClr val="F4F6F8"/>
+            <a:srgbClr val="E8ECF0"/>
           </a:solidFill>
-          <a:ln>
+          <a:ln w="12700">
             <a:solidFill>
-              <a:srgbClr val="CCCCCC"/>
+              <a:srgbClr val="D5D9DD"/>
             </a:solidFill>
           </a:ln>
         </p:spPr>
@@ -4808,58 +5274,58 @@
       </p:sp>
       <p:sp>
         <p:nvSpPr>
-          <p:cNvPr id="37" name="TextBox 36"/>
-          <p:cNvSpPr txBox="1"/>
-          <p:nvPr/>
-        </p:nvSpPr>
-        <p:spPr>
-          <a:xfrm>
-            <a:off x="365759" y="4114800"/>
-            <a:ext cx="2468879" cy="384048"/>
-          </a:xfrm>
-          <a:prstGeom prst="rect">
-            <a:avLst/>
-          </a:prstGeom>
-          <a:noFill/>
-        </p:spPr>
-        <p:txBody>
-          <a:bodyPr wrap="square">
+          <p:cNvPr id="40" name="TextBox 39"/>
+          <p:cNvSpPr txBox="1"/>
+          <p:nvPr/>
+        </p:nvSpPr>
+        <p:spPr>
+          <a:xfrm>
+            <a:off x="457200" y="4160520"/>
+            <a:ext cx="2121408" cy="493776"/>
+          </a:xfrm>
+          <a:prstGeom prst="rect">
+            <a:avLst/>
+          </a:prstGeom>
+          <a:noFill/>
+        </p:spPr>
+        <p:txBody>
+          <a:bodyPr wrap="square" anchor="ctr">
             <a:spAutoFit/>
           </a:bodyPr>
           <a:lstStyle/>
           <a:p>
             <a:pPr algn="ctr"/>
             <a:r>
-              <a:rPr sz="1200" b="0">
-                <a:solidFill>
-                  <a:srgbClr val="333333"/>
-                </a:solidFill>
-              </a:rPr>
-              <a:t>WavLM</a:t>
-            </a:r>
-          </a:p>
-        </p:txBody>
-      </p:sp>
-      <p:sp>
-        <p:nvSpPr>
-          <p:cNvPr id="38" name="Rectangle 37"/>
+              <a:rPr sz="1100" b="1" i="0">
+                <a:solidFill>
+                  <a:srgbClr val="2A2A2A"/>
+                </a:solidFill>
+              </a:rPr>
+              <a:t>WavLM [15]</a:t>
+            </a:r>
+          </a:p>
+        </p:txBody>
+      </p:sp>
+      <p:sp>
+        <p:nvSpPr>
+          <p:cNvPr id="41" name="Rectangle 40"/>
           <p:cNvSpPr/>
           <p:nvPr/>
         </p:nvSpPr>
         <p:spPr>
           <a:xfrm>
-            <a:off x="2926080" y="4005072"/>
-            <a:ext cx="2286000" cy="594360"/>
+            <a:off x="2651760" y="4087368"/>
+            <a:ext cx="2011680" cy="621792"/>
           </a:xfrm>
           <a:prstGeom prst="rect">
             <a:avLst/>
           </a:prstGeom>
           <a:solidFill>
-            <a:srgbClr val="F4F6F8"/>
+            <a:srgbClr val="E8ECF0"/>
           </a:solidFill>
-          <a:ln>
+          <a:ln w="12700">
             <a:solidFill>
-              <a:srgbClr val="CCCCCC"/>
+              <a:srgbClr val="D5D9DD"/>
             </a:solidFill>
           </a:ln>
         </p:spPr>
@@ -4887,31 +5353,31 @@
       </p:sp>
       <p:sp>
         <p:nvSpPr>
-          <p:cNvPr id="39" name="TextBox 38"/>
-          <p:cNvSpPr txBox="1"/>
-          <p:nvPr/>
-        </p:nvSpPr>
-        <p:spPr>
-          <a:xfrm>
-            <a:off x="2971800" y="4114800"/>
-            <a:ext cx="2194560" cy="384048"/>
-          </a:xfrm>
-          <a:prstGeom prst="rect">
-            <a:avLst/>
-          </a:prstGeom>
-          <a:noFill/>
-        </p:spPr>
-        <p:txBody>
-          <a:bodyPr wrap="square">
+          <p:cNvPr id="42" name="TextBox 41"/>
+          <p:cNvSpPr txBox="1"/>
+          <p:nvPr/>
+        </p:nvSpPr>
+        <p:spPr>
+          <a:xfrm>
+            <a:off x="2743200" y="4160520"/>
+            <a:ext cx="1847088" cy="493776"/>
+          </a:xfrm>
+          <a:prstGeom prst="rect">
+            <a:avLst/>
+          </a:prstGeom>
+          <a:noFill/>
+        </p:spPr>
+        <p:txBody>
+          <a:bodyPr wrap="square" anchor="ctr">
             <a:spAutoFit/>
           </a:bodyPr>
           <a:lstStyle/>
           <a:p>
             <a:pPr algn="ctr"/>
             <a:r>
-              <a:rPr sz="1200" b="0">
-                <a:solidFill>
-                  <a:srgbClr val="333333"/>
+              <a:rPr sz="1100" b="0" i="0">
+                <a:solidFill>
+                  <a:srgbClr val="2A2A2A"/>
                 </a:solidFill>
               </a:rPr>
               <a:t>Chen vd.</a:t>
@@ -4921,24 +5387,24 @@
       </p:sp>
       <p:sp>
         <p:nvSpPr>
-          <p:cNvPr id="40" name="Rectangle 39"/>
+          <p:cNvPr id="43" name="Rectangle 42"/>
           <p:cNvSpPr/>
           <p:nvPr/>
         </p:nvSpPr>
         <p:spPr>
           <a:xfrm>
-            <a:off x="5257800" y="4005072"/>
-            <a:ext cx="1097280" cy="594360"/>
+            <a:off x="4663440" y="4087368"/>
+            <a:ext cx="822960" cy="621792"/>
           </a:xfrm>
           <a:prstGeom prst="rect">
             <a:avLst/>
           </a:prstGeom>
           <a:solidFill>
-            <a:srgbClr val="F4F6F8"/>
+            <a:srgbClr val="E8ECF0"/>
           </a:solidFill>
-          <a:ln>
+          <a:ln w="12700">
             <a:solidFill>
-              <a:srgbClr val="CCCCCC"/>
+              <a:srgbClr val="D5D9DD"/>
             </a:solidFill>
           </a:ln>
         </p:spPr>
@@ -4966,31 +5432,31 @@
       </p:sp>
       <p:sp>
         <p:nvSpPr>
-          <p:cNvPr id="41" name="TextBox 40"/>
-          <p:cNvSpPr txBox="1"/>
-          <p:nvPr/>
-        </p:nvSpPr>
-        <p:spPr>
-          <a:xfrm>
-            <a:off x="5303520" y="4114800"/>
-            <a:ext cx="1005839" cy="384048"/>
-          </a:xfrm>
-          <a:prstGeom prst="rect">
-            <a:avLst/>
-          </a:prstGeom>
-          <a:noFill/>
-        </p:spPr>
-        <p:txBody>
-          <a:bodyPr wrap="square">
+          <p:cNvPr id="44" name="TextBox 43"/>
+          <p:cNvSpPr txBox="1"/>
+          <p:nvPr/>
+        </p:nvSpPr>
+        <p:spPr>
+          <a:xfrm>
+            <a:off x="4754879" y="4160520"/>
+            <a:ext cx="658368" cy="493776"/>
+          </a:xfrm>
+          <a:prstGeom prst="rect">
+            <a:avLst/>
+          </a:prstGeom>
+          <a:noFill/>
+        </p:spPr>
+        <p:txBody>
+          <a:bodyPr wrap="square" anchor="ctr">
             <a:spAutoFit/>
           </a:bodyPr>
           <a:lstStyle/>
           <a:p>
             <a:pPr algn="ctr"/>
             <a:r>
-              <a:rPr sz="1200" b="0">
-                <a:solidFill>
-                  <a:srgbClr val="333333"/>
+              <a:rPr sz="1100" b="0" i="0">
+                <a:solidFill>
+                  <a:srgbClr val="2A2A2A"/>
                 </a:solidFill>
               </a:rPr>
               <a:t>2022</a:t>
@@ -5000,24 +5466,24 @@
       </p:sp>
       <p:sp>
         <p:nvSpPr>
-          <p:cNvPr id="42" name="Rectangle 41"/>
+          <p:cNvPr id="45" name="Rectangle 44"/>
           <p:cNvSpPr/>
           <p:nvPr/>
         </p:nvSpPr>
         <p:spPr>
           <a:xfrm>
-            <a:off x="6400800" y="4005072"/>
-            <a:ext cx="5943600" cy="594360"/>
+            <a:off x="5486400" y="4087368"/>
+            <a:ext cx="6309360" cy="621792"/>
           </a:xfrm>
           <a:prstGeom prst="rect">
             <a:avLst/>
           </a:prstGeom>
           <a:solidFill>
-            <a:srgbClr val="F4F6F8"/>
+            <a:srgbClr val="E8ECF0"/>
           </a:solidFill>
-          <a:ln>
+          <a:ln w="12700">
             <a:solidFill>
-              <a:srgbClr val="CCCCCC"/>
+              <a:srgbClr val="D5D9DD"/>
             </a:solidFill>
           </a:ln>
         </p:spPr>
@@ -5045,48 +5511,48 @@
       </p:sp>
       <p:sp>
         <p:nvSpPr>
-          <p:cNvPr id="43" name="TextBox 42"/>
-          <p:cNvSpPr txBox="1"/>
-          <p:nvPr/>
-        </p:nvSpPr>
-        <p:spPr>
-          <a:xfrm>
-            <a:off x="6446520" y="4114800"/>
-            <a:ext cx="5852160" cy="384048"/>
-          </a:xfrm>
-          <a:prstGeom prst="rect">
-            <a:avLst/>
-          </a:prstGeom>
-          <a:noFill/>
-        </p:spPr>
-        <p:txBody>
-          <a:bodyPr wrap="square">
-            <a:spAutoFit/>
-          </a:bodyPr>
-          <a:lstStyle/>
-          <a:p>
-            <a:pPr algn="ctr"/>
-            <a:r>
-              <a:rPr sz="1200" b="0">
-                <a:solidFill>
-                  <a:srgbClr val="333333"/>
-                </a:solidFill>
-              </a:rPr>
-              <a:t>Maskelenmiş öngörüyle ön eğitim</a:t>
-            </a:r>
-          </a:p>
-        </p:txBody>
-      </p:sp>
-      <p:sp>
-        <p:nvSpPr>
-          <p:cNvPr id="44" name="Rectangle 43"/>
+          <p:cNvPr id="46" name="TextBox 45"/>
+          <p:cNvSpPr txBox="1"/>
+          <p:nvPr/>
+        </p:nvSpPr>
+        <p:spPr>
+          <a:xfrm>
+            <a:off x="5577840" y="4160520"/>
+            <a:ext cx="6144768" cy="493776"/>
+          </a:xfrm>
+          <a:prstGeom prst="rect">
+            <a:avLst/>
+          </a:prstGeom>
+          <a:noFill/>
+        </p:spPr>
+        <p:txBody>
+          <a:bodyPr wrap="square" anchor="ctr">
+            <a:spAutoFit/>
+          </a:bodyPr>
+          <a:lstStyle/>
+          <a:p>
+            <a:pPr algn="l"/>
+            <a:r>
+              <a:rPr sz="1100" b="0" i="0">
+                <a:solidFill>
+                  <a:srgbClr val="2A2A2A"/>
+                </a:solidFill>
+              </a:rPr>
+              <a:t>Maskelenmiş öngörü ile büyük ölçekli ön eğitim</a:t>
+            </a:r>
+          </a:p>
+        </p:txBody>
+      </p:sp>
+      <p:sp>
+        <p:nvSpPr>
+          <p:cNvPr id="47" name="Rectangle 46"/>
           <p:cNvSpPr/>
           <p:nvPr/>
         </p:nvSpPr>
         <p:spPr>
           <a:xfrm>
-            <a:off x="320040" y="4663440"/>
-            <a:ext cx="2560320" cy="594360"/>
+            <a:off x="365760" y="4764024"/>
+            <a:ext cx="2286000" cy="621792"/>
           </a:xfrm>
           <a:prstGeom prst="rect">
             <a:avLst/>
@@ -5094,9 +5560,9 @@
           <a:solidFill>
             <a:srgbClr val="FFFFFF"/>
           </a:solidFill>
-          <a:ln>
+          <a:ln w="12700">
             <a:solidFill>
-              <a:srgbClr val="CCCCCC"/>
+              <a:srgbClr val="D5D9DD"/>
             </a:solidFill>
           </a:ln>
         </p:spPr>
@@ -5124,48 +5590,48 @@
       </p:sp>
       <p:sp>
         <p:nvSpPr>
-          <p:cNvPr id="45" name="TextBox 44"/>
-          <p:cNvSpPr txBox="1"/>
-          <p:nvPr/>
-        </p:nvSpPr>
-        <p:spPr>
-          <a:xfrm>
-            <a:off x="365759" y="4773168"/>
-            <a:ext cx="2468879" cy="384048"/>
-          </a:xfrm>
-          <a:prstGeom prst="rect">
-            <a:avLst/>
-          </a:prstGeom>
-          <a:noFill/>
-        </p:spPr>
-        <p:txBody>
-          <a:bodyPr wrap="square">
+          <p:cNvPr id="48" name="TextBox 47"/>
+          <p:cNvSpPr txBox="1"/>
+          <p:nvPr/>
+        </p:nvSpPr>
+        <p:spPr>
+          <a:xfrm>
+            <a:off x="457200" y="4837176"/>
+            <a:ext cx="2121408" cy="493776"/>
+          </a:xfrm>
+          <a:prstGeom prst="rect">
+            <a:avLst/>
+          </a:prstGeom>
+          <a:noFill/>
+        </p:spPr>
+        <p:txBody>
+          <a:bodyPr wrap="square" anchor="ctr">
             <a:spAutoFit/>
           </a:bodyPr>
           <a:lstStyle/>
           <a:p>
             <a:pPr algn="ctr"/>
             <a:r>
-              <a:rPr sz="1200" b="0">
-                <a:solidFill>
-                  <a:srgbClr val="333333"/>
-                </a:solidFill>
-              </a:rPr>
-              <a:t>ADD 2022</a:t>
-            </a:r>
-          </a:p>
-        </p:txBody>
-      </p:sp>
-      <p:sp>
-        <p:nvSpPr>
-          <p:cNvPr id="46" name="Rectangle 45"/>
+              <a:rPr sz="1100" b="1" i="0">
+                <a:solidFill>
+                  <a:srgbClr val="2A2A2A"/>
+                </a:solidFill>
+              </a:rPr>
+              <a:t>ADD 2022 [3]</a:t>
+            </a:r>
+          </a:p>
+        </p:txBody>
+      </p:sp>
+      <p:sp>
+        <p:nvSpPr>
+          <p:cNvPr id="49" name="Rectangle 48"/>
           <p:cNvSpPr/>
           <p:nvPr/>
         </p:nvSpPr>
         <p:spPr>
           <a:xfrm>
-            <a:off x="2926080" y="4663440"/>
-            <a:ext cx="2286000" cy="594360"/>
+            <a:off x="2651760" y="4764024"/>
+            <a:ext cx="2011680" cy="621792"/>
           </a:xfrm>
           <a:prstGeom prst="rect">
             <a:avLst/>
@@ -5173,9 +5639,9 @@
           <a:solidFill>
             <a:srgbClr val="FFFFFF"/>
           </a:solidFill>
-          <a:ln>
+          <a:ln w="12700">
             <a:solidFill>
-              <a:srgbClr val="CCCCCC"/>
+              <a:srgbClr val="D5D9DD"/>
             </a:solidFill>
           </a:ln>
         </p:spPr>
@@ -5203,31 +5669,31 @@
       </p:sp>
       <p:sp>
         <p:nvSpPr>
-          <p:cNvPr id="47" name="TextBox 46"/>
-          <p:cNvSpPr txBox="1"/>
-          <p:nvPr/>
-        </p:nvSpPr>
-        <p:spPr>
-          <a:xfrm>
-            <a:off x="2971800" y="4773168"/>
-            <a:ext cx="2194560" cy="384048"/>
-          </a:xfrm>
-          <a:prstGeom prst="rect">
-            <a:avLst/>
-          </a:prstGeom>
-          <a:noFill/>
-        </p:spPr>
-        <p:txBody>
-          <a:bodyPr wrap="square">
+          <p:cNvPr id="50" name="TextBox 49"/>
+          <p:cNvSpPr txBox="1"/>
+          <p:nvPr/>
+        </p:nvSpPr>
+        <p:spPr>
+          <a:xfrm>
+            <a:off x="2743200" y="4837176"/>
+            <a:ext cx="1847088" cy="493776"/>
+          </a:xfrm>
+          <a:prstGeom prst="rect">
+            <a:avLst/>
+          </a:prstGeom>
+          <a:noFill/>
+        </p:spPr>
+        <p:txBody>
+          <a:bodyPr wrap="square" anchor="ctr">
             <a:spAutoFit/>
           </a:bodyPr>
           <a:lstStyle/>
           <a:p>
             <a:pPr algn="ctr"/>
             <a:r>
-              <a:rPr sz="1200" b="0">
-                <a:solidFill>
-                  <a:srgbClr val="333333"/>
+              <a:rPr sz="1100" b="0" i="0">
+                <a:solidFill>
+                  <a:srgbClr val="2A2A2A"/>
                 </a:solidFill>
               </a:rPr>
               <a:t>Yi vd.</a:t>
@@ -5237,14 +5703,14 @@
       </p:sp>
       <p:sp>
         <p:nvSpPr>
-          <p:cNvPr id="48" name="Rectangle 47"/>
+          <p:cNvPr id="51" name="Rectangle 50"/>
           <p:cNvSpPr/>
           <p:nvPr/>
         </p:nvSpPr>
         <p:spPr>
           <a:xfrm>
-            <a:off x="5257800" y="4663440"/>
-            <a:ext cx="1097280" cy="594360"/>
+            <a:off x="4663440" y="4764024"/>
+            <a:ext cx="822960" cy="621792"/>
           </a:xfrm>
           <a:prstGeom prst="rect">
             <a:avLst/>
@@ -5252,9 +5718,9 @@
           <a:solidFill>
             <a:srgbClr val="FFFFFF"/>
           </a:solidFill>
-          <a:ln>
+          <a:ln w="12700">
             <a:solidFill>
-              <a:srgbClr val="CCCCCC"/>
+              <a:srgbClr val="D5D9DD"/>
             </a:solidFill>
           </a:ln>
         </p:spPr>
@@ -5282,31 +5748,31 @@
       </p:sp>
       <p:sp>
         <p:nvSpPr>
-          <p:cNvPr id="49" name="TextBox 48"/>
-          <p:cNvSpPr txBox="1"/>
-          <p:nvPr/>
-        </p:nvSpPr>
-        <p:spPr>
-          <a:xfrm>
-            <a:off x="5303520" y="4773168"/>
-            <a:ext cx="1005839" cy="384048"/>
-          </a:xfrm>
-          <a:prstGeom prst="rect">
-            <a:avLst/>
-          </a:prstGeom>
-          <a:noFill/>
-        </p:spPr>
-        <p:txBody>
-          <a:bodyPr wrap="square">
+          <p:cNvPr id="52" name="TextBox 51"/>
+          <p:cNvSpPr txBox="1"/>
+          <p:nvPr/>
+        </p:nvSpPr>
+        <p:spPr>
+          <a:xfrm>
+            <a:off x="4754879" y="4837176"/>
+            <a:ext cx="658368" cy="493776"/>
+          </a:xfrm>
+          <a:prstGeom prst="rect">
+            <a:avLst/>
+          </a:prstGeom>
+          <a:noFill/>
+        </p:spPr>
+        <p:txBody>
+          <a:bodyPr wrap="square" anchor="ctr">
             <a:spAutoFit/>
           </a:bodyPr>
           <a:lstStyle/>
           <a:p>
             <a:pPr algn="ctr"/>
             <a:r>
-              <a:rPr sz="1200" b="0">
-                <a:solidFill>
-                  <a:srgbClr val="333333"/>
+              <a:rPr sz="1100" b="0" i="0">
+                <a:solidFill>
+                  <a:srgbClr val="2A2A2A"/>
                 </a:solidFill>
               </a:rPr>
               <a:t>2022</a:t>
@@ -5316,14 +5782,14 @@
       </p:sp>
       <p:sp>
         <p:nvSpPr>
-          <p:cNvPr id="50" name="Rectangle 49"/>
+          <p:cNvPr id="53" name="Rectangle 52"/>
           <p:cNvSpPr/>
           <p:nvPr/>
         </p:nvSpPr>
         <p:spPr>
           <a:xfrm>
-            <a:off x="6400800" y="4663440"/>
-            <a:ext cx="5943600" cy="594360"/>
+            <a:off x="5486400" y="4764024"/>
+            <a:ext cx="6309360" cy="621792"/>
           </a:xfrm>
           <a:prstGeom prst="rect">
             <a:avLst/>
@@ -5331,9 +5797,9 @@
           <a:solidFill>
             <a:srgbClr val="FFFFFF"/>
           </a:solidFill>
-          <a:ln>
+          <a:ln w="12700">
             <a:solidFill>
-              <a:srgbClr val="CCCCCC"/>
+              <a:srgbClr val="D5D9DD"/>
             </a:solidFill>
           </a:ln>
         </p:spPr>
@@ -5361,58 +5827,58 @@
       </p:sp>
       <p:sp>
         <p:nvSpPr>
-          <p:cNvPr id="51" name="TextBox 50"/>
-          <p:cNvSpPr txBox="1"/>
-          <p:nvPr/>
-        </p:nvSpPr>
-        <p:spPr>
-          <a:xfrm>
-            <a:off x="6446520" y="4773168"/>
-            <a:ext cx="5852160" cy="384048"/>
-          </a:xfrm>
-          <a:prstGeom prst="rect">
-            <a:avLst/>
-          </a:prstGeom>
-          <a:noFill/>
-        </p:spPr>
-        <p:txBody>
-          <a:bodyPr wrap="square">
-            <a:spAutoFit/>
-          </a:bodyPr>
-          <a:lstStyle/>
-          <a:p>
-            <a:pPr algn="ctr"/>
-            <a:r>
-              <a:rPr sz="1200" b="0">
-                <a:solidFill>
-                  <a:srgbClr val="333333"/>
-                </a:solidFill>
-              </a:rPr>
-              <a:t>İlk YZ ses sentezi tespit yarışması</a:t>
-            </a:r>
-          </a:p>
-        </p:txBody>
-      </p:sp>
-      <p:sp>
-        <p:nvSpPr>
-          <p:cNvPr id="52" name="Rectangle 51"/>
+          <p:cNvPr id="54" name="TextBox 53"/>
+          <p:cNvSpPr txBox="1"/>
+          <p:nvPr/>
+        </p:nvSpPr>
+        <p:spPr>
+          <a:xfrm>
+            <a:off x="5577840" y="4837176"/>
+            <a:ext cx="6144768" cy="493776"/>
+          </a:xfrm>
+          <a:prstGeom prst="rect">
+            <a:avLst/>
+          </a:prstGeom>
+          <a:noFill/>
+        </p:spPr>
+        <p:txBody>
+          <a:bodyPr wrap="square" anchor="ctr">
+            <a:spAutoFit/>
+          </a:bodyPr>
+          <a:lstStyle/>
+          <a:p>
+            <a:pPr algn="l"/>
+            <a:r>
+              <a:rPr sz="1100" b="0" i="0">
+                <a:solidFill>
+                  <a:srgbClr val="2A2A2A"/>
+                </a:solidFill>
+              </a:rPr>
+              <a:t>İlk YZ ses sentezi tespit yarışması; alanı standartlaştırdı</a:t>
+            </a:r>
+          </a:p>
+        </p:txBody>
+      </p:sp>
+      <p:sp>
+        <p:nvSpPr>
+          <p:cNvPr id="55" name="Rectangle 54"/>
           <p:cNvSpPr/>
           <p:nvPr/>
         </p:nvSpPr>
         <p:spPr>
           <a:xfrm>
-            <a:off x="320040" y="5321808"/>
-            <a:ext cx="2560320" cy="594360"/>
+            <a:off x="365760" y="5440680"/>
+            <a:ext cx="2286000" cy="621792"/>
           </a:xfrm>
           <a:prstGeom prst="rect">
             <a:avLst/>
           </a:prstGeom>
           <a:solidFill>
-            <a:srgbClr val="F4F6F8"/>
+            <a:srgbClr val="E8ECF0"/>
           </a:solidFill>
-          <a:ln>
+          <a:ln w="12700">
             <a:solidFill>
-              <a:srgbClr val="CCCCCC"/>
+              <a:srgbClr val="D5D9DD"/>
             </a:solidFill>
           </a:ln>
         </p:spPr>
@@ -5440,58 +5906,58 @@
       </p:sp>
       <p:sp>
         <p:nvSpPr>
-          <p:cNvPr id="53" name="TextBox 52"/>
-          <p:cNvSpPr txBox="1"/>
-          <p:nvPr/>
-        </p:nvSpPr>
-        <p:spPr>
-          <a:xfrm>
-            <a:off x="365759" y="5431536"/>
-            <a:ext cx="2468879" cy="384048"/>
-          </a:xfrm>
-          <a:prstGeom prst="rect">
-            <a:avLst/>
-          </a:prstGeom>
-          <a:noFill/>
-        </p:spPr>
-        <p:txBody>
-          <a:bodyPr wrap="square">
+          <p:cNvPr id="56" name="TextBox 55"/>
+          <p:cNvSpPr txBox="1"/>
+          <p:nvPr/>
+        </p:nvSpPr>
+        <p:spPr>
+          <a:xfrm>
+            <a:off x="457200" y="5513832"/>
+            <a:ext cx="2121408" cy="493776"/>
+          </a:xfrm>
+          <a:prstGeom prst="rect">
+            <a:avLst/>
+          </a:prstGeom>
+          <a:noFill/>
+        </p:spPr>
+        <p:txBody>
+          <a:bodyPr wrap="square" anchor="ctr">
             <a:spAutoFit/>
           </a:bodyPr>
           <a:lstStyle/>
           <a:p>
             <a:pPr algn="ctr"/>
             <a:r>
-              <a:rPr sz="1200" b="0">
-                <a:solidFill>
-                  <a:srgbClr val="333333"/>
-                </a:solidFill>
-              </a:rPr>
-              <a:t>ASVspoof 2019</a:t>
-            </a:r>
-          </a:p>
-        </p:txBody>
-      </p:sp>
-      <p:sp>
-        <p:nvSpPr>
-          <p:cNvPr id="54" name="Rectangle 53"/>
+              <a:rPr sz="1100" b="1" i="0">
+                <a:solidFill>
+                  <a:srgbClr val="2A2A2A"/>
+                </a:solidFill>
+              </a:rPr>
+              <a:t>ASVspoof 2019 [17]</a:t>
+            </a:r>
+          </a:p>
+        </p:txBody>
+      </p:sp>
+      <p:sp>
+        <p:nvSpPr>
+          <p:cNvPr id="57" name="Rectangle 56"/>
           <p:cNvSpPr/>
           <p:nvPr/>
         </p:nvSpPr>
         <p:spPr>
           <a:xfrm>
-            <a:off x="2926080" y="5321808"/>
-            <a:ext cx="2286000" cy="594360"/>
+            <a:off x="2651760" y="5440680"/>
+            <a:ext cx="2011680" cy="621792"/>
           </a:xfrm>
           <a:prstGeom prst="rect">
             <a:avLst/>
           </a:prstGeom>
           <a:solidFill>
-            <a:srgbClr val="F4F6F8"/>
+            <a:srgbClr val="E8ECF0"/>
           </a:solidFill>
-          <a:ln>
+          <a:ln w="12700">
             <a:solidFill>
-              <a:srgbClr val="CCCCCC"/>
+              <a:srgbClr val="D5D9DD"/>
             </a:solidFill>
           </a:ln>
         </p:spPr>
@@ -5519,31 +5985,31 @@
       </p:sp>
       <p:sp>
         <p:nvSpPr>
-          <p:cNvPr id="55" name="TextBox 54"/>
-          <p:cNvSpPr txBox="1"/>
-          <p:nvPr/>
-        </p:nvSpPr>
-        <p:spPr>
-          <a:xfrm>
-            <a:off x="2971800" y="5431536"/>
-            <a:ext cx="2194560" cy="384048"/>
-          </a:xfrm>
-          <a:prstGeom prst="rect">
-            <a:avLst/>
-          </a:prstGeom>
-          <a:noFill/>
-        </p:spPr>
-        <p:txBody>
-          <a:bodyPr wrap="square">
+          <p:cNvPr id="58" name="TextBox 57"/>
+          <p:cNvSpPr txBox="1"/>
+          <p:nvPr/>
+        </p:nvSpPr>
+        <p:spPr>
+          <a:xfrm>
+            <a:off x="2743200" y="5513832"/>
+            <a:ext cx="1847088" cy="493776"/>
+          </a:xfrm>
+          <a:prstGeom prst="rect">
+            <a:avLst/>
+          </a:prstGeom>
+          <a:noFill/>
+        </p:spPr>
+        <p:txBody>
+          <a:bodyPr wrap="square" anchor="ctr">
             <a:spAutoFit/>
           </a:bodyPr>
           <a:lstStyle/>
           <a:p>
             <a:pPr algn="ctr"/>
             <a:r>
-              <a:rPr sz="1200" b="0">
-                <a:solidFill>
-                  <a:srgbClr val="333333"/>
+              <a:rPr sz="1100" b="0" i="0">
+                <a:solidFill>
+                  <a:srgbClr val="2A2A2A"/>
                 </a:solidFill>
               </a:rPr>
               <a:t>Wang vd.</a:t>
@@ -5553,24 +6019,24 @@
       </p:sp>
       <p:sp>
         <p:nvSpPr>
-          <p:cNvPr id="56" name="Rectangle 55"/>
+          <p:cNvPr id="59" name="Rectangle 58"/>
           <p:cNvSpPr/>
           <p:nvPr/>
         </p:nvSpPr>
         <p:spPr>
           <a:xfrm>
-            <a:off x="5257800" y="5321808"/>
-            <a:ext cx="1097280" cy="594360"/>
+            <a:off x="4663440" y="5440680"/>
+            <a:ext cx="822960" cy="621792"/>
           </a:xfrm>
           <a:prstGeom prst="rect">
             <a:avLst/>
           </a:prstGeom>
           <a:solidFill>
-            <a:srgbClr val="F4F6F8"/>
+            <a:srgbClr val="E8ECF0"/>
           </a:solidFill>
-          <a:ln>
+          <a:ln w="12700">
             <a:solidFill>
-              <a:srgbClr val="CCCCCC"/>
+              <a:srgbClr val="D5D9DD"/>
             </a:solidFill>
           </a:ln>
         </p:spPr>
@@ -5598,31 +6064,31 @@
       </p:sp>
       <p:sp>
         <p:nvSpPr>
-          <p:cNvPr id="57" name="TextBox 56"/>
-          <p:cNvSpPr txBox="1"/>
-          <p:nvPr/>
-        </p:nvSpPr>
-        <p:spPr>
-          <a:xfrm>
-            <a:off x="5303520" y="5431536"/>
-            <a:ext cx="1005839" cy="384048"/>
-          </a:xfrm>
-          <a:prstGeom prst="rect">
-            <a:avLst/>
-          </a:prstGeom>
-          <a:noFill/>
-        </p:spPr>
-        <p:txBody>
-          <a:bodyPr wrap="square">
+          <p:cNvPr id="60" name="TextBox 59"/>
+          <p:cNvSpPr txBox="1"/>
+          <p:nvPr/>
+        </p:nvSpPr>
+        <p:spPr>
+          <a:xfrm>
+            <a:off x="4754879" y="5513832"/>
+            <a:ext cx="658368" cy="493776"/>
+          </a:xfrm>
+          <a:prstGeom prst="rect">
+            <a:avLst/>
+          </a:prstGeom>
+          <a:noFill/>
+        </p:spPr>
+        <p:txBody>
+          <a:bodyPr wrap="square" anchor="ctr">
             <a:spAutoFit/>
           </a:bodyPr>
           <a:lstStyle/>
           <a:p>
             <a:pPr algn="ctr"/>
             <a:r>
-              <a:rPr sz="1200" b="0">
-                <a:solidFill>
-                  <a:srgbClr val="333333"/>
+              <a:rPr sz="1100" b="0" i="0">
+                <a:solidFill>
+                  <a:srgbClr val="2A2A2A"/>
                 </a:solidFill>
               </a:rPr>
               <a:t>2020</a:t>
@@ -5632,24 +6098,24 @@
       </p:sp>
       <p:sp>
         <p:nvSpPr>
-          <p:cNvPr id="58" name="Rectangle 57"/>
+          <p:cNvPr id="61" name="Rectangle 60"/>
           <p:cNvSpPr/>
           <p:nvPr/>
         </p:nvSpPr>
         <p:spPr>
           <a:xfrm>
-            <a:off x="6400800" y="5321808"/>
-            <a:ext cx="5943600" cy="594360"/>
+            <a:off x="5486400" y="5440680"/>
+            <a:ext cx="6309360" cy="621792"/>
           </a:xfrm>
           <a:prstGeom prst="rect">
             <a:avLst/>
           </a:prstGeom>
           <a:solidFill>
-            <a:srgbClr val="F4F6F8"/>
+            <a:srgbClr val="E8ECF0"/>
           </a:solidFill>
-          <a:ln>
+          <a:ln w="12700">
             <a:solidFill>
-              <a:srgbClr val="CCCCCC"/>
+              <a:srgbClr val="D5D9DD"/>
             </a:solidFill>
           </a:ln>
         </p:spPr>
@@ -5677,14 +6143,48 @@
       </p:sp>
       <p:sp>
         <p:nvSpPr>
-          <p:cNvPr id="59" name="TextBox 58"/>
-          <p:cNvSpPr txBox="1"/>
-          <p:nvPr/>
-        </p:nvSpPr>
-        <p:spPr>
-          <a:xfrm>
-            <a:off x="6446520" y="5431536"/>
-            <a:ext cx="5852160" cy="384048"/>
+          <p:cNvPr id="62" name="TextBox 61"/>
+          <p:cNvSpPr txBox="1"/>
+          <p:nvPr/>
+        </p:nvSpPr>
+        <p:spPr>
+          <a:xfrm>
+            <a:off x="5577840" y="5513832"/>
+            <a:ext cx="6144768" cy="493776"/>
+          </a:xfrm>
+          <a:prstGeom prst="rect">
+            <a:avLst/>
+          </a:prstGeom>
+          <a:noFill/>
+        </p:spPr>
+        <p:txBody>
+          <a:bodyPr wrap="square" anchor="ctr">
+            <a:spAutoFit/>
+          </a:bodyPr>
+          <a:lstStyle/>
+          <a:p>
+            <a:pPr algn="l"/>
+            <a:r>
+              <a:rPr sz="1100" b="0" i="0">
+                <a:solidFill>
+                  <a:srgbClr val="2A2A2A"/>
+                </a:solidFill>
+              </a:rPr>
+              <a:t>64k örnekli kıyaslama veri kümesi; sahte ses araştırmasının omurgası</a:t>
+            </a:r>
+          </a:p>
+        </p:txBody>
+      </p:sp>
+      <p:sp>
+        <p:nvSpPr>
+          <p:cNvPr id="63" name="TextBox 62"/>
+          <p:cNvSpPr txBox="1"/>
+          <p:nvPr/>
+        </p:nvSpPr>
+        <p:spPr>
+          <a:xfrm>
+            <a:off x="365760" y="6355080"/>
+            <a:ext cx="11430000" cy="274320"/>
           </a:xfrm>
           <a:prstGeom prst="rect">
             <a:avLst/>
@@ -5697,28 +6197,28 @@
           </a:bodyPr>
           <a:lstStyle/>
           <a:p>
-            <a:pPr algn="ctr"/>
-            <a:r>
-              <a:rPr sz="1200" b="0">
-                <a:solidFill>
-                  <a:srgbClr val="333333"/>
-                </a:solidFill>
-              </a:rPr>
-              <a:t>Büyük ölçekli benchmark</a:t>
-            </a:r>
-          </a:p>
-        </p:txBody>
-      </p:sp>
-      <p:sp>
-        <p:nvSpPr>
-          <p:cNvPr id="60" name="TextBox 59"/>
-          <p:cNvSpPr txBox="1"/>
-          <p:nvPr/>
-        </p:nvSpPr>
-        <p:spPr>
-          <a:xfrm>
-            <a:off x="0" y="6510528"/>
-            <a:ext cx="12188952" cy="301752"/>
+            <a:pPr algn="l"/>
+            <a:r>
+              <a:rPr sz="1100" b="0" i="1">
+                <a:solidFill>
+                  <a:srgbClr val="66707A"/>
+                </a:solidFill>
+              </a:rPr>
+              <a:t>Çıkarım: Bu yöntemler konuşma için olgun; ancak müziğin ritmik ve harmonik yapısını hedeflemiyor.</a:t>
+            </a:r>
+          </a:p>
+        </p:txBody>
+      </p:sp>
+      <p:sp>
+        <p:nvSpPr>
+          <p:cNvPr id="64" name="TextBox 63"/>
+          <p:cNvSpPr txBox="1"/>
+          <p:nvPr/>
+        </p:nvSpPr>
+        <p:spPr>
+          <a:xfrm>
+            <a:off x="365760" y="6510528"/>
+            <a:ext cx="8229600" cy="301752"/>
           </a:xfrm>
           <a:prstGeom prst="rect">
             <a:avLst/>
@@ -5731,14 +6231,48 @@
           </a:bodyPr>
           <a:lstStyle/>
           <a:p>
-            <a:pPr algn="ctr"/>
-            <a:r>
-              <a:rPr sz="900" b="0">
-                <a:solidFill>
-                  <a:srgbClr val="8899AA"/>
-                </a:solidFill>
-              </a:rPr>
-              <a:t>Hasan Arthur Altuntaş  |  BM498  |  Düzce Üniversitesi  |  2025-2026</a:t>
+            <a:pPr algn="l"/>
+            <a:r>
+              <a:rPr sz="900" b="0" i="0">
+                <a:solidFill>
+                  <a:srgbClr val="66707A"/>
+                </a:solidFill>
+              </a:rPr>
+              <a:t>AURIS  ·  Hasan Arthur Altuntaş  ·  BM498 Mezuniyet Tezi</a:t>
+            </a:r>
+          </a:p>
+        </p:txBody>
+      </p:sp>
+      <p:sp>
+        <p:nvSpPr>
+          <p:cNvPr id="65" name="TextBox 64"/>
+          <p:cNvSpPr txBox="1"/>
+          <p:nvPr/>
+        </p:nvSpPr>
+        <p:spPr>
+          <a:xfrm>
+            <a:off x="8595360" y="6510528"/>
+            <a:ext cx="3200400" cy="301752"/>
+          </a:xfrm>
+          <a:prstGeom prst="rect">
+            <a:avLst/>
+          </a:prstGeom>
+          <a:noFill/>
+        </p:spPr>
+        <p:txBody>
+          <a:bodyPr wrap="square">
+            <a:spAutoFit/>
+          </a:bodyPr>
+          <a:lstStyle/>
+          <a:p>
+            <a:pPr algn="r"/>
+            <a:r>
+              <a:rPr sz="900" b="0" i="0">
+                <a:solidFill>
+                  <a:srgbClr val="66707A"/>
+                </a:solidFill>
+              </a:rPr>
+              <a:t>Düzce Üniversitesi · 2025-2026</a:t>
             </a:r>
           </a:p>
         </p:txBody>
@@ -5778,7 +6312,7 @@
         <p:spPr>
           <a:xfrm>
             <a:off x="0" y="0"/>
-            <a:ext cx="12188952" cy="1417320"/>
+            <a:ext cx="12188952" cy="1371600"/>
           </a:xfrm>
           <a:prstGeom prst="rect">
             <a:avLst/>
@@ -5814,14 +6348,57 @@
       </p:sp>
       <p:sp>
         <p:nvSpPr>
-          <p:cNvPr id="3" name="TextBox 2"/>
-          <p:cNvSpPr txBox="1"/>
-          <p:nvPr/>
-        </p:nvSpPr>
-        <p:spPr>
-          <a:xfrm>
-            <a:off x="320040" y="91440"/>
-            <a:ext cx="11521440" cy="822960"/>
+          <p:cNvPr id="3" name="Rectangle 2"/>
+          <p:cNvSpPr/>
+          <p:nvPr/>
+        </p:nvSpPr>
+        <p:spPr>
+          <a:xfrm>
+            <a:off x="0" y="1371600"/>
+            <a:ext cx="12188952" cy="54864"/>
+          </a:xfrm>
+          <a:prstGeom prst="rect">
+            <a:avLst/>
+          </a:prstGeom>
+          <a:solidFill>
+            <a:srgbClr val="E0A800"/>
+          </a:solidFill>
+          <a:ln>
+            <a:noFill/>
+          </a:ln>
+        </p:spPr>
+        <p:style>
+          <a:lnRef idx="1">
+            <a:schemeClr val="accent1"/>
+          </a:lnRef>
+          <a:fillRef idx="3">
+            <a:schemeClr val="accent1"/>
+          </a:fillRef>
+          <a:effectRef idx="2">
+            <a:schemeClr val="accent1"/>
+          </a:effectRef>
+          <a:fontRef idx="minor">
+            <a:schemeClr val="lt1"/>
+          </a:fontRef>
+        </p:style>
+        <p:txBody>
+          <a:bodyPr rtlCol="0" anchor="ctr"/>
+          <a:lstStyle/>
+          <a:p>
+            <a:pPr algn="ctr"/>
+          </a:p>
+        </p:txBody>
+      </p:sp>
+      <p:sp>
+        <p:nvSpPr>
+          <p:cNvPr id="4" name="TextBox 3"/>
+          <p:cNvSpPr txBox="1"/>
+          <p:nvPr/>
+        </p:nvSpPr>
+        <p:spPr>
+          <a:xfrm>
+            <a:off x="365760" y="109728"/>
+            <a:ext cx="11430000" cy="320040"/>
           </a:xfrm>
           <a:prstGeom prst="rect">
             <a:avLst/>
@@ -5836,26 +6413,60 @@
           <a:p>
             <a:pPr algn="l"/>
             <a:r>
-              <a:rPr sz="2500" b="1">
+              <a:rPr sz="1100" b="1" i="0">
+                <a:solidFill>
+                  <a:srgbClr val="E0A800"/>
+                </a:solidFill>
+              </a:rPr>
+              <a:t>ALAN 2 &amp; 3</a:t>
+            </a:r>
+          </a:p>
+        </p:txBody>
+      </p:sp>
+      <p:sp>
+        <p:nvSpPr>
+          <p:cNvPr id="5" name="TextBox 4"/>
+          <p:cNvSpPr txBox="1"/>
+          <p:nvPr/>
+        </p:nvSpPr>
+        <p:spPr>
+          <a:xfrm>
+            <a:off x="365760" y="402336"/>
+            <a:ext cx="11430000" cy="640080"/>
+          </a:xfrm>
+          <a:prstGeom prst="rect">
+            <a:avLst/>
+          </a:prstGeom>
+          <a:noFill/>
+        </p:spPr>
+        <p:txBody>
+          <a:bodyPr wrap="square">
+            <a:spAutoFit/>
+          </a:bodyPr>
+          <a:lstStyle/>
+          <a:p>
+            <a:pPr algn="l"/>
+            <a:r>
+              <a:rPr sz="2400" b="1" i="0">
                 <a:solidFill>
                   <a:srgbClr val="FFFFFF"/>
                 </a:solidFill>
               </a:rPr>
-              <a:t>Alan 2-3: YZ Müzik ve Tespit + Boşluk Analizi</a:t>
-            </a:r>
-          </a:p>
-        </p:txBody>
-      </p:sp>
-      <p:sp>
-        <p:nvSpPr>
-          <p:cNvPr id="4" name="TextBox 3"/>
-          <p:cNvSpPr txBox="1"/>
-          <p:nvPr/>
-        </p:nvSpPr>
-        <p:spPr>
-          <a:xfrm>
-            <a:off x="457200" y="1554480"/>
-            <a:ext cx="5486400" cy="4754880"/>
+              <a:t>Üretken Müzik Sistemleri ve YZ Müzik Tespiti</a:t>
+            </a:r>
+          </a:p>
+        </p:txBody>
+      </p:sp>
+      <p:sp>
+        <p:nvSpPr>
+          <p:cNvPr id="6" name="TextBox 5"/>
+          <p:cNvSpPr txBox="1"/>
+          <p:nvPr/>
+        </p:nvSpPr>
+        <p:spPr>
+          <a:xfrm>
+            <a:off x="365760" y="1508760"/>
+            <a:ext cx="5577840" cy="365760"/>
           </a:xfrm>
           <a:prstGeom prst="rect">
             <a:avLst/>
@@ -5868,197 +6479,73 @@
           </a:bodyPr>
           <a:lstStyle/>
           <a:p>
-            <a:pPr>
-              <a:spcAft>
-                <a:spcPts val="400"/>
-              </a:spcAft>
-            </a:pPr>
-            <a:r>
-              <a:rPr sz="1300">
-                <a:solidFill>
-                  <a:srgbClr val="333333"/>
-                </a:solidFill>
-              </a:rPr>
-              <a:t>YZ Müzik Üretici Sistemler:</a:t>
-            </a:r>
-          </a:p>
-          <a:p>
-            <a:pPr>
-              <a:spcAft>
-                <a:spcPts val="400"/>
-              </a:spcAft>
-            </a:pPr>
-            <a:r>
-              <a:rPr sz="1300">
-                <a:solidFill>
-                  <a:srgbClr val="333333"/>
-                </a:solidFill>
-              </a:rPr>
-              <a:t>  MusicGen (Copet vd., 2023) — Meta</a:t>
-            </a:r>
-          </a:p>
-          <a:p>
-            <a:pPr>
-              <a:spcAft>
-                <a:spcPts val="400"/>
-              </a:spcAft>
-            </a:pPr>
-            <a:r>
-              <a:rPr sz="1300">
-                <a:solidFill>
-                  <a:srgbClr val="333333"/>
-                </a:solidFill>
-              </a:rPr>
-              <a:t>  AudioLDM (Liu vd., 2023) — latent diffusion</a:t>
-            </a:r>
-          </a:p>
-          <a:p>
-            <a:pPr>
-              <a:spcAft>
-                <a:spcPts val="400"/>
-              </a:spcAft>
-            </a:pPr>
-            <a:r>
-              <a:rPr sz="1300">
-                <a:solidFill>
-                  <a:srgbClr val="333333"/>
-                </a:solidFill>
-              </a:rPr>
-              <a:t>  Suno / Udio — ticari sistemler, 2024</a:t>
-            </a:r>
-          </a:p>
-          <a:p>
-            <a:pPr>
-              <a:spcAft>
-                <a:spcPts val="400"/>
-              </a:spcAft>
-            </a:pPr>
-            <a:r>
-              <a:rPr sz="1300">
-                <a:solidFill>
-                  <a:srgbClr val="333333"/>
-                </a:solidFill>
-              </a:rPr>
-              <a:t/>
-            </a:r>
-          </a:p>
-          <a:p>
-            <a:pPr>
-              <a:spcAft>
-                <a:spcPts val="400"/>
-              </a:spcAft>
-            </a:pPr>
-            <a:r>
-              <a:rPr sz="1300">
-                <a:solidFill>
-                  <a:srgbClr val="333333"/>
-                </a:solidFill>
-              </a:rPr>
-              <a:t>Tespit Çalışmaları:</a:t>
-            </a:r>
-          </a:p>
-          <a:p>
-            <a:pPr>
-              <a:spcAft>
-                <a:spcPts val="400"/>
-              </a:spcAft>
-            </a:pPr>
-            <a:r>
-              <a:rPr sz="1300">
-                <a:solidFill>
-                  <a:srgbClr val="333333"/>
-                </a:solidFill>
-              </a:rPr>
-              <a:t>  Afchar vd. (ICASSP 2025) — oto-kodlayıcı</a:t>
-            </a:r>
-          </a:p>
-          <a:p>
-            <a:pPr>
-              <a:spcAft>
-                <a:spcPts val="400"/>
-              </a:spcAft>
-            </a:pPr>
-            <a:r>
-              <a:rPr sz="1300">
-                <a:solidFill>
-                  <a:srgbClr val="333333"/>
-                </a:solidFill>
-              </a:rPr>
-              <a:t>  Cros Vila vd. (TISMIR 2025) — müzik öznitelik</a:t>
-            </a:r>
-          </a:p>
-          <a:p>
-            <a:pPr>
-              <a:spcAft>
-                <a:spcPts val="400"/>
-              </a:spcAft>
-            </a:pPr>
-            <a:r>
-              <a:rPr sz="1300">
-                <a:solidFill>
-                  <a:srgbClr val="333333"/>
-                </a:solidFill>
-              </a:rPr>
-              <a:t>  Li vd. (Sci. Rep. 2026) — açıklanabilir</a:t>
-            </a:r>
-          </a:p>
-          <a:p>
-            <a:pPr>
-              <a:spcAft>
-                <a:spcPts val="400"/>
-              </a:spcAft>
-            </a:pPr>
-            <a:r>
-              <a:rPr sz="1300">
-                <a:solidFill>
-                  <a:srgbClr val="333333"/>
-                </a:solidFill>
-              </a:rPr>
-              <a:t/>
-            </a:r>
-          </a:p>
-          <a:p>
-            <a:pPr>
-              <a:spcAft>
-                <a:spcPts val="400"/>
-              </a:spcAft>
-            </a:pPr>
-            <a:r>
-              <a:rPr sz="1300">
-                <a:solidFill>
-                  <a:srgbClr val="333333"/>
-                </a:solidFill>
-              </a:rPr>
-              <a:t>Veri Setleri:</a:t>
-            </a:r>
-          </a:p>
-          <a:p>
-            <a:pPr>
-              <a:spcAft>
-                <a:spcPts val="400"/>
-              </a:spcAft>
-            </a:pPr>
-            <a:r>
-              <a:rPr sz="1300">
-                <a:solidFill>
-                  <a:srgbClr val="333333"/>
-                </a:solidFill>
-              </a:rPr>
-              <a:t>  SONICS (ICLR 2025), FakeMusicCaps (2025)</a:t>
-            </a:r>
-          </a:p>
-        </p:txBody>
-      </p:sp>
-      <p:sp>
-        <p:nvSpPr>
-          <p:cNvPr id="5" name="TextBox 4"/>
-          <p:cNvSpPr txBox="1"/>
-          <p:nvPr/>
-        </p:nvSpPr>
-        <p:spPr>
-          <a:xfrm>
-            <a:off x="6217920" y="1554480"/>
-            <a:ext cx="5577840" cy="4754880"/>
+            <a:pPr algn="l"/>
+            <a:r>
+              <a:rPr sz="1400" b="1" i="0">
+                <a:solidFill>
+                  <a:srgbClr val="0D2B55"/>
+                </a:solidFill>
+              </a:rPr>
+              <a:t>Üretici Sistemler</a:t>
+            </a:r>
+          </a:p>
+        </p:txBody>
+      </p:sp>
+      <p:sp>
+        <p:nvSpPr>
+          <p:cNvPr id="7" name="Rectangle 6"/>
+          <p:cNvSpPr/>
+          <p:nvPr/>
+        </p:nvSpPr>
+        <p:spPr>
+          <a:xfrm>
+            <a:off x="365760" y="1965960"/>
+            <a:ext cx="5577840" cy="868680"/>
+          </a:xfrm>
+          <a:prstGeom prst="rect">
+            <a:avLst/>
+          </a:prstGeom>
+          <a:solidFill>
+            <a:srgbClr val="FFFFFF"/>
+          </a:solidFill>
+          <a:ln w="12700">
+            <a:solidFill>
+              <a:srgbClr val="007A87"/>
+            </a:solidFill>
+          </a:ln>
+        </p:spPr>
+        <p:style>
+          <a:lnRef idx="1">
+            <a:schemeClr val="accent1"/>
+          </a:lnRef>
+          <a:fillRef idx="3">
+            <a:schemeClr val="accent1"/>
+          </a:fillRef>
+          <a:effectRef idx="2">
+            <a:schemeClr val="accent1"/>
+          </a:effectRef>
+          <a:fontRef idx="minor">
+            <a:schemeClr val="lt1"/>
+          </a:fontRef>
+        </p:style>
+        <p:txBody>
+          <a:bodyPr rtlCol="0" anchor="ctr"/>
+          <a:lstStyle/>
+          <a:p>
+            <a:pPr algn="ctr"/>
+          </a:p>
+        </p:txBody>
+      </p:sp>
+      <p:sp>
+        <p:nvSpPr>
+          <p:cNvPr id="8" name="TextBox 7"/>
+          <p:cNvSpPr txBox="1"/>
+          <p:nvPr/>
+        </p:nvSpPr>
+        <p:spPr>
+          <a:xfrm>
+            <a:off x="502920" y="2057400"/>
+            <a:ext cx="5303520" cy="320040"/>
           </a:xfrm>
           <a:prstGeom prst="rect">
             <a:avLst/>
@@ -6071,182 +6558,28 @@
           </a:bodyPr>
           <a:lstStyle/>
           <a:p>
-            <a:pPr>
-              <a:spcAft>
-                <a:spcPts val="400"/>
-              </a:spcAft>
-            </a:pPr>
-            <a:r>
-              <a:rPr sz="1300">
-                <a:solidFill>
-                  <a:srgbClr val="333333"/>
-                </a:solidFill>
-              </a:rPr>
-              <a:t>Literatür Boşlukları:</a:t>
-            </a:r>
-          </a:p>
-          <a:p>
-            <a:pPr>
-              <a:spcAft>
-                <a:spcPts val="400"/>
-              </a:spcAft>
-            </a:pPr>
-            <a:r>
-              <a:rPr sz="1300">
-                <a:solidFill>
-                  <a:srgbClr val="333333"/>
-                </a:solidFill>
-              </a:rPr>
-              <a:t/>
-            </a:r>
-          </a:p>
-          <a:p>
-            <a:pPr>
-              <a:spcAft>
-                <a:spcPts val="400"/>
-              </a:spcAft>
-            </a:pPr>
-            <a:r>
-              <a:rPr sz="1300">
-                <a:solidFill>
-                  <a:srgbClr val="333333"/>
-                </a:solidFill>
-              </a:rPr>
-              <a:t>✗  Müzik için topluluk (ensemble) yetersiz</a:t>
-            </a:r>
-          </a:p>
-          <a:p>
-            <a:pPr>
-              <a:spcAft>
-                <a:spcPts val="400"/>
-              </a:spcAft>
-            </a:pPr>
-            <a:r>
-              <a:rPr sz="1300">
-                <a:solidFill>
-                  <a:srgbClr val="333333"/>
-                </a:solidFill>
-              </a:rPr>
-              <a:t>✗  47 boyutlu heterojen öznitelik yok</a:t>
-            </a:r>
-          </a:p>
-          <a:p>
-            <a:pPr>
-              <a:spcAft>
-                <a:spcPts val="400"/>
-              </a:spcAft>
-            </a:pPr>
-            <a:r>
-              <a:rPr sz="1300">
-                <a:solidFill>
-                  <a:srgbClr val="333333"/>
-                </a:solidFill>
-              </a:rPr>
-              <a:t>✗  Kaynak bazlı performans analizi yok</a:t>
-            </a:r>
-          </a:p>
-          <a:p>
-            <a:pPr>
-              <a:spcAft>
-                <a:spcPts val="400"/>
-              </a:spcAft>
-            </a:pPr>
-            <a:r>
-              <a:rPr sz="1300">
-                <a:solidFill>
-                  <a:srgbClr val="333333"/>
-                </a:solidFill>
-              </a:rPr>
-              <a:t>✗  SHAP açıklanabilirlik uygulanmamış</a:t>
-            </a:r>
-          </a:p>
-          <a:p>
-            <a:pPr>
-              <a:spcAft>
-                <a:spcPts val="400"/>
-              </a:spcAft>
-            </a:pPr>
-            <a:r>
-              <a:rPr sz="1300">
-                <a:solidFill>
-                  <a:srgbClr val="333333"/>
-                </a:solidFill>
-              </a:rPr>
-              <a:t>✗  Youden J eşik optimizasyonu yok</a:t>
-            </a:r>
-          </a:p>
-          <a:p>
-            <a:pPr>
-              <a:spcAft>
-                <a:spcPts val="400"/>
-              </a:spcAft>
-            </a:pPr>
-            <a:r>
-              <a:rPr sz="1300">
-                <a:solidFill>
-                  <a:srgbClr val="333333"/>
-                </a:solidFill>
-              </a:rPr>
-              <a:t/>
-            </a:r>
-          </a:p>
-          <a:p>
-            <a:pPr>
-              <a:spcAft>
-                <a:spcPts val="400"/>
-              </a:spcAft>
-            </a:pPr>
-            <a:r>
-              <a:rPr sz="1300">
-                <a:solidFill>
-                  <a:srgbClr val="333333"/>
-                </a:solidFill>
-              </a:rPr>
-              <a:t>AURIS bu 5 boşluğu dolduruyor.</a:t>
-            </a:r>
-          </a:p>
-          <a:p>
-            <a:pPr>
-              <a:spcAft>
-                <a:spcPts val="400"/>
-              </a:spcAft>
-            </a:pPr>
-            <a:r>
-              <a:rPr sz="1300">
-                <a:solidFill>
-                  <a:srgbClr val="333333"/>
-                </a:solidFill>
-              </a:rPr>
-              <a:t/>
-            </a:r>
-          </a:p>
-          <a:p>
-            <a:pPr>
-              <a:spcAft>
-                <a:spcPts val="400"/>
-              </a:spcAft>
-            </a:pPr>
-            <a:r>
-              <a:rPr sz="1300">
-                <a:solidFill>
-                  <a:srgbClr val="333333"/>
-                </a:solidFill>
-              </a:rPr>
-              <a:t>Referans: 39  |  Güncel oran: %74</a:t>
-            </a:r>
-          </a:p>
-        </p:txBody>
-      </p:sp>
-      <p:sp>
-        <p:nvSpPr>
-          <p:cNvPr id="6" name="TextBox 5"/>
-          <p:cNvSpPr txBox="1"/>
-          <p:nvPr/>
-        </p:nvSpPr>
-        <p:spPr>
-          <a:xfrm>
-            <a:off x="0" y="6510528"/>
-            <a:ext cx="12188952" cy="301752"/>
+            <a:pPr algn="l"/>
+            <a:r>
+              <a:rPr sz="1250" b="1" i="0">
+                <a:solidFill>
+                  <a:srgbClr val="007A87"/>
+                </a:solidFill>
+              </a:rPr>
+              <a:t>MusicGen [1]</a:t>
+            </a:r>
+          </a:p>
+        </p:txBody>
+      </p:sp>
+      <p:sp>
+        <p:nvSpPr>
+          <p:cNvPr id="9" name="TextBox 8"/>
+          <p:cNvSpPr txBox="1"/>
+          <p:nvPr/>
+        </p:nvSpPr>
+        <p:spPr>
+          <a:xfrm>
+            <a:off x="502920" y="2386584"/>
+            <a:ext cx="5303520" cy="384048"/>
           </a:xfrm>
           <a:prstGeom prst="rect">
             <a:avLst/>
@@ -6259,14 +6592,1020 @@
           </a:bodyPr>
           <a:lstStyle/>
           <a:p>
+            <a:pPr algn="l"/>
+            <a:r>
+              <a:rPr sz="1100" b="0" i="0">
+                <a:solidFill>
+                  <a:srgbClr val="2A2A2A"/>
+                </a:solidFill>
+              </a:rPr>
+              <a:t>Copet vd., 2023 — Meta; metne koşullu, tek aşamalı transformer</a:t>
+            </a:r>
+          </a:p>
+        </p:txBody>
+      </p:sp>
+      <p:sp>
+        <p:nvSpPr>
+          <p:cNvPr id="10" name="Rectangle 9"/>
+          <p:cNvSpPr/>
+          <p:nvPr/>
+        </p:nvSpPr>
+        <p:spPr>
+          <a:xfrm>
+            <a:off x="365760" y="2926080"/>
+            <a:ext cx="5577840" cy="868680"/>
+          </a:xfrm>
+          <a:prstGeom prst="rect">
+            <a:avLst/>
+          </a:prstGeom>
+          <a:solidFill>
+            <a:srgbClr val="FFFFFF"/>
+          </a:solidFill>
+          <a:ln w="12700">
+            <a:solidFill>
+              <a:srgbClr val="007A87"/>
+            </a:solidFill>
+          </a:ln>
+        </p:spPr>
+        <p:style>
+          <a:lnRef idx="1">
+            <a:schemeClr val="accent1"/>
+          </a:lnRef>
+          <a:fillRef idx="3">
+            <a:schemeClr val="accent1"/>
+          </a:fillRef>
+          <a:effectRef idx="2">
+            <a:schemeClr val="accent1"/>
+          </a:effectRef>
+          <a:fontRef idx="minor">
+            <a:schemeClr val="lt1"/>
+          </a:fontRef>
+        </p:style>
+        <p:txBody>
+          <a:bodyPr rtlCol="0" anchor="ctr"/>
+          <a:lstStyle/>
+          <a:p>
             <a:pPr algn="ctr"/>
-            <a:r>
-              <a:rPr sz="900" b="0">
-                <a:solidFill>
-                  <a:srgbClr val="8899AA"/>
-                </a:solidFill>
-              </a:rPr>
-              <a:t>Hasan Arthur Altuntaş  |  BM498  |  Düzce Üniversitesi  |  2025-2026</a:t>
+          </a:p>
+        </p:txBody>
+      </p:sp>
+      <p:sp>
+        <p:nvSpPr>
+          <p:cNvPr id="11" name="TextBox 10"/>
+          <p:cNvSpPr txBox="1"/>
+          <p:nvPr/>
+        </p:nvSpPr>
+        <p:spPr>
+          <a:xfrm>
+            <a:off x="502920" y="3017520"/>
+            <a:ext cx="5303520" cy="320040"/>
+          </a:xfrm>
+          <a:prstGeom prst="rect">
+            <a:avLst/>
+          </a:prstGeom>
+          <a:noFill/>
+        </p:spPr>
+        <p:txBody>
+          <a:bodyPr wrap="square">
+            <a:spAutoFit/>
+          </a:bodyPr>
+          <a:lstStyle/>
+          <a:p>
+            <a:pPr algn="l"/>
+            <a:r>
+              <a:rPr sz="1250" b="1" i="0">
+                <a:solidFill>
+                  <a:srgbClr val="007A87"/>
+                </a:solidFill>
+              </a:rPr>
+              <a:t>AudioLDM2 [2]</a:t>
+            </a:r>
+          </a:p>
+        </p:txBody>
+      </p:sp>
+      <p:sp>
+        <p:nvSpPr>
+          <p:cNvPr id="12" name="TextBox 11"/>
+          <p:cNvSpPr txBox="1"/>
+          <p:nvPr/>
+        </p:nvSpPr>
+        <p:spPr>
+          <a:xfrm>
+            <a:off x="502920" y="3346704"/>
+            <a:ext cx="5303520" cy="384048"/>
+          </a:xfrm>
+          <a:prstGeom prst="rect">
+            <a:avLst/>
+          </a:prstGeom>
+          <a:noFill/>
+        </p:spPr>
+        <p:txBody>
+          <a:bodyPr wrap="square">
+            <a:spAutoFit/>
+          </a:bodyPr>
+          <a:lstStyle/>
+          <a:p>
+            <a:pPr algn="l"/>
+            <a:r>
+              <a:rPr sz="1100" b="0" i="0">
+                <a:solidFill>
+                  <a:srgbClr val="2A2A2A"/>
+                </a:solidFill>
+              </a:rPr>
+              <a:t>Liu vd., 2023; latent difüzyon tabanlı üretim</a:t>
+            </a:r>
+          </a:p>
+        </p:txBody>
+      </p:sp>
+      <p:sp>
+        <p:nvSpPr>
+          <p:cNvPr id="13" name="Rectangle 12"/>
+          <p:cNvSpPr/>
+          <p:nvPr/>
+        </p:nvSpPr>
+        <p:spPr>
+          <a:xfrm>
+            <a:off x="365760" y="3886200"/>
+            <a:ext cx="5577840" cy="868680"/>
+          </a:xfrm>
+          <a:prstGeom prst="rect">
+            <a:avLst/>
+          </a:prstGeom>
+          <a:solidFill>
+            <a:srgbClr val="FFFFFF"/>
+          </a:solidFill>
+          <a:ln w="12700">
+            <a:solidFill>
+              <a:srgbClr val="007A87"/>
+            </a:solidFill>
+          </a:ln>
+        </p:spPr>
+        <p:style>
+          <a:lnRef idx="1">
+            <a:schemeClr val="accent1"/>
+          </a:lnRef>
+          <a:fillRef idx="3">
+            <a:schemeClr val="accent1"/>
+          </a:fillRef>
+          <a:effectRef idx="2">
+            <a:schemeClr val="accent1"/>
+          </a:effectRef>
+          <a:fontRef idx="minor">
+            <a:schemeClr val="lt1"/>
+          </a:fontRef>
+        </p:style>
+        <p:txBody>
+          <a:bodyPr rtlCol="0" anchor="ctr"/>
+          <a:lstStyle/>
+          <a:p>
+            <a:pPr algn="ctr"/>
+          </a:p>
+        </p:txBody>
+      </p:sp>
+      <p:sp>
+        <p:nvSpPr>
+          <p:cNvPr id="14" name="TextBox 13"/>
+          <p:cNvSpPr txBox="1"/>
+          <p:nvPr/>
+        </p:nvSpPr>
+        <p:spPr>
+          <a:xfrm>
+            <a:off x="502920" y="3977639"/>
+            <a:ext cx="5303520" cy="320040"/>
+          </a:xfrm>
+          <a:prstGeom prst="rect">
+            <a:avLst/>
+          </a:prstGeom>
+          <a:noFill/>
+        </p:spPr>
+        <p:txBody>
+          <a:bodyPr wrap="square">
+            <a:spAutoFit/>
+          </a:bodyPr>
+          <a:lstStyle/>
+          <a:p>
+            <a:pPr algn="l"/>
+            <a:r>
+              <a:rPr sz="1250" b="1" i="0">
+                <a:solidFill>
+                  <a:srgbClr val="007A87"/>
+                </a:solidFill>
+              </a:rPr>
+              <a:t>Suno / Udio</a:t>
+            </a:r>
+          </a:p>
+        </p:txBody>
+      </p:sp>
+      <p:sp>
+        <p:nvSpPr>
+          <p:cNvPr id="15" name="TextBox 14"/>
+          <p:cNvSpPr txBox="1"/>
+          <p:nvPr/>
+        </p:nvSpPr>
+        <p:spPr>
+          <a:xfrm>
+            <a:off x="502920" y="4306824"/>
+            <a:ext cx="5303520" cy="384048"/>
+          </a:xfrm>
+          <a:prstGeom prst="rect">
+            <a:avLst/>
+          </a:prstGeom>
+          <a:noFill/>
+        </p:spPr>
+        <p:txBody>
+          <a:bodyPr wrap="square">
+            <a:spAutoFit/>
+          </a:bodyPr>
+          <a:lstStyle/>
+          <a:p>
+            <a:pPr algn="l"/>
+            <a:r>
+              <a:rPr sz="1100" b="0" i="0">
+                <a:solidFill>
+                  <a:srgbClr val="2A2A2A"/>
+                </a:solidFill>
+              </a:rPr>
+              <a:t>Ticari sistemler, 2024; yüksek kaliteli şarkı üretimi</a:t>
+            </a:r>
+          </a:p>
+        </p:txBody>
+      </p:sp>
+      <p:sp>
+        <p:nvSpPr>
+          <p:cNvPr id="16" name="Rectangle 15"/>
+          <p:cNvSpPr/>
+          <p:nvPr/>
+        </p:nvSpPr>
+        <p:spPr>
+          <a:xfrm>
+            <a:off x="365760" y="4846320"/>
+            <a:ext cx="5577840" cy="868680"/>
+          </a:xfrm>
+          <a:prstGeom prst="rect">
+            <a:avLst/>
+          </a:prstGeom>
+          <a:solidFill>
+            <a:srgbClr val="FFFFFF"/>
+          </a:solidFill>
+          <a:ln w="12700">
+            <a:solidFill>
+              <a:srgbClr val="007A87"/>
+            </a:solidFill>
+          </a:ln>
+        </p:spPr>
+        <p:style>
+          <a:lnRef idx="1">
+            <a:schemeClr val="accent1"/>
+          </a:lnRef>
+          <a:fillRef idx="3">
+            <a:schemeClr val="accent1"/>
+          </a:fillRef>
+          <a:effectRef idx="2">
+            <a:schemeClr val="accent1"/>
+          </a:effectRef>
+          <a:fontRef idx="minor">
+            <a:schemeClr val="lt1"/>
+          </a:fontRef>
+        </p:style>
+        <p:txBody>
+          <a:bodyPr rtlCol="0" anchor="ctr"/>
+          <a:lstStyle/>
+          <a:p>
+            <a:pPr algn="ctr"/>
+          </a:p>
+        </p:txBody>
+      </p:sp>
+      <p:sp>
+        <p:nvSpPr>
+          <p:cNvPr id="17" name="TextBox 16"/>
+          <p:cNvSpPr txBox="1"/>
+          <p:nvPr/>
+        </p:nvSpPr>
+        <p:spPr>
+          <a:xfrm>
+            <a:off x="502920" y="4937760"/>
+            <a:ext cx="5303520" cy="320040"/>
+          </a:xfrm>
+          <a:prstGeom prst="rect">
+            <a:avLst/>
+          </a:prstGeom>
+          <a:noFill/>
+        </p:spPr>
+        <p:txBody>
+          <a:bodyPr wrap="square">
+            <a:spAutoFit/>
+          </a:bodyPr>
+          <a:lstStyle/>
+          <a:p>
+            <a:pPr algn="l"/>
+            <a:r>
+              <a:rPr sz="1250" b="1" i="0">
+                <a:solidFill>
+                  <a:srgbClr val="007A87"/>
+                </a:solidFill>
+              </a:rPr>
+              <a:t>Stable Audio / Riffusion</a:t>
+            </a:r>
+          </a:p>
+        </p:txBody>
+      </p:sp>
+      <p:sp>
+        <p:nvSpPr>
+          <p:cNvPr id="18" name="TextBox 17"/>
+          <p:cNvSpPr txBox="1"/>
+          <p:nvPr/>
+        </p:nvSpPr>
+        <p:spPr>
+          <a:xfrm>
+            <a:off x="502920" y="5266944"/>
+            <a:ext cx="5303520" cy="384048"/>
+          </a:xfrm>
+          <a:prstGeom prst="rect">
+            <a:avLst/>
+          </a:prstGeom>
+          <a:noFill/>
+        </p:spPr>
+        <p:txBody>
+          <a:bodyPr wrap="square">
+            <a:spAutoFit/>
+          </a:bodyPr>
+          <a:lstStyle/>
+          <a:p>
+            <a:pPr algn="l"/>
+            <a:r>
+              <a:rPr sz="1100" b="0" i="0">
+                <a:solidFill>
+                  <a:srgbClr val="2A2A2A"/>
+                </a:solidFill>
+              </a:rPr>
+              <a:t>Difüzyon tabanlı açık sistemler</a:t>
+            </a:r>
+          </a:p>
+        </p:txBody>
+      </p:sp>
+      <p:sp>
+        <p:nvSpPr>
+          <p:cNvPr id="19" name="TextBox 18"/>
+          <p:cNvSpPr txBox="1"/>
+          <p:nvPr/>
+        </p:nvSpPr>
+        <p:spPr>
+          <a:xfrm>
+            <a:off x="6263640" y="1508760"/>
+            <a:ext cx="5486400" cy="365760"/>
+          </a:xfrm>
+          <a:prstGeom prst="rect">
+            <a:avLst/>
+          </a:prstGeom>
+          <a:noFill/>
+        </p:spPr>
+        <p:txBody>
+          <a:bodyPr wrap="square">
+            <a:spAutoFit/>
+          </a:bodyPr>
+          <a:lstStyle/>
+          <a:p>
+            <a:pPr algn="l"/>
+            <a:r>
+              <a:rPr sz="1400" b="1" i="0">
+                <a:solidFill>
+                  <a:srgbClr val="0D2B55"/>
+                </a:solidFill>
+              </a:rPr>
+              <a:t>Doğrudan İlgili Tespit Çalışmaları</a:t>
+            </a:r>
+          </a:p>
+        </p:txBody>
+      </p:sp>
+      <p:sp>
+        <p:nvSpPr>
+          <p:cNvPr id="20" name="Rectangle 19"/>
+          <p:cNvSpPr/>
+          <p:nvPr/>
+        </p:nvSpPr>
+        <p:spPr>
+          <a:xfrm>
+            <a:off x="6263640" y="1965960"/>
+            <a:ext cx="5486400" cy="685800"/>
+          </a:xfrm>
+          <a:prstGeom prst="rect">
+            <a:avLst/>
+          </a:prstGeom>
+          <a:solidFill>
+            <a:srgbClr val="FFFFFF"/>
+          </a:solidFill>
+          <a:ln w="12700">
+            <a:solidFill>
+              <a:srgbClr val="E0A800"/>
+            </a:solidFill>
+          </a:ln>
+        </p:spPr>
+        <p:style>
+          <a:lnRef idx="1">
+            <a:schemeClr val="accent1"/>
+          </a:lnRef>
+          <a:fillRef idx="3">
+            <a:schemeClr val="accent1"/>
+          </a:fillRef>
+          <a:effectRef idx="2">
+            <a:schemeClr val="accent1"/>
+          </a:effectRef>
+          <a:fontRef idx="minor">
+            <a:schemeClr val="lt1"/>
+          </a:fontRef>
+        </p:style>
+        <p:txBody>
+          <a:bodyPr rtlCol="0" anchor="ctr"/>
+          <a:lstStyle/>
+          <a:p>
+            <a:pPr algn="ctr"/>
+          </a:p>
+        </p:txBody>
+      </p:sp>
+      <p:sp>
+        <p:nvSpPr>
+          <p:cNvPr id="21" name="TextBox 20"/>
+          <p:cNvSpPr txBox="1"/>
+          <p:nvPr/>
+        </p:nvSpPr>
+        <p:spPr>
+          <a:xfrm>
+            <a:off x="6400800" y="2029967"/>
+            <a:ext cx="5212080" cy="292608"/>
+          </a:xfrm>
+          <a:prstGeom prst="rect">
+            <a:avLst/>
+          </a:prstGeom>
+          <a:noFill/>
+        </p:spPr>
+        <p:txBody>
+          <a:bodyPr wrap="square">
+            <a:spAutoFit/>
+          </a:bodyPr>
+          <a:lstStyle/>
+          <a:p>
+            <a:pPr algn="l"/>
+            <a:r>
+              <a:rPr sz="1150" b="1" i="0">
+                <a:solidFill>
+                  <a:srgbClr val="9A7300"/>
+                </a:solidFill>
+              </a:rPr>
+              <a:t>Afchar vd. [5] (2025)</a:t>
+            </a:r>
+          </a:p>
+        </p:txBody>
+      </p:sp>
+      <p:sp>
+        <p:nvSpPr>
+          <p:cNvPr id="22" name="TextBox 21"/>
+          <p:cNvSpPr txBox="1"/>
+          <p:nvPr/>
+        </p:nvSpPr>
+        <p:spPr>
+          <a:xfrm>
+            <a:off x="6400800" y="2313432"/>
+            <a:ext cx="5212080" cy="310896"/>
+          </a:xfrm>
+          <a:prstGeom prst="rect">
+            <a:avLst/>
+          </a:prstGeom>
+          <a:noFill/>
+        </p:spPr>
+        <p:txBody>
+          <a:bodyPr wrap="square">
+            <a:spAutoFit/>
+          </a:bodyPr>
+          <a:lstStyle/>
+          <a:p>
+            <a:pPr algn="l"/>
+            <a:r>
+              <a:rPr sz="1050" b="0" i="0">
+                <a:solidFill>
+                  <a:srgbClr val="2A2A2A"/>
+                </a:solidFill>
+              </a:rPr>
+              <a:t>Oto-kodlayıcı artefaktı; aynı üreticiye %99,8, farklı üreticide ciddi düşüş</a:t>
+            </a:r>
+          </a:p>
+        </p:txBody>
+      </p:sp>
+      <p:sp>
+        <p:nvSpPr>
+          <p:cNvPr id="23" name="Rectangle 22"/>
+          <p:cNvSpPr/>
+          <p:nvPr/>
+        </p:nvSpPr>
+        <p:spPr>
+          <a:xfrm>
+            <a:off x="6263640" y="2724912"/>
+            <a:ext cx="5486400" cy="685800"/>
+          </a:xfrm>
+          <a:prstGeom prst="rect">
+            <a:avLst/>
+          </a:prstGeom>
+          <a:solidFill>
+            <a:srgbClr val="FFFFFF"/>
+          </a:solidFill>
+          <a:ln w="12700">
+            <a:solidFill>
+              <a:srgbClr val="E0A800"/>
+            </a:solidFill>
+          </a:ln>
+        </p:spPr>
+        <p:style>
+          <a:lnRef idx="1">
+            <a:schemeClr val="accent1"/>
+          </a:lnRef>
+          <a:fillRef idx="3">
+            <a:schemeClr val="accent1"/>
+          </a:fillRef>
+          <a:effectRef idx="2">
+            <a:schemeClr val="accent1"/>
+          </a:effectRef>
+          <a:fontRef idx="minor">
+            <a:schemeClr val="lt1"/>
+          </a:fontRef>
+        </p:style>
+        <p:txBody>
+          <a:bodyPr rtlCol="0" anchor="ctr"/>
+          <a:lstStyle/>
+          <a:p>
+            <a:pPr algn="ctr"/>
+          </a:p>
+        </p:txBody>
+      </p:sp>
+      <p:sp>
+        <p:nvSpPr>
+          <p:cNvPr id="24" name="TextBox 23"/>
+          <p:cNvSpPr txBox="1"/>
+          <p:nvPr/>
+        </p:nvSpPr>
+        <p:spPr>
+          <a:xfrm>
+            <a:off x="6400800" y="2788920"/>
+            <a:ext cx="5212080" cy="292608"/>
+          </a:xfrm>
+          <a:prstGeom prst="rect">
+            <a:avLst/>
+          </a:prstGeom>
+          <a:noFill/>
+        </p:spPr>
+        <p:txBody>
+          <a:bodyPr wrap="square">
+            <a:spAutoFit/>
+          </a:bodyPr>
+          <a:lstStyle/>
+          <a:p>
+            <a:pPr algn="l"/>
+            <a:r>
+              <a:rPr sz="1150" b="1" i="0">
+                <a:solidFill>
+                  <a:srgbClr val="9A7300"/>
+                </a:solidFill>
+              </a:rPr>
+              <a:t>Cros Vila vd. [33] (2025)</a:t>
+            </a:r>
+          </a:p>
+        </p:txBody>
+      </p:sp>
+      <p:sp>
+        <p:nvSpPr>
+          <p:cNvPr id="25" name="TextBox 24"/>
+          <p:cNvSpPr txBox="1"/>
+          <p:nvPr/>
+        </p:nvSpPr>
+        <p:spPr>
+          <a:xfrm>
+            <a:off x="6400800" y="3072384"/>
+            <a:ext cx="5212080" cy="310896"/>
+          </a:xfrm>
+          <a:prstGeom prst="rect">
+            <a:avLst/>
+          </a:prstGeom>
+          <a:noFill/>
+        </p:spPr>
+        <p:txBody>
+          <a:bodyPr wrap="square">
+            <a:spAutoFit/>
+          </a:bodyPr>
+          <a:lstStyle/>
+          <a:p>
+            <a:pPr algn="l"/>
+            <a:r>
+              <a:rPr sz="1050" b="0" i="0">
+                <a:solidFill>
+                  <a:srgbClr val="2A2A2A"/>
+                </a:solidFill>
+              </a:rPr>
+              <a:t>Spektral + ritmik öznitelik + SVM; müzik-spesifik</a:t>
+            </a:r>
+          </a:p>
+        </p:txBody>
+      </p:sp>
+      <p:sp>
+        <p:nvSpPr>
+          <p:cNvPr id="26" name="Rectangle 25"/>
+          <p:cNvSpPr/>
+          <p:nvPr/>
+        </p:nvSpPr>
+        <p:spPr>
+          <a:xfrm>
+            <a:off x="6263640" y="3483863"/>
+            <a:ext cx="5486400" cy="685800"/>
+          </a:xfrm>
+          <a:prstGeom prst="rect">
+            <a:avLst/>
+          </a:prstGeom>
+          <a:solidFill>
+            <a:srgbClr val="FFFFFF"/>
+          </a:solidFill>
+          <a:ln w="12700">
+            <a:solidFill>
+              <a:srgbClr val="E0A800"/>
+            </a:solidFill>
+          </a:ln>
+        </p:spPr>
+        <p:style>
+          <a:lnRef idx="1">
+            <a:schemeClr val="accent1"/>
+          </a:lnRef>
+          <a:fillRef idx="3">
+            <a:schemeClr val="accent1"/>
+          </a:fillRef>
+          <a:effectRef idx="2">
+            <a:schemeClr val="accent1"/>
+          </a:effectRef>
+          <a:fontRef idx="minor">
+            <a:schemeClr val="lt1"/>
+          </a:fontRef>
+        </p:style>
+        <p:txBody>
+          <a:bodyPr rtlCol="0" anchor="ctr"/>
+          <a:lstStyle/>
+          <a:p>
+            <a:pPr algn="ctr"/>
+          </a:p>
+        </p:txBody>
+      </p:sp>
+      <p:sp>
+        <p:nvSpPr>
+          <p:cNvPr id="27" name="TextBox 26"/>
+          <p:cNvSpPr txBox="1"/>
+          <p:nvPr/>
+        </p:nvSpPr>
+        <p:spPr>
+          <a:xfrm>
+            <a:off x="6400800" y="3547871"/>
+            <a:ext cx="5212080" cy="292608"/>
+          </a:xfrm>
+          <a:prstGeom prst="rect">
+            <a:avLst/>
+          </a:prstGeom>
+          <a:noFill/>
+        </p:spPr>
+        <p:txBody>
+          <a:bodyPr wrap="square">
+            <a:spAutoFit/>
+          </a:bodyPr>
+          <a:lstStyle/>
+          <a:p>
+            <a:pPr algn="l"/>
+            <a:r>
+              <a:rPr sz="1150" b="1" i="0">
+                <a:solidFill>
+                  <a:srgbClr val="9A7300"/>
+                </a:solidFill>
+              </a:rPr>
+              <a:t>Li vd. [22] (2026)</a:t>
+            </a:r>
+          </a:p>
+        </p:txBody>
+      </p:sp>
+      <p:sp>
+        <p:nvSpPr>
+          <p:cNvPr id="28" name="TextBox 27"/>
+          <p:cNvSpPr txBox="1"/>
+          <p:nvPr/>
+        </p:nvSpPr>
+        <p:spPr>
+          <a:xfrm>
+            <a:off x="6400800" y="3831335"/>
+            <a:ext cx="5212080" cy="310896"/>
+          </a:xfrm>
+          <a:prstGeom prst="rect">
+            <a:avLst/>
+          </a:prstGeom>
+          <a:noFill/>
+        </p:spPr>
+        <p:txBody>
+          <a:bodyPr wrap="square">
+            <a:spAutoFit/>
+          </a:bodyPr>
+          <a:lstStyle/>
+          <a:p>
+            <a:pPr algn="l"/>
+            <a:r>
+              <a:rPr sz="1050" b="0" i="0">
+                <a:solidFill>
+                  <a:srgbClr val="2A2A2A"/>
+                </a:solidFill>
+              </a:rPr>
+              <a:t>Açıklanabilir öznitelik tabanlı erken sistematik değerlendirme</a:t>
+            </a:r>
+          </a:p>
+        </p:txBody>
+      </p:sp>
+      <p:sp>
+        <p:nvSpPr>
+          <p:cNvPr id="29" name="Rectangle 28"/>
+          <p:cNvSpPr/>
+          <p:nvPr/>
+        </p:nvSpPr>
+        <p:spPr>
+          <a:xfrm>
+            <a:off x="6263640" y="4242816"/>
+            <a:ext cx="5486400" cy="685800"/>
+          </a:xfrm>
+          <a:prstGeom prst="rect">
+            <a:avLst/>
+          </a:prstGeom>
+          <a:solidFill>
+            <a:srgbClr val="FFFFFF"/>
+          </a:solidFill>
+          <a:ln w="12700">
+            <a:solidFill>
+              <a:srgbClr val="E0A800"/>
+            </a:solidFill>
+          </a:ln>
+        </p:spPr>
+        <p:style>
+          <a:lnRef idx="1">
+            <a:schemeClr val="accent1"/>
+          </a:lnRef>
+          <a:fillRef idx="3">
+            <a:schemeClr val="accent1"/>
+          </a:fillRef>
+          <a:effectRef idx="2">
+            <a:schemeClr val="accent1"/>
+          </a:effectRef>
+          <a:fontRef idx="minor">
+            <a:schemeClr val="lt1"/>
+          </a:fontRef>
+        </p:style>
+        <p:txBody>
+          <a:bodyPr rtlCol="0" anchor="ctr"/>
+          <a:lstStyle/>
+          <a:p>
+            <a:pPr algn="ctr"/>
+          </a:p>
+        </p:txBody>
+      </p:sp>
+      <p:sp>
+        <p:nvSpPr>
+          <p:cNvPr id="30" name="TextBox 29"/>
+          <p:cNvSpPr txBox="1"/>
+          <p:nvPr/>
+        </p:nvSpPr>
+        <p:spPr>
+          <a:xfrm>
+            <a:off x="6400800" y="4306824"/>
+            <a:ext cx="5212080" cy="292608"/>
+          </a:xfrm>
+          <a:prstGeom prst="rect">
+            <a:avLst/>
+          </a:prstGeom>
+          <a:noFill/>
+        </p:spPr>
+        <p:txBody>
+          <a:bodyPr wrap="square">
+            <a:spAutoFit/>
+          </a:bodyPr>
+          <a:lstStyle/>
+          <a:p>
+            <a:pPr algn="l"/>
+            <a:r>
+              <a:rPr sz="1150" b="1" i="0">
+                <a:solidFill>
+                  <a:srgbClr val="9A7300"/>
+                </a:solidFill>
+              </a:rPr>
+              <a:t>SONICS [34] (2025)</a:t>
+            </a:r>
+          </a:p>
+        </p:txBody>
+      </p:sp>
+      <p:sp>
+        <p:nvSpPr>
+          <p:cNvPr id="31" name="TextBox 30"/>
+          <p:cNvSpPr txBox="1"/>
+          <p:nvPr/>
+        </p:nvSpPr>
+        <p:spPr>
+          <a:xfrm>
+            <a:off x="6400800" y="4590288"/>
+            <a:ext cx="5212080" cy="310896"/>
+          </a:xfrm>
+          <a:prstGeom prst="rect">
+            <a:avLst/>
+          </a:prstGeom>
+          <a:noFill/>
+        </p:spPr>
+        <p:txBody>
+          <a:bodyPr wrap="square">
+            <a:spAutoFit/>
+          </a:bodyPr>
+          <a:lstStyle/>
+          <a:p>
+            <a:pPr algn="l"/>
+            <a:r>
+              <a:rPr sz="1050" b="0" i="0">
+                <a:solidFill>
+                  <a:srgbClr val="2A2A2A"/>
+                </a:solidFill>
+              </a:rPr>
+              <a:t>Transformer DL; 97k şarkılık büyük veri kümesi</a:t>
+            </a:r>
+          </a:p>
+        </p:txBody>
+      </p:sp>
+      <p:sp>
+        <p:nvSpPr>
+          <p:cNvPr id="32" name="Rectangle 31"/>
+          <p:cNvSpPr/>
+          <p:nvPr/>
+        </p:nvSpPr>
+        <p:spPr>
+          <a:xfrm>
+            <a:off x="6263640" y="5001768"/>
+            <a:ext cx="5486400" cy="685800"/>
+          </a:xfrm>
+          <a:prstGeom prst="rect">
+            <a:avLst/>
+          </a:prstGeom>
+          <a:solidFill>
+            <a:srgbClr val="FFFFFF"/>
+          </a:solidFill>
+          <a:ln w="12700">
+            <a:solidFill>
+              <a:srgbClr val="E0A800"/>
+            </a:solidFill>
+          </a:ln>
+        </p:spPr>
+        <p:style>
+          <a:lnRef idx="1">
+            <a:schemeClr val="accent1"/>
+          </a:lnRef>
+          <a:fillRef idx="3">
+            <a:schemeClr val="accent1"/>
+          </a:fillRef>
+          <a:effectRef idx="2">
+            <a:schemeClr val="accent1"/>
+          </a:effectRef>
+          <a:fontRef idx="minor">
+            <a:schemeClr val="lt1"/>
+          </a:fontRef>
+        </p:style>
+        <p:txBody>
+          <a:bodyPr rtlCol="0" anchor="ctr"/>
+          <a:lstStyle/>
+          <a:p>
+            <a:pPr algn="ctr"/>
+          </a:p>
+        </p:txBody>
+      </p:sp>
+      <p:sp>
+        <p:nvSpPr>
+          <p:cNvPr id="33" name="TextBox 32"/>
+          <p:cNvSpPr txBox="1"/>
+          <p:nvPr/>
+        </p:nvSpPr>
+        <p:spPr>
+          <a:xfrm>
+            <a:off x="6400800" y="5065776"/>
+            <a:ext cx="5212080" cy="292608"/>
+          </a:xfrm>
+          <a:prstGeom prst="rect">
+            <a:avLst/>
+          </a:prstGeom>
+          <a:noFill/>
+        </p:spPr>
+        <p:txBody>
+          <a:bodyPr wrap="square">
+            <a:spAutoFit/>
+          </a:bodyPr>
+          <a:lstStyle/>
+          <a:p>
+            <a:pPr algn="l"/>
+            <a:r>
+              <a:rPr sz="1150" b="1" i="0">
+                <a:solidFill>
+                  <a:srgbClr val="9A7300"/>
+                </a:solidFill>
+              </a:rPr>
+              <a:t>FakeMusicCaps [35] (2025)</a:t>
+            </a:r>
+          </a:p>
+        </p:txBody>
+      </p:sp>
+      <p:sp>
+        <p:nvSpPr>
+          <p:cNvPr id="34" name="TextBox 33"/>
+          <p:cNvSpPr txBox="1"/>
+          <p:nvPr/>
+        </p:nvSpPr>
+        <p:spPr>
+          <a:xfrm>
+            <a:off x="6400800" y="5349240"/>
+            <a:ext cx="5212080" cy="310896"/>
+          </a:xfrm>
+          <a:prstGeom prst="rect">
+            <a:avLst/>
+          </a:prstGeom>
+          <a:noFill/>
+        </p:spPr>
+        <p:txBody>
+          <a:bodyPr wrap="square">
+            <a:spAutoFit/>
+          </a:bodyPr>
+          <a:lstStyle/>
+          <a:p>
+            <a:pPr algn="l"/>
+            <a:r>
+              <a:rPr sz="1050" b="0" i="0">
+                <a:solidFill>
+                  <a:srgbClr val="2A2A2A"/>
+                </a:solidFill>
+              </a:rPr>
+              <a:t>Metin→müzik tespiti ve atıf veri kümesi</a:t>
+            </a:r>
+          </a:p>
+        </p:txBody>
+      </p:sp>
+      <p:sp>
+        <p:nvSpPr>
+          <p:cNvPr id="35" name="TextBox 34"/>
+          <p:cNvSpPr txBox="1"/>
+          <p:nvPr/>
+        </p:nvSpPr>
+        <p:spPr>
+          <a:xfrm>
+            <a:off x="365760" y="6510528"/>
+            <a:ext cx="8229600" cy="301752"/>
+          </a:xfrm>
+          <a:prstGeom prst="rect">
+            <a:avLst/>
+          </a:prstGeom>
+          <a:noFill/>
+        </p:spPr>
+        <p:txBody>
+          <a:bodyPr wrap="square">
+            <a:spAutoFit/>
+          </a:bodyPr>
+          <a:lstStyle/>
+          <a:p>
+            <a:pPr algn="l"/>
+            <a:r>
+              <a:rPr sz="900" b="0" i="0">
+                <a:solidFill>
+                  <a:srgbClr val="66707A"/>
+                </a:solidFill>
+              </a:rPr>
+              <a:t>AURIS  ·  Hasan Arthur Altuntaş  ·  BM498 Mezuniyet Tezi</a:t>
+            </a:r>
+          </a:p>
+        </p:txBody>
+      </p:sp>
+      <p:sp>
+        <p:nvSpPr>
+          <p:cNvPr id="36" name="TextBox 35"/>
+          <p:cNvSpPr txBox="1"/>
+          <p:nvPr/>
+        </p:nvSpPr>
+        <p:spPr>
+          <a:xfrm>
+            <a:off x="8595360" y="6510528"/>
+            <a:ext cx="3200400" cy="301752"/>
+          </a:xfrm>
+          <a:prstGeom prst="rect">
+            <a:avLst/>
+          </a:prstGeom>
+          <a:noFill/>
+        </p:spPr>
+        <p:txBody>
+          <a:bodyPr wrap="square">
+            <a:spAutoFit/>
+          </a:bodyPr>
+          <a:lstStyle/>
+          <a:p>
+            <a:pPr algn="r"/>
+            <a:r>
+              <a:rPr sz="900" b="0" i="0">
+                <a:solidFill>
+                  <a:srgbClr val="66707A"/>
+                </a:solidFill>
+              </a:rPr>
+              <a:t>Düzce Üniversitesi · 2025-2026</a:t>
             </a:r>
           </a:p>
         </p:txBody>
@@ -6306,7 +7645,7 @@
         <p:spPr>
           <a:xfrm>
             <a:off x="0" y="0"/>
-            <a:ext cx="12188952" cy="457200"/>
+            <a:ext cx="12188952" cy="1371600"/>
           </a:xfrm>
           <a:prstGeom prst="rect">
             <a:avLst/>
@@ -6342,59 +7681,23 @@
       </p:sp>
       <p:sp>
         <p:nvSpPr>
-          <p:cNvPr id="3" name="TextBox 2"/>
-          <p:cNvSpPr txBox="1"/>
-          <p:nvPr/>
-        </p:nvSpPr>
-        <p:spPr>
-          <a:xfrm>
-            <a:off x="320040" y="64008"/>
-            <a:ext cx="11521440" cy="347472"/>
-          </a:xfrm>
-          <a:prstGeom prst="rect">
-            <a:avLst/>
-          </a:prstGeom>
-          <a:noFill/>
-        </p:spPr>
-        <p:txBody>
-          <a:bodyPr wrap="square">
-            <a:spAutoFit/>
-          </a:bodyPr>
-          <a:lstStyle/>
-          <a:p>
-            <a:pPr algn="l"/>
-            <a:r>
-              <a:rPr sz="1100" b="0">
-                <a:solidFill>
-                  <a:srgbClr val="FFFFFF"/>
-                </a:solidFill>
-              </a:rPr>
-              <a:t>BM498 — 02: Literatür Taraması Sunumu</a:t>
-            </a:r>
-          </a:p>
-        </p:txBody>
-      </p:sp>
-      <p:sp>
-        <p:nvSpPr>
-          <p:cNvPr id="4" name="Rectangle 3"/>
+          <p:cNvPr id="3" name="Rectangle 2"/>
           <p:cNvSpPr/>
           <p:nvPr/>
         </p:nvSpPr>
         <p:spPr>
           <a:xfrm>
-            <a:off x="2286000" y="1005840"/>
-            <a:ext cx="7589520" cy="5394960"/>
+            <a:off x="0" y="1371600"/>
+            <a:ext cx="12188952" cy="54864"/>
           </a:xfrm>
           <a:prstGeom prst="rect">
             <a:avLst/>
           </a:prstGeom>
           <a:solidFill>
-            <a:srgbClr val="FFFFFF"/>
+            <a:srgbClr val="E0A800"/>
           </a:solidFill>
           <a:ln>
-            <a:solidFill>
-              <a:srgbClr val="007A87"/>
-            </a:solidFill>
+            <a:noFill/>
           </a:ln>
         </p:spPr>
         <p:style>
@@ -6421,14 +7724,48 @@
       </p:sp>
       <p:sp>
         <p:nvSpPr>
+          <p:cNvPr id="4" name="TextBox 3"/>
+          <p:cNvSpPr txBox="1"/>
+          <p:nvPr/>
+        </p:nvSpPr>
+        <p:spPr>
+          <a:xfrm>
+            <a:off x="365760" y="109728"/>
+            <a:ext cx="11430000" cy="320040"/>
+          </a:xfrm>
+          <a:prstGeom prst="rect">
+            <a:avLst/>
+          </a:prstGeom>
+          <a:noFill/>
+        </p:spPr>
+        <p:txBody>
+          <a:bodyPr wrap="square">
+            <a:spAutoFit/>
+          </a:bodyPr>
+          <a:lstStyle/>
+          <a:p>
+            <a:pPr algn="l"/>
+            <a:r>
+              <a:rPr sz="1100" b="1" i="0">
+                <a:solidFill>
+                  <a:srgbClr val="E0A800"/>
+                </a:solidFill>
+              </a:rPr>
+              <a:t>SENTEZ</a:t>
+            </a:r>
+          </a:p>
+        </p:txBody>
+      </p:sp>
+      <p:sp>
+        <p:nvSpPr>
           <p:cNvPr id="5" name="TextBox 4"/>
           <p:cNvSpPr txBox="1"/>
           <p:nvPr/>
         </p:nvSpPr>
         <p:spPr>
           <a:xfrm>
-            <a:off x="2377440" y="1115568"/>
-            <a:ext cx="7406640" cy="548640"/>
+            <a:off x="365760" y="402336"/>
+            <a:ext cx="11430000" cy="640080"/>
           </a:xfrm>
           <a:prstGeom prst="rect">
             <a:avLst/>
@@ -6441,32 +7778,1404 @@
           </a:bodyPr>
           <a:lstStyle/>
           <a:p>
+            <a:pPr algn="l"/>
+            <a:r>
+              <a:rPr sz="2400" b="1" i="0">
+                <a:solidFill>
+                  <a:srgbClr val="FFFFFF"/>
+                </a:solidFill>
+              </a:rPr>
+              <a:t>Literatür Boşluğu ve AURIS'in Konumu</a:t>
+            </a:r>
+          </a:p>
+        </p:txBody>
+      </p:sp>
+      <p:sp>
+        <p:nvSpPr>
+          <p:cNvPr id="6" name="TextBox 5"/>
+          <p:cNvSpPr txBox="1"/>
+          <p:nvPr/>
+        </p:nvSpPr>
+        <p:spPr>
+          <a:xfrm>
+            <a:off x="365760" y="1554480"/>
+            <a:ext cx="5669280" cy="411480"/>
+          </a:xfrm>
+          <a:prstGeom prst="rect">
+            <a:avLst/>
+          </a:prstGeom>
+          <a:noFill/>
+        </p:spPr>
+        <p:txBody>
+          <a:bodyPr wrap="square">
+            <a:spAutoFit/>
+          </a:bodyPr>
+          <a:lstStyle/>
+          <a:p>
+            <a:pPr algn="l"/>
+            <a:r>
+              <a:rPr sz="1500" b="1" i="0">
+                <a:solidFill>
+                  <a:srgbClr val="B52A2A"/>
+                </a:solidFill>
+              </a:rPr>
+              <a:t>Tespit Edilen Boşluklar</a:t>
+            </a:r>
+          </a:p>
+        </p:txBody>
+      </p:sp>
+      <p:sp>
+        <p:nvSpPr>
+          <p:cNvPr id="7" name="Rectangle 6"/>
+          <p:cNvSpPr/>
+          <p:nvPr/>
+        </p:nvSpPr>
+        <p:spPr>
+          <a:xfrm>
+            <a:off x="365760" y="2011680"/>
+            <a:ext cx="5669280" cy="713232"/>
+          </a:xfrm>
+          <a:prstGeom prst="rect">
+            <a:avLst/>
+          </a:prstGeom>
+          <a:solidFill>
+            <a:srgbClr val="FDECEC"/>
+          </a:solidFill>
+          <a:ln w="12700">
+            <a:solidFill>
+              <a:srgbClr val="B52A2A"/>
+            </a:solidFill>
+          </a:ln>
+        </p:spPr>
+        <p:style>
+          <a:lnRef idx="1">
+            <a:schemeClr val="accent1"/>
+          </a:lnRef>
+          <a:fillRef idx="3">
+            <a:schemeClr val="accent1"/>
+          </a:fillRef>
+          <a:effectRef idx="2">
+            <a:schemeClr val="accent1"/>
+          </a:effectRef>
+          <a:fontRef idx="minor">
+            <a:schemeClr val="lt1"/>
+          </a:fontRef>
+        </p:style>
+        <p:txBody>
+          <a:bodyPr rtlCol="0" anchor="ctr"/>
+          <a:lstStyle/>
+          <a:p>
             <a:pPr algn="ctr"/>
-            <a:r>
-              <a:rPr sz="1700" b="1">
-                <a:solidFill>
-                  <a:srgbClr val="0D2B55"/>
-                </a:solidFill>
-              </a:rPr>
-              <a:t>ÖĞRENCİ İMZA SAYFASI</a:t>
-            </a:r>
-          </a:p>
-        </p:txBody>
-      </p:sp>
-      <p:sp>
-        <p:nvSpPr>
-          <p:cNvPr id="6" name="Rectangle 5"/>
+          </a:p>
+        </p:txBody>
+      </p:sp>
+      <p:sp>
+        <p:nvSpPr>
+          <p:cNvPr id="8" name="TextBox 7"/>
+          <p:cNvSpPr txBox="1"/>
+          <p:nvPr/>
+        </p:nvSpPr>
+        <p:spPr>
+          <a:xfrm>
+            <a:off x="502920" y="2066544"/>
+            <a:ext cx="457200" cy="603504"/>
+          </a:xfrm>
+          <a:prstGeom prst="rect">
+            <a:avLst/>
+          </a:prstGeom>
+          <a:noFill/>
+        </p:spPr>
+        <p:txBody>
+          <a:bodyPr wrap="square" anchor="ctr">
+            <a:spAutoFit/>
+          </a:bodyPr>
+          <a:lstStyle/>
+          <a:p>
+            <a:pPr algn="l"/>
+            <a:r>
+              <a:rPr sz="1800" b="1" i="0">
+                <a:solidFill>
+                  <a:srgbClr val="B52A2A"/>
+                </a:solidFill>
+              </a:rPr>
+              <a:t>✗</a:t>
+            </a:r>
+          </a:p>
+        </p:txBody>
+      </p:sp>
+      <p:sp>
+        <p:nvSpPr>
+          <p:cNvPr id="9" name="TextBox 8"/>
+          <p:cNvSpPr txBox="1"/>
+          <p:nvPr/>
+        </p:nvSpPr>
+        <p:spPr>
+          <a:xfrm>
+            <a:off x="960120" y="2066544"/>
+            <a:ext cx="4937760" cy="603504"/>
+          </a:xfrm>
+          <a:prstGeom prst="rect">
+            <a:avLst/>
+          </a:prstGeom>
+          <a:noFill/>
+        </p:spPr>
+        <p:txBody>
+          <a:bodyPr wrap="square" anchor="ctr">
+            <a:spAutoFit/>
+          </a:bodyPr>
+          <a:lstStyle/>
+          <a:p>
+            <a:pPr algn="l"/>
+            <a:r>
+              <a:rPr sz="1150" b="0" i="0">
+                <a:solidFill>
+                  <a:srgbClr val="2A2A2A"/>
+                </a:solidFill>
+              </a:rPr>
+              <a:t>Müzik için topluluk (ensemble) yaklaşımı yetersiz uygulanmış</a:t>
+            </a:r>
+          </a:p>
+        </p:txBody>
+      </p:sp>
+      <p:sp>
+        <p:nvSpPr>
+          <p:cNvPr id="10" name="Rectangle 9"/>
           <p:cNvSpPr/>
           <p:nvPr/>
         </p:nvSpPr>
         <p:spPr>
           <a:xfrm>
-            <a:off x="2377440" y="1691640"/>
-            <a:ext cx="7406640" cy="0"/>
-          </a:xfrm>
-          <a:prstGeom prst="rect">
-            <a:avLst/>
-          </a:prstGeom>
+            <a:off x="365760" y="2816352"/>
+            <a:ext cx="5669280" cy="713232"/>
+          </a:xfrm>
+          <a:prstGeom prst="rect">
+            <a:avLst/>
+          </a:prstGeom>
+          <a:solidFill>
+            <a:srgbClr val="FDECEC"/>
+          </a:solidFill>
+          <a:ln w="12700">
+            <a:solidFill>
+              <a:srgbClr val="B52A2A"/>
+            </a:solidFill>
+          </a:ln>
+        </p:spPr>
+        <p:style>
+          <a:lnRef idx="1">
+            <a:schemeClr val="accent1"/>
+          </a:lnRef>
+          <a:fillRef idx="3">
+            <a:schemeClr val="accent1"/>
+          </a:fillRef>
+          <a:effectRef idx="2">
+            <a:schemeClr val="accent1"/>
+          </a:effectRef>
+          <a:fontRef idx="minor">
+            <a:schemeClr val="lt1"/>
+          </a:fontRef>
+        </p:style>
+        <p:txBody>
+          <a:bodyPr rtlCol="0" anchor="ctr"/>
+          <a:lstStyle/>
+          <a:p>
+            <a:pPr algn="ctr"/>
+          </a:p>
+        </p:txBody>
+      </p:sp>
+      <p:sp>
+        <p:nvSpPr>
+          <p:cNvPr id="11" name="TextBox 10"/>
+          <p:cNvSpPr txBox="1"/>
+          <p:nvPr/>
+        </p:nvSpPr>
+        <p:spPr>
+          <a:xfrm>
+            <a:off x="502920" y="2871216"/>
+            <a:ext cx="457200" cy="603504"/>
+          </a:xfrm>
+          <a:prstGeom prst="rect">
+            <a:avLst/>
+          </a:prstGeom>
+          <a:noFill/>
+        </p:spPr>
+        <p:txBody>
+          <a:bodyPr wrap="square" anchor="ctr">
+            <a:spAutoFit/>
+          </a:bodyPr>
+          <a:lstStyle/>
+          <a:p>
+            <a:pPr algn="l"/>
+            <a:r>
+              <a:rPr sz="1800" b="1" i="0">
+                <a:solidFill>
+                  <a:srgbClr val="B52A2A"/>
+                </a:solidFill>
+              </a:rPr>
+              <a:t>✗</a:t>
+            </a:r>
+          </a:p>
+        </p:txBody>
+      </p:sp>
+      <p:sp>
+        <p:nvSpPr>
+          <p:cNvPr id="12" name="TextBox 11"/>
+          <p:cNvSpPr txBox="1"/>
+          <p:nvPr/>
+        </p:nvSpPr>
+        <p:spPr>
+          <a:xfrm>
+            <a:off x="960120" y="2871216"/>
+            <a:ext cx="4937760" cy="603504"/>
+          </a:xfrm>
+          <a:prstGeom prst="rect">
+            <a:avLst/>
+          </a:prstGeom>
+          <a:noFill/>
+        </p:spPr>
+        <p:txBody>
+          <a:bodyPr wrap="square" anchor="ctr">
+            <a:spAutoFit/>
+          </a:bodyPr>
+          <a:lstStyle/>
+          <a:p>
+            <a:pPr algn="l"/>
+            <a:r>
+              <a:rPr sz="1150" b="0" i="0">
+                <a:solidFill>
+                  <a:srgbClr val="2A2A2A"/>
+                </a:solidFill>
+              </a:rPr>
+              <a:t>47 boyutlu, beş aileli heterojen öznitelik vektörü kullanılmamış</a:t>
+            </a:r>
+          </a:p>
+        </p:txBody>
+      </p:sp>
+      <p:sp>
+        <p:nvSpPr>
+          <p:cNvPr id="13" name="Rectangle 12"/>
+          <p:cNvSpPr/>
+          <p:nvPr/>
+        </p:nvSpPr>
+        <p:spPr>
+          <a:xfrm>
+            <a:off x="365760" y="3621024"/>
+            <a:ext cx="5669280" cy="713232"/>
+          </a:xfrm>
+          <a:prstGeom prst="rect">
+            <a:avLst/>
+          </a:prstGeom>
+          <a:solidFill>
+            <a:srgbClr val="FDECEC"/>
+          </a:solidFill>
+          <a:ln w="12700">
+            <a:solidFill>
+              <a:srgbClr val="B52A2A"/>
+            </a:solidFill>
+          </a:ln>
+        </p:spPr>
+        <p:style>
+          <a:lnRef idx="1">
+            <a:schemeClr val="accent1"/>
+          </a:lnRef>
+          <a:fillRef idx="3">
+            <a:schemeClr val="accent1"/>
+          </a:fillRef>
+          <a:effectRef idx="2">
+            <a:schemeClr val="accent1"/>
+          </a:effectRef>
+          <a:fontRef idx="minor">
+            <a:schemeClr val="lt1"/>
+          </a:fontRef>
+        </p:style>
+        <p:txBody>
+          <a:bodyPr rtlCol="0" anchor="ctr"/>
+          <a:lstStyle/>
+          <a:p>
+            <a:pPr algn="ctr"/>
+          </a:p>
+        </p:txBody>
+      </p:sp>
+      <p:sp>
+        <p:nvSpPr>
+          <p:cNvPr id="14" name="TextBox 13"/>
+          <p:cNvSpPr txBox="1"/>
+          <p:nvPr/>
+        </p:nvSpPr>
+        <p:spPr>
+          <a:xfrm>
+            <a:off x="502920" y="3675887"/>
+            <a:ext cx="457200" cy="603504"/>
+          </a:xfrm>
+          <a:prstGeom prst="rect">
+            <a:avLst/>
+          </a:prstGeom>
+          <a:noFill/>
+        </p:spPr>
+        <p:txBody>
+          <a:bodyPr wrap="square" anchor="ctr">
+            <a:spAutoFit/>
+          </a:bodyPr>
+          <a:lstStyle/>
+          <a:p>
+            <a:pPr algn="l"/>
+            <a:r>
+              <a:rPr sz="1800" b="1" i="0">
+                <a:solidFill>
+                  <a:srgbClr val="B52A2A"/>
+                </a:solidFill>
+              </a:rPr>
+              <a:t>✗</a:t>
+            </a:r>
+          </a:p>
+        </p:txBody>
+      </p:sp>
+      <p:sp>
+        <p:nvSpPr>
+          <p:cNvPr id="15" name="TextBox 14"/>
+          <p:cNvSpPr txBox="1"/>
+          <p:nvPr/>
+        </p:nvSpPr>
+        <p:spPr>
+          <a:xfrm>
+            <a:off x="960120" y="3675887"/>
+            <a:ext cx="4937760" cy="603504"/>
+          </a:xfrm>
+          <a:prstGeom prst="rect">
+            <a:avLst/>
+          </a:prstGeom>
+          <a:noFill/>
+        </p:spPr>
+        <p:txBody>
+          <a:bodyPr wrap="square" anchor="ctr">
+            <a:spAutoFit/>
+          </a:bodyPr>
+          <a:lstStyle/>
+          <a:p>
+            <a:pPr algn="l"/>
+            <a:r>
+              <a:rPr sz="1150" b="0" i="0">
+                <a:solidFill>
+                  <a:srgbClr val="2A2A2A"/>
+                </a:solidFill>
+              </a:rPr>
+              <a:t>Üretici/kaynak bazlı ayrıntılı performans analizi eksik</a:t>
+            </a:r>
+          </a:p>
+        </p:txBody>
+      </p:sp>
+      <p:sp>
+        <p:nvSpPr>
+          <p:cNvPr id="16" name="Rectangle 15"/>
+          <p:cNvSpPr/>
+          <p:nvPr/>
+        </p:nvSpPr>
+        <p:spPr>
+          <a:xfrm>
+            <a:off x="365760" y="4425696"/>
+            <a:ext cx="5669280" cy="713232"/>
+          </a:xfrm>
+          <a:prstGeom prst="rect">
+            <a:avLst/>
+          </a:prstGeom>
+          <a:solidFill>
+            <a:srgbClr val="FDECEC"/>
+          </a:solidFill>
+          <a:ln w="12700">
+            <a:solidFill>
+              <a:srgbClr val="B52A2A"/>
+            </a:solidFill>
+          </a:ln>
+        </p:spPr>
+        <p:style>
+          <a:lnRef idx="1">
+            <a:schemeClr val="accent1"/>
+          </a:lnRef>
+          <a:fillRef idx="3">
+            <a:schemeClr val="accent1"/>
+          </a:fillRef>
+          <a:effectRef idx="2">
+            <a:schemeClr val="accent1"/>
+          </a:effectRef>
+          <a:fontRef idx="minor">
+            <a:schemeClr val="lt1"/>
+          </a:fontRef>
+        </p:style>
+        <p:txBody>
+          <a:bodyPr rtlCol="0" anchor="ctr"/>
+          <a:lstStyle/>
+          <a:p>
+            <a:pPr algn="ctr"/>
+          </a:p>
+        </p:txBody>
+      </p:sp>
+      <p:sp>
+        <p:nvSpPr>
+          <p:cNvPr id="17" name="TextBox 16"/>
+          <p:cNvSpPr txBox="1"/>
+          <p:nvPr/>
+        </p:nvSpPr>
+        <p:spPr>
+          <a:xfrm>
+            <a:off x="502920" y="4480559"/>
+            <a:ext cx="457200" cy="603504"/>
+          </a:xfrm>
+          <a:prstGeom prst="rect">
+            <a:avLst/>
+          </a:prstGeom>
+          <a:noFill/>
+        </p:spPr>
+        <p:txBody>
+          <a:bodyPr wrap="square" anchor="ctr">
+            <a:spAutoFit/>
+          </a:bodyPr>
+          <a:lstStyle/>
+          <a:p>
+            <a:pPr algn="l"/>
+            <a:r>
+              <a:rPr sz="1800" b="1" i="0">
+                <a:solidFill>
+                  <a:srgbClr val="B52A2A"/>
+                </a:solidFill>
+              </a:rPr>
+              <a:t>✗</a:t>
+            </a:r>
+          </a:p>
+        </p:txBody>
+      </p:sp>
+      <p:sp>
+        <p:nvSpPr>
+          <p:cNvPr id="18" name="TextBox 17"/>
+          <p:cNvSpPr txBox="1"/>
+          <p:nvPr/>
+        </p:nvSpPr>
+        <p:spPr>
+          <a:xfrm>
+            <a:off x="960120" y="4480559"/>
+            <a:ext cx="4937760" cy="603504"/>
+          </a:xfrm>
+          <a:prstGeom prst="rect">
+            <a:avLst/>
+          </a:prstGeom>
+          <a:noFill/>
+        </p:spPr>
+        <p:txBody>
+          <a:bodyPr wrap="square" anchor="ctr">
+            <a:spAutoFit/>
+          </a:bodyPr>
+          <a:lstStyle/>
+          <a:p>
+            <a:pPr algn="l"/>
+            <a:r>
+              <a:rPr sz="1150" b="0" i="0">
+                <a:solidFill>
+                  <a:srgbClr val="2A2A2A"/>
+                </a:solidFill>
+              </a:rPr>
+              <a:t>SHAP/TreeSHAP açıklanabilirliği müzik tespitine taşınmamış</a:t>
+            </a:r>
+          </a:p>
+        </p:txBody>
+      </p:sp>
+      <p:sp>
+        <p:nvSpPr>
+          <p:cNvPr id="19" name="Rectangle 18"/>
+          <p:cNvSpPr/>
+          <p:nvPr/>
+        </p:nvSpPr>
+        <p:spPr>
+          <a:xfrm>
+            <a:off x="365760" y="5230368"/>
+            <a:ext cx="5669280" cy="713232"/>
+          </a:xfrm>
+          <a:prstGeom prst="rect">
+            <a:avLst/>
+          </a:prstGeom>
+          <a:solidFill>
+            <a:srgbClr val="FDECEC"/>
+          </a:solidFill>
+          <a:ln w="12700">
+            <a:solidFill>
+              <a:srgbClr val="B52A2A"/>
+            </a:solidFill>
+          </a:ln>
+        </p:spPr>
+        <p:style>
+          <a:lnRef idx="1">
+            <a:schemeClr val="accent1"/>
+          </a:lnRef>
+          <a:fillRef idx="3">
+            <a:schemeClr val="accent1"/>
+          </a:fillRef>
+          <a:effectRef idx="2">
+            <a:schemeClr val="accent1"/>
+          </a:effectRef>
+          <a:fontRef idx="minor">
+            <a:schemeClr val="lt1"/>
+          </a:fontRef>
+        </p:style>
+        <p:txBody>
+          <a:bodyPr rtlCol="0" anchor="ctr"/>
+          <a:lstStyle/>
+          <a:p>
+            <a:pPr algn="ctr"/>
+          </a:p>
+        </p:txBody>
+      </p:sp>
+      <p:sp>
+        <p:nvSpPr>
+          <p:cNvPr id="20" name="TextBox 19"/>
+          <p:cNvSpPr txBox="1"/>
+          <p:nvPr/>
+        </p:nvSpPr>
+        <p:spPr>
+          <a:xfrm>
+            <a:off x="502920" y="5285232"/>
+            <a:ext cx="457200" cy="603504"/>
+          </a:xfrm>
+          <a:prstGeom prst="rect">
+            <a:avLst/>
+          </a:prstGeom>
+          <a:noFill/>
+        </p:spPr>
+        <p:txBody>
+          <a:bodyPr wrap="square" anchor="ctr">
+            <a:spAutoFit/>
+          </a:bodyPr>
+          <a:lstStyle/>
+          <a:p>
+            <a:pPr algn="l"/>
+            <a:r>
+              <a:rPr sz="1800" b="1" i="0">
+                <a:solidFill>
+                  <a:srgbClr val="B52A2A"/>
+                </a:solidFill>
+              </a:rPr>
+              <a:t>✗</a:t>
+            </a:r>
+          </a:p>
+        </p:txBody>
+      </p:sp>
+      <p:sp>
+        <p:nvSpPr>
+          <p:cNvPr id="21" name="TextBox 20"/>
+          <p:cNvSpPr txBox="1"/>
+          <p:nvPr/>
+        </p:nvSpPr>
+        <p:spPr>
+          <a:xfrm>
+            <a:off x="960120" y="5285232"/>
+            <a:ext cx="4937760" cy="603504"/>
+          </a:xfrm>
+          <a:prstGeom prst="rect">
+            <a:avLst/>
+          </a:prstGeom>
+          <a:noFill/>
+        </p:spPr>
+        <p:txBody>
+          <a:bodyPr wrap="square" anchor="ctr">
+            <a:spAutoFit/>
+          </a:bodyPr>
+          <a:lstStyle/>
+          <a:p>
+            <a:pPr algn="l"/>
+            <a:r>
+              <a:rPr sz="1150" b="0" i="0">
+                <a:solidFill>
+                  <a:srgbClr val="2A2A2A"/>
+                </a:solidFill>
+              </a:rPr>
+              <a:t>Youden J karar eşiği optimizasyonu uygulanmamış</a:t>
+            </a:r>
+          </a:p>
+        </p:txBody>
+      </p:sp>
+      <p:sp>
+        <p:nvSpPr>
+          <p:cNvPr id="22" name="TextBox 21"/>
+          <p:cNvSpPr txBox="1"/>
+          <p:nvPr/>
+        </p:nvSpPr>
+        <p:spPr>
+          <a:xfrm>
+            <a:off x="6355080" y="1554480"/>
+            <a:ext cx="5486400" cy="411480"/>
+          </a:xfrm>
+          <a:prstGeom prst="rect">
+            <a:avLst/>
+          </a:prstGeom>
+          <a:noFill/>
+        </p:spPr>
+        <p:txBody>
+          <a:bodyPr wrap="square">
+            <a:spAutoFit/>
+          </a:bodyPr>
+          <a:lstStyle/>
+          <a:p>
+            <a:pPr algn="l"/>
+            <a:r>
+              <a:rPr sz="1500" b="1" i="0">
+                <a:solidFill>
+                  <a:srgbClr val="1A6B3A"/>
+                </a:solidFill>
+              </a:rPr>
+              <a:t>AURIS'in Çözümü</a:t>
+            </a:r>
+          </a:p>
+        </p:txBody>
+      </p:sp>
+      <p:sp>
+        <p:nvSpPr>
+          <p:cNvPr id="23" name="Rectangle 22"/>
+          <p:cNvSpPr/>
+          <p:nvPr/>
+        </p:nvSpPr>
+        <p:spPr>
+          <a:xfrm>
+            <a:off x="6355080" y="2011680"/>
+            <a:ext cx="5486400" cy="713232"/>
+          </a:xfrm>
+          <a:prstGeom prst="rect">
+            <a:avLst/>
+          </a:prstGeom>
+          <a:solidFill>
+            <a:srgbClr val="E9F6EC"/>
+          </a:solidFill>
+          <a:ln w="12700">
+            <a:solidFill>
+              <a:srgbClr val="1A6B3A"/>
+            </a:solidFill>
+          </a:ln>
+        </p:spPr>
+        <p:style>
+          <a:lnRef idx="1">
+            <a:schemeClr val="accent1"/>
+          </a:lnRef>
+          <a:fillRef idx="3">
+            <a:schemeClr val="accent1"/>
+          </a:fillRef>
+          <a:effectRef idx="2">
+            <a:schemeClr val="accent1"/>
+          </a:effectRef>
+          <a:fontRef idx="minor">
+            <a:schemeClr val="lt1"/>
+          </a:fontRef>
+        </p:style>
+        <p:txBody>
+          <a:bodyPr rtlCol="0" anchor="ctr"/>
+          <a:lstStyle/>
+          <a:p>
+            <a:pPr algn="ctr"/>
+          </a:p>
+        </p:txBody>
+      </p:sp>
+      <p:sp>
+        <p:nvSpPr>
+          <p:cNvPr id="24" name="TextBox 23"/>
+          <p:cNvSpPr txBox="1"/>
+          <p:nvPr/>
+        </p:nvSpPr>
+        <p:spPr>
+          <a:xfrm>
+            <a:off x="6492240" y="2066544"/>
+            <a:ext cx="457200" cy="603504"/>
+          </a:xfrm>
+          <a:prstGeom prst="rect">
+            <a:avLst/>
+          </a:prstGeom>
+          <a:noFill/>
+        </p:spPr>
+        <p:txBody>
+          <a:bodyPr wrap="square" anchor="ctr">
+            <a:spAutoFit/>
+          </a:bodyPr>
+          <a:lstStyle/>
+          <a:p>
+            <a:pPr algn="l"/>
+            <a:r>
+              <a:rPr sz="1800" b="1" i="0">
+                <a:solidFill>
+                  <a:srgbClr val="1A6B3A"/>
+                </a:solidFill>
+              </a:rPr>
+              <a:t>✓</a:t>
+            </a:r>
+          </a:p>
+        </p:txBody>
+      </p:sp>
+      <p:sp>
+        <p:nvSpPr>
+          <p:cNvPr id="25" name="TextBox 24"/>
+          <p:cNvSpPr txBox="1"/>
+          <p:nvPr/>
+        </p:nvSpPr>
+        <p:spPr>
+          <a:xfrm>
+            <a:off x="6949440" y="2066544"/>
+            <a:ext cx="4754880" cy="603504"/>
+          </a:xfrm>
+          <a:prstGeom prst="rect">
+            <a:avLst/>
+          </a:prstGeom>
+          <a:noFill/>
+        </p:spPr>
+        <p:txBody>
+          <a:bodyPr wrap="square" anchor="ctr">
+            <a:spAutoFit/>
+          </a:bodyPr>
+          <a:lstStyle/>
+          <a:p>
+            <a:pPr algn="l"/>
+            <a:r>
+              <a:rPr sz="1100" b="0" i="0">
+                <a:solidFill>
+                  <a:srgbClr val="2A2A2A"/>
+                </a:solidFill>
+              </a:rPr>
+              <a:t>7 ML + 4 DL = 11 modelli topluluk öğrenmesi</a:t>
+            </a:r>
+          </a:p>
+        </p:txBody>
+      </p:sp>
+      <p:sp>
+        <p:nvSpPr>
+          <p:cNvPr id="26" name="Rectangle 25"/>
+          <p:cNvSpPr/>
+          <p:nvPr/>
+        </p:nvSpPr>
+        <p:spPr>
+          <a:xfrm>
+            <a:off x="6355080" y="2816352"/>
+            <a:ext cx="5486400" cy="713232"/>
+          </a:xfrm>
+          <a:prstGeom prst="rect">
+            <a:avLst/>
+          </a:prstGeom>
+          <a:solidFill>
+            <a:srgbClr val="E9F6EC"/>
+          </a:solidFill>
+          <a:ln w="12700">
+            <a:solidFill>
+              <a:srgbClr val="1A6B3A"/>
+            </a:solidFill>
+          </a:ln>
+        </p:spPr>
+        <p:style>
+          <a:lnRef idx="1">
+            <a:schemeClr val="accent1"/>
+          </a:lnRef>
+          <a:fillRef idx="3">
+            <a:schemeClr val="accent1"/>
+          </a:fillRef>
+          <a:effectRef idx="2">
+            <a:schemeClr val="accent1"/>
+          </a:effectRef>
+          <a:fontRef idx="minor">
+            <a:schemeClr val="lt1"/>
+          </a:fontRef>
+        </p:style>
+        <p:txBody>
+          <a:bodyPr rtlCol="0" anchor="ctr"/>
+          <a:lstStyle/>
+          <a:p>
+            <a:pPr algn="ctr"/>
+          </a:p>
+        </p:txBody>
+      </p:sp>
+      <p:sp>
+        <p:nvSpPr>
+          <p:cNvPr id="27" name="TextBox 26"/>
+          <p:cNvSpPr txBox="1"/>
+          <p:nvPr/>
+        </p:nvSpPr>
+        <p:spPr>
+          <a:xfrm>
+            <a:off x="6492240" y="2871216"/>
+            <a:ext cx="457200" cy="603504"/>
+          </a:xfrm>
+          <a:prstGeom prst="rect">
+            <a:avLst/>
+          </a:prstGeom>
+          <a:noFill/>
+        </p:spPr>
+        <p:txBody>
+          <a:bodyPr wrap="square" anchor="ctr">
+            <a:spAutoFit/>
+          </a:bodyPr>
+          <a:lstStyle/>
+          <a:p>
+            <a:pPr algn="l"/>
+            <a:r>
+              <a:rPr sz="1800" b="1" i="0">
+                <a:solidFill>
+                  <a:srgbClr val="1A6B3A"/>
+                </a:solidFill>
+              </a:rPr>
+              <a:t>✓</a:t>
+            </a:r>
+          </a:p>
+        </p:txBody>
+      </p:sp>
+      <p:sp>
+        <p:nvSpPr>
+          <p:cNvPr id="28" name="TextBox 27"/>
+          <p:cNvSpPr txBox="1"/>
+          <p:nvPr/>
+        </p:nvSpPr>
+        <p:spPr>
+          <a:xfrm>
+            <a:off x="6949440" y="2871216"/>
+            <a:ext cx="4754880" cy="603504"/>
+          </a:xfrm>
+          <a:prstGeom prst="rect">
+            <a:avLst/>
+          </a:prstGeom>
+          <a:noFill/>
+        </p:spPr>
+        <p:txBody>
+          <a:bodyPr wrap="square" anchor="ctr">
+            <a:spAutoFit/>
+          </a:bodyPr>
+          <a:lstStyle/>
+          <a:p>
+            <a:pPr algn="l"/>
+            <a:r>
+              <a:rPr sz="1100" b="0" i="0">
+                <a:solidFill>
+                  <a:srgbClr val="2A2A2A"/>
+                </a:solidFill>
+              </a:rPr>
+              <a:t>Spektral, zamansal, ritmik, harmonik, vokal — 5 aile / 47 boyut</a:t>
+            </a:r>
+          </a:p>
+        </p:txBody>
+      </p:sp>
+      <p:sp>
+        <p:nvSpPr>
+          <p:cNvPr id="29" name="Rectangle 28"/>
+          <p:cNvSpPr/>
+          <p:nvPr/>
+        </p:nvSpPr>
+        <p:spPr>
+          <a:xfrm>
+            <a:off x="6355080" y="3621024"/>
+            <a:ext cx="5486400" cy="713232"/>
+          </a:xfrm>
+          <a:prstGeom prst="rect">
+            <a:avLst/>
+          </a:prstGeom>
+          <a:solidFill>
+            <a:srgbClr val="E9F6EC"/>
+          </a:solidFill>
+          <a:ln w="12700">
+            <a:solidFill>
+              <a:srgbClr val="1A6B3A"/>
+            </a:solidFill>
+          </a:ln>
+        </p:spPr>
+        <p:style>
+          <a:lnRef idx="1">
+            <a:schemeClr val="accent1"/>
+          </a:lnRef>
+          <a:fillRef idx="3">
+            <a:schemeClr val="accent1"/>
+          </a:fillRef>
+          <a:effectRef idx="2">
+            <a:schemeClr val="accent1"/>
+          </a:effectRef>
+          <a:fontRef idx="minor">
+            <a:schemeClr val="lt1"/>
+          </a:fontRef>
+        </p:style>
+        <p:txBody>
+          <a:bodyPr rtlCol="0" anchor="ctr"/>
+          <a:lstStyle/>
+          <a:p>
+            <a:pPr algn="ctr"/>
+          </a:p>
+        </p:txBody>
+      </p:sp>
+      <p:sp>
+        <p:nvSpPr>
+          <p:cNvPr id="30" name="TextBox 29"/>
+          <p:cNvSpPr txBox="1"/>
+          <p:nvPr/>
+        </p:nvSpPr>
+        <p:spPr>
+          <a:xfrm>
+            <a:off x="6492240" y="3675887"/>
+            <a:ext cx="457200" cy="603504"/>
+          </a:xfrm>
+          <a:prstGeom prst="rect">
+            <a:avLst/>
+          </a:prstGeom>
+          <a:noFill/>
+        </p:spPr>
+        <p:txBody>
+          <a:bodyPr wrap="square" anchor="ctr">
+            <a:spAutoFit/>
+          </a:bodyPr>
+          <a:lstStyle/>
+          <a:p>
+            <a:pPr algn="l"/>
+            <a:r>
+              <a:rPr sz="1800" b="1" i="0">
+                <a:solidFill>
+                  <a:srgbClr val="1A6B3A"/>
+                </a:solidFill>
+              </a:rPr>
+              <a:t>✓</a:t>
+            </a:r>
+          </a:p>
+        </p:txBody>
+      </p:sp>
+      <p:sp>
+        <p:nvSpPr>
+          <p:cNvPr id="31" name="TextBox 30"/>
+          <p:cNvSpPr txBox="1"/>
+          <p:nvPr/>
+        </p:nvSpPr>
+        <p:spPr>
+          <a:xfrm>
+            <a:off x="6949440" y="3675887"/>
+            <a:ext cx="4754880" cy="603504"/>
+          </a:xfrm>
+          <a:prstGeom prst="rect">
+            <a:avLst/>
+          </a:prstGeom>
+          <a:noFill/>
+        </p:spPr>
+        <p:txBody>
+          <a:bodyPr wrap="square" anchor="ctr">
+            <a:spAutoFit/>
+          </a:bodyPr>
+          <a:lstStyle/>
+          <a:p>
+            <a:pPr algn="l"/>
+            <a:r>
+              <a:rPr sz="1100" b="0" i="0">
+                <a:solidFill>
+                  <a:srgbClr val="2A2A2A"/>
+                </a:solidFill>
+              </a:rPr>
+              <a:t>Sekiz kaynak için ayrı duyarlılık analizi (Suno %93,0, Echoes %88,6)</a:t>
+            </a:r>
+          </a:p>
+        </p:txBody>
+      </p:sp>
+      <p:sp>
+        <p:nvSpPr>
+          <p:cNvPr id="32" name="Rectangle 31"/>
+          <p:cNvSpPr/>
+          <p:nvPr/>
+        </p:nvSpPr>
+        <p:spPr>
+          <a:xfrm>
+            <a:off x="6355080" y="4425696"/>
+            <a:ext cx="5486400" cy="713232"/>
+          </a:xfrm>
+          <a:prstGeom prst="rect">
+            <a:avLst/>
+          </a:prstGeom>
+          <a:solidFill>
+            <a:srgbClr val="E9F6EC"/>
+          </a:solidFill>
+          <a:ln w="12700">
+            <a:solidFill>
+              <a:srgbClr val="1A6B3A"/>
+            </a:solidFill>
+          </a:ln>
+        </p:spPr>
+        <p:style>
+          <a:lnRef idx="1">
+            <a:schemeClr val="accent1"/>
+          </a:lnRef>
+          <a:fillRef idx="3">
+            <a:schemeClr val="accent1"/>
+          </a:fillRef>
+          <a:effectRef idx="2">
+            <a:schemeClr val="accent1"/>
+          </a:effectRef>
+          <a:fontRef idx="minor">
+            <a:schemeClr val="lt1"/>
+          </a:fontRef>
+        </p:style>
+        <p:txBody>
+          <a:bodyPr rtlCol="0" anchor="ctr"/>
+          <a:lstStyle/>
+          <a:p>
+            <a:pPr algn="ctr"/>
+          </a:p>
+        </p:txBody>
+      </p:sp>
+      <p:sp>
+        <p:nvSpPr>
+          <p:cNvPr id="33" name="TextBox 32"/>
+          <p:cNvSpPr txBox="1"/>
+          <p:nvPr/>
+        </p:nvSpPr>
+        <p:spPr>
+          <a:xfrm>
+            <a:off x="6492240" y="4480559"/>
+            <a:ext cx="457200" cy="603504"/>
+          </a:xfrm>
+          <a:prstGeom prst="rect">
+            <a:avLst/>
+          </a:prstGeom>
+          <a:noFill/>
+        </p:spPr>
+        <p:txBody>
+          <a:bodyPr wrap="square" anchor="ctr">
+            <a:spAutoFit/>
+          </a:bodyPr>
+          <a:lstStyle/>
+          <a:p>
+            <a:pPr algn="l"/>
+            <a:r>
+              <a:rPr sz="1800" b="1" i="0">
+                <a:solidFill>
+                  <a:srgbClr val="1A6B3A"/>
+                </a:solidFill>
+              </a:rPr>
+              <a:t>✓</a:t>
+            </a:r>
+          </a:p>
+        </p:txBody>
+      </p:sp>
+      <p:sp>
+        <p:nvSpPr>
+          <p:cNvPr id="34" name="TextBox 33"/>
+          <p:cNvSpPr txBox="1"/>
+          <p:nvPr/>
+        </p:nvSpPr>
+        <p:spPr>
+          <a:xfrm>
+            <a:off x="6949440" y="4480559"/>
+            <a:ext cx="4754880" cy="603504"/>
+          </a:xfrm>
+          <a:prstGeom prst="rect">
+            <a:avLst/>
+          </a:prstGeom>
+          <a:noFill/>
+        </p:spPr>
+        <p:txBody>
+          <a:bodyPr wrap="square" anchor="ctr">
+            <a:spAutoFit/>
+          </a:bodyPr>
+          <a:lstStyle/>
+          <a:p>
+            <a:pPr algn="l"/>
+            <a:r>
+              <a:rPr sz="1100" b="0" i="0">
+                <a:solidFill>
+                  <a:srgbClr val="2A2A2A"/>
+                </a:solidFill>
+              </a:rPr>
+              <a:t>TreeSHAP ile global ve yerel öznitelik etkisi</a:t>
+            </a:r>
+          </a:p>
+        </p:txBody>
+      </p:sp>
+      <p:sp>
+        <p:nvSpPr>
+          <p:cNvPr id="35" name="Rectangle 34"/>
+          <p:cNvSpPr/>
+          <p:nvPr/>
+        </p:nvSpPr>
+        <p:spPr>
+          <a:xfrm>
+            <a:off x="6355080" y="5230368"/>
+            <a:ext cx="5486400" cy="713232"/>
+          </a:xfrm>
+          <a:prstGeom prst="rect">
+            <a:avLst/>
+          </a:prstGeom>
+          <a:solidFill>
+            <a:srgbClr val="E9F6EC"/>
+          </a:solidFill>
+          <a:ln w="12700">
+            <a:solidFill>
+              <a:srgbClr val="1A6B3A"/>
+            </a:solidFill>
+          </a:ln>
+        </p:spPr>
+        <p:style>
+          <a:lnRef idx="1">
+            <a:schemeClr val="accent1"/>
+          </a:lnRef>
+          <a:fillRef idx="3">
+            <a:schemeClr val="accent1"/>
+          </a:fillRef>
+          <a:effectRef idx="2">
+            <a:schemeClr val="accent1"/>
+          </a:effectRef>
+          <a:fontRef idx="minor">
+            <a:schemeClr val="lt1"/>
+          </a:fontRef>
+        </p:style>
+        <p:txBody>
+          <a:bodyPr rtlCol="0" anchor="ctr"/>
+          <a:lstStyle/>
+          <a:p>
+            <a:pPr algn="ctr"/>
+          </a:p>
+        </p:txBody>
+      </p:sp>
+      <p:sp>
+        <p:nvSpPr>
+          <p:cNvPr id="36" name="TextBox 35"/>
+          <p:cNvSpPr txBox="1"/>
+          <p:nvPr/>
+        </p:nvSpPr>
+        <p:spPr>
+          <a:xfrm>
+            <a:off x="6492240" y="5285232"/>
+            <a:ext cx="457200" cy="603504"/>
+          </a:xfrm>
+          <a:prstGeom prst="rect">
+            <a:avLst/>
+          </a:prstGeom>
+          <a:noFill/>
+        </p:spPr>
+        <p:txBody>
+          <a:bodyPr wrap="square" anchor="ctr">
+            <a:spAutoFit/>
+          </a:bodyPr>
+          <a:lstStyle/>
+          <a:p>
+            <a:pPr algn="l"/>
+            <a:r>
+              <a:rPr sz="1800" b="1" i="0">
+                <a:solidFill>
+                  <a:srgbClr val="1A6B3A"/>
+                </a:solidFill>
+              </a:rPr>
+              <a:t>✓</a:t>
+            </a:r>
+          </a:p>
+        </p:txBody>
+      </p:sp>
+      <p:sp>
+        <p:nvSpPr>
+          <p:cNvPr id="37" name="TextBox 36"/>
+          <p:cNvSpPr txBox="1"/>
+          <p:nvPr/>
+        </p:nvSpPr>
+        <p:spPr>
+          <a:xfrm>
+            <a:off x="6949440" y="5285232"/>
+            <a:ext cx="4754880" cy="603504"/>
+          </a:xfrm>
+          <a:prstGeom prst="rect">
+            <a:avLst/>
+          </a:prstGeom>
+          <a:noFill/>
+        </p:spPr>
+        <p:txBody>
+          <a:bodyPr wrap="square" anchor="ctr">
+            <a:spAutoFit/>
+          </a:bodyPr>
+          <a:lstStyle/>
+          <a:p>
+            <a:pPr algn="l"/>
+            <a:r>
+              <a:rPr sz="1100" b="0" i="0">
+                <a:solidFill>
+                  <a:srgbClr val="2A2A2A"/>
+                </a:solidFill>
+              </a:rPr>
+              <a:t>θ* = 0,4316 ile dengeli karar eşiği</a:t>
+            </a:r>
+          </a:p>
+        </p:txBody>
+      </p:sp>
+      <p:sp>
+        <p:nvSpPr>
+          <p:cNvPr id="38" name="TextBox 37"/>
+          <p:cNvSpPr txBox="1"/>
+          <p:nvPr/>
+        </p:nvSpPr>
+        <p:spPr>
+          <a:xfrm>
+            <a:off x="365760" y="6510528"/>
+            <a:ext cx="8229600" cy="301752"/>
+          </a:xfrm>
+          <a:prstGeom prst="rect">
+            <a:avLst/>
+          </a:prstGeom>
+          <a:noFill/>
+        </p:spPr>
+        <p:txBody>
+          <a:bodyPr wrap="square">
+            <a:spAutoFit/>
+          </a:bodyPr>
+          <a:lstStyle/>
+          <a:p>
+            <a:pPr algn="l"/>
+            <a:r>
+              <a:rPr sz="900" b="0" i="0">
+                <a:solidFill>
+                  <a:srgbClr val="66707A"/>
+                </a:solidFill>
+              </a:rPr>
+              <a:t>AURIS  ·  Hasan Arthur Altuntaş  ·  BM498 Mezuniyet Tezi</a:t>
+            </a:r>
+          </a:p>
+        </p:txBody>
+      </p:sp>
+      <p:sp>
+        <p:nvSpPr>
+          <p:cNvPr id="39" name="TextBox 38"/>
+          <p:cNvSpPr txBox="1"/>
+          <p:nvPr/>
+        </p:nvSpPr>
+        <p:spPr>
+          <a:xfrm>
+            <a:off x="8595360" y="6510528"/>
+            <a:ext cx="3200400" cy="301752"/>
+          </a:xfrm>
+          <a:prstGeom prst="rect">
+            <a:avLst/>
+          </a:prstGeom>
+          <a:noFill/>
+        </p:spPr>
+        <p:txBody>
+          <a:bodyPr wrap="square">
+            <a:spAutoFit/>
+          </a:bodyPr>
+          <a:lstStyle/>
+          <a:p>
+            <a:pPr algn="r"/>
+            <a:r>
+              <a:rPr sz="900" b="0" i="0">
+                <a:solidFill>
+                  <a:srgbClr val="66707A"/>
+                </a:solidFill>
+              </a:rPr>
+              <a:t>Düzce Üniversitesi · 2025-2026</a:t>
+            </a:r>
+          </a:p>
+        </p:txBody>
+      </p:sp>
+    </p:spTree>
+  </p:cSld>
+  <p:clrMapOvr>
+    <a:masterClrMapping/>
+  </p:clrMapOvr>
+</p:sld>
+</file>
+
+<file path=ppt/slides/slide5.xml><?xml version="1.0" encoding="utf-8"?>
+<p:sld xmlns:a="http://schemas.openxmlformats.org/drawingml/2006/main" xmlns:p="http://schemas.openxmlformats.org/presentationml/2006/main" xmlns:r="http://schemas.openxmlformats.org/officeDocument/2006/relationships">
+  <p:cSld>
+    <p:bg>
+      <p:bgPr>
+        <a:solidFill>
+          <a:srgbClr val="F4F6F8"/>
+        </a:solidFill>
+        <a:effectLst/>
+      </p:bgPr>
+    </p:bg>
+    <p:spTree>
+      <p:nvGrpSpPr>
+        <p:cNvPr id="1" name=""/>
+        <p:cNvGrpSpPr/>
+        <p:nvPr/>
+      </p:nvGrpSpPr>
+      <p:grpSpPr/>
+      <p:sp>
+        <p:nvSpPr>
+          <p:cNvPr id="2" name="Rectangle 1"/>
+          <p:cNvSpPr/>
+          <p:nvPr/>
+        </p:nvSpPr>
+        <p:spPr>
+          <a:xfrm>
+            <a:off x="0" y="0"/>
+            <a:ext cx="12188952" cy="457200"/>
+          </a:xfrm>
+          <a:prstGeom prst="rect">
+            <a:avLst/>
+          </a:prstGeom>
+          <a:solidFill>
+            <a:srgbClr val="0D2B55"/>
+          </a:solidFill>
+          <a:ln>
+            <a:noFill/>
+          </a:ln>
+        </p:spPr>
+        <p:style>
+          <a:lnRef idx="1">
+            <a:schemeClr val="accent1"/>
+          </a:lnRef>
+          <a:fillRef idx="3">
+            <a:schemeClr val="accent1"/>
+          </a:fillRef>
+          <a:effectRef idx="2">
+            <a:schemeClr val="accent1"/>
+          </a:effectRef>
+          <a:fontRef idx="minor">
+            <a:schemeClr val="lt1"/>
+          </a:fontRef>
+        </p:style>
+        <p:txBody>
+          <a:bodyPr rtlCol="0" anchor="ctr"/>
+          <a:lstStyle/>
+          <a:p>
+            <a:pPr algn="ctr"/>
+          </a:p>
+        </p:txBody>
+      </p:sp>
+      <p:sp>
+        <p:nvSpPr>
+          <p:cNvPr id="3" name="TextBox 2"/>
+          <p:cNvSpPr txBox="1"/>
+          <p:nvPr/>
+        </p:nvSpPr>
+        <p:spPr>
+          <a:xfrm>
+            <a:off x="320040" y="64008"/>
+            <a:ext cx="11521440" cy="347472"/>
+          </a:xfrm>
+          <a:prstGeom prst="rect">
+            <a:avLst/>
+          </a:prstGeom>
+          <a:noFill/>
+        </p:spPr>
+        <p:txBody>
+          <a:bodyPr wrap="square">
+            <a:spAutoFit/>
+          </a:bodyPr>
+          <a:lstStyle/>
+          <a:p>
+            <a:pPr algn="l"/>
+            <a:r>
+              <a:rPr sz="1100" b="0" i="0">
+                <a:solidFill>
+                  <a:srgbClr val="FFFFFF"/>
+                </a:solidFill>
+              </a:rPr>
+              <a:t>BM498 — 02: Literatür Taraması Sunumu</a:t>
+            </a:r>
+          </a:p>
+        </p:txBody>
+      </p:sp>
+      <p:sp>
+        <p:nvSpPr>
+          <p:cNvPr id="4" name="Rectangle 3"/>
+          <p:cNvSpPr/>
+          <p:nvPr/>
+        </p:nvSpPr>
+        <p:spPr>
+          <a:xfrm>
+            <a:off x="2286000" y="960120"/>
+            <a:ext cx="7589520" cy="5440680"/>
+          </a:xfrm>
+          <a:prstGeom prst="rect">
+            <a:avLst/>
+          </a:prstGeom>
+          <a:solidFill>
+            <a:srgbClr val="FFFFFF"/>
+          </a:solidFill>
           <a:ln w="19050">
             <a:solidFill>
               <a:srgbClr val="007A87"/>
@@ -6497,13 +9206,89 @@
       </p:sp>
       <p:sp>
         <p:nvSpPr>
+          <p:cNvPr id="5" name="TextBox 4"/>
+          <p:cNvSpPr txBox="1"/>
+          <p:nvPr/>
+        </p:nvSpPr>
+        <p:spPr>
+          <a:xfrm>
+            <a:off x="2377440" y="1078992"/>
+            <a:ext cx="7406640" cy="502920"/>
+          </a:xfrm>
+          <a:prstGeom prst="rect">
+            <a:avLst/>
+          </a:prstGeom>
+          <a:noFill/>
+        </p:spPr>
+        <p:txBody>
+          <a:bodyPr wrap="square">
+            <a:spAutoFit/>
+          </a:bodyPr>
+          <a:lstStyle/>
+          <a:p>
+            <a:pPr algn="ctr"/>
+            <a:r>
+              <a:rPr sz="1700" b="1" i="0">
+                <a:solidFill>
+                  <a:srgbClr val="0D2B55"/>
+                </a:solidFill>
+              </a:rPr>
+              <a:t>ÖĞRENCİ İMZA SAYFASI</a:t>
+            </a:r>
+          </a:p>
+        </p:txBody>
+      </p:sp>
+      <p:sp>
+        <p:nvSpPr>
+          <p:cNvPr id="6" name="Rectangle 5"/>
+          <p:cNvSpPr/>
+          <p:nvPr/>
+        </p:nvSpPr>
+        <p:spPr>
+          <a:xfrm>
+            <a:off x="2377440" y="1627632"/>
+            <a:ext cx="7406640" cy="0"/>
+          </a:xfrm>
+          <a:prstGeom prst="rect">
+            <a:avLst/>
+          </a:prstGeom>
+          <a:ln w="19050">
+            <a:solidFill>
+              <a:srgbClr val="007A87"/>
+            </a:solidFill>
+          </a:ln>
+        </p:spPr>
+        <p:style>
+          <a:lnRef idx="1">
+            <a:schemeClr val="accent1"/>
+          </a:lnRef>
+          <a:fillRef idx="3">
+            <a:schemeClr val="accent1"/>
+          </a:fillRef>
+          <a:effectRef idx="2">
+            <a:schemeClr val="accent1"/>
+          </a:effectRef>
+          <a:fontRef idx="minor">
+            <a:schemeClr val="lt1"/>
+          </a:fontRef>
+        </p:style>
+        <p:txBody>
+          <a:bodyPr rtlCol="0" anchor="ctr"/>
+          <a:lstStyle/>
+          <a:p>
+            <a:pPr algn="ctr"/>
+          </a:p>
+        </p:txBody>
+      </p:sp>
+      <p:sp>
+        <p:nvSpPr>
           <p:cNvPr id="7" name="TextBox 6"/>
           <p:cNvSpPr txBox="1"/>
           <p:nvPr/>
         </p:nvSpPr>
         <p:spPr>
           <a:xfrm>
-            <a:off x="2468880" y="1874519"/>
+            <a:off x="2468880" y="1810512"/>
             <a:ext cx="2834640" cy="320040"/>
           </a:xfrm>
           <a:prstGeom prst="rect">
@@ -6519,7 +9304,7 @@
           <a:p>
             <a:pPr algn="l"/>
             <a:r>
-              <a:rPr sz="1200" b="1">
+              <a:rPr sz="1200" b="1" i="0">
                 <a:solidFill>
                   <a:srgbClr val="0D2B55"/>
                 </a:solidFill>
@@ -6537,7 +9322,7 @@
         </p:nvSpPr>
         <p:spPr>
           <a:xfrm>
-            <a:off x="5394960" y="1874519"/>
+            <a:off x="5394960" y="1810512"/>
             <a:ext cx="4297680" cy="320040"/>
           </a:xfrm>
           <a:prstGeom prst="rect">
@@ -6553,9 +9338,9 @@
           <a:p>
             <a:pPr algn="l"/>
             <a:r>
-              <a:rPr sz="1200" b="0">
-                <a:solidFill>
-                  <a:srgbClr val="333333"/>
+              <a:rPr sz="1200" b="0" i="0">
+                <a:solidFill>
+                  <a:srgbClr val="2A2A2A"/>
                 </a:solidFill>
               </a:rPr>
               <a:t>Hasan Arthur Altuntaş</a:t>
@@ -6571,7 +9356,7 @@
         </p:nvSpPr>
         <p:spPr>
           <a:xfrm>
-            <a:off x="5349240" y="2212848"/>
+            <a:off x="5349240" y="2148840"/>
             <a:ext cx="4343400" cy="0"/>
           </a:xfrm>
           <a:prstGeom prst="rect">
@@ -6613,7 +9398,7 @@
         </p:nvSpPr>
         <p:spPr>
           <a:xfrm>
-            <a:off x="2468880" y="2423160"/>
+            <a:off x="2468880" y="2377440"/>
             <a:ext cx="2834640" cy="320040"/>
           </a:xfrm>
           <a:prstGeom prst="rect">
@@ -6629,7 +9414,7 @@
           <a:p>
             <a:pPr algn="l"/>
             <a:r>
-              <a:rPr sz="1200" b="1">
+              <a:rPr sz="1200" b="1" i="0">
                 <a:solidFill>
                   <a:srgbClr val="0D2B55"/>
                 </a:solidFill>
@@ -6647,7 +9432,7 @@
         </p:nvSpPr>
         <p:spPr>
           <a:xfrm>
-            <a:off x="5394960" y="2423160"/>
+            <a:off x="5394960" y="2377440"/>
             <a:ext cx="4297680" cy="320040"/>
           </a:xfrm>
           <a:prstGeom prst="rect">
@@ -6663,9 +9448,9 @@
           <a:p>
             <a:pPr algn="l"/>
             <a:r>
-              <a:rPr sz="1200" b="0">
-                <a:solidFill>
-                  <a:srgbClr val="333333"/>
+              <a:rPr sz="1200" b="0" i="0">
+                <a:solidFill>
+                  <a:srgbClr val="2A2A2A"/>
                 </a:solidFill>
               </a:rPr>
               <a:t/>
@@ -6681,7 +9466,7 @@
         </p:nvSpPr>
         <p:spPr>
           <a:xfrm>
-            <a:off x="5349240" y="2761488"/>
+            <a:off x="5349240" y="2715768"/>
             <a:ext cx="4343400" cy="0"/>
           </a:xfrm>
           <a:prstGeom prst="rect">
@@ -6723,7 +9508,7 @@
         </p:nvSpPr>
         <p:spPr>
           <a:xfrm>
-            <a:off x="2468880" y="2971800"/>
+            <a:off x="2468880" y="2944368"/>
             <a:ext cx="2834640" cy="320040"/>
           </a:xfrm>
           <a:prstGeom prst="rect">
@@ -6739,7 +9524,7 @@
           <a:p>
             <a:pPr algn="l"/>
             <a:r>
-              <a:rPr sz="1200" b="1">
+              <a:rPr sz="1200" b="1" i="0">
                 <a:solidFill>
                   <a:srgbClr val="0D2B55"/>
                 </a:solidFill>
@@ -6757,7 +9542,7 @@
         </p:nvSpPr>
         <p:spPr>
           <a:xfrm>
-            <a:off x="5394960" y="2971800"/>
+            <a:off x="5394960" y="2944368"/>
             <a:ext cx="4297680" cy="320040"/>
           </a:xfrm>
           <a:prstGeom prst="rect">
@@ -6773,9 +9558,9 @@
           <a:p>
             <a:pPr algn="l"/>
             <a:r>
-              <a:rPr sz="1200" b="0">
-                <a:solidFill>
-                  <a:srgbClr val="333333"/>
+              <a:rPr sz="1200" b="0" i="0">
+                <a:solidFill>
+                  <a:srgbClr val="2A2A2A"/>
                 </a:solidFill>
               </a:rPr>
               <a:t>Bilgisayar Mühendisliği</a:t>
@@ -6791,7 +9576,7 @@
         </p:nvSpPr>
         <p:spPr>
           <a:xfrm>
-            <a:off x="5349240" y="3310128"/>
+            <a:off x="5349240" y="3282696"/>
             <a:ext cx="4343400" cy="0"/>
           </a:xfrm>
           <a:prstGeom prst="rect">
@@ -6833,7 +9618,7 @@
         </p:nvSpPr>
         <p:spPr>
           <a:xfrm>
-            <a:off x="2468880" y="3520439"/>
+            <a:off x="2468880" y="3511296"/>
             <a:ext cx="2834640" cy="320040"/>
           </a:xfrm>
           <a:prstGeom prst="rect">
@@ -6849,7 +9634,7 @@
           <a:p>
             <a:pPr algn="l"/>
             <a:r>
-              <a:rPr sz="1200" b="1">
+              <a:rPr sz="1200" b="1" i="0">
                 <a:solidFill>
                   <a:srgbClr val="0D2B55"/>
                 </a:solidFill>
@@ -6867,7 +9652,7 @@
         </p:nvSpPr>
         <p:spPr>
           <a:xfrm>
-            <a:off x="5394960" y="3520439"/>
+            <a:off x="5394960" y="3511296"/>
             <a:ext cx="4297680" cy="320040"/>
           </a:xfrm>
           <a:prstGeom prst="rect">
@@ -6883,9 +9668,9 @@
           <a:p>
             <a:pPr algn="l"/>
             <a:r>
-              <a:rPr sz="1200" b="0">
-                <a:solidFill>
-                  <a:srgbClr val="333333"/>
+              <a:rPr sz="1200" b="0" i="0">
+                <a:solidFill>
+                  <a:srgbClr val="2A2A2A"/>
                 </a:solidFill>
               </a:rPr>
               <a:t/>
@@ -6901,7 +9686,7 @@
         </p:nvSpPr>
         <p:spPr>
           <a:xfrm>
-            <a:off x="5349240" y="3858768"/>
+            <a:off x="5349240" y="3849624"/>
             <a:ext cx="4343400" cy="0"/>
           </a:xfrm>
           <a:prstGeom prst="rect">
@@ -6943,7 +9728,7 @@
         </p:nvSpPr>
         <p:spPr>
           <a:xfrm>
-            <a:off x="2468880" y="4069079"/>
+            <a:off x="2468880" y="4078224"/>
             <a:ext cx="2834640" cy="320040"/>
           </a:xfrm>
           <a:prstGeom prst="rect">
@@ -6959,7 +9744,7 @@
           <a:p>
             <a:pPr algn="l"/>
             <a:r>
-              <a:rPr sz="1200" b="1">
+              <a:rPr sz="1200" b="1" i="0">
                 <a:solidFill>
                   <a:srgbClr val="0D2B55"/>
                 </a:solidFill>
@@ -6977,7 +9762,7 @@
         </p:nvSpPr>
         <p:spPr>
           <a:xfrm>
-            <a:off x="5394960" y="4069079"/>
+            <a:off x="5394960" y="4078224"/>
             <a:ext cx="4297680" cy="320040"/>
           </a:xfrm>
           <a:prstGeom prst="rect">
@@ -6993,9 +9778,9 @@
           <a:p>
             <a:pPr algn="l"/>
             <a:r>
-              <a:rPr sz="1200" b="0">
-                <a:solidFill>
-                  <a:srgbClr val="333333"/>
+              <a:rPr sz="1200" b="0" i="0">
+                <a:solidFill>
+                  <a:srgbClr val="2A2A2A"/>
                 </a:solidFill>
               </a:rPr>
               <a:t/>
@@ -7011,7 +9796,7 @@
         </p:nvSpPr>
         <p:spPr>
           <a:xfrm>
-            <a:off x="5349240" y="4407407"/>
+            <a:off x="5349240" y="4416552"/>
             <a:ext cx="4343400" cy="0"/>
           </a:xfrm>
           <a:prstGeom prst="rect">
@@ -7053,7 +9838,7 @@
         </p:nvSpPr>
         <p:spPr>
           <a:xfrm>
-            <a:off x="2468880" y="4617720"/>
+            <a:off x="2468880" y="4645152"/>
             <a:ext cx="2834640" cy="320040"/>
           </a:xfrm>
           <a:prstGeom prst="rect">
@@ -7069,7 +9854,7 @@
           <a:p>
             <a:pPr algn="l"/>
             <a:r>
-              <a:rPr sz="1200" b="1">
+              <a:rPr sz="1200" b="1" i="0">
                 <a:solidFill>
                   <a:srgbClr val="0D2B55"/>
                 </a:solidFill>
@@ -7087,7 +9872,7 @@
         </p:nvSpPr>
         <p:spPr>
           <a:xfrm>
-            <a:off x="5394960" y="4617720"/>
+            <a:off x="5394960" y="4645152"/>
             <a:ext cx="4297680" cy="320040"/>
           </a:xfrm>
           <a:prstGeom prst="rect">
@@ -7103,9 +9888,9 @@
           <a:p>
             <a:pPr algn="l"/>
             <a:r>
-              <a:rPr sz="1200" b="0">
-                <a:solidFill>
-                  <a:srgbClr val="333333"/>
+              <a:rPr sz="1200" b="0" i="0">
+                <a:solidFill>
+                  <a:srgbClr val="2A2A2A"/>
                 </a:solidFill>
               </a:rPr>
               <a:t>Literatür Taraması Sunumu</a:t>
@@ -7121,7 +9906,7 @@
         </p:nvSpPr>
         <p:spPr>
           <a:xfrm>
-            <a:off x="5349240" y="4956048"/>
+            <a:off x="5349240" y="4983480"/>
             <a:ext cx="4343400" cy="0"/>
           </a:xfrm>
           <a:prstGeom prst="rect">
@@ -7163,7 +9948,7 @@
         </p:nvSpPr>
         <p:spPr>
           <a:xfrm>
-            <a:off x="2468880" y="5394960"/>
+            <a:off x="2468880" y="5440680"/>
             <a:ext cx="2926080" cy="347472"/>
           </a:xfrm>
           <a:prstGeom prst="rect">
@@ -7179,7 +9964,7 @@
           <a:p>
             <a:pPr algn="l"/>
             <a:r>
-              <a:rPr sz="1300" b="1">
+              <a:rPr sz="1300" b="1" i="0">
                 <a:solidFill>
                   <a:srgbClr val="0D2B55"/>
                 </a:solidFill>
@@ -7197,7 +9982,7 @@
         </p:nvSpPr>
         <p:spPr>
           <a:xfrm>
-            <a:off x="3246120" y="5742432"/>
+            <a:off x="3246120" y="5788152"/>
             <a:ext cx="6080760" cy="0"/>
           </a:xfrm>
           <a:prstGeom prst="rect">
@@ -7205,7 +9990,7 @@
           </a:prstGeom>
           <a:ln w="19050">
             <a:solidFill>
-              <a:srgbClr val="333333"/>
+              <a:srgbClr val="2A2A2A"/>
             </a:solidFill>
           </a:ln>
         </p:spPr>
@@ -7239,8 +10024,8 @@
         </p:nvSpPr>
         <p:spPr>
           <a:xfrm>
-            <a:off x="3246120" y="5797296"/>
-            <a:ext cx="6080760" cy="292608"/>
+            <a:off x="3246120" y="5843016"/>
+            <a:ext cx="6080760" cy="274320"/>
           </a:xfrm>
           <a:prstGeom prst="rect">
             <a:avLst/>
@@ -7255,9 +10040,9 @@
           <a:p>
             <a:pPr algn="ctr"/>
             <a:r>
-              <a:rPr sz="900" b="0">
-                <a:solidFill>
-                  <a:srgbClr val="888888"/>
+              <a:rPr sz="900" b="0" i="0">
+                <a:solidFill>
+                  <a:srgbClr val="66707A"/>
                 </a:solidFill>
               </a:rPr>
               <a:t>(Öğrenci bu alanı imzalayarak sunumun kendisine ait olduğunu onaylar.)</a:t>

--- a/docs/academic/TeslimEdilecekler/Sunumlar/02_Literatur_Taramasi_Sunumu.pptx
+++ b/docs/academic/TeslimEdilecekler/Sunumlar/02_Literatur_Taramasi_Sunumu.pptx
@@ -3088,7 +3088,7 @@
     <p:bg>
       <p:bgPr>
         <a:solidFill>
-          <a:srgbClr val="F4F6F8"/>
+          <a:srgbClr val="F6F8FA"/>
         </a:solidFill>
         <a:effectLst/>
       </p:bgPr>
@@ -3109,17 +3109,18 @@
         <p:spPr>
           <a:xfrm>
             <a:off x="0" y="0"/>
-            <a:ext cx="12188952" cy="2468880"/>
+            <a:ext cx="12188952" cy="2514600"/>
           </a:xfrm>
           <a:prstGeom prst="rect">
             <a:avLst/>
           </a:prstGeom>
           <a:solidFill>
-            <a:srgbClr val="0D2B55"/>
+            <a:srgbClr val="102A4C"/>
           </a:solidFill>
           <a:ln>
             <a:noFill/>
           </a:ln>
+          <a:effectLst/>
         </p:spPr>
         <p:style>
           <a:lnRef idx="1">
@@ -3151,18 +3152,19 @@
         </p:nvSpPr>
         <p:spPr>
           <a:xfrm>
-            <a:off x="0" y="2468880"/>
-            <a:ext cx="12188952" cy="64008"/>
+            <a:off x="0" y="2514600"/>
+            <a:ext cx="12188952" cy="54864"/>
           </a:xfrm>
           <a:prstGeom prst="rect">
             <a:avLst/>
           </a:prstGeom>
           <a:solidFill>
-            <a:srgbClr val="E0A800"/>
+            <a:srgbClr val="D99A07"/>
           </a:solidFill>
           <a:ln>
             <a:noFill/>
           </a:ln>
+          <a:effectLst/>
         </p:spPr>
         <p:style>
           <a:lnRef idx="1">
@@ -3188,126 +3190,25 @@
       </p:sp>
       <p:sp>
         <p:nvSpPr>
-          <p:cNvPr id="4" name="TextBox 3"/>
-          <p:cNvSpPr txBox="1"/>
-          <p:nvPr/>
-        </p:nvSpPr>
-        <p:spPr>
-          <a:xfrm>
-            <a:off x="548640" y="411480"/>
-            <a:ext cx="10972800" cy="365760"/>
-          </a:xfrm>
-          <a:prstGeom prst="rect">
-            <a:avLst/>
-          </a:prstGeom>
-          <a:noFill/>
-        </p:spPr>
-        <p:txBody>
-          <a:bodyPr wrap="square">
-            <a:spAutoFit/>
-          </a:bodyPr>
-          <a:lstStyle/>
-          <a:p>
-            <a:pPr algn="l"/>
-            <a:r>
-              <a:rPr sz="1300" b="1" i="0">
-                <a:solidFill>
-                  <a:srgbClr val="E0A800"/>
-                </a:solidFill>
-              </a:rPr>
-              <a:t>02 — LİTERATÜR TARAMASI</a:t>
-            </a:r>
-          </a:p>
-        </p:txBody>
-      </p:sp>
-      <p:sp>
-        <p:nvSpPr>
-          <p:cNvPr id="5" name="TextBox 4"/>
-          <p:cNvSpPr txBox="1"/>
-          <p:nvPr/>
-        </p:nvSpPr>
-        <p:spPr>
-          <a:xfrm>
-            <a:off x="548640" y="868680"/>
-            <a:ext cx="10972800" cy="914400"/>
-          </a:xfrm>
-          <a:prstGeom prst="rect">
-            <a:avLst/>
-          </a:prstGeom>
-          <a:noFill/>
-        </p:spPr>
-        <p:txBody>
-          <a:bodyPr wrap="square">
-            <a:spAutoFit/>
-          </a:bodyPr>
-          <a:lstStyle/>
-          <a:p>
-            <a:pPr algn="l"/>
-            <a:r>
-              <a:rPr sz="3400" b="1" i="0">
-                <a:solidFill>
-                  <a:srgbClr val="FFFFFF"/>
-                </a:solidFill>
-              </a:rPr>
-              <a:t>İlgili Çalışmalar</a:t>
-            </a:r>
-          </a:p>
-        </p:txBody>
-      </p:sp>
-      <p:sp>
-        <p:nvSpPr>
-          <p:cNvPr id="6" name="TextBox 5"/>
-          <p:cNvSpPr txBox="1"/>
-          <p:nvPr/>
-        </p:nvSpPr>
-        <p:spPr>
-          <a:xfrm>
-            <a:off x="548640" y="1691640"/>
-            <a:ext cx="10972800" cy="548640"/>
-          </a:xfrm>
-          <a:prstGeom prst="rect">
-            <a:avLst/>
-          </a:prstGeom>
-          <a:noFill/>
-        </p:spPr>
-        <p:txBody>
-          <a:bodyPr wrap="square">
-            <a:spAutoFit/>
-          </a:bodyPr>
-          <a:lstStyle/>
-          <a:p>
-            <a:pPr algn="l"/>
-            <a:r>
-              <a:rPr sz="1600" b="0" i="0">
-                <a:solidFill>
-                  <a:srgbClr val="AEC6D6"/>
-                </a:solidFill>
-              </a:rPr>
-              <a:t>39 kaynak · üç araştırma alanı · sistematik boşluk analizi</a:t>
-            </a:r>
-          </a:p>
-        </p:txBody>
-      </p:sp>
-      <p:sp>
-        <p:nvSpPr>
-          <p:cNvPr id="7" name="Rectangle 6"/>
+          <p:cNvPr id="4" name="Rectangle 3"/>
           <p:cNvSpPr/>
           <p:nvPr/>
         </p:nvSpPr>
         <p:spPr>
           <a:xfrm>
-            <a:off x="640080" y="2971800"/>
-            <a:ext cx="3520440" cy="1051560"/>
+            <a:off x="0" y="0"/>
+            <a:ext cx="182880" cy="2514600"/>
           </a:xfrm>
           <a:prstGeom prst="rect">
             <a:avLst/>
           </a:prstGeom>
           <a:solidFill>
-            <a:srgbClr val="0D2B55"/>
+            <a:srgbClr val="D99A07"/>
           </a:solidFill>
           <a:ln>
             <a:noFill/>
           </a:ln>
+          <a:effectLst/>
         </p:spPr>
         <p:style>
           <a:lnRef idx="1">
@@ -3333,92 +3234,130 @@
       </p:sp>
       <p:sp>
         <p:nvSpPr>
-          <p:cNvPr id="8" name="TextBox 7"/>
-          <p:cNvSpPr txBox="1"/>
-          <p:nvPr/>
-        </p:nvSpPr>
-        <p:spPr>
-          <a:xfrm>
-            <a:off x="640080" y="3108502"/>
-            <a:ext cx="3520440" cy="525780"/>
-          </a:xfrm>
-          <a:prstGeom prst="rect">
-            <a:avLst/>
-          </a:prstGeom>
-          <a:noFill/>
-        </p:spPr>
-        <p:txBody>
-          <a:bodyPr wrap="square">
-            <a:spAutoFit/>
-          </a:bodyPr>
-          <a:lstStyle/>
-          <a:p>
-            <a:pPr algn="ctr"/>
-            <a:r>
-              <a:rPr sz="3000" b="1" i="0">
-                <a:solidFill>
-                  <a:srgbClr val="E0A800"/>
-                </a:solidFill>
-              </a:rPr>
-              <a:t>39</a:t>
-            </a:r>
-          </a:p>
-        </p:txBody>
-      </p:sp>
-      <p:sp>
-        <p:nvSpPr>
-          <p:cNvPr id="9" name="TextBox 8"/>
-          <p:cNvSpPr txBox="1"/>
-          <p:nvPr/>
-        </p:nvSpPr>
-        <p:spPr>
-          <a:xfrm>
-            <a:off x="640080" y="3623767"/>
-            <a:ext cx="3520440" cy="336499"/>
-          </a:xfrm>
-          <a:prstGeom prst="rect">
-            <a:avLst/>
-          </a:prstGeom>
-          <a:noFill/>
-        </p:spPr>
-        <p:txBody>
-          <a:bodyPr wrap="square">
-            <a:spAutoFit/>
-          </a:bodyPr>
-          <a:lstStyle/>
-          <a:p>
-            <a:pPr algn="ctr"/>
-            <a:r>
-              <a:rPr sz="1100" b="0" i="0">
+          <p:cNvPr id="5" name="TextBox 4"/>
+          <p:cNvSpPr txBox="1"/>
+          <p:nvPr/>
+        </p:nvSpPr>
+        <p:spPr>
+          <a:xfrm>
+            <a:off x="548640" y="457200"/>
+            <a:ext cx="10972800" cy="365760"/>
+          </a:xfrm>
+          <a:prstGeom prst="rect">
+            <a:avLst/>
+          </a:prstGeom>
+          <a:noFill/>
+        </p:spPr>
+        <p:txBody>
+          <a:bodyPr wrap="square" anchor="t" lIns="25400" rIns="25400" tIns="12700" bIns="12700">
+            <a:spAutoFit/>
+          </a:bodyPr>
+          <a:lstStyle/>
+          <a:p>
+            <a:pPr algn="l"/>
+            <a:r>
+              <a:rPr sz="1300" b="1" i="0">
+                <a:solidFill>
+                  <a:srgbClr val="D99A07"/>
+                </a:solidFill>
+                <a:latin typeface="Calibri"/>
+              </a:rPr>
+              <a:t>02 — LİTERATÜR TARAMASI</a:t>
+            </a:r>
+          </a:p>
+        </p:txBody>
+      </p:sp>
+      <p:sp>
+        <p:nvSpPr>
+          <p:cNvPr id="6" name="TextBox 5"/>
+          <p:cNvSpPr txBox="1"/>
+          <p:nvPr/>
+        </p:nvSpPr>
+        <p:spPr>
+          <a:xfrm>
+            <a:off x="548640" y="914400"/>
+            <a:ext cx="10972800" cy="868680"/>
+          </a:xfrm>
+          <a:prstGeom prst="rect">
+            <a:avLst/>
+          </a:prstGeom>
+          <a:noFill/>
+        </p:spPr>
+        <p:txBody>
+          <a:bodyPr wrap="square" anchor="t" lIns="25400" rIns="25400" tIns="12700" bIns="12700">
+            <a:spAutoFit/>
+          </a:bodyPr>
+          <a:lstStyle/>
+          <a:p>
+            <a:pPr algn="l"/>
+            <a:r>
+              <a:rPr sz="3400" b="1" i="0">
                 <a:solidFill>
                   <a:srgbClr val="FFFFFF"/>
                 </a:solidFill>
-              </a:rPr>
-              <a:t>Taranan kaynak</a:t>
-            </a:r>
-          </a:p>
-        </p:txBody>
-      </p:sp>
-      <p:sp>
-        <p:nvSpPr>
-          <p:cNvPr id="10" name="Rectangle 9"/>
+                <a:latin typeface="Calibri"/>
+              </a:rPr>
+              <a:t>İlgili Çalışmalar</a:t>
+            </a:r>
+          </a:p>
+        </p:txBody>
+      </p:sp>
+      <p:sp>
+        <p:nvSpPr>
+          <p:cNvPr id="7" name="TextBox 6"/>
+          <p:cNvSpPr txBox="1"/>
+          <p:nvPr/>
+        </p:nvSpPr>
+        <p:spPr>
+          <a:xfrm>
+            <a:off x="548640" y="1755648"/>
+            <a:ext cx="10972800" cy="502920"/>
+          </a:xfrm>
+          <a:prstGeom prst="rect">
+            <a:avLst/>
+          </a:prstGeom>
+          <a:noFill/>
+        </p:spPr>
+        <p:txBody>
+          <a:bodyPr wrap="square" anchor="t" lIns="25400" rIns="25400" tIns="12700" bIns="12700">
+            <a:spAutoFit/>
+          </a:bodyPr>
+          <a:lstStyle/>
+          <a:p>
+            <a:pPr algn="l"/>
+            <a:r>
+              <a:rPr sz="1600" b="0" i="0">
+                <a:solidFill>
+                  <a:srgbClr val="ADC4D6"/>
+                </a:solidFill>
+                <a:latin typeface="Calibri"/>
+              </a:rPr>
+              <a:t>39 kaynak · üç araştırma alanı · sistematik boşluk analizi</a:t>
+            </a:r>
+          </a:p>
+        </p:txBody>
+      </p:sp>
+      <p:sp>
+        <p:nvSpPr>
+          <p:cNvPr id="8" name="Rectangle 7"/>
           <p:cNvSpPr/>
           <p:nvPr/>
         </p:nvSpPr>
         <p:spPr>
           <a:xfrm>
-            <a:off x="4343400" y="2971800"/>
-            <a:ext cx="3520440" cy="1051560"/>
+            <a:off x="548640" y="2880360"/>
+            <a:ext cx="3566160" cy="1051560"/>
           </a:xfrm>
           <a:prstGeom prst="rect">
             <a:avLst/>
           </a:prstGeom>
           <a:solidFill>
-            <a:srgbClr val="0D2B55"/>
+            <a:srgbClr val="102A4C"/>
           </a:solidFill>
           <a:ln>
             <a:noFill/>
           </a:ln>
+          <a:effectLst/>
         </p:spPr>
         <p:style>
           <a:lnRef idx="1">
@@ -3444,22 +3383,22 @@
       </p:sp>
       <p:sp>
         <p:nvSpPr>
-          <p:cNvPr id="11" name="TextBox 10"/>
-          <p:cNvSpPr txBox="1"/>
-          <p:nvPr/>
-        </p:nvSpPr>
-        <p:spPr>
-          <a:xfrm>
-            <a:off x="4343400" y="3108502"/>
-            <a:ext cx="3520440" cy="525780"/>
-          </a:xfrm>
-          <a:prstGeom prst="rect">
-            <a:avLst/>
-          </a:prstGeom>
-          <a:noFill/>
-        </p:spPr>
-        <p:txBody>
-          <a:bodyPr wrap="square">
+          <p:cNvPr id="9" name="TextBox 8"/>
+          <p:cNvSpPr txBox="1"/>
+          <p:nvPr/>
+        </p:nvSpPr>
+        <p:spPr>
+          <a:xfrm>
+            <a:off x="548640" y="3027578"/>
+            <a:ext cx="3566160" cy="525780"/>
+          </a:xfrm>
+          <a:prstGeom prst="rect">
+            <a:avLst/>
+          </a:prstGeom>
+          <a:noFill/>
+        </p:spPr>
+        <p:txBody>
+          <a:bodyPr wrap="square" anchor="ctr" lIns="25400" rIns="25400" tIns="12700" bIns="12700">
             <a:spAutoFit/>
           </a:bodyPr>
           <a:lstStyle/>
@@ -3468,32 +3407,33 @@
             <a:r>
               <a:rPr sz="3000" b="1" i="0">
                 <a:solidFill>
-                  <a:srgbClr val="1A6B3A"/>
-                </a:solidFill>
-              </a:rPr>
-              <a:t>%74</a:t>
-            </a:r>
-          </a:p>
-        </p:txBody>
-      </p:sp>
-      <p:sp>
-        <p:nvSpPr>
-          <p:cNvPr id="12" name="TextBox 11"/>
-          <p:cNvSpPr txBox="1"/>
-          <p:nvPr/>
-        </p:nvSpPr>
-        <p:spPr>
-          <a:xfrm>
-            <a:off x="4343400" y="3623767"/>
-            <a:ext cx="3520440" cy="336499"/>
-          </a:xfrm>
-          <a:prstGeom prst="rect">
-            <a:avLst/>
-          </a:prstGeom>
-          <a:noFill/>
-        </p:spPr>
-        <p:txBody>
-          <a:bodyPr wrap="square">
+                  <a:srgbClr val="D99A07"/>
+                </a:solidFill>
+                <a:latin typeface="Calibri"/>
+              </a:rPr>
+              <a:t>39</a:t>
+            </a:r>
+          </a:p>
+        </p:txBody>
+      </p:sp>
+      <p:sp>
+        <p:nvSpPr>
+          <p:cNvPr id="10" name="TextBox 9"/>
+          <p:cNvSpPr txBox="1"/>
+          <p:nvPr/>
+        </p:nvSpPr>
+        <p:spPr>
+          <a:xfrm>
+            <a:off x="548640" y="3542842"/>
+            <a:ext cx="3566160" cy="357530"/>
+          </a:xfrm>
+          <a:prstGeom prst="rect">
+            <a:avLst/>
+          </a:prstGeom>
+          <a:noFill/>
+        </p:spPr>
+        <p:txBody>
+          <a:bodyPr wrap="square" anchor="ctr" lIns="25400" rIns="25400" tIns="12700" bIns="12700">
             <a:spAutoFit/>
           </a:bodyPr>
           <a:lstStyle/>
@@ -3504,32 +3444,34 @@
                 <a:solidFill>
                   <a:srgbClr val="FFFFFF"/>
                 </a:solidFill>
-              </a:rPr>
-              <a:t>Son 5 yıl (2021+)</a:t>
-            </a:r>
-          </a:p>
-        </p:txBody>
-      </p:sp>
-      <p:sp>
-        <p:nvSpPr>
-          <p:cNvPr id="13" name="Rectangle 12"/>
+                <a:latin typeface="Calibri"/>
+              </a:rPr>
+              <a:t>Taranan kaynak</a:t>
+            </a:r>
+          </a:p>
+        </p:txBody>
+      </p:sp>
+      <p:sp>
+        <p:nvSpPr>
+          <p:cNvPr id="11" name="Rectangle 10"/>
           <p:cNvSpPr/>
           <p:nvPr/>
         </p:nvSpPr>
         <p:spPr>
           <a:xfrm>
-            <a:off x="8046720" y="2971800"/>
-            <a:ext cx="3520440" cy="1051560"/>
+            <a:off x="4297680" y="2880360"/>
+            <a:ext cx="3566160" cy="1051560"/>
           </a:xfrm>
           <a:prstGeom prst="rect">
             <a:avLst/>
           </a:prstGeom>
           <a:solidFill>
-            <a:srgbClr val="0D2B55"/>
+            <a:srgbClr val="102A4C"/>
           </a:solidFill>
           <a:ln>
             <a:noFill/>
           </a:ln>
+          <a:effectLst/>
         </p:spPr>
         <p:style>
           <a:lnRef idx="1">
@@ -3555,22 +3497,22 @@
       </p:sp>
       <p:sp>
         <p:nvSpPr>
-          <p:cNvPr id="14" name="TextBox 13"/>
-          <p:cNvSpPr txBox="1"/>
-          <p:nvPr/>
-        </p:nvSpPr>
-        <p:spPr>
-          <a:xfrm>
-            <a:off x="8046720" y="3108502"/>
-            <a:ext cx="3520440" cy="525780"/>
-          </a:xfrm>
-          <a:prstGeom prst="rect">
-            <a:avLst/>
-          </a:prstGeom>
-          <a:noFill/>
-        </p:spPr>
-        <p:txBody>
-          <a:bodyPr wrap="square">
+          <p:cNvPr id="12" name="TextBox 11"/>
+          <p:cNvSpPr txBox="1"/>
+          <p:nvPr/>
+        </p:nvSpPr>
+        <p:spPr>
+          <a:xfrm>
+            <a:off x="4297680" y="3027578"/>
+            <a:ext cx="3566160" cy="525780"/>
+          </a:xfrm>
+          <a:prstGeom prst="rect">
+            <a:avLst/>
+          </a:prstGeom>
+          <a:noFill/>
+        </p:spPr>
+        <p:txBody>
+          <a:bodyPr wrap="square" anchor="ctr" lIns="25400" rIns="25400" tIns="12700" bIns="12700">
             <a:spAutoFit/>
           </a:bodyPr>
           <a:lstStyle/>
@@ -3579,8 +3521,123 @@
             <a:r>
               <a:rPr sz="3000" b="1" i="0">
                 <a:solidFill>
-                  <a:srgbClr val="E0A800"/>
-                </a:solidFill>
+                  <a:srgbClr val="6FD895"/>
+                </a:solidFill>
+                <a:latin typeface="Calibri"/>
+              </a:rPr>
+              <a:t>%74</a:t>
+            </a:r>
+          </a:p>
+        </p:txBody>
+      </p:sp>
+      <p:sp>
+        <p:nvSpPr>
+          <p:cNvPr id="13" name="TextBox 12"/>
+          <p:cNvSpPr txBox="1"/>
+          <p:nvPr/>
+        </p:nvSpPr>
+        <p:spPr>
+          <a:xfrm>
+            <a:off x="4297680" y="3542842"/>
+            <a:ext cx="3566160" cy="357530"/>
+          </a:xfrm>
+          <a:prstGeom prst="rect">
+            <a:avLst/>
+          </a:prstGeom>
+          <a:noFill/>
+        </p:spPr>
+        <p:txBody>
+          <a:bodyPr wrap="square" anchor="ctr" lIns="25400" rIns="25400" tIns="12700" bIns="12700">
+            <a:spAutoFit/>
+          </a:bodyPr>
+          <a:lstStyle/>
+          <a:p>
+            <a:pPr algn="ctr"/>
+            <a:r>
+              <a:rPr sz="1100" b="0" i="0">
+                <a:solidFill>
+                  <a:srgbClr val="FFFFFF"/>
+                </a:solidFill>
+                <a:latin typeface="Calibri"/>
+              </a:rPr>
+              <a:t>Son 5 yıl (2021+)</a:t>
+            </a:r>
+          </a:p>
+        </p:txBody>
+      </p:sp>
+      <p:sp>
+        <p:nvSpPr>
+          <p:cNvPr id="14" name="Rectangle 13"/>
+          <p:cNvSpPr/>
+          <p:nvPr/>
+        </p:nvSpPr>
+        <p:spPr>
+          <a:xfrm>
+            <a:off x="8046720" y="2880360"/>
+            <a:ext cx="3657600" cy="1051560"/>
+          </a:xfrm>
+          <a:prstGeom prst="rect">
+            <a:avLst/>
+          </a:prstGeom>
+          <a:solidFill>
+            <a:srgbClr val="102A4C"/>
+          </a:solidFill>
+          <a:ln>
+            <a:noFill/>
+          </a:ln>
+          <a:effectLst/>
+        </p:spPr>
+        <p:style>
+          <a:lnRef idx="1">
+            <a:schemeClr val="accent1"/>
+          </a:lnRef>
+          <a:fillRef idx="3">
+            <a:schemeClr val="accent1"/>
+          </a:fillRef>
+          <a:effectRef idx="2">
+            <a:schemeClr val="accent1"/>
+          </a:effectRef>
+          <a:fontRef idx="minor">
+            <a:schemeClr val="lt1"/>
+          </a:fontRef>
+        </p:style>
+        <p:txBody>
+          <a:bodyPr rtlCol="0" anchor="ctr"/>
+          <a:lstStyle/>
+          <a:p>
+            <a:pPr algn="ctr"/>
+          </a:p>
+        </p:txBody>
+      </p:sp>
+      <p:sp>
+        <p:nvSpPr>
+          <p:cNvPr id="15" name="TextBox 14"/>
+          <p:cNvSpPr txBox="1"/>
+          <p:nvPr/>
+        </p:nvSpPr>
+        <p:spPr>
+          <a:xfrm>
+            <a:off x="8046720" y="3027578"/>
+            <a:ext cx="3657600" cy="525780"/>
+          </a:xfrm>
+          <a:prstGeom prst="rect">
+            <a:avLst/>
+          </a:prstGeom>
+          <a:noFill/>
+        </p:spPr>
+        <p:txBody>
+          <a:bodyPr wrap="square" anchor="ctr" lIns="25400" rIns="25400" tIns="12700" bIns="12700">
+            <a:spAutoFit/>
+          </a:bodyPr>
+          <a:lstStyle/>
+          <a:p>
+            <a:pPr algn="ctr"/>
+            <a:r>
+              <a:rPr sz="3000" b="1" i="0">
+                <a:solidFill>
+                  <a:srgbClr val="D99A07"/>
+                </a:solidFill>
+                <a:latin typeface="Calibri"/>
               </a:rPr>
               <a:t>3</a:t>
             </a:r>
@@ -3589,22 +3646,22 @@
       </p:sp>
       <p:sp>
         <p:nvSpPr>
-          <p:cNvPr id="15" name="TextBox 14"/>
-          <p:cNvSpPr txBox="1"/>
-          <p:nvPr/>
-        </p:nvSpPr>
-        <p:spPr>
-          <a:xfrm>
-            <a:off x="8046720" y="3623767"/>
-            <a:ext cx="3520440" cy="336499"/>
-          </a:xfrm>
-          <a:prstGeom prst="rect">
-            <a:avLst/>
-          </a:prstGeom>
-          <a:noFill/>
-        </p:spPr>
-        <p:txBody>
-          <a:bodyPr wrap="square">
+          <p:cNvPr id="16" name="TextBox 15"/>
+          <p:cNvSpPr txBox="1"/>
+          <p:nvPr/>
+        </p:nvSpPr>
+        <p:spPr>
+          <a:xfrm>
+            <a:off x="8046720" y="3542842"/>
+            <a:ext cx="3657600" cy="357530"/>
+          </a:xfrm>
+          <a:prstGeom prst="rect">
+            <a:avLst/>
+          </a:prstGeom>
+          <a:noFill/>
+        </p:spPr>
+        <p:txBody>
+          <a:bodyPr wrap="square" anchor="ctr" lIns="25400" rIns="25400" tIns="12700" bIns="12700">
             <a:spAutoFit/>
           </a:bodyPr>
           <a:lstStyle/>
@@ -3615,6 +3672,7 @@
                 <a:solidFill>
                   <a:srgbClr val="FFFFFF"/>
                 </a:solidFill>
+                <a:latin typeface="Calibri"/>
               </a:rPr>
               <a:t>Araştırma alanı</a:t>
             </a:r>
@@ -3623,90 +3681,146 @@
       </p:sp>
       <p:sp>
         <p:nvSpPr>
-          <p:cNvPr id="16" name="TextBox 15"/>
-          <p:cNvSpPr txBox="1"/>
-          <p:nvPr/>
-        </p:nvSpPr>
-        <p:spPr>
-          <a:xfrm>
-            <a:off x="640080" y="4389120"/>
-            <a:ext cx="10972800" cy="2011680"/>
-          </a:xfrm>
-          <a:prstGeom prst="rect">
-            <a:avLst/>
-          </a:prstGeom>
-          <a:noFill/>
-        </p:spPr>
-        <p:txBody>
-          <a:bodyPr wrap="square">
-            <a:spAutoFit/>
-          </a:bodyPr>
-          <a:lstStyle/>
-          <a:p>
-            <a:pPr>
+          <p:cNvPr id="17" name="TextBox 16"/>
+          <p:cNvSpPr txBox="1"/>
+          <p:nvPr/>
+        </p:nvSpPr>
+        <p:spPr>
+          <a:xfrm>
+            <a:off x="548640" y="4297680"/>
+            <a:ext cx="11155680" cy="1828800"/>
+          </a:xfrm>
+          <a:prstGeom prst="rect">
+            <a:avLst/>
+          </a:prstGeom>
+          <a:noFill/>
+        </p:spPr>
+        <p:txBody>
+          <a:bodyPr wrap="square" anchor="t" lIns="25400" rIns="25400">
+            <a:spAutoFit/>
+          </a:bodyPr>
+          <a:lstStyle/>
+          <a:p>
+            <a:pPr algn="l">
+              <a:spcBef>
+                <a:spcPts val="0"/>
+              </a:spcBef>
               <a:spcAft>
-                <a:spcPts val="900"/>
+                <a:spcPts val="1000"/>
               </a:spcAft>
             </a:pPr>
             <a:r>
-              <a:rPr sz="1300">
-                <a:solidFill>
-                  <a:srgbClr val="2A2A2A"/>
-                </a:solidFill>
-              </a:rPr>
-              <a:t>—  GUJSA kuralı referansların en az %30'unun güncel olmasını şart koşar — AURIS %74 ile bu eşiği fazlasıyla aşar.</a:t>
-            </a:r>
-          </a:p>
-          <a:p>
-            <a:pPr>
+              <a:rPr sz="1300" b="0" i="0">
+                <a:solidFill>
+                  <a:srgbClr val="242A30"/>
+                </a:solidFill>
+                <a:latin typeface="Calibri"/>
+              </a:rPr>
+              <a:t>—  GUJSA, referansların en az %30'unun güncel olmasını şart koşar — AURIS %74 ile bu eşiği fazlasıyla aşar.</a:t>
+            </a:r>
+          </a:p>
+          <a:p>
+            <a:pPr algn="l">
+              <a:spcBef>
+                <a:spcPts val="0"/>
+              </a:spcBef>
               <a:spcAft>
-                <a:spcPts val="900"/>
+                <a:spcPts val="1000"/>
               </a:spcAft>
             </a:pPr>
             <a:r>
-              <a:rPr sz="1300">
-                <a:solidFill>
-                  <a:srgbClr val="2A2A2A"/>
-                </a:solidFill>
-              </a:rPr>
-              <a:t>—  Tarama üç eksende yürütüldü: ses deepfake tespiti, üretken müzik sistemleri ve YZ müzik tespiti.</a:t>
-            </a:r>
-          </a:p>
-          <a:p>
-            <a:pPr>
+              <a:rPr sz="1300" b="0" i="0">
+                <a:solidFill>
+                  <a:srgbClr val="242A30"/>
+                </a:solidFill>
+                <a:latin typeface="Calibri"/>
+              </a:rPr>
+              <a:t>—  Tarama üç eksende yürütüldü: ses deepfake tespiti, üretken müzik sistemleri, YZ müzik tespiti.</a:t>
+            </a:r>
+          </a:p>
+          <a:p>
+            <a:pPr algn="l">
+              <a:spcBef>
+                <a:spcPts val="0"/>
+              </a:spcBef>
               <a:spcAft>
-                <a:spcPts val="900"/>
+                <a:spcPts val="1000"/>
               </a:spcAft>
             </a:pPr>
             <a:r>
-              <a:rPr sz="1300">
-                <a:solidFill>
-                  <a:srgbClr val="2A2A2A"/>
-                </a:solidFill>
-              </a:rPr>
-              <a:t>—  Temel bulgu: müzik için topluluk öğrenmesi + SHAP açıklanabilirliğini birleştiren çalışma literatürde eksik.</a:t>
-            </a:r>
-          </a:p>
-        </p:txBody>
-      </p:sp>
-      <p:sp>
-        <p:nvSpPr>
-          <p:cNvPr id="17" name="TextBox 16"/>
-          <p:cNvSpPr txBox="1"/>
-          <p:nvPr/>
-        </p:nvSpPr>
-        <p:spPr>
-          <a:xfrm>
-            <a:off x="365760" y="6510528"/>
-            <a:ext cx="8229600" cy="301752"/>
-          </a:xfrm>
-          <a:prstGeom prst="rect">
-            <a:avLst/>
-          </a:prstGeom>
-          <a:noFill/>
-        </p:spPr>
-        <p:txBody>
-          <a:bodyPr wrap="square">
+              <a:rPr sz="1300" b="0" i="0">
+                <a:solidFill>
+                  <a:srgbClr val="242A30"/>
+                </a:solidFill>
+                <a:latin typeface="Calibri"/>
+              </a:rPr>
+              <a:t>—  Temel bulgu: müzik için topluluk öğrenmesi + SHAP açıklanabilirliğini birleştiren çalışma eksik.</a:t>
+            </a:r>
+          </a:p>
+        </p:txBody>
+      </p:sp>
+      <p:sp>
+        <p:nvSpPr>
+          <p:cNvPr id="18" name="Rectangle 17"/>
+          <p:cNvSpPr/>
+          <p:nvPr/>
+        </p:nvSpPr>
+        <p:spPr>
+          <a:xfrm>
+            <a:off x="365760" y="6419088"/>
+            <a:ext cx="11457432" cy="10972"/>
+          </a:xfrm>
+          <a:prstGeom prst="rect">
+            <a:avLst/>
+          </a:prstGeom>
+          <a:solidFill>
+            <a:srgbClr val="D2D9E0"/>
+          </a:solidFill>
+          <a:ln>
+            <a:noFill/>
+          </a:ln>
+          <a:effectLst/>
+        </p:spPr>
+        <p:style>
+          <a:lnRef idx="1">
+            <a:schemeClr val="accent1"/>
+          </a:lnRef>
+          <a:fillRef idx="3">
+            <a:schemeClr val="accent1"/>
+          </a:fillRef>
+          <a:effectRef idx="2">
+            <a:schemeClr val="accent1"/>
+          </a:effectRef>
+          <a:fontRef idx="minor">
+            <a:schemeClr val="lt1"/>
+          </a:fontRef>
+        </p:style>
+        <p:txBody>
+          <a:bodyPr rtlCol="0" anchor="ctr"/>
+          <a:lstStyle/>
+          <a:p>
+            <a:pPr algn="ctr"/>
+          </a:p>
+        </p:txBody>
+      </p:sp>
+      <p:sp>
+        <p:nvSpPr>
+          <p:cNvPr id="19" name="TextBox 18"/>
+          <p:cNvSpPr txBox="1"/>
+          <p:nvPr/>
+        </p:nvSpPr>
+        <p:spPr>
+          <a:xfrm>
+            <a:off x="365760" y="6473952"/>
+            <a:ext cx="7772400" cy="292608"/>
+          </a:xfrm>
+          <a:prstGeom prst="rect">
+            <a:avLst/>
+          </a:prstGeom>
+          <a:noFill/>
+        </p:spPr>
+        <p:txBody>
+          <a:bodyPr wrap="square" anchor="t" lIns="25400" rIns="25400" tIns="12700" bIns="12700">
             <a:spAutoFit/>
           </a:bodyPr>
           <a:lstStyle/>
@@ -3715,32 +3829,33 @@
             <a:r>
               <a:rPr sz="900" b="0" i="0">
                 <a:solidFill>
-                  <a:srgbClr val="66707A"/>
-                </a:solidFill>
-              </a:rPr>
-              <a:t>AURIS  ·  Hasan Arthur Altuntaş  ·  BM498 Mezuniyet Tezi</a:t>
-            </a:r>
-          </a:p>
-        </p:txBody>
-      </p:sp>
-      <p:sp>
-        <p:nvSpPr>
-          <p:cNvPr id="18" name="TextBox 17"/>
-          <p:cNvSpPr txBox="1"/>
-          <p:nvPr/>
-        </p:nvSpPr>
-        <p:spPr>
-          <a:xfrm>
-            <a:off x="8595360" y="6510528"/>
-            <a:ext cx="3200400" cy="301752"/>
-          </a:xfrm>
-          <a:prstGeom prst="rect">
-            <a:avLst/>
-          </a:prstGeom>
-          <a:noFill/>
-        </p:spPr>
-        <p:txBody>
-          <a:bodyPr wrap="square">
+                  <a:srgbClr val="6A7480"/>
+                </a:solidFill>
+                <a:latin typeface="Calibri"/>
+              </a:rPr>
+              <a:t>AURIS  ·  Yapay Zekâ Üretimli Müzik Tespiti</a:t>
+            </a:r>
+          </a:p>
+        </p:txBody>
+      </p:sp>
+      <p:sp>
+        <p:nvSpPr>
+          <p:cNvPr id="20" name="TextBox 19"/>
+          <p:cNvSpPr txBox="1"/>
+          <p:nvPr/>
+        </p:nvSpPr>
+        <p:spPr>
+          <a:xfrm>
+            <a:off x="5029200" y="6473952"/>
+            <a:ext cx="6793992" cy="292608"/>
+          </a:xfrm>
+          <a:prstGeom prst="rect">
+            <a:avLst/>
+          </a:prstGeom>
+          <a:noFill/>
+        </p:spPr>
+        <p:txBody>
+          <a:bodyPr wrap="square" anchor="t" lIns="25400" rIns="25400" tIns="12700" bIns="12700">
             <a:spAutoFit/>
           </a:bodyPr>
           <a:lstStyle/>
@@ -3749,10 +3864,11 @@
             <a:r>
               <a:rPr sz="900" b="0" i="0">
                 <a:solidFill>
-                  <a:srgbClr val="66707A"/>
-                </a:solidFill>
-              </a:rPr>
-              <a:t>Düzce Üniversitesi · 2025-2026</a:t>
+                  <a:srgbClr val="6A7480"/>
+                </a:solidFill>
+                <a:latin typeface="Calibri"/>
+              </a:rPr>
+              <a:t>Hasan Arthur Altuntaş  ·  BM498  ·  Düzce Üniversitesi  ·  2025-2026</a:t>
             </a:r>
           </a:p>
         </p:txBody>
@@ -3771,7 +3887,7 @@
     <p:bg>
       <p:bgPr>
         <a:solidFill>
-          <a:srgbClr val="F4F6F8"/>
+          <a:srgbClr val="F6F8FA"/>
         </a:solidFill>
         <a:effectLst/>
       </p:bgPr>
@@ -3798,11 +3914,12 @@
             <a:avLst/>
           </a:prstGeom>
           <a:solidFill>
-            <a:srgbClr val="0D2B55"/>
+            <a:srgbClr val="102A4C"/>
           </a:solidFill>
           <a:ln>
             <a:noFill/>
           </a:ln>
+          <a:effectLst/>
         </p:spPr>
         <p:style>
           <a:lnRef idx="1">
@@ -3835,17 +3952,18 @@
         <p:spPr>
           <a:xfrm>
             <a:off x="0" y="1371600"/>
-            <a:ext cx="12188952" cy="54864"/>
+            <a:ext cx="12188952" cy="50292"/>
           </a:xfrm>
           <a:prstGeom prst="rect">
             <a:avLst/>
           </a:prstGeom>
           <a:solidFill>
-            <a:srgbClr val="E0A800"/>
+            <a:srgbClr val="D99A07"/>
           </a:solidFill>
           <a:ln>
             <a:noFill/>
           </a:ln>
+          <a:effectLst/>
         </p:spPr>
         <p:style>
           <a:lnRef idx="1">
@@ -3871,126 +3989,25 @@
       </p:sp>
       <p:sp>
         <p:nvSpPr>
-          <p:cNvPr id="4" name="TextBox 3"/>
-          <p:cNvSpPr txBox="1"/>
-          <p:nvPr/>
-        </p:nvSpPr>
-        <p:spPr>
-          <a:xfrm>
-            <a:off x="365760" y="109728"/>
-            <a:ext cx="11430000" cy="320040"/>
-          </a:xfrm>
-          <a:prstGeom prst="rect">
-            <a:avLst/>
-          </a:prstGeom>
-          <a:noFill/>
-        </p:spPr>
-        <p:txBody>
-          <a:bodyPr wrap="square">
-            <a:spAutoFit/>
-          </a:bodyPr>
-          <a:lstStyle/>
-          <a:p>
-            <a:pPr algn="l"/>
-            <a:r>
-              <a:rPr sz="1100" b="1" i="0">
-                <a:solidFill>
-                  <a:srgbClr val="E0A800"/>
-                </a:solidFill>
-              </a:rPr>
-              <a:t>ALAN 1</a:t>
-            </a:r>
-          </a:p>
-        </p:txBody>
-      </p:sp>
-      <p:sp>
-        <p:nvSpPr>
-          <p:cNvPr id="5" name="TextBox 4"/>
-          <p:cNvSpPr txBox="1"/>
-          <p:nvPr/>
-        </p:nvSpPr>
-        <p:spPr>
-          <a:xfrm>
-            <a:off x="365760" y="402336"/>
-            <a:ext cx="11430000" cy="640080"/>
-          </a:xfrm>
-          <a:prstGeom prst="rect">
-            <a:avLst/>
-          </a:prstGeom>
-          <a:noFill/>
-        </p:spPr>
-        <p:txBody>
-          <a:bodyPr wrap="square">
-            <a:spAutoFit/>
-          </a:bodyPr>
-          <a:lstStyle/>
-          <a:p>
-            <a:pPr algn="l"/>
-            <a:r>
-              <a:rPr sz="2400" b="1" i="0">
-                <a:solidFill>
-                  <a:srgbClr val="FFFFFF"/>
-                </a:solidFill>
-              </a:rPr>
-              <a:t>Ses Derin Sahte Tespiti (Audio Deepfake Detection)</a:t>
-            </a:r>
-          </a:p>
-        </p:txBody>
-      </p:sp>
-      <p:sp>
-        <p:nvSpPr>
-          <p:cNvPr id="6" name="TextBox 5"/>
-          <p:cNvSpPr txBox="1"/>
-          <p:nvPr/>
-        </p:nvSpPr>
-        <p:spPr>
-          <a:xfrm>
-            <a:off x="365760" y="987552"/>
-            <a:ext cx="11430000" cy="365760"/>
-          </a:xfrm>
-          <a:prstGeom prst="rect">
-            <a:avLst/>
-          </a:prstGeom>
-          <a:noFill/>
-        </p:spPr>
-        <p:txBody>
-          <a:bodyPr wrap="square">
-            <a:spAutoFit/>
-          </a:bodyPr>
-          <a:lstStyle/>
-          <a:p>
-            <a:pPr algn="l"/>
-            <a:r>
-              <a:rPr sz="1250" b="0" i="0">
-                <a:solidFill>
-                  <a:srgbClr val="AEC6D6"/>
-                </a:solidFill>
-              </a:rPr>
-              <a:t>GenAI müzik tespiti için en olgun komşu alan</a:t>
-            </a:r>
-          </a:p>
-        </p:txBody>
-      </p:sp>
-      <p:sp>
-        <p:nvSpPr>
-          <p:cNvPr id="7" name="Rectangle 6"/>
+          <p:cNvPr id="4" name="Rectangle 3"/>
           <p:cNvSpPr/>
           <p:nvPr/>
         </p:nvSpPr>
         <p:spPr>
           <a:xfrm>
-            <a:off x="365760" y="1600200"/>
-            <a:ext cx="2286000" cy="411480"/>
+            <a:off x="0" y="0"/>
+            <a:ext cx="164592" cy="1371600"/>
           </a:xfrm>
           <a:prstGeom prst="rect">
             <a:avLst/>
           </a:prstGeom>
           <a:solidFill>
-            <a:srgbClr val="0D2B55"/>
+            <a:srgbClr val="D99A07"/>
           </a:solidFill>
           <a:ln>
             <a:noFill/>
           </a:ln>
+          <a:effectLst/>
         </p:spPr>
         <p:style>
           <a:lnRef idx="1">
@@ -4016,58 +4033,130 @@
       </p:sp>
       <p:sp>
         <p:nvSpPr>
-          <p:cNvPr id="8" name="TextBox 7"/>
-          <p:cNvSpPr txBox="1"/>
-          <p:nvPr/>
-        </p:nvSpPr>
-        <p:spPr>
-          <a:xfrm>
-            <a:off x="438912" y="1636776"/>
-            <a:ext cx="2176272" cy="347472"/>
-          </a:xfrm>
-          <a:prstGeom prst="rect">
-            <a:avLst/>
-          </a:prstGeom>
-          <a:noFill/>
-        </p:spPr>
-        <p:txBody>
-          <a:bodyPr wrap="square">
+          <p:cNvPr id="5" name="TextBox 4"/>
+          <p:cNvSpPr txBox="1"/>
+          <p:nvPr/>
+        </p:nvSpPr>
+        <p:spPr>
+          <a:xfrm>
+            <a:off x="411480" y="146304"/>
+            <a:ext cx="10058400" cy="292608"/>
+          </a:xfrm>
+          <a:prstGeom prst="rect">
+            <a:avLst/>
+          </a:prstGeom>
+          <a:noFill/>
+        </p:spPr>
+        <p:txBody>
+          <a:bodyPr wrap="square" anchor="t" lIns="25400" rIns="25400" tIns="12700" bIns="12700">
             <a:spAutoFit/>
           </a:bodyPr>
           <a:lstStyle/>
           <a:p>
             <a:pPr algn="l"/>
             <a:r>
-              <a:rPr sz="1200" b="1" i="0">
+              <a:rPr sz="1150" b="1" i="0">
+                <a:solidFill>
+                  <a:srgbClr val="D99A07"/>
+                </a:solidFill>
+                <a:latin typeface="Calibri"/>
+              </a:rPr>
+              <a:t>ALAN 1</a:t>
+            </a:r>
+          </a:p>
+        </p:txBody>
+      </p:sp>
+      <p:sp>
+        <p:nvSpPr>
+          <p:cNvPr id="6" name="TextBox 5"/>
+          <p:cNvSpPr txBox="1"/>
+          <p:nvPr/>
+        </p:nvSpPr>
+        <p:spPr>
+          <a:xfrm>
+            <a:off x="411480" y="420624"/>
+            <a:ext cx="11338560" cy="603504"/>
+          </a:xfrm>
+          <a:prstGeom prst="rect">
+            <a:avLst/>
+          </a:prstGeom>
+          <a:noFill/>
+        </p:spPr>
+        <p:txBody>
+          <a:bodyPr wrap="square" anchor="t" lIns="25400" rIns="25400" tIns="12700" bIns="12700">
+            <a:spAutoFit/>
+          </a:bodyPr>
+          <a:lstStyle/>
+          <a:p>
+            <a:pPr algn="l"/>
+            <a:r>
+              <a:rPr sz="2300" b="1" i="0">
                 <a:solidFill>
                   <a:srgbClr val="FFFFFF"/>
                 </a:solidFill>
-              </a:rPr>
-              <a:t>Model / Çalışma</a:t>
-            </a:r>
-          </a:p>
-        </p:txBody>
-      </p:sp>
-      <p:sp>
-        <p:nvSpPr>
-          <p:cNvPr id="9" name="Rectangle 8"/>
+                <a:latin typeface="Calibri"/>
+              </a:rPr>
+              <a:t>Ses Derin Sahte Tespiti (Audio Deepfake Detection)</a:t>
+            </a:r>
+          </a:p>
+        </p:txBody>
+      </p:sp>
+      <p:sp>
+        <p:nvSpPr>
+          <p:cNvPr id="7" name="TextBox 6"/>
+          <p:cNvSpPr txBox="1"/>
+          <p:nvPr/>
+        </p:nvSpPr>
+        <p:spPr>
+          <a:xfrm>
+            <a:off x="411480" y="1024128"/>
+            <a:ext cx="11338560" cy="329184"/>
+          </a:xfrm>
+          <a:prstGeom prst="rect">
+            <a:avLst/>
+          </a:prstGeom>
+          <a:noFill/>
+        </p:spPr>
+        <p:txBody>
+          <a:bodyPr wrap="square" anchor="t" lIns="25400" rIns="25400" tIns="12700" bIns="12700">
+            <a:spAutoFit/>
+          </a:bodyPr>
+          <a:lstStyle/>
+          <a:p>
+            <a:pPr algn="l"/>
+            <a:r>
+              <a:rPr sz="1200" b="0" i="0">
+                <a:solidFill>
+                  <a:srgbClr val="ADC4D6"/>
+                </a:solidFill>
+                <a:latin typeface="Calibri"/>
+              </a:rPr>
+              <a:t>GenAI müzik tespiti için en olgun komşu alan</a:t>
+            </a:r>
+          </a:p>
+        </p:txBody>
+      </p:sp>
+      <p:sp>
+        <p:nvSpPr>
+          <p:cNvPr id="8" name="Rectangle 7"/>
           <p:cNvSpPr/>
           <p:nvPr/>
         </p:nvSpPr>
         <p:spPr>
           <a:xfrm>
-            <a:off x="2651760" y="1600200"/>
-            <a:ext cx="2011680" cy="411480"/>
+            <a:off x="365760" y="1627632"/>
+            <a:ext cx="2286000" cy="384048"/>
           </a:xfrm>
           <a:prstGeom prst="rect">
             <a:avLst/>
           </a:prstGeom>
           <a:solidFill>
-            <a:srgbClr val="0D2B55"/>
+            <a:srgbClr val="102A4C"/>
           </a:solidFill>
           <a:ln>
             <a:noFill/>
           </a:ln>
+          <a:effectLst/>
         </p:spPr>
         <p:style>
           <a:lnRef idx="1">
@@ -4093,58 +4182,60 @@
       </p:sp>
       <p:sp>
         <p:nvSpPr>
-          <p:cNvPr id="10" name="TextBox 9"/>
-          <p:cNvSpPr txBox="1"/>
-          <p:nvPr/>
-        </p:nvSpPr>
-        <p:spPr>
-          <a:xfrm>
-            <a:off x="2724912" y="1636776"/>
-            <a:ext cx="1901952" cy="347472"/>
-          </a:xfrm>
-          <a:prstGeom prst="rect">
-            <a:avLst/>
-          </a:prstGeom>
-          <a:noFill/>
-        </p:spPr>
-        <p:txBody>
-          <a:bodyPr wrap="square">
+          <p:cNvPr id="9" name="TextBox 8"/>
+          <p:cNvSpPr txBox="1"/>
+          <p:nvPr/>
+        </p:nvSpPr>
+        <p:spPr>
+          <a:xfrm>
+            <a:off x="457200" y="1627632"/>
+            <a:ext cx="2103120" cy="384048"/>
+          </a:xfrm>
+          <a:prstGeom prst="rect">
+            <a:avLst/>
+          </a:prstGeom>
+          <a:noFill/>
+        </p:spPr>
+        <p:txBody>
+          <a:bodyPr wrap="square" anchor="ctr" lIns="25400" rIns="25400" tIns="12700" bIns="12700">
             <a:spAutoFit/>
           </a:bodyPr>
           <a:lstStyle/>
           <a:p>
             <a:pPr algn="l"/>
             <a:r>
-              <a:rPr sz="1200" b="1" i="0">
+              <a:rPr sz="1150" b="1" i="0">
                 <a:solidFill>
                   <a:srgbClr val="FFFFFF"/>
                 </a:solidFill>
-              </a:rPr>
-              <a:t>Yazarlar</a:t>
-            </a:r>
-          </a:p>
-        </p:txBody>
-      </p:sp>
-      <p:sp>
-        <p:nvSpPr>
-          <p:cNvPr id="11" name="Rectangle 10"/>
+                <a:latin typeface="Calibri"/>
+              </a:rPr>
+              <a:t>Çalışma</a:t>
+            </a:r>
+          </a:p>
+        </p:txBody>
+      </p:sp>
+      <p:sp>
+        <p:nvSpPr>
+          <p:cNvPr id="10" name="Rectangle 9"/>
           <p:cNvSpPr/>
           <p:nvPr/>
         </p:nvSpPr>
         <p:spPr>
           <a:xfrm>
-            <a:off x="4663440" y="1600200"/>
-            <a:ext cx="822960" cy="411480"/>
+            <a:off x="2651760" y="1627632"/>
+            <a:ext cx="1828800" cy="384048"/>
           </a:xfrm>
           <a:prstGeom prst="rect">
             <a:avLst/>
           </a:prstGeom>
           <a:solidFill>
-            <a:srgbClr val="0D2B55"/>
+            <a:srgbClr val="102A4C"/>
           </a:solidFill>
           <a:ln>
             <a:noFill/>
           </a:ln>
+          <a:effectLst/>
         </p:spPr>
         <p:style>
           <a:lnRef idx="1">
@@ -4170,58 +4261,60 @@
       </p:sp>
       <p:sp>
         <p:nvSpPr>
-          <p:cNvPr id="12" name="TextBox 11"/>
-          <p:cNvSpPr txBox="1"/>
-          <p:nvPr/>
-        </p:nvSpPr>
-        <p:spPr>
-          <a:xfrm>
-            <a:off x="4736592" y="1636776"/>
-            <a:ext cx="713232" cy="347472"/>
-          </a:xfrm>
-          <a:prstGeom prst="rect">
-            <a:avLst/>
-          </a:prstGeom>
-          <a:noFill/>
-        </p:spPr>
-        <p:txBody>
-          <a:bodyPr wrap="square">
-            <a:spAutoFit/>
-          </a:bodyPr>
-          <a:lstStyle/>
-          <a:p>
-            <a:pPr algn="l"/>
-            <a:r>
-              <a:rPr sz="1200" b="1" i="0">
+          <p:cNvPr id="11" name="TextBox 10"/>
+          <p:cNvSpPr txBox="1"/>
+          <p:nvPr/>
+        </p:nvSpPr>
+        <p:spPr>
+          <a:xfrm>
+            <a:off x="2651760" y="1627632"/>
+            <a:ext cx="1828800" cy="384048"/>
+          </a:xfrm>
+          <a:prstGeom prst="rect">
+            <a:avLst/>
+          </a:prstGeom>
+          <a:noFill/>
+        </p:spPr>
+        <p:txBody>
+          <a:bodyPr wrap="square" anchor="ctr" lIns="25400" rIns="25400" tIns="12700" bIns="12700">
+            <a:spAutoFit/>
+          </a:bodyPr>
+          <a:lstStyle/>
+          <a:p>
+            <a:pPr algn="ctr"/>
+            <a:r>
+              <a:rPr sz="1150" b="1" i="0">
                 <a:solidFill>
                   <a:srgbClr val="FFFFFF"/>
                 </a:solidFill>
-              </a:rPr>
-              <a:t>Yıl</a:t>
-            </a:r>
-          </a:p>
-        </p:txBody>
-      </p:sp>
-      <p:sp>
-        <p:nvSpPr>
-          <p:cNvPr id="13" name="Rectangle 12"/>
+                <a:latin typeface="Calibri"/>
+              </a:rPr>
+              <a:t>Yazarlar</a:t>
+            </a:r>
+          </a:p>
+        </p:txBody>
+      </p:sp>
+      <p:sp>
+        <p:nvSpPr>
+          <p:cNvPr id="12" name="Rectangle 11"/>
           <p:cNvSpPr/>
           <p:nvPr/>
         </p:nvSpPr>
         <p:spPr>
           <a:xfrm>
-            <a:off x="5486400" y="1600200"/>
-            <a:ext cx="6309360" cy="411480"/>
+            <a:off x="4480560" y="1627632"/>
+            <a:ext cx="822960" cy="384048"/>
           </a:xfrm>
           <a:prstGeom prst="rect">
             <a:avLst/>
           </a:prstGeom>
           <a:solidFill>
-            <a:srgbClr val="0D2B55"/>
+            <a:srgbClr val="102A4C"/>
           </a:solidFill>
           <a:ln>
             <a:noFill/>
           </a:ln>
+          <a:effectLst/>
         </p:spPr>
         <p:style>
           <a:lnRef idx="1">
@@ -4247,60 +4340,60 @@
       </p:sp>
       <p:sp>
         <p:nvSpPr>
-          <p:cNvPr id="14" name="TextBox 13"/>
-          <p:cNvSpPr txBox="1"/>
-          <p:nvPr/>
-        </p:nvSpPr>
-        <p:spPr>
-          <a:xfrm>
-            <a:off x="5559552" y="1636776"/>
-            <a:ext cx="6199632" cy="347472"/>
-          </a:xfrm>
-          <a:prstGeom prst="rect">
-            <a:avLst/>
-          </a:prstGeom>
-          <a:noFill/>
-        </p:spPr>
-        <p:txBody>
-          <a:bodyPr wrap="square">
-            <a:spAutoFit/>
-          </a:bodyPr>
-          <a:lstStyle/>
-          <a:p>
-            <a:pPr algn="l"/>
-            <a:r>
-              <a:rPr sz="1200" b="1" i="0">
+          <p:cNvPr id="13" name="TextBox 12"/>
+          <p:cNvSpPr txBox="1"/>
+          <p:nvPr/>
+        </p:nvSpPr>
+        <p:spPr>
+          <a:xfrm>
+            <a:off x="4480560" y="1627632"/>
+            <a:ext cx="822960" cy="384048"/>
+          </a:xfrm>
+          <a:prstGeom prst="rect">
+            <a:avLst/>
+          </a:prstGeom>
+          <a:noFill/>
+        </p:spPr>
+        <p:txBody>
+          <a:bodyPr wrap="square" anchor="ctr" lIns="25400" rIns="25400" tIns="12700" bIns="12700">
+            <a:spAutoFit/>
+          </a:bodyPr>
+          <a:lstStyle/>
+          <a:p>
+            <a:pPr algn="ctr"/>
+            <a:r>
+              <a:rPr sz="1150" b="1" i="0">
                 <a:solidFill>
                   <a:srgbClr val="FFFFFF"/>
                 </a:solidFill>
-              </a:rPr>
-              <a:t>Yaklaşım ve Katkı</a:t>
-            </a:r>
-          </a:p>
-        </p:txBody>
-      </p:sp>
-      <p:sp>
-        <p:nvSpPr>
-          <p:cNvPr id="15" name="Rectangle 14"/>
+                <a:latin typeface="Calibri"/>
+              </a:rPr>
+              <a:t>Yıl</a:t>
+            </a:r>
+          </a:p>
+        </p:txBody>
+      </p:sp>
+      <p:sp>
+        <p:nvSpPr>
+          <p:cNvPr id="14" name="Rectangle 13"/>
           <p:cNvSpPr/>
           <p:nvPr/>
         </p:nvSpPr>
         <p:spPr>
           <a:xfrm>
-            <a:off x="365760" y="2057400"/>
-            <a:ext cx="2286000" cy="621792"/>
+            <a:off x="5303520" y="1627632"/>
+            <a:ext cx="6519672" cy="384048"/>
           </a:xfrm>
           <a:prstGeom prst="rect">
             <a:avLst/>
           </a:prstGeom>
           <a:solidFill>
-            <a:srgbClr val="FFFFFF"/>
+            <a:srgbClr val="102A4C"/>
           </a:solidFill>
-          <a:ln w="12700">
-            <a:solidFill>
-              <a:srgbClr val="D5D9DD"/>
-            </a:solidFill>
+          <a:ln>
+            <a:noFill/>
           </a:ln>
+          <a:effectLst/>
         </p:spPr>
         <p:style>
           <a:lnRef idx="1">
@@ -4326,48 +4419,49 @@
       </p:sp>
       <p:sp>
         <p:nvSpPr>
-          <p:cNvPr id="16" name="TextBox 15"/>
-          <p:cNvSpPr txBox="1"/>
-          <p:nvPr/>
-        </p:nvSpPr>
-        <p:spPr>
-          <a:xfrm>
-            <a:off x="457200" y="2130552"/>
-            <a:ext cx="2121408" cy="493776"/>
-          </a:xfrm>
-          <a:prstGeom prst="rect">
-            <a:avLst/>
-          </a:prstGeom>
-          <a:noFill/>
-        </p:spPr>
-        <p:txBody>
-          <a:bodyPr wrap="square" anchor="ctr">
-            <a:spAutoFit/>
-          </a:bodyPr>
-          <a:lstStyle/>
-          <a:p>
-            <a:pPr algn="ctr"/>
-            <a:r>
-              <a:rPr sz="1100" b="1" i="0">
-                <a:solidFill>
-                  <a:srgbClr val="2A2A2A"/>
-                </a:solidFill>
-              </a:rPr>
-              <a:t>AASIST [10]</a:t>
-            </a:r>
-          </a:p>
-        </p:txBody>
-      </p:sp>
-      <p:sp>
-        <p:nvSpPr>
-          <p:cNvPr id="17" name="Rectangle 16"/>
+          <p:cNvPr id="15" name="TextBox 14"/>
+          <p:cNvSpPr txBox="1"/>
+          <p:nvPr/>
+        </p:nvSpPr>
+        <p:spPr>
+          <a:xfrm>
+            <a:off x="5394960" y="1627632"/>
+            <a:ext cx="6336792" cy="384048"/>
+          </a:xfrm>
+          <a:prstGeom prst="rect">
+            <a:avLst/>
+          </a:prstGeom>
+          <a:noFill/>
+        </p:spPr>
+        <p:txBody>
+          <a:bodyPr wrap="square" anchor="ctr" lIns="25400" rIns="25400" tIns="12700" bIns="12700">
+            <a:spAutoFit/>
+          </a:bodyPr>
+          <a:lstStyle/>
+          <a:p>
+            <a:pPr algn="l"/>
+            <a:r>
+              <a:rPr sz="1150" b="1" i="0">
+                <a:solidFill>
+                  <a:srgbClr val="FFFFFF"/>
+                </a:solidFill>
+                <a:latin typeface="Calibri"/>
+              </a:rPr>
+              <a:t>Yaklaşım ve Katkı</a:t>
+            </a:r>
+          </a:p>
+        </p:txBody>
+      </p:sp>
+      <p:sp>
+        <p:nvSpPr>
+          <p:cNvPr id="16" name="Rectangle 15"/>
           <p:cNvSpPr/>
           <p:nvPr/>
         </p:nvSpPr>
         <p:spPr>
           <a:xfrm>
-            <a:off x="2651760" y="2057400"/>
-            <a:ext cx="2011680" cy="621792"/>
+            <a:off x="365760" y="2011680"/>
+            <a:ext cx="2286000" cy="548640"/>
           </a:xfrm>
           <a:prstGeom prst="rect">
             <a:avLst/>
@@ -4375,11 +4469,12 @@
           <a:solidFill>
             <a:srgbClr val="FFFFFF"/>
           </a:solidFill>
-          <a:ln w="12700">
+          <a:ln w="6350">
             <a:solidFill>
-              <a:srgbClr val="D5D9DD"/>
+              <a:srgbClr val="D2D9E0"/>
             </a:solidFill>
           </a:ln>
+          <a:effectLst/>
         </p:spPr>
         <p:style>
           <a:lnRef idx="1">
@@ -4405,48 +4500,49 @@
       </p:sp>
       <p:sp>
         <p:nvSpPr>
-          <p:cNvPr id="18" name="TextBox 17"/>
-          <p:cNvSpPr txBox="1"/>
-          <p:nvPr/>
-        </p:nvSpPr>
-        <p:spPr>
-          <a:xfrm>
-            <a:off x="2743200" y="2130552"/>
-            <a:ext cx="1847088" cy="493776"/>
-          </a:xfrm>
-          <a:prstGeom prst="rect">
-            <a:avLst/>
-          </a:prstGeom>
-          <a:noFill/>
-        </p:spPr>
-        <p:txBody>
-          <a:bodyPr wrap="square" anchor="ctr">
-            <a:spAutoFit/>
-          </a:bodyPr>
-          <a:lstStyle/>
-          <a:p>
-            <a:pPr algn="ctr"/>
-            <a:r>
-              <a:rPr sz="1100" b="0" i="0">
-                <a:solidFill>
-                  <a:srgbClr val="2A2A2A"/>
-                </a:solidFill>
-              </a:rPr>
-              <a:t>Jung vd.</a:t>
-            </a:r>
-          </a:p>
-        </p:txBody>
-      </p:sp>
-      <p:sp>
-        <p:nvSpPr>
-          <p:cNvPr id="19" name="Rectangle 18"/>
+          <p:cNvPr id="17" name="TextBox 16"/>
+          <p:cNvSpPr txBox="1"/>
+          <p:nvPr/>
+        </p:nvSpPr>
+        <p:spPr>
+          <a:xfrm>
+            <a:off x="457200" y="2011680"/>
+            <a:ext cx="2103120" cy="548640"/>
+          </a:xfrm>
+          <a:prstGeom prst="rect">
+            <a:avLst/>
+          </a:prstGeom>
+          <a:noFill/>
+        </p:spPr>
+        <p:txBody>
+          <a:bodyPr wrap="square" anchor="ctr" lIns="25400" rIns="25400" tIns="12700" bIns="12700">
+            <a:spAutoFit/>
+          </a:bodyPr>
+          <a:lstStyle/>
+          <a:p>
+            <a:pPr algn="l"/>
+            <a:r>
+              <a:rPr sz="1150" b="0" i="0">
+                <a:solidFill>
+                  <a:srgbClr val="242A30"/>
+                </a:solidFill>
+                <a:latin typeface="Calibri"/>
+              </a:rPr>
+              <a:t>AASIST [10]</a:t>
+            </a:r>
+          </a:p>
+        </p:txBody>
+      </p:sp>
+      <p:sp>
+        <p:nvSpPr>
+          <p:cNvPr id="18" name="Rectangle 17"/>
           <p:cNvSpPr/>
           <p:nvPr/>
         </p:nvSpPr>
         <p:spPr>
           <a:xfrm>
-            <a:off x="4663440" y="2057400"/>
-            <a:ext cx="822960" cy="621792"/>
+            <a:off x="2651760" y="2011680"/>
+            <a:ext cx="1828800" cy="548640"/>
           </a:xfrm>
           <a:prstGeom prst="rect">
             <a:avLst/>
@@ -4454,11 +4550,12 @@
           <a:solidFill>
             <a:srgbClr val="FFFFFF"/>
           </a:solidFill>
-          <a:ln w="12700">
+          <a:ln w="6350">
             <a:solidFill>
-              <a:srgbClr val="D5D9DD"/>
+              <a:srgbClr val="D2D9E0"/>
             </a:solidFill>
           </a:ln>
+          <a:effectLst/>
         </p:spPr>
         <p:style>
           <a:lnRef idx="1">
@@ -4484,48 +4581,49 @@
       </p:sp>
       <p:sp>
         <p:nvSpPr>
-          <p:cNvPr id="20" name="TextBox 19"/>
-          <p:cNvSpPr txBox="1"/>
-          <p:nvPr/>
-        </p:nvSpPr>
-        <p:spPr>
-          <a:xfrm>
-            <a:off x="4754879" y="2130552"/>
-            <a:ext cx="658368" cy="493776"/>
-          </a:xfrm>
-          <a:prstGeom prst="rect">
-            <a:avLst/>
-          </a:prstGeom>
-          <a:noFill/>
-        </p:spPr>
-        <p:txBody>
-          <a:bodyPr wrap="square" anchor="ctr">
+          <p:cNvPr id="19" name="TextBox 18"/>
+          <p:cNvSpPr txBox="1"/>
+          <p:nvPr/>
+        </p:nvSpPr>
+        <p:spPr>
+          <a:xfrm>
+            <a:off x="2679191" y="2011680"/>
+            <a:ext cx="1773936" cy="548640"/>
+          </a:xfrm>
+          <a:prstGeom prst="rect">
+            <a:avLst/>
+          </a:prstGeom>
+          <a:noFill/>
+        </p:spPr>
+        <p:txBody>
+          <a:bodyPr wrap="square" anchor="ctr" lIns="25400" rIns="25400" tIns="12700" bIns="12700">
             <a:spAutoFit/>
           </a:bodyPr>
           <a:lstStyle/>
           <a:p>
             <a:pPr algn="ctr"/>
             <a:r>
-              <a:rPr sz="1100" b="0" i="0">
-                <a:solidFill>
-                  <a:srgbClr val="2A2A2A"/>
-                </a:solidFill>
-              </a:rPr>
-              <a:t>2022</a:t>
-            </a:r>
-          </a:p>
-        </p:txBody>
-      </p:sp>
-      <p:sp>
-        <p:nvSpPr>
-          <p:cNvPr id="21" name="Rectangle 20"/>
+              <a:rPr sz="1150" b="0" i="0">
+                <a:solidFill>
+                  <a:srgbClr val="242A30"/>
+                </a:solidFill>
+                <a:latin typeface="Calibri"/>
+              </a:rPr>
+              <a:t>Jung vd.</a:t>
+            </a:r>
+          </a:p>
+        </p:txBody>
+      </p:sp>
+      <p:sp>
+        <p:nvSpPr>
+          <p:cNvPr id="20" name="Rectangle 19"/>
           <p:cNvSpPr/>
           <p:nvPr/>
         </p:nvSpPr>
         <p:spPr>
           <a:xfrm>
-            <a:off x="5486400" y="2057400"/>
-            <a:ext cx="6309360" cy="621792"/>
+            <a:off x="4480560" y="2011680"/>
+            <a:ext cx="822960" cy="548640"/>
           </a:xfrm>
           <a:prstGeom prst="rect">
             <a:avLst/>
@@ -4533,11 +4631,12 @@
           <a:solidFill>
             <a:srgbClr val="FFFFFF"/>
           </a:solidFill>
-          <a:ln w="12700">
+          <a:ln w="6350">
             <a:solidFill>
-              <a:srgbClr val="D5D9DD"/>
+              <a:srgbClr val="D2D9E0"/>
             </a:solidFill>
           </a:ln>
+          <a:effectLst/>
         </p:spPr>
         <p:style>
           <a:lnRef idx="1">
@@ -4563,60 +4662,62 @@
       </p:sp>
       <p:sp>
         <p:nvSpPr>
-          <p:cNvPr id="22" name="TextBox 21"/>
-          <p:cNvSpPr txBox="1"/>
-          <p:nvPr/>
-        </p:nvSpPr>
-        <p:spPr>
-          <a:xfrm>
-            <a:off x="5577840" y="2130552"/>
-            <a:ext cx="6144768" cy="493776"/>
-          </a:xfrm>
-          <a:prstGeom prst="rect">
-            <a:avLst/>
-          </a:prstGeom>
-          <a:noFill/>
-        </p:spPr>
-        <p:txBody>
-          <a:bodyPr wrap="square" anchor="ctr">
-            <a:spAutoFit/>
-          </a:bodyPr>
-          <a:lstStyle/>
-          <a:p>
-            <a:pPr algn="l"/>
-            <a:r>
-              <a:rPr sz="1100" b="0" i="0">
-                <a:solidFill>
-                  <a:srgbClr val="2A2A2A"/>
-                </a:solidFill>
-              </a:rPr>
-              <a:t>Bütünleşik spektro-temporal graf dikkat ağı; ASVspoof 2019'da güçlü sonuç</a:t>
-            </a:r>
-          </a:p>
-        </p:txBody>
-      </p:sp>
-      <p:sp>
-        <p:nvSpPr>
-          <p:cNvPr id="23" name="Rectangle 22"/>
+          <p:cNvPr id="21" name="TextBox 20"/>
+          <p:cNvSpPr txBox="1"/>
+          <p:nvPr/>
+        </p:nvSpPr>
+        <p:spPr>
+          <a:xfrm>
+            <a:off x="4507992" y="2011680"/>
+            <a:ext cx="768096" cy="548640"/>
+          </a:xfrm>
+          <a:prstGeom prst="rect">
+            <a:avLst/>
+          </a:prstGeom>
+          <a:noFill/>
+        </p:spPr>
+        <p:txBody>
+          <a:bodyPr wrap="square" anchor="ctr" lIns="25400" rIns="25400" tIns="12700" bIns="12700">
+            <a:spAutoFit/>
+          </a:bodyPr>
+          <a:lstStyle/>
+          <a:p>
+            <a:pPr algn="ctr"/>
+            <a:r>
+              <a:rPr sz="1150" b="0" i="0">
+                <a:solidFill>
+                  <a:srgbClr val="242A30"/>
+                </a:solidFill>
+                <a:latin typeface="Calibri"/>
+              </a:rPr>
+              <a:t>2022</a:t>
+            </a:r>
+          </a:p>
+        </p:txBody>
+      </p:sp>
+      <p:sp>
+        <p:nvSpPr>
+          <p:cNvPr id="22" name="Rectangle 21"/>
           <p:cNvSpPr/>
           <p:nvPr/>
         </p:nvSpPr>
         <p:spPr>
           <a:xfrm>
-            <a:off x="365760" y="2734056"/>
-            <a:ext cx="2286000" cy="621792"/>
+            <a:off x="5303520" y="2011680"/>
+            <a:ext cx="6519672" cy="548640"/>
           </a:xfrm>
           <a:prstGeom prst="rect">
             <a:avLst/>
           </a:prstGeom>
           <a:solidFill>
-            <a:srgbClr val="E8ECF0"/>
+            <a:srgbClr val="FFFFFF"/>
           </a:solidFill>
-          <a:ln w="12700">
+          <a:ln w="6350">
             <a:solidFill>
-              <a:srgbClr val="D5D9DD"/>
+              <a:srgbClr val="D2D9E0"/>
             </a:solidFill>
           </a:ln>
+          <a:effectLst/>
         </p:spPr>
         <p:style>
           <a:lnRef idx="1">
@@ -4642,60 +4743,62 @@
       </p:sp>
       <p:sp>
         <p:nvSpPr>
-          <p:cNvPr id="24" name="TextBox 23"/>
-          <p:cNvSpPr txBox="1"/>
-          <p:nvPr/>
-        </p:nvSpPr>
-        <p:spPr>
-          <a:xfrm>
-            <a:off x="457200" y="2807208"/>
-            <a:ext cx="2121408" cy="493776"/>
-          </a:xfrm>
-          <a:prstGeom prst="rect">
-            <a:avLst/>
-          </a:prstGeom>
-          <a:noFill/>
-        </p:spPr>
-        <p:txBody>
-          <a:bodyPr wrap="square" anchor="ctr">
-            <a:spAutoFit/>
-          </a:bodyPr>
-          <a:lstStyle/>
-          <a:p>
-            <a:pPr algn="ctr"/>
-            <a:r>
-              <a:rPr sz="1100" b="1" i="0">
-                <a:solidFill>
-                  <a:srgbClr val="2A2A2A"/>
-                </a:solidFill>
-              </a:rPr>
-              <a:t>RawNet2 [11]</a:t>
-            </a:r>
-          </a:p>
-        </p:txBody>
-      </p:sp>
-      <p:sp>
-        <p:nvSpPr>
-          <p:cNvPr id="25" name="Rectangle 24"/>
+          <p:cNvPr id="23" name="TextBox 22"/>
+          <p:cNvSpPr txBox="1"/>
+          <p:nvPr/>
+        </p:nvSpPr>
+        <p:spPr>
+          <a:xfrm>
+            <a:off x="5394960" y="2011680"/>
+            <a:ext cx="6336792" cy="548640"/>
+          </a:xfrm>
+          <a:prstGeom prst="rect">
+            <a:avLst/>
+          </a:prstGeom>
+          <a:noFill/>
+        </p:spPr>
+        <p:txBody>
+          <a:bodyPr wrap="square" anchor="ctr" lIns="25400" rIns="25400" tIns="12700" bIns="12700">
+            <a:spAutoFit/>
+          </a:bodyPr>
+          <a:lstStyle/>
+          <a:p>
+            <a:pPr algn="l"/>
+            <a:r>
+              <a:rPr sz="1150" b="0" i="0">
+                <a:solidFill>
+                  <a:srgbClr val="242A30"/>
+                </a:solidFill>
+                <a:latin typeface="Calibri"/>
+              </a:rPr>
+              <a:t>Bütünleşik spektro-temporal graf dikkat ağı</a:t>
+            </a:r>
+          </a:p>
+        </p:txBody>
+      </p:sp>
+      <p:sp>
+        <p:nvSpPr>
+          <p:cNvPr id="24" name="Rectangle 23"/>
           <p:cNvSpPr/>
           <p:nvPr/>
         </p:nvSpPr>
         <p:spPr>
           <a:xfrm>
-            <a:off x="2651760" y="2734056"/>
-            <a:ext cx="2011680" cy="621792"/>
+            <a:off x="365760" y="2560320"/>
+            <a:ext cx="2286000" cy="548640"/>
           </a:xfrm>
           <a:prstGeom prst="rect">
             <a:avLst/>
           </a:prstGeom>
           <a:solidFill>
-            <a:srgbClr val="E8ECF0"/>
+            <a:srgbClr val="EAEEF2"/>
           </a:solidFill>
-          <a:ln w="12700">
+          <a:ln w="6350">
             <a:solidFill>
-              <a:srgbClr val="D5D9DD"/>
+              <a:srgbClr val="D2D9E0"/>
             </a:solidFill>
           </a:ln>
+          <a:effectLst/>
         </p:spPr>
         <p:style>
           <a:lnRef idx="1">
@@ -4721,60 +4824,62 @@
       </p:sp>
       <p:sp>
         <p:nvSpPr>
-          <p:cNvPr id="26" name="TextBox 25"/>
-          <p:cNvSpPr txBox="1"/>
-          <p:nvPr/>
-        </p:nvSpPr>
-        <p:spPr>
-          <a:xfrm>
-            <a:off x="2743200" y="2807208"/>
-            <a:ext cx="1847088" cy="493776"/>
-          </a:xfrm>
-          <a:prstGeom prst="rect">
-            <a:avLst/>
-          </a:prstGeom>
-          <a:noFill/>
-        </p:spPr>
-        <p:txBody>
-          <a:bodyPr wrap="square" anchor="ctr">
-            <a:spAutoFit/>
-          </a:bodyPr>
-          <a:lstStyle/>
-          <a:p>
-            <a:pPr algn="ctr"/>
-            <a:r>
-              <a:rPr sz="1100" b="0" i="0">
-                <a:solidFill>
-                  <a:srgbClr val="2A2A2A"/>
-                </a:solidFill>
-              </a:rPr>
-              <a:t>Tak vd.</a:t>
-            </a:r>
-          </a:p>
-        </p:txBody>
-      </p:sp>
-      <p:sp>
-        <p:nvSpPr>
-          <p:cNvPr id="27" name="Rectangle 26"/>
+          <p:cNvPr id="25" name="TextBox 24"/>
+          <p:cNvSpPr txBox="1"/>
+          <p:nvPr/>
+        </p:nvSpPr>
+        <p:spPr>
+          <a:xfrm>
+            <a:off x="457200" y="2560320"/>
+            <a:ext cx="2103120" cy="548640"/>
+          </a:xfrm>
+          <a:prstGeom prst="rect">
+            <a:avLst/>
+          </a:prstGeom>
+          <a:noFill/>
+        </p:spPr>
+        <p:txBody>
+          <a:bodyPr wrap="square" anchor="ctr" lIns="25400" rIns="25400" tIns="12700" bIns="12700">
+            <a:spAutoFit/>
+          </a:bodyPr>
+          <a:lstStyle/>
+          <a:p>
+            <a:pPr algn="l"/>
+            <a:r>
+              <a:rPr sz="1150" b="0" i="0">
+                <a:solidFill>
+                  <a:srgbClr val="242A30"/>
+                </a:solidFill>
+                <a:latin typeface="Calibri"/>
+              </a:rPr>
+              <a:t>RawNet2 [11]</a:t>
+            </a:r>
+          </a:p>
+        </p:txBody>
+      </p:sp>
+      <p:sp>
+        <p:nvSpPr>
+          <p:cNvPr id="26" name="Rectangle 25"/>
           <p:cNvSpPr/>
           <p:nvPr/>
         </p:nvSpPr>
         <p:spPr>
           <a:xfrm>
-            <a:off x="4663440" y="2734056"/>
-            <a:ext cx="822960" cy="621792"/>
+            <a:off x="2651760" y="2560320"/>
+            <a:ext cx="1828800" cy="548640"/>
           </a:xfrm>
           <a:prstGeom prst="rect">
             <a:avLst/>
           </a:prstGeom>
           <a:solidFill>
-            <a:srgbClr val="E8ECF0"/>
+            <a:srgbClr val="EAEEF2"/>
           </a:solidFill>
-          <a:ln w="12700">
+          <a:ln w="6350">
             <a:solidFill>
-              <a:srgbClr val="D5D9DD"/>
+              <a:srgbClr val="D2D9E0"/>
             </a:solidFill>
           </a:ln>
+          <a:effectLst/>
         </p:spPr>
         <p:style>
           <a:lnRef idx="1">
@@ -4800,60 +4905,62 @@
       </p:sp>
       <p:sp>
         <p:nvSpPr>
-          <p:cNvPr id="28" name="TextBox 27"/>
-          <p:cNvSpPr txBox="1"/>
-          <p:nvPr/>
-        </p:nvSpPr>
-        <p:spPr>
-          <a:xfrm>
-            <a:off x="4754879" y="2807208"/>
-            <a:ext cx="658368" cy="493776"/>
-          </a:xfrm>
-          <a:prstGeom prst="rect">
-            <a:avLst/>
-          </a:prstGeom>
-          <a:noFill/>
-        </p:spPr>
-        <p:txBody>
-          <a:bodyPr wrap="square" anchor="ctr">
+          <p:cNvPr id="27" name="TextBox 26"/>
+          <p:cNvSpPr txBox="1"/>
+          <p:nvPr/>
+        </p:nvSpPr>
+        <p:spPr>
+          <a:xfrm>
+            <a:off x="2679191" y="2560320"/>
+            <a:ext cx="1773936" cy="548640"/>
+          </a:xfrm>
+          <a:prstGeom prst="rect">
+            <a:avLst/>
+          </a:prstGeom>
+          <a:noFill/>
+        </p:spPr>
+        <p:txBody>
+          <a:bodyPr wrap="square" anchor="ctr" lIns="25400" rIns="25400" tIns="12700" bIns="12700">
             <a:spAutoFit/>
           </a:bodyPr>
           <a:lstStyle/>
           <a:p>
             <a:pPr algn="ctr"/>
             <a:r>
-              <a:rPr sz="1100" b="0" i="0">
-                <a:solidFill>
-                  <a:srgbClr val="2A2A2A"/>
-                </a:solidFill>
-              </a:rPr>
-              <a:t>2021</a:t>
-            </a:r>
-          </a:p>
-        </p:txBody>
-      </p:sp>
-      <p:sp>
-        <p:nvSpPr>
-          <p:cNvPr id="29" name="Rectangle 28"/>
+              <a:rPr sz="1150" b="0" i="0">
+                <a:solidFill>
+                  <a:srgbClr val="242A30"/>
+                </a:solidFill>
+                <a:latin typeface="Calibri"/>
+              </a:rPr>
+              <a:t>Tak vd.</a:t>
+            </a:r>
+          </a:p>
+        </p:txBody>
+      </p:sp>
+      <p:sp>
+        <p:nvSpPr>
+          <p:cNvPr id="28" name="Rectangle 27"/>
           <p:cNvSpPr/>
           <p:nvPr/>
         </p:nvSpPr>
         <p:spPr>
           <a:xfrm>
-            <a:off x="5486400" y="2734056"/>
-            <a:ext cx="6309360" cy="621792"/>
+            <a:off x="4480560" y="2560320"/>
+            <a:ext cx="822960" cy="548640"/>
           </a:xfrm>
           <a:prstGeom prst="rect">
             <a:avLst/>
           </a:prstGeom>
           <a:solidFill>
-            <a:srgbClr val="E8ECF0"/>
+            <a:srgbClr val="EAEEF2"/>
           </a:solidFill>
-          <a:ln w="12700">
+          <a:ln w="6350">
             <a:solidFill>
-              <a:srgbClr val="D5D9DD"/>
+              <a:srgbClr val="D2D9E0"/>
             </a:solidFill>
           </a:ln>
+          <a:effectLst/>
         </p:spPr>
         <p:style>
           <a:lnRef idx="1">
@@ -4879,60 +4986,62 @@
       </p:sp>
       <p:sp>
         <p:nvSpPr>
-          <p:cNvPr id="30" name="TextBox 29"/>
-          <p:cNvSpPr txBox="1"/>
-          <p:nvPr/>
-        </p:nvSpPr>
-        <p:spPr>
-          <a:xfrm>
-            <a:off x="5577840" y="2807208"/>
-            <a:ext cx="6144768" cy="493776"/>
-          </a:xfrm>
-          <a:prstGeom prst="rect">
-            <a:avLst/>
-          </a:prstGeom>
-          <a:noFill/>
-        </p:spPr>
-        <p:txBody>
-          <a:bodyPr wrap="square" anchor="ctr">
-            <a:spAutoFit/>
-          </a:bodyPr>
-          <a:lstStyle/>
-          <a:p>
-            <a:pPr algn="l"/>
-            <a:r>
-              <a:rPr sz="1100" b="0" i="0">
-                <a:solidFill>
-                  <a:srgbClr val="2A2A2A"/>
-                </a:solidFill>
-              </a:rPr>
-              <a:t>Ham dalga formundan uçtan uca öğrenme; öznitelik mühendisliği gerektirmez</a:t>
-            </a:r>
-          </a:p>
-        </p:txBody>
-      </p:sp>
-      <p:sp>
-        <p:nvSpPr>
-          <p:cNvPr id="31" name="Rectangle 30"/>
+          <p:cNvPr id="29" name="TextBox 28"/>
+          <p:cNvSpPr txBox="1"/>
+          <p:nvPr/>
+        </p:nvSpPr>
+        <p:spPr>
+          <a:xfrm>
+            <a:off x="4507992" y="2560320"/>
+            <a:ext cx="768096" cy="548640"/>
+          </a:xfrm>
+          <a:prstGeom prst="rect">
+            <a:avLst/>
+          </a:prstGeom>
+          <a:noFill/>
+        </p:spPr>
+        <p:txBody>
+          <a:bodyPr wrap="square" anchor="ctr" lIns="25400" rIns="25400" tIns="12700" bIns="12700">
+            <a:spAutoFit/>
+          </a:bodyPr>
+          <a:lstStyle/>
+          <a:p>
+            <a:pPr algn="ctr"/>
+            <a:r>
+              <a:rPr sz="1150" b="0" i="0">
+                <a:solidFill>
+                  <a:srgbClr val="242A30"/>
+                </a:solidFill>
+                <a:latin typeface="Calibri"/>
+              </a:rPr>
+              <a:t>2021</a:t>
+            </a:r>
+          </a:p>
+        </p:txBody>
+      </p:sp>
+      <p:sp>
+        <p:nvSpPr>
+          <p:cNvPr id="30" name="Rectangle 29"/>
           <p:cNvSpPr/>
           <p:nvPr/>
         </p:nvSpPr>
         <p:spPr>
           <a:xfrm>
-            <a:off x="365760" y="3410712"/>
-            <a:ext cx="2286000" cy="621792"/>
+            <a:off x="5303520" y="2560320"/>
+            <a:ext cx="6519672" cy="548640"/>
           </a:xfrm>
           <a:prstGeom prst="rect">
             <a:avLst/>
           </a:prstGeom>
           <a:solidFill>
-            <a:srgbClr val="FFFFFF"/>
+            <a:srgbClr val="EAEEF2"/>
           </a:solidFill>
-          <a:ln w="12700">
+          <a:ln w="6350">
             <a:solidFill>
-              <a:srgbClr val="D5D9DD"/>
+              <a:srgbClr val="D2D9E0"/>
             </a:solidFill>
           </a:ln>
+          <a:effectLst/>
         </p:spPr>
         <p:style>
           <a:lnRef idx="1">
@@ -4958,48 +5067,49 @@
       </p:sp>
       <p:sp>
         <p:nvSpPr>
-          <p:cNvPr id="32" name="TextBox 31"/>
-          <p:cNvSpPr txBox="1"/>
-          <p:nvPr/>
-        </p:nvSpPr>
-        <p:spPr>
-          <a:xfrm>
-            <a:off x="457200" y="3483864"/>
-            <a:ext cx="2121408" cy="493776"/>
-          </a:xfrm>
-          <a:prstGeom prst="rect">
-            <a:avLst/>
-          </a:prstGeom>
-          <a:noFill/>
-        </p:spPr>
-        <p:txBody>
-          <a:bodyPr wrap="square" anchor="ctr">
-            <a:spAutoFit/>
-          </a:bodyPr>
-          <a:lstStyle/>
-          <a:p>
-            <a:pPr algn="ctr"/>
-            <a:r>
-              <a:rPr sz="1100" b="1" i="0">
-                <a:solidFill>
-                  <a:srgbClr val="2A2A2A"/>
-                </a:solidFill>
-              </a:rPr>
-              <a:t>wav2vec 2.0 [13]</a:t>
-            </a:r>
-          </a:p>
-        </p:txBody>
-      </p:sp>
-      <p:sp>
-        <p:nvSpPr>
-          <p:cNvPr id="33" name="Rectangle 32"/>
+          <p:cNvPr id="31" name="TextBox 30"/>
+          <p:cNvSpPr txBox="1"/>
+          <p:nvPr/>
+        </p:nvSpPr>
+        <p:spPr>
+          <a:xfrm>
+            <a:off x="5394960" y="2560320"/>
+            <a:ext cx="6336792" cy="548640"/>
+          </a:xfrm>
+          <a:prstGeom prst="rect">
+            <a:avLst/>
+          </a:prstGeom>
+          <a:noFill/>
+        </p:spPr>
+        <p:txBody>
+          <a:bodyPr wrap="square" anchor="ctr" lIns="25400" rIns="25400" tIns="12700" bIns="12700">
+            <a:spAutoFit/>
+          </a:bodyPr>
+          <a:lstStyle/>
+          <a:p>
+            <a:pPr algn="l"/>
+            <a:r>
+              <a:rPr sz="1150" b="0" i="0">
+                <a:solidFill>
+                  <a:srgbClr val="242A30"/>
+                </a:solidFill>
+                <a:latin typeface="Calibri"/>
+              </a:rPr>
+              <a:t>Ham dalga formundan uçtan uca öğrenme</a:t>
+            </a:r>
+          </a:p>
+        </p:txBody>
+      </p:sp>
+      <p:sp>
+        <p:nvSpPr>
+          <p:cNvPr id="32" name="Rectangle 31"/>
           <p:cNvSpPr/>
           <p:nvPr/>
         </p:nvSpPr>
         <p:spPr>
           <a:xfrm>
-            <a:off x="2651760" y="3410712"/>
-            <a:ext cx="2011680" cy="621792"/>
+            <a:off x="365760" y="3108960"/>
+            <a:ext cx="2286000" cy="548640"/>
           </a:xfrm>
           <a:prstGeom prst="rect">
             <a:avLst/>
@@ -5007,11 +5117,12 @@
           <a:solidFill>
             <a:srgbClr val="FFFFFF"/>
           </a:solidFill>
-          <a:ln w="12700">
+          <a:ln w="6350">
             <a:solidFill>
-              <a:srgbClr val="D5D9DD"/>
+              <a:srgbClr val="D2D9E0"/>
             </a:solidFill>
           </a:ln>
+          <a:effectLst/>
         </p:spPr>
         <p:style>
           <a:lnRef idx="1">
@@ -5037,48 +5148,49 @@
       </p:sp>
       <p:sp>
         <p:nvSpPr>
-          <p:cNvPr id="34" name="TextBox 33"/>
-          <p:cNvSpPr txBox="1"/>
-          <p:nvPr/>
-        </p:nvSpPr>
-        <p:spPr>
-          <a:xfrm>
-            <a:off x="2743200" y="3483864"/>
-            <a:ext cx="1847088" cy="493776"/>
-          </a:xfrm>
-          <a:prstGeom prst="rect">
-            <a:avLst/>
-          </a:prstGeom>
-          <a:noFill/>
-        </p:spPr>
-        <p:txBody>
-          <a:bodyPr wrap="square" anchor="ctr">
-            <a:spAutoFit/>
-          </a:bodyPr>
-          <a:lstStyle/>
-          <a:p>
-            <a:pPr algn="ctr"/>
-            <a:r>
-              <a:rPr sz="1100" b="0" i="0">
-                <a:solidFill>
-                  <a:srgbClr val="2A2A2A"/>
-                </a:solidFill>
-              </a:rPr>
-              <a:t>Baevski vd.</a:t>
-            </a:r>
-          </a:p>
-        </p:txBody>
-      </p:sp>
-      <p:sp>
-        <p:nvSpPr>
-          <p:cNvPr id="35" name="Rectangle 34"/>
+          <p:cNvPr id="33" name="TextBox 32"/>
+          <p:cNvSpPr txBox="1"/>
+          <p:nvPr/>
+        </p:nvSpPr>
+        <p:spPr>
+          <a:xfrm>
+            <a:off x="457200" y="3108960"/>
+            <a:ext cx="2103120" cy="548640"/>
+          </a:xfrm>
+          <a:prstGeom prst="rect">
+            <a:avLst/>
+          </a:prstGeom>
+          <a:noFill/>
+        </p:spPr>
+        <p:txBody>
+          <a:bodyPr wrap="square" anchor="ctr" lIns="25400" rIns="25400" tIns="12700" bIns="12700">
+            <a:spAutoFit/>
+          </a:bodyPr>
+          <a:lstStyle/>
+          <a:p>
+            <a:pPr algn="l"/>
+            <a:r>
+              <a:rPr sz="1150" b="0" i="0">
+                <a:solidFill>
+                  <a:srgbClr val="242A30"/>
+                </a:solidFill>
+                <a:latin typeface="Calibri"/>
+              </a:rPr>
+              <a:t>wav2vec 2.0 [13]</a:t>
+            </a:r>
+          </a:p>
+        </p:txBody>
+      </p:sp>
+      <p:sp>
+        <p:nvSpPr>
+          <p:cNvPr id="34" name="Rectangle 33"/>
           <p:cNvSpPr/>
           <p:nvPr/>
         </p:nvSpPr>
         <p:spPr>
           <a:xfrm>
-            <a:off x="4663440" y="3410712"/>
-            <a:ext cx="822960" cy="621792"/>
+            <a:off x="2651760" y="3108960"/>
+            <a:ext cx="1828800" cy="548640"/>
           </a:xfrm>
           <a:prstGeom prst="rect">
             <a:avLst/>
@@ -5086,11 +5198,12 @@
           <a:solidFill>
             <a:srgbClr val="FFFFFF"/>
           </a:solidFill>
-          <a:ln w="12700">
+          <a:ln w="6350">
             <a:solidFill>
-              <a:srgbClr val="D5D9DD"/>
+              <a:srgbClr val="D2D9E0"/>
             </a:solidFill>
           </a:ln>
+          <a:effectLst/>
         </p:spPr>
         <p:style>
           <a:lnRef idx="1">
@@ -5116,48 +5229,49 @@
       </p:sp>
       <p:sp>
         <p:nvSpPr>
-          <p:cNvPr id="36" name="TextBox 35"/>
-          <p:cNvSpPr txBox="1"/>
-          <p:nvPr/>
-        </p:nvSpPr>
-        <p:spPr>
-          <a:xfrm>
-            <a:off x="4754879" y="3483864"/>
-            <a:ext cx="658368" cy="493776"/>
-          </a:xfrm>
-          <a:prstGeom prst="rect">
-            <a:avLst/>
-          </a:prstGeom>
-          <a:noFill/>
-        </p:spPr>
-        <p:txBody>
-          <a:bodyPr wrap="square" anchor="ctr">
+          <p:cNvPr id="35" name="TextBox 34"/>
+          <p:cNvSpPr txBox="1"/>
+          <p:nvPr/>
+        </p:nvSpPr>
+        <p:spPr>
+          <a:xfrm>
+            <a:off x="2679191" y="3108960"/>
+            <a:ext cx="1773936" cy="548640"/>
+          </a:xfrm>
+          <a:prstGeom prst="rect">
+            <a:avLst/>
+          </a:prstGeom>
+          <a:noFill/>
+        </p:spPr>
+        <p:txBody>
+          <a:bodyPr wrap="square" anchor="ctr" lIns="25400" rIns="25400" tIns="12700" bIns="12700">
             <a:spAutoFit/>
           </a:bodyPr>
           <a:lstStyle/>
           <a:p>
             <a:pPr algn="ctr"/>
             <a:r>
-              <a:rPr sz="1100" b="0" i="0">
-                <a:solidFill>
-                  <a:srgbClr val="2A2A2A"/>
-                </a:solidFill>
-              </a:rPr>
-              <a:t>2020</a:t>
-            </a:r>
-          </a:p>
-        </p:txBody>
-      </p:sp>
-      <p:sp>
-        <p:nvSpPr>
-          <p:cNvPr id="37" name="Rectangle 36"/>
+              <a:rPr sz="1150" b="0" i="0">
+                <a:solidFill>
+                  <a:srgbClr val="242A30"/>
+                </a:solidFill>
+                <a:latin typeface="Calibri"/>
+              </a:rPr>
+              <a:t>Baevski vd.</a:t>
+            </a:r>
+          </a:p>
+        </p:txBody>
+      </p:sp>
+      <p:sp>
+        <p:nvSpPr>
+          <p:cNvPr id="36" name="Rectangle 35"/>
           <p:cNvSpPr/>
           <p:nvPr/>
         </p:nvSpPr>
         <p:spPr>
           <a:xfrm>
-            <a:off x="5486400" y="3410712"/>
-            <a:ext cx="6309360" cy="621792"/>
+            <a:off x="4480560" y="3108960"/>
+            <a:ext cx="822960" cy="548640"/>
           </a:xfrm>
           <a:prstGeom prst="rect">
             <a:avLst/>
@@ -5165,11 +5279,12 @@
           <a:solidFill>
             <a:srgbClr val="FFFFFF"/>
           </a:solidFill>
-          <a:ln w="12700">
+          <a:ln w="6350">
             <a:solidFill>
-              <a:srgbClr val="D5D9DD"/>
+              <a:srgbClr val="D2D9E0"/>
             </a:solidFill>
           </a:ln>
+          <a:effectLst/>
         </p:spPr>
         <p:style>
           <a:lnRef idx="1">
@@ -5195,60 +5310,62 @@
       </p:sp>
       <p:sp>
         <p:nvSpPr>
-          <p:cNvPr id="38" name="TextBox 37"/>
-          <p:cNvSpPr txBox="1"/>
-          <p:nvPr/>
-        </p:nvSpPr>
-        <p:spPr>
-          <a:xfrm>
-            <a:off x="5577840" y="3483864"/>
-            <a:ext cx="6144768" cy="493776"/>
-          </a:xfrm>
-          <a:prstGeom prst="rect">
-            <a:avLst/>
-          </a:prstGeom>
-          <a:noFill/>
-        </p:spPr>
-        <p:txBody>
-          <a:bodyPr wrap="square" anchor="ctr">
-            <a:spAutoFit/>
-          </a:bodyPr>
-          <a:lstStyle/>
-          <a:p>
-            <a:pPr algn="l"/>
-            <a:r>
-              <a:rPr sz="1100" b="0" i="0">
-                <a:solidFill>
-                  <a:srgbClr val="2A2A2A"/>
-                </a:solidFill>
-              </a:rPr>
-              <a:t>Öz-denetimli ses temsili; transfer öğrenme için güçlü taban</a:t>
-            </a:r>
-          </a:p>
-        </p:txBody>
-      </p:sp>
-      <p:sp>
-        <p:nvSpPr>
-          <p:cNvPr id="39" name="Rectangle 38"/>
+          <p:cNvPr id="37" name="TextBox 36"/>
+          <p:cNvSpPr txBox="1"/>
+          <p:nvPr/>
+        </p:nvSpPr>
+        <p:spPr>
+          <a:xfrm>
+            <a:off x="4507992" y="3108960"/>
+            <a:ext cx="768096" cy="548640"/>
+          </a:xfrm>
+          <a:prstGeom prst="rect">
+            <a:avLst/>
+          </a:prstGeom>
+          <a:noFill/>
+        </p:spPr>
+        <p:txBody>
+          <a:bodyPr wrap="square" anchor="ctr" lIns="25400" rIns="25400" tIns="12700" bIns="12700">
+            <a:spAutoFit/>
+          </a:bodyPr>
+          <a:lstStyle/>
+          <a:p>
+            <a:pPr algn="ctr"/>
+            <a:r>
+              <a:rPr sz="1150" b="0" i="0">
+                <a:solidFill>
+                  <a:srgbClr val="242A30"/>
+                </a:solidFill>
+                <a:latin typeface="Calibri"/>
+              </a:rPr>
+              <a:t>2020</a:t>
+            </a:r>
+          </a:p>
+        </p:txBody>
+      </p:sp>
+      <p:sp>
+        <p:nvSpPr>
+          <p:cNvPr id="38" name="Rectangle 37"/>
           <p:cNvSpPr/>
           <p:nvPr/>
         </p:nvSpPr>
         <p:spPr>
           <a:xfrm>
-            <a:off x="365760" y="4087368"/>
-            <a:ext cx="2286000" cy="621792"/>
+            <a:off x="5303520" y="3108960"/>
+            <a:ext cx="6519672" cy="548640"/>
           </a:xfrm>
           <a:prstGeom prst="rect">
             <a:avLst/>
           </a:prstGeom>
           <a:solidFill>
-            <a:srgbClr val="E8ECF0"/>
+            <a:srgbClr val="FFFFFF"/>
           </a:solidFill>
-          <a:ln w="12700">
+          <a:ln w="6350">
             <a:solidFill>
-              <a:srgbClr val="D5D9DD"/>
+              <a:srgbClr val="D2D9E0"/>
             </a:solidFill>
           </a:ln>
+          <a:effectLst/>
         </p:spPr>
         <p:style>
           <a:lnRef idx="1">
@@ -5274,60 +5391,62 @@
       </p:sp>
       <p:sp>
         <p:nvSpPr>
-          <p:cNvPr id="40" name="TextBox 39"/>
-          <p:cNvSpPr txBox="1"/>
-          <p:nvPr/>
-        </p:nvSpPr>
-        <p:spPr>
-          <a:xfrm>
-            <a:off x="457200" y="4160520"/>
-            <a:ext cx="2121408" cy="493776"/>
-          </a:xfrm>
-          <a:prstGeom prst="rect">
-            <a:avLst/>
-          </a:prstGeom>
-          <a:noFill/>
-        </p:spPr>
-        <p:txBody>
-          <a:bodyPr wrap="square" anchor="ctr">
-            <a:spAutoFit/>
-          </a:bodyPr>
-          <a:lstStyle/>
-          <a:p>
-            <a:pPr algn="ctr"/>
-            <a:r>
-              <a:rPr sz="1100" b="1" i="0">
-                <a:solidFill>
-                  <a:srgbClr val="2A2A2A"/>
-                </a:solidFill>
-              </a:rPr>
-              <a:t>WavLM [15]</a:t>
-            </a:r>
-          </a:p>
-        </p:txBody>
-      </p:sp>
-      <p:sp>
-        <p:nvSpPr>
-          <p:cNvPr id="41" name="Rectangle 40"/>
+          <p:cNvPr id="39" name="TextBox 38"/>
+          <p:cNvSpPr txBox="1"/>
+          <p:nvPr/>
+        </p:nvSpPr>
+        <p:spPr>
+          <a:xfrm>
+            <a:off x="5394960" y="3108960"/>
+            <a:ext cx="6336792" cy="548640"/>
+          </a:xfrm>
+          <a:prstGeom prst="rect">
+            <a:avLst/>
+          </a:prstGeom>
+          <a:noFill/>
+        </p:spPr>
+        <p:txBody>
+          <a:bodyPr wrap="square" anchor="ctr" lIns="25400" rIns="25400" tIns="12700" bIns="12700">
+            <a:spAutoFit/>
+          </a:bodyPr>
+          <a:lstStyle/>
+          <a:p>
+            <a:pPr algn="l"/>
+            <a:r>
+              <a:rPr sz="1150" b="0" i="0">
+                <a:solidFill>
+                  <a:srgbClr val="242A30"/>
+                </a:solidFill>
+                <a:latin typeface="Calibri"/>
+              </a:rPr>
+              <a:t>Öz-denetimli ses temsili; güçlü transfer tabanı</a:t>
+            </a:r>
+          </a:p>
+        </p:txBody>
+      </p:sp>
+      <p:sp>
+        <p:nvSpPr>
+          <p:cNvPr id="40" name="Rectangle 39"/>
           <p:cNvSpPr/>
           <p:nvPr/>
         </p:nvSpPr>
         <p:spPr>
           <a:xfrm>
-            <a:off x="2651760" y="4087368"/>
-            <a:ext cx="2011680" cy="621792"/>
+            <a:off x="365760" y="3657600"/>
+            <a:ext cx="2286000" cy="548640"/>
           </a:xfrm>
           <a:prstGeom prst="rect">
             <a:avLst/>
           </a:prstGeom>
           <a:solidFill>
-            <a:srgbClr val="E8ECF0"/>
+            <a:srgbClr val="EAEEF2"/>
           </a:solidFill>
-          <a:ln w="12700">
+          <a:ln w="6350">
             <a:solidFill>
-              <a:srgbClr val="D5D9DD"/>
+              <a:srgbClr val="D2D9E0"/>
             </a:solidFill>
           </a:ln>
+          <a:effectLst/>
         </p:spPr>
         <p:style>
           <a:lnRef idx="1">
@@ -5353,60 +5472,62 @@
       </p:sp>
       <p:sp>
         <p:nvSpPr>
-          <p:cNvPr id="42" name="TextBox 41"/>
-          <p:cNvSpPr txBox="1"/>
-          <p:nvPr/>
-        </p:nvSpPr>
-        <p:spPr>
-          <a:xfrm>
-            <a:off x="2743200" y="4160520"/>
-            <a:ext cx="1847088" cy="493776"/>
-          </a:xfrm>
-          <a:prstGeom prst="rect">
-            <a:avLst/>
-          </a:prstGeom>
-          <a:noFill/>
-        </p:spPr>
-        <p:txBody>
-          <a:bodyPr wrap="square" anchor="ctr">
-            <a:spAutoFit/>
-          </a:bodyPr>
-          <a:lstStyle/>
-          <a:p>
-            <a:pPr algn="ctr"/>
-            <a:r>
-              <a:rPr sz="1100" b="0" i="0">
-                <a:solidFill>
-                  <a:srgbClr val="2A2A2A"/>
-                </a:solidFill>
-              </a:rPr>
-              <a:t>Chen vd.</a:t>
-            </a:r>
-          </a:p>
-        </p:txBody>
-      </p:sp>
-      <p:sp>
-        <p:nvSpPr>
-          <p:cNvPr id="43" name="Rectangle 42"/>
+          <p:cNvPr id="41" name="TextBox 40"/>
+          <p:cNvSpPr txBox="1"/>
+          <p:nvPr/>
+        </p:nvSpPr>
+        <p:spPr>
+          <a:xfrm>
+            <a:off x="457200" y="3657600"/>
+            <a:ext cx="2103120" cy="548640"/>
+          </a:xfrm>
+          <a:prstGeom prst="rect">
+            <a:avLst/>
+          </a:prstGeom>
+          <a:noFill/>
+        </p:spPr>
+        <p:txBody>
+          <a:bodyPr wrap="square" anchor="ctr" lIns="25400" rIns="25400" tIns="12700" bIns="12700">
+            <a:spAutoFit/>
+          </a:bodyPr>
+          <a:lstStyle/>
+          <a:p>
+            <a:pPr algn="l"/>
+            <a:r>
+              <a:rPr sz="1150" b="0" i="0">
+                <a:solidFill>
+                  <a:srgbClr val="242A30"/>
+                </a:solidFill>
+                <a:latin typeface="Calibri"/>
+              </a:rPr>
+              <a:t>WavLM [15]</a:t>
+            </a:r>
+          </a:p>
+        </p:txBody>
+      </p:sp>
+      <p:sp>
+        <p:nvSpPr>
+          <p:cNvPr id="42" name="Rectangle 41"/>
           <p:cNvSpPr/>
           <p:nvPr/>
         </p:nvSpPr>
         <p:spPr>
           <a:xfrm>
-            <a:off x="4663440" y="4087368"/>
-            <a:ext cx="822960" cy="621792"/>
+            <a:off x="2651760" y="3657600"/>
+            <a:ext cx="1828800" cy="548640"/>
           </a:xfrm>
           <a:prstGeom prst="rect">
             <a:avLst/>
           </a:prstGeom>
           <a:solidFill>
-            <a:srgbClr val="E8ECF0"/>
+            <a:srgbClr val="EAEEF2"/>
           </a:solidFill>
-          <a:ln w="12700">
+          <a:ln w="6350">
             <a:solidFill>
-              <a:srgbClr val="D5D9DD"/>
+              <a:srgbClr val="D2D9E0"/>
             </a:solidFill>
           </a:ln>
+          <a:effectLst/>
         </p:spPr>
         <p:style>
           <a:lnRef idx="1">
@@ -5432,60 +5553,62 @@
       </p:sp>
       <p:sp>
         <p:nvSpPr>
-          <p:cNvPr id="44" name="TextBox 43"/>
-          <p:cNvSpPr txBox="1"/>
-          <p:nvPr/>
-        </p:nvSpPr>
-        <p:spPr>
-          <a:xfrm>
-            <a:off x="4754879" y="4160520"/>
-            <a:ext cx="658368" cy="493776"/>
-          </a:xfrm>
-          <a:prstGeom prst="rect">
-            <a:avLst/>
-          </a:prstGeom>
-          <a:noFill/>
-        </p:spPr>
-        <p:txBody>
-          <a:bodyPr wrap="square" anchor="ctr">
+          <p:cNvPr id="43" name="TextBox 42"/>
+          <p:cNvSpPr txBox="1"/>
+          <p:nvPr/>
+        </p:nvSpPr>
+        <p:spPr>
+          <a:xfrm>
+            <a:off x="2679191" y="3657600"/>
+            <a:ext cx="1773936" cy="548640"/>
+          </a:xfrm>
+          <a:prstGeom prst="rect">
+            <a:avLst/>
+          </a:prstGeom>
+          <a:noFill/>
+        </p:spPr>
+        <p:txBody>
+          <a:bodyPr wrap="square" anchor="ctr" lIns="25400" rIns="25400" tIns="12700" bIns="12700">
             <a:spAutoFit/>
           </a:bodyPr>
           <a:lstStyle/>
           <a:p>
             <a:pPr algn="ctr"/>
             <a:r>
-              <a:rPr sz="1100" b="0" i="0">
-                <a:solidFill>
-                  <a:srgbClr val="2A2A2A"/>
-                </a:solidFill>
-              </a:rPr>
-              <a:t>2022</a:t>
-            </a:r>
-          </a:p>
-        </p:txBody>
-      </p:sp>
-      <p:sp>
-        <p:nvSpPr>
-          <p:cNvPr id="45" name="Rectangle 44"/>
+              <a:rPr sz="1150" b="0" i="0">
+                <a:solidFill>
+                  <a:srgbClr val="242A30"/>
+                </a:solidFill>
+                <a:latin typeface="Calibri"/>
+              </a:rPr>
+              <a:t>Chen vd.</a:t>
+            </a:r>
+          </a:p>
+        </p:txBody>
+      </p:sp>
+      <p:sp>
+        <p:nvSpPr>
+          <p:cNvPr id="44" name="Rectangle 43"/>
           <p:cNvSpPr/>
           <p:nvPr/>
         </p:nvSpPr>
         <p:spPr>
           <a:xfrm>
-            <a:off x="5486400" y="4087368"/>
-            <a:ext cx="6309360" cy="621792"/>
+            <a:off x="4480560" y="3657600"/>
+            <a:ext cx="822960" cy="548640"/>
           </a:xfrm>
           <a:prstGeom prst="rect">
             <a:avLst/>
           </a:prstGeom>
           <a:solidFill>
-            <a:srgbClr val="E8ECF0"/>
+            <a:srgbClr val="EAEEF2"/>
           </a:solidFill>
-          <a:ln w="12700">
+          <a:ln w="6350">
             <a:solidFill>
-              <a:srgbClr val="D5D9DD"/>
+              <a:srgbClr val="D2D9E0"/>
             </a:solidFill>
           </a:ln>
+          <a:effectLst/>
         </p:spPr>
         <p:style>
           <a:lnRef idx="1">
@@ -5511,60 +5634,62 @@
       </p:sp>
       <p:sp>
         <p:nvSpPr>
-          <p:cNvPr id="46" name="TextBox 45"/>
-          <p:cNvSpPr txBox="1"/>
-          <p:nvPr/>
-        </p:nvSpPr>
-        <p:spPr>
-          <a:xfrm>
-            <a:off x="5577840" y="4160520"/>
-            <a:ext cx="6144768" cy="493776"/>
-          </a:xfrm>
-          <a:prstGeom prst="rect">
-            <a:avLst/>
-          </a:prstGeom>
-          <a:noFill/>
-        </p:spPr>
-        <p:txBody>
-          <a:bodyPr wrap="square" anchor="ctr">
-            <a:spAutoFit/>
-          </a:bodyPr>
-          <a:lstStyle/>
-          <a:p>
-            <a:pPr algn="l"/>
-            <a:r>
-              <a:rPr sz="1100" b="0" i="0">
-                <a:solidFill>
-                  <a:srgbClr val="2A2A2A"/>
-                </a:solidFill>
-              </a:rPr>
-              <a:t>Maskelenmiş öngörü ile büyük ölçekli ön eğitim</a:t>
-            </a:r>
-          </a:p>
-        </p:txBody>
-      </p:sp>
-      <p:sp>
-        <p:nvSpPr>
-          <p:cNvPr id="47" name="Rectangle 46"/>
+          <p:cNvPr id="45" name="TextBox 44"/>
+          <p:cNvSpPr txBox="1"/>
+          <p:nvPr/>
+        </p:nvSpPr>
+        <p:spPr>
+          <a:xfrm>
+            <a:off x="4507992" y="3657600"/>
+            <a:ext cx="768096" cy="548640"/>
+          </a:xfrm>
+          <a:prstGeom prst="rect">
+            <a:avLst/>
+          </a:prstGeom>
+          <a:noFill/>
+        </p:spPr>
+        <p:txBody>
+          <a:bodyPr wrap="square" anchor="ctr" lIns="25400" rIns="25400" tIns="12700" bIns="12700">
+            <a:spAutoFit/>
+          </a:bodyPr>
+          <a:lstStyle/>
+          <a:p>
+            <a:pPr algn="ctr"/>
+            <a:r>
+              <a:rPr sz="1150" b="0" i="0">
+                <a:solidFill>
+                  <a:srgbClr val="242A30"/>
+                </a:solidFill>
+                <a:latin typeface="Calibri"/>
+              </a:rPr>
+              <a:t>2022</a:t>
+            </a:r>
+          </a:p>
+        </p:txBody>
+      </p:sp>
+      <p:sp>
+        <p:nvSpPr>
+          <p:cNvPr id="46" name="Rectangle 45"/>
           <p:cNvSpPr/>
           <p:nvPr/>
         </p:nvSpPr>
         <p:spPr>
           <a:xfrm>
-            <a:off x="365760" y="4764024"/>
-            <a:ext cx="2286000" cy="621792"/>
+            <a:off x="5303520" y="3657600"/>
+            <a:ext cx="6519672" cy="548640"/>
           </a:xfrm>
           <a:prstGeom prst="rect">
             <a:avLst/>
           </a:prstGeom>
           <a:solidFill>
-            <a:srgbClr val="FFFFFF"/>
+            <a:srgbClr val="EAEEF2"/>
           </a:solidFill>
-          <a:ln w="12700">
+          <a:ln w="6350">
             <a:solidFill>
-              <a:srgbClr val="D5D9DD"/>
+              <a:srgbClr val="D2D9E0"/>
             </a:solidFill>
           </a:ln>
+          <a:effectLst/>
         </p:spPr>
         <p:style>
           <a:lnRef idx="1">
@@ -5590,48 +5715,49 @@
       </p:sp>
       <p:sp>
         <p:nvSpPr>
-          <p:cNvPr id="48" name="TextBox 47"/>
-          <p:cNvSpPr txBox="1"/>
-          <p:nvPr/>
-        </p:nvSpPr>
-        <p:spPr>
-          <a:xfrm>
-            <a:off x="457200" y="4837176"/>
-            <a:ext cx="2121408" cy="493776"/>
-          </a:xfrm>
-          <a:prstGeom prst="rect">
-            <a:avLst/>
-          </a:prstGeom>
-          <a:noFill/>
-        </p:spPr>
-        <p:txBody>
-          <a:bodyPr wrap="square" anchor="ctr">
-            <a:spAutoFit/>
-          </a:bodyPr>
-          <a:lstStyle/>
-          <a:p>
-            <a:pPr algn="ctr"/>
-            <a:r>
-              <a:rPr sz="1100" b="1" i="0">
-                <a:solidFill>
-                  <a:srgbClr val="2A2A2A"/>
-                </a:solidFill>
-              </a:rPr>
-              <a:t>ADD 2022 [3]</a:t>
-            </a:r>
-          </a:p>
-        </p:txBody>
-      </p:sp>
-      <p:sp>
-        <p:nvSpPr>
-          <p:cNvPr id="49" name="Rectangle 48"/>
+          <p:cNvPr id="47" name="TextBox 46"/>
+          <p:cNvSpPr txBox="1"/>
+          <p:nvPr/>
+        </p:nvSpPr>
+        <p:spPr>
+          <a:xfrm>
+            <a:off x="5394960" y="3657600"/>
+            <a:ext cx="6336792" cy="548640"/>
+          </a:xfrm>
+          <a:prstGeom prst="rect">
+            <a:avLst/>
+          </a:prstGeom>
+          <a:noFill/>
+        </p:spPr>
+        <p:txBody>
+          <a:bodyPr wrap="square" anchor="ctr" lIns="25400" rIns="25400" tIns="12700" bIns="12700">
+            <a:spAutoFit/>
+          </a:bodyPr>
+          <a:lstStyle/>
+          <a:p>
+            <a:pPr algn="l"/>
+            <a:r>
+              <a:rPr sz="1150" b="0" i="0">
+                <a:solidFill>
+                  <a:srgbClr val="242A30"/>
+                </a:solidFill>
+                <a:latin typeface="Calibri"/>
+              </a:rPr>
+              <a:t>Maskelenmiş öngörü ile büyük ölçekli ön eğitim</a:t>
+            </a:r>
+          </a:p>
+        </p:txBody>
+      </p:sp>
+      <p:sp>
+        <p:nvSpPr>
+          <p:cNvPr id="48" name="Rectangle 47"/>
           <p:cNvSpPr/>
           <p:nvPr/>
         </p:nvSpPr>
         <p:spPr>
           <a:xfrm>
-            <a:off x="2651760" y="4764024"/>
-            <a:ext cx="2011680" cy="621792"/>
+            <a:off x="365760" y="4206240"/>
+            <a:ext cx="2286000" cy="548640"/>
           </a:xfrm>
           <a:prstGeom prst="rect">
             <a:avLst/>
@@ -5639,11 +5765,12 @@
           <a:solidFill>
             <a:srgbClr val="FFFFFF"/>
           </a:solidFill>
-          <a:ln w="12700">
+          <a:ln w="6350">
             <a:solidFill>
-              <a:srgbClr val="D5D9DD"/>
+              <a:srgbClr val="D2D9E0"/>
             </a:solidFill>
           </a:ln>
+          <a:effectLst/>
         </p:spPr>
         <p:style>
           <a:lnRef idx="1">
@@ -5669,48 +5796,49 @@
       </p:sp>
       <p:sp>
         <p:nvSpPr>
-          <p:cNvPr id="50" name="TextBox 49"/>
-          <p:cNvSpPr txBox="1"/>
-          <p:nvPr/>
-        </p:nvSpPr>
-        <p:spPr>
-          <a:xfrm>
-            <a:off x="2743200" y="4837176"/>
-            <a:ext cx="1847088" cy="493776"/>
-          </a:xfrm>
-          <a:prstGeom prst="rect">
-            <a:avLst/>
-          </a:prstGeom>
-          <a:noFill/>
-        </p:spPr>
-        <p:txBody>
-          <a:bodyPr wrap="square" anchor="ctr">
-            <a:spAutoFit/>
-          </a:bodyPr>
-          <a:lstStyle/>
-          <a:p>
-            <a:pPr algn="ctr"/>
-            <a:r>
-              <a:rPr sz="1100" b="0" i="0">
-                <a:solidFill>
-                  <a:srgbClr val="2A2A2A"/>
-                </a:solidFill>
-              </a:rPr>
-              <a:t>Yi vd.</a:t>
-            </a:r>
-          </a:p>
-        </p:txBody>
-      </p:sp>
-      <p:sp>
-        <p:nvSpPr>
-          <p:cNvPr id="51" name="Rectangle 50"/>
+          <p:cNvPr id="49" name="TextBox 48"/>
+          <p:cNvSpPr txBox="1"/>
+          <p:nvPr/>
+        </p:nvSpPr>
+        <p:spPr>
+          <a:xfrm>
+            <a:off x="457200" y="4206240"/>
+            <a:ext cx="2103120" cy="548640"/>
+          </a:xfrm>
+          <a:prstGeom prst="rect">
+            <a:avLst/>
+          </a:prstGeom>
+          <a:noFill/>
+        </p:spPr>
+        <p:txBody>
+          <a:bodyPr wrap="square" anchor="ctr" lIns="25400" rIns="25400" tIns="12700" bIns="12700">
+            <a:spAutoFit/>
+          </a:bodyPr>
+          <a:lstStyle/>
+          <a:p>
+            <a:pPr algn="l"/>
+            <a:r>
+              <a:rPr sz="1150" b="0" i="0">
+                <a:solidFill>
+                  <a:srgbClr val="242A30"/>
+                </a:solidFill>
+                <a:latin typeface="Calibri"/>
+              </a:rPr>
+              <a:t>ADD 2022 [3]</a:t>
+            </a:r>
+          </a:p>
+        </p:txBody>
+      </p:sp>
+      <p:sp>
+        <p:nvSpPr>
+          <p:cNvPr id="50" name="Rectangle 49"/>
           <p:cNvSpPr/>
           <p:nvPr/>
         </p:nvSpPr>
         <p:spPr>
           <a:xfrm>
-            <a:off x="4663440" y="4764024"/>
-            <a:ext cx="822960" cy="621792"/>
+            <a:off x="2651760" y="4206240"/>
+            <a:ext cx="1828800" cy="548640"/>
           </a:xfrm>
           <a:prstGeom prst="rect">
             <a:avLst/>
@@ -5718,11 +5846,12 @@
           <a:solidFill>
             <a:srgbClr val="FFFFFF"/>
           </a:solidFill>
-          <a:ln w="12700">
+          <a:ln w="6350">
             <a:solidFill>
-              <a:srgbClr val="D5D9DD"/>
+              <a:srgbClr val="D2D9E0"/>
             </a:solidFill>
           </a:ln>
+          <a:effectLst/>
         </p:spPr>
         <p:style>
           <a:lnRef idx="1">
@@ -5748,48 +5877,49 @@
       </p:sp>
       <p:sp>
         <p:nvSpPr>
-          <p:cNvPr id="52" name="TextBox 51"/>
-          <p:cNvSpPr txBox="1"/>
-          <p:nvPr/>
-        </p:nvSpPr>
-        <p:spPr>
-          <a:xfrm>
-            <a:off x="4754879" y="4837176"/>
-            <a:ext cx="658368" cy="493776"/>
-          </a:xfrm>
-          <a:prstGeom prst="rect">
-            <a:avLst/>
-          </a:prstGeom>
-          <a:noFill/>
-        </p:spPr>
-        <p:txBody>
-          <a:bodyPr wrap="square" anchor="ctr">
+          <p:cNvPr id="51" name="TextBox 50"/>
+          <p:cNvSpPr txBox="1"/>
+          <p:nvPr/>
+        </p:nvSpPr>
+        <p:spPr>
+          <a:xfrm>
+            <a:off x="2679191" y="4206240"/>
+            <a:ext cx="1773936" cy="548640"/>
+          </a:xfrm>
+          <a:prstGeom prst="rect">
+            <a:avLst/>
+          </a:prstGeom>
+          <a:noFill/>
+        </p:spPr>
+        <p:txBody>
+          <a:bodyPr wrap="square" anchor="ctr" lIns="25400" rIns="25400" tIns="12700" bIns="12700">
             <a:spAutoFit/>
           </a:bodyPr>
           <a:lstStyle/>
           <a:p>
             <a:pPr algn="ctr"/>
             <a:r>
-              <a:rPr sz="1100" b="0" i="0">
-                <a:solidFill>
-                  <a:srgbClr val="2A2A2A"/>
-                </a:solidFill>
-              </a:rPr>
-              <a:t>2022</a:t>
-            </a:r>
-          </a:p>
-        </p:txBody>
-      </p:sp>
-      <p:sp>
-        <p:nvSpPr>
-          <p:cNvPr id="53" name="Rectangle 52"/>
+              <a:rPr sz="1150" b="0" i="0">
+                <a:solidFill>
+                  <a:srgbClr val="242A30"/>
+                </a:solidFill>
+                <a:latin typeface="Calibri"/>
+              </a:rPr>
+              <a:t>Yi vd.</a:t>
+            </a:r>
+          </a:p>
+        </p:txBody>
+      </p:sp>
+      <p:sp>
+        <p:nvSpPr>
+          <p:cNvPr id="52" name="Rectangle 51"/>
           <p:cNvSpPr/>
           <p:nvPr/>
         </p:nvSpPr>
         <p:spPr>
           <a:xfrm>
-            <a:off x="5486400" y="4764024"/>
-            <a:ext cx="6309360" cy="621792"/>
+            <a:off x="4480560" y="4206240"/>
+            <a:ext cx="822960" cy="548640"/>
           </a:xfrm>
           <a:prstGeom prst="rect">
             <a:avLst/>
@@ -5797,11 +5927,12 @@
           <a:solidFill>
             <a:srgbClr val="FFFFFF"/>
           </a:solidFill>
-          <a:ln w="12700">
+          <a:ln w="6350">
             <a:solidFill>
-              <a:srgbClr val="D5D9DD"/>
+              <a:srgbClr val="D2D9E0"/>
             </a:solidFill>
           </a:ln>
+          <a:effectLst/>
         </p:spPr>
         <p:style>
           <a:lnRef idx="1">
@@ -5827,60 +5958,62 @@
       </p:sp>
       <p:sp>
         <p:nvSpPr>
-          <p:cNvPr id="54" name="TextBox 53"/>
-          <p:cNvSpPr txBox="1"/>
-          <p:nvPr/>
-        </p:nvSpPr>
-        <p:spPr>
-          <a:xfrm>
-            <a:off x="5577840" y="4837176"/>
-            <a:ext cx="6144768" cy="493776"/>
-          </a:xfrm>
-          <a:prstGeom prst="rect">
-            <a:avLst/>
-          </a:prstGeom>
-          <a:noFill/>
-        </p:spPr>
-        <p:txBody>
-          <a:bodyPr wrap="square" anchor="ctr">
-            <a:spAutoFit/>
-          </a:bodyPr>
-          <a:lstStyle/>
-          <a:p>
-            <a:pPr algn="l"/>
-            <a:r>
-              <a:rPr sz="1100" b="0" i="0">
-                <a:solidFill>
-                  <a:srgbClr val="2A2A2A"/>
-                </a:solidFill>
-              </a:rPr>
-              <a:t>İlk YZ ses sentezi tespit yarışması; alanı standartlaştırdı</a:t>
-            </a:r>
-          </a:p>
-        </p:txBody>
-      </p:sp>
-      <p:sp>
-        <p:nvSpPr>
-          <p:cNvPr id="55" name="Rectangle 54"/>
+          <p:cNvPr id="53" name="TextBox 52"/>
+          <p:cNvSpPr txBox="1"/>
+          <p:nvPr/>
+        </p:nvSpPr>
+        <p:spPr>
+          <a:xfrm>
+            <a:off x="4507992" y="4206240"/>
+            <a:ext cx="768096" cy="548640"/>
+          </a:xfrm>
+          <a:prstGeom prst="rect">
+            <a:avLst/>
+          </a:prstGeom>
+          <a:noFill/>
+        </p:spPr>
+        <p:txBody>
+          <a:bodyPr wrap="square" anchor="ctr" lIns="25400" rIns="25400" tIns="12700" bIns="12700">
+            <a:spAutoFit/>
+          </a:bodyPr>
+          <a:lstStyle/>
+          <a:p>
+            <a:pPr algn="ctr"/>
+            <a:r>
+              <a:rPr sz="1150" b="0" i="0">
+                <a:solidFill>
+                  <a:srgbClr val="242A30"/>
+                </a:solidFill>
+                <a:latin typeface="Calibri"/>
+              </a:rPr>
+              <a:t>2022</a:t>
+            </a:r>
+          </a:p>
+        </p:txBody>
+      </p:sp>
+      <p:sp>
+        <p:nvSpPr>
+          <p:cNvPr id="54" name="Rectangle 53"/>
           <p:cNvSpPr/>
           <p:nvPr/>
         </p:nvSpPr>
         <p:spPr>
           <a:xfrm>
-            <a:off x="365760" y="5440680"/>
-            <a:ext cx="2286000" cy="621792"/>
+            <a:off x="5303520" y="4206240"/>
+            <a:ext cx="6519672" cy="548640"/>
           </a:xfrm>
           <a:prstGeom prst="rect">
             <a:avLst/>
           </a:prstGeom>
           <a:solidFill>
-            <a:srgbClr val="E8ECF0"/>
+            <a:srgbClr val="FFFFFF"/>
           </a:solidFill>
-          <a:ln w="12700">
+          <a:ln w="6350">
             <a:solidFill>
-              <a:srgbClr val="D5D9DD"/>
+              <a:srgbClr val="D2D9E0"/>
             </a:solidFill>
           </a:ln>
+          <a:effectLst/>
         </p:spPr>
         <p:style>
           <a:lnRef idx="1">
@@ -5906,60 +6039,62 @@
       </p:sp>
       <p:sp>
         <p:nvSpPr>
-          <p:cNvPr id="56" name="TextBox 55"/>
-          <p:cNvSpPr txBox="1"/>
-          <p:nvPr/>
-        </p:nvSpPr>
-        <p:spPr>
-          <a:xfrm>
-            <a:off x="457200" y="5513832"/>
-            <a:ext cx="2121408" cy="493776"/>
-          </a:xfrm>
-          <a:prstGeom prst="rect">
-            <a:avLst/>
-          </a:prstGeom>
-          <a:noFill/>
-        </p:spPr>
-        <p:txBody>
-          <a:bodyPr wrap="square" anchor="ctr">
-            <a:spAutoFit/>
-          </a:bodyPr>
-          <a:lstStyle/>
-          <a:p>
-            <a:pPr algn="ctr"/>
-            <a:r>
-              <a:rPr sz="1100" b="1" i="0">
-                <a:solidFill>
-                  <a:srgbClr val="2A2A2A"/>
-                </a:solidFill>
-              </a:rPr>
-              <a:t>ASVspoof 2019 [17]</a:t>
-            </a:r>
-          </a:p>
-        </p:txBody>
-      </p:sp>
-      <p:sp>
-        <p:nvSpPr>
-          <p:cNvPr id="57" name="Rectangle 56"/>
+          <p:cNvPr id="55" name="TextBox 54"/>
+          <p:cNvSpPr txBox="1"/>
+          <p:nvPr/>
+        </p:nvSpPr>
+        <p:spPr>
+          <a:xfrm>
+            <a:off x="5394960" y="4206240"/>
+            <a:ext cx="6336792" cy="548640"/>
+          </a:xfrm>
+          <a:prstGeom prst="rect">
+            <a:avLst/>
+          </a:prstGeom>
+          <a:noFill/>
+        </p:spPr>
+        <p:txBody>
+          <a:bodyPr wrap="square" anchor="ctr" lIns="25400" rIns="25400" tIns="12700" bIns="12700">
+            <a:spAutoFit/>
+          </a:bodyPr>
+          <a:lstStyle/>
+          <a:p>
+            <a:pPr algn="l"/>
+            <a:r>
+              <a:rPr sz="1150" b="0" i="0">
+                <a:solidFill>
+                  <a:srgbClr val="242A30"/>
+                </a:solidFill>
+                <a:latin typeface="Calibri"/>
+              </a:rPr>
+              <a:t>İlk YZ ses sentezi tespit yarışması</a:t>
+            </a:r>
+          </a:p>
+        </p:txBody>
+      </p:sp>
+      <p:sp>
+        <p:nvSpPr>
+          <p:cNvPr id="56" name="Rectangle 55"/>
           <p:cNvSpPr/>
           <p:nvPr/>
         </p:nvSpPr>
         <p:spPr>
           <a:xfrm>
-            <a:off x="2651760" y="5440680"/>
-            <a:ext cx="2011680" cy="621792"/>
+            <a:off x="365760" y="4754879"/>
+            <a:ext cx="2286000" cy="548640"/>
           </a:xfrm>
           <a:prstGeom prst="rect">
             <a:avLst/>
           </a:prstGeom>
           <a:solidFill>
-            <a:srgbClr val="E8ECF0"/>
+            <a:srgbClr val="EAEEF2"/>
           </a:solidFill>
-          <a:ln w="12700">
+          <a:ln w="6350">
             <a:solidFill>
-              <a:srgbClr val="D5D9DD"/>
+              <a:srgbClr val="D2D9E0"/>
             </a:solidFill>
           </a:ln>
+          <a:effectLst/>
         </p:spPr>
         <p:style>
           <a:lnRef idx="1">
@@ -5985,60 +6120,62 @@
       </p:sp>
       <p:sp>
         <p:nvSpPr>
-          <p:cNvPr id="58" name="TextBox 57"/>
-          <p:cNvSpPr txBox="1"/>
-          <p:nvPr/>
-        </p:nvSpPr>
-        <p:spPr>
-          <a:xfrm>
-            <a:off x="2743200" y="5513832"/>
-            <a:ext cx="1847088" cy="493776"/>
-          </a:xfrm>
-          <a:prstGeom prst="rect">
-            <a:avLst/>
-          </a:prstGeom>
-          <a:noFill/>
-        </p:spPr>
-        <p:txBody>
-          <a:bodyPr wrap="square" anchor="ctr">
-            <a:spAutoFit/>
-          </a:bodyPr>
-          <a:lstStyle/>
-          <a:p>
-            <a:pPr algn="ctr"/>
-            <a:r>
-              <a:rPr sz="1100" b="0" i="0">
-                <a:solidFill>
-                  <a:srgbClr val="2A2A2A"/>
-                </a:solidFill>
-              </a:rPr>
-              <a:t>Wang vd.</a:t>
-            </a:r>
-          </a:p>
-        </p:txBody>
-      </p:sp>
-      <p:sp>
-        <p:nvSpPr>
-          <p:cNvPr id="59" name="Rectangle 58"/>
+          <p:cNvPr id="57" name="TextBox 56"/>
+          <p:cNvSpPr txBox="1"/>
+          <p:nvPr/>
+        </p:nvSpPr>
+        <p:spPr>
+          <a:xfrm>
+            <a:off x="457200" y="4754879"/>
+            <a:ext cx="2103120" cy="548640"/>
+          </a:xfrm>
+          <a:prstGeom prst="rect">
+            <a:avLst/>
+          </a:prstGeom>
+          <a:noFill/>
+        </p:spPr>
+        <p:txBody>
+          <a:bodyPr wrap="square" anchor="ctr" lIns="25400" rIns="25400" tIns="12700" bIns="12700">
+            <a:spAutoFit/>
+          </a:bodyPr>
+          <a:lstStyle/>
+          <a:p>
+            <a:pPr algn="l"/>
+            <a:r>
+              <a:rPr sz="1150" b="0" i="0">
+                <a:solidFill>
+                  <a:srgbClr val="242A30"/>
+                </a:solidFill>
+                <a:latin typeface="Calibri"/>
+              </a:rPr>
+              <a:t>ASVspoof 2019 [17]</a:t>
+            </a:r>
+          </a:p>
+        </p:txBody>
+      </p:sp>
+      <p:sp>
+        <p:nvSpPr>
+          <p:cNvPr id="58" name="Rectangle 57"/>
           <p:cNvSpPr/>
           <p:nvPr/>
         </p:nvSpPr>
         <p:spPr>
           <a:xfrm>
-            <a:off x="4663440" y="5440680"/>
-            <a:ext cx="822960" cy="621792"/>
+            <a:off x="2651760" y="4754879"/>
+            <a:ext cx="1828800" cy="548640"/>
           </a:xfrm>
           <a:prstGeom prst="rect">
             <a:avLst/>
           </a:prstGeom>
           <a:solidFill>
-            <a:srgbClr val="E8ECF0"/>
+            <a:srgbClr val="EAEEF2"/>
           </a:solidFill>
-          <a:ln w="12700">
+          <a:ln w="6350">
             <a:solidFill>
-              <a:srgbClr val="D5D9DD"/>
+              <a:srgbClr val="D2D9E0"/>
             </a:solidFill>
           </a:ln>
+          <a:effectLst/>
         </p:spPr>
         <p:style>
           <a:lnRef idx="1">
@@ -6064,60 +6201,62 @@
       </p:sp>
       <p:sp>
         <p:nvSpPr>
-          <p:cNvPr id="60" name="TextBox 59"/>
-          <p:cNvSpPr txBox="1"/>
-          <p:nvPr/>
-        </p:nvSpPr>
-        <p:spPr>
-          <a:xfrm>
-            <a:off x="4754879" y="5513832"/>
-            <a:ext cx="658368" cy="493776"/>
-          </a:xfrm>
-          <a:prstGeom prst="rect">
-            <a:avLst/>
-          </a:prstGeom>
-          <a:noFill/>
-        </p:spPr>
-        <p:txBody>
-          <a:bodyPr wrap="square" anchor="ctr">
+          <p:cNvPr id="59" name="TextBox 58"/>
+          <p:cNvSpPr txBox="1"/>
+          <p:nvPr/>
+        </p:nvSpPr>
+        <p:spPr>
+          <a:xfrm>
+            <a:off x="2679191" y="4754879"/>
+            <a:ext cx="1773936" cy="548640"/>
+          </a:xfrm>
+          <a:prstGeom prst="rect">
+            <a:avLst/>
+          </a:prstGeom>
+          <a:noFill/>
+        </p:spPr>
+        <p:txBody>
+          <a:bodyPr wrap="square" anchor="ctr" lIns="25400" rIns="25400" tIns="12700" bIns="12700">
             <a:spAutoFit/>
           </a:bodyPr>
           <a:lstStyle/>
           <a:p>
             <a:pPr algn="ctr"/>
             <a:r>
-              <a:rPr sz="1100" b="0" i="0">
-                <a:solidFill>
-                  <a:srgbClr val="2A2A2A"/>
-                </a:solidFill>
-              </a:rPr>
-              <a:t>2020</a:t>
-            </a:r>
-          </a:p>
-        </p:txBody>
-      </p:sp>
-      <p:sp>
-        <p:nvSpPr>
-          <p:cNvPr id="61" name="Rectangle 60"/>
+              <a:rPr sz="1150" b="0" i="0">
+                <a:solidFill>
+                  <a:srgbClr val="242A30"/>
+                </a:solidFill>
+                <a:latin typeface="Calibri"/>
+              </a:rPr>
+              <a:t>Wang vd.</a:t>
+            </a:r>
+          </a:p>
+        </p:txBody>
+      </p:sp>
+      <p:sp>
+        <p:nvSpPr>
+          <p:cNvPr id="60" name="Rectangle 59"/>
           <p:cNvSpPr/>
           <p:nvPr/>
         </p:nvSpPr>
         <p:spPr>
           <a:xfrm>
-            <a:off x="5486400" y="5440680"/>
-            <a:ext cx="6309360" cy="621792"/>
+            <a:off x="4480560" y="4754879"/>
+            <a:ext cx="822960" cy="548640"/>
           </a:xfrm>
           <a:prstGeom prst="rect">
             <a:avLst/>
           </a:prstGeom>
           <a:solidFill>
-            <a:srgbClr val="E8ECF0"/>
+            <a:srgbClr val="EAEEF2"/>
           </a:solidFill>
-          <a:ln w="12700">
+          <a:ln w="6350">
             <a:solidFill>
-              <a:srgbClr val="D5D9DD"/>
+              <a:srgbClr val="D2D9E0"/>
             </a:solidFill>
           </a:ln>
+          <a:effectLst/>
         </p:spPr>
         <p:style>
           <a:lnRef idx="1">
@@ -6143,90 +6282,217 @@
       </p:sp>
       <p:sp>
         <p:nvSpPr>
-          <p:cNvPr id="62" name="TextBox 61"/>
-          <p:cNvSpPr txBox="1"/>
-          <p:nvPr/>
-        </p:nvSpPr>
-        <p:spPr>
-          <a:xfrm>
-            <a:off x="5577840" y="5513832"/>
-            <a:ext cx="6144768" cy="493776"/>
-          </a:xfrm>
-          <a:prstGeom prst="rect">
-            <a:avLst/>
-          </a:prstGeom>
-          <a:noFill/>
-        </p:spPr>
-        <p:txBody>
-          <a:bodyPr wrap="square" anchor="ctr">
+          <p:cNvPr id="61" name="TextBox 60"/>
+          <p:cNvSpPr txBox="1"/>
+          <p:nvPr/>
+        </p:nvSpPr>
+        <p:spPr>
+          <a:xfrm>
+            <a:off x="4507992" y="4754879"/>
+            <a:ext cx="768096" cy="548640"/>
+          </a:xfrm>
+          <a:prstGeom prst="rect">
+            <a:avLst/>
+          </a:prstGeom>
+          <a:noFill/>
+        </p:spPr>
+        <p:txBody>
+          <a:bodyPr wrap="square" anchor="ctr" lIns="25400" rIns="25400" tIns="12700" bIns="12700">
+            <a:spAutoFit/>
+          </a:bodyPr>
+          <a:lstStyle/>
+          <a:p>
+            <a:pPr algn="ctr"/>
+            <a:r>
+              <a:rPr sz="1150" b="0" i="0">
+                <a:solidFill>
+                  <a:srgbClr val="242A30"/>
+                </a:solidFill>
+                <a:latin typeface="Calibri"/>
+              </a:rPr>
+              <a:t>2020</a:t>
+            </a:r>
+          </a:p>
+        </p:txBody>
+      </p:sp>
+      <p:sp>
+        <p:nvSpPr>
+          <p:cNvPr id="62" name="Rectangle 61"/>
+          <p:cNvSpPr/>
+          <p:nvPr/>
+        </p:nvSpPr>
+        <p:spPr>
+          <a:xfrm>
+            <a:off x="5303520" y="4754879"/>
+            <a:ext cx="6519672" cy="548640"/>
+          </a:xfrm>
+          <a:prstGeom prst="rect">
+            <a:avLst/>
+          </a:prstGeom>
+          <a:solidFill>
+            <a:srgbClr val="EAEEF2"/>
+          </a:solidFill>
+          <a:ln w="6350">
+            <a:solidFill>
+              <a:srgbClr val="D2D9E0"/>
+            </a:solidFill>
+          </a:ln>
+          <a:effectLst/>
+        </p:spPr>
+        <p:style>
+          <a:lnRef idx="1">
+            <a:schemeClr val="accent1"/>
+          </a:lnRef>
+          <a:fillRef idx="3">
+            <a:schemeClr val="accent1"/>
+          </a:fillRef>
+          <a:effectRef idx="2">
+            <a:schemeClr val="accent1"/>
+          </a:effectRef>
+          <a:fontRef idx="minor">
+            <a:schemeClr val="lt1"/>
+          </a:fontRef>
+        </p:style>
+        <p:txBody>
+          <a:bodyPr rtlCol="0" anchor="ctr"/>
+          <a:lstStyle/>
+          <a:p>
+            <a:pPr algn="ctr"/>
+          </a:p>
+        </p:txBody>
+      </p:sp>
+      <p:sp>
+        <p:nvSpPr>
+          <p:cNvPr id="63" name="TextBox 62"/>
+          <p:cNvSpPr txBox="1"/>
+          <p:nvPr/>
+        </p:nvSpPr>
+        <p:spPr>
+          <a:xfrm>
+            <a:off x="5394960" y="4754879"/>
+            <a:ext cx="6336792" cy="548640"/>
+          </a:xfrm>
+          <a:prstGeom prst="rect">
+            <a:avLst/>
+          </a:prstGeom>
+          <a:noFill/>
+        </p:spPr>
+        <p:txBody>
+          <a:bodyPr wrap="square" anchor="ctr" lIns="25400" rIns="25400" tIns="12700" bIns="12700">
             <a:spAutoFit/>
           </a:bodyPr>
           <a:lstStyle/>
           <a:p>
             <a:pPr algn="l"/>
             <a:r>
-              <a:rPr sz="1100" b="0" i="0">
-                <a:solidFill>
-                  <a:srgbClr val="2A2A2A"/>
-                </a:solidFill>
-              </a:rPr>
-              <a:t>64k örnekli kıyaslama veri kümesi; sahte ses araştırmasının omurgası</a:t>
-            </a:r>
-          </a:p>
-        </p:txBody>
-      </p:sp>
-      <p:sp>
-        <p:nvSpPr>
-          <p:cNvPr id="63" name="TextBox 62"/>
-          <p:cNvSpPr txBox="1"/>
-          <p:nvPr/>
-        </p:nvSpPr>
-        <p:spPr>
-          <a:xfrm>
-            <a:off x="365760" y="6355080"/>
-            <a:ext cx="11430000" cy="274320"/>
-          </a:xfrm>
-          <a:prstGeom prst="rect">
-            <a:avLst/>
-          </a:prstGeom>
-          <a:noFill/>
-        </p:spPr>
-        <p:txBody>
-          <a:bodyPr wrap="square">
+              <a:rPr sz="1150" b="0" i="0">
+                <a:solidFill>
+                  <a:srgbClr val="242A30"/>
+                </a:solidFill>
+                <a:latin typeface="Calibri"/>
+              </a:rPr>
+              <a:t>64k örnekli kıyaslama veri kümesi</a:t>
+            </a:r>
+          </a:p>
+        </p:txBody>
+      </p:sp>
+      <p:sp>
+        <p:nvSpPr>
+          <p:cNvPr id="64" name="TextBox 63"/>
+          <p:cNvSpPr txBox="1"/>
+          <p:nvPr/>
+        </p:nvSpPr>
+        <p:spPr>
+          <a:xfrm>
+            <a:off x="365760" y="5486400"/>
+            <a:ext cx="11430000" cy="365760"/>
+          </a:xfrm>
+          <a:prstGeom prst="rect">
+            <a:avLst/>
+          </a:prstGeom>
+          <a:noFill/>
+        </p:spPr>
+        <p:txBody>
+          <a:bodyPr wrap="square" anchor="t" lIns="25400" rIns="25400" tIns="12700" bIns="12700">
             <a:spAutoFit/>
           </a:bodyPr>
           <a:lstStyle/>
           <a:p>
             <a:pPr algn="l"/>
             <a:r>
-              <a:rPr sz="1100" b="0" i="1">
-                <a:solidFill>
-                  <a:srgbClr val="66707A"/>
-                </a:solidFill>
-              </a:rPr>
-              <a:t>Çıkarım: Bu yöntemler konuşma için olgun; ancak müziğin ritmik ve harmonik yapısını hedeflemiyor.</a:t>
-            </a:r>
-          </a:p>
-        </p:txBody>
-      </p:sp>
-      <p:sp>
-        <p:nvSpPr>
-          <p:cNvPr id="64" name="TextBox 63"/>
-          <p:cNvSpPr txBox="1"/>
-          <p:nvPr/>
-        </p:nvSpPr>
-        <p:spPr>
-          <a:xfrm>
-            <a:off x="365760" y="6510528"/>
-            <a:ext cx="8229600" cy="301752"/>
-          </a:xfrm>
-          <a:prstGeom prst="rect">
-            <a:avLst/>
-          </a:prstGeom>
-          <a:noFill/>
-        </p:spPr>
-        <p:txBody>
-          <a:bodyPr wrap="square">
+              <a:rPr sz="1150" b="0" i="1">
+                <a:solidFill>
+                  <a:srgbClr val="6A7480"/>
+                </a:solidFill>
+                <a:latin typeface="Calibri"/>
+              </a:rPr>
+              <a:t>Çıkarım: Bu yöntemler konuşma için olgun; müziğin ritmik ve harmonik yapısını hedeflemiyor.</a:t>
+            </a:r>
+          </a:p>
+        </p:txBody>
+      </p:sp>
+      <p:sp>
+        <p:nvSpPr>
+          <p:cNvPr id="65" name="Rectangle 64"/>
+          <p:cNvSpPr/>
+          <p:nvPr/>
+        </p:nvSpPr>
+        <p:spPr>
+          <a:xfrm>
+            <a:off x="365760" y="6419088"/>
+            <a:ext cx="11457432" cy="10972"/>
+          </a:xfrm>
+          <a:prstGeom prst="rect">
+            <a:avLst/>
+          </a:prstGeom>
+          <a:solidFill>
+            <a:srgbClr val="D2D9E0"/>
+          </a:solidFill>
+          <a:ln>
+            <a:noFill/>
+          </a:ln>
+          <a:effectLst/>
+        </p:spPr>
+        <p:style>
+          <a:lnRef idx="1">
+            <a:schemeClr val="accent1"/>
+          </a:lnRef>
+          <a:fillRef idx="3">
+            <a:schemeClr val="accent1"/>
+          </a:fillRef>
+          <a:effectRef idx="2">
+            <a:schemeClr val="accent1"/>
+          </a:effectRef>
+          <a:fontRef idx="minor">
+            <a:schemeClr val="lt1"/>
+          </a:fontRef>
+        </p:style>
+        <p:txBody>
+          <a:bodyPr rtlCol="0" anchor="ctr"/>
+          <a:lstStyle/>
+          <a:p>
+            <a:pPr algn="ctr"/>
+          </a:p>
+        </p:txBody>
+      </p:sp>
+      <p:sp>
+        <p:nvSpPr>
+          <p:cNvPr id="66" name="TextBox 65"/>
+          <p:cNvSpPr txBox="1"/>
+          <p:nvPr/>
+        </p:nvSpPr>
+        <p:spPr>
+          <a:xfrm>
+            <a:off x="365760" y="6473952"/>
+            <a:ext cx="7772400" cy="292608"/>
+          </a:xfrm>
+          <a:prstGeom prst="rect">
+            <a:avLst/>
+          </a:prstGeom>
+          <a:noFill/>
+        </p:spPr>
+        <p:txBody>
+          <a:bodyPr wrap="square" anchor="t" lIns="25400" rIns="25400" tIns="12700" bIns="12700">
             <a:spAutoFit/>
           </a:bodyPr>
           <a:lstStyle/>
@@ -6235,32 +6501,33 @@
             <a:r>
               <a:rPr sz="900" b="0" i="0">
                 <a:solidFill>
-                  <a:srgbClr val="66707A"/>
-                </a:solidFill>
-              </a:rPr>
-              <a:t>AURIS  ·  Hasan Arthur Altuntaş  ·  BM498 Mezuniyet Tezi</a:t>
-            </a:r>
-          </a:p>
-        </p:txBody>
-      </p:sp>
-      <p:sp>
-        <p:nvSpPr>
-          <p:cNvPr id="65" name="TextBox 64"/>
-          <p:cNvSpPr txBox="1"/>
-          <p:nvPr/>
-        </p:nvSpPr>
-        <p:spPr>
-          <a:xfrm>
-            <a:off x="8595360" y="6510528"/>
-            <a:ext cx="3200400" cy="301752"/>
-          </a:xfrm>
-          <a:prstGeom prst="rect">
-            <a:avLst/>
-          </a:prstGeom>
-          <a:noFill/>
-        </p:spPr>
-        <p:txBody>
-          <a:bodyPr wrap="square">
+                  <a:srgbClr val="6A7480"/>
+                </a:solidFill>
+                <a:latin typeface="Calibri"/>
+              </a:rPr>
+              <a:t>AURIS  ·  Yapay Zekâ Üretimli Müzik Tespiti</a:t>
+            </a:r>
+          </a:p>
+        </p:txBody>
+      </p:sp>
+      <p:sp>
+        <p:nvSpPr>
+          <p:cNvPr id="67" name="TextBox 66"/>
+          <p:cNvSpPr txBox="1"/>
+          <p:nvPr/>
+        </p:nvSpPr>
+        <p:spPr>
+          <a:xfrm>
+            <a:off x="5029200" y="6473952"/>
+            <a:ext cx="6793992" cy="292608"/>
+          </a:xfrm>
+          <a:prstGeom prst="rect">
+            <a:avLst/>
+          </a:prstGeom>
+          <a:noFill/>
+        </p:spPr>
+        <p:txBody>
+          <a:bodyPr wrap="square" anchor="t" lIns="25400" rIns="25400" tIns="12700" bIns="12700">
             <a:spAutoFit/>
           </a:bodyPr>
           <a:lstStyle/>
@@ -6269,10 +6536,11 @@
             <a:r>
               <a:rPr sz="900" b="0" i="0">
                 <a:solidFill>
-                  <a:srgbClr val="66707A"/>
-                </a:solidFill>
-              </a:rPr>
-              <a:t>Düzce Üniversitesi · 2025-2026</a:t>
+                  <a:srgbClr val="6A7480"/>
+                </a:solidFill>
+                <a:latin typeface="Calibri"/>
+              </a:rPr>
+              <a:t>Hasan Arthur Altuntaş  ·  BM498  ·  Düzce Üniversitesi  ·  2025-2026</a:t>
             </a:r>
           </a:p>
         </p:txBody>
@@ -6291,7 +6559,7 @@
     <p:bg>
       <p:bgPr>
         <a:solidFill>
-          <a:srgbClr val="F4F6F8"/>
+          <a:srgbClr val="F6F8FA"/>
         </a:solidFill>
         <a:effectLst/>
       </p:bgPr>
@@ -6318,11 +6586,12 @@
             <a:avLst/>
           </a:prstGeom>
           <a:solidFill>
-            <a:srgbClr val="0D2B55"/>
+            <a:srgbClr val="102A4C"/>
           </a:solidFill>
           <a:ln>
             <a:noFill/>
           </a:ln>
+          <a:effectLst/>
         </p:spPr>
         <p:style>
           <a:lnRef idx="1">
@@ -6355,17 +6624,18 @@
         <p:spPr>
           <a:xfrm>
             <a:off x="0" y="1371600"/>
-            <a:ext cx="12188952" cy="54864"/>
+            <a:ext cx="12188952" cy="50292"/>
           </a:xfrm>
           <a:prstGeom prst="rect">
             <a:avLst/>
           </a:prstGeom>
           <a:solidFill>
-            <a:srgbClr val="E0A800"/>
+            <a:srgbClr val="D99A07"/>
           </a:solidFill>
           <a:ln>
             <a:noFill/>
           </a:ln>
+          <a:effectLst/>
         </p:spPr>
         <p:style>
           <a:lnRef idx="1">
@@ -6391,32 +6661,77 @@
       </p:sp>
       <p:sp>
         <p:nvSpPr>
-          <p:cNvPr id="4" name="TextBox 3"/>
-          <p:cNvSpPr txBox="1"/>
-          <p:nvPr/>
-        </p:nvSpPr>
-        <p:spPr>
-          <a:xfrm>
-            <a:off x="365760" y="109728"/>
-            <a:ext cx="11430000" cy="320040"/>
-          </a:xfrm>
-          <a:prstGeom prst="rect">
-            <a:avLst/>
-          </a:prstGeom>
-          <a:noFill/>
-        </p:spPr>
-        <p:txBody>
-          <a:bodyPr wrap="square">
+          <p:cNvPr id="4" name="Rectangle 3"/>
+          <p:cNvSpPr/>
+          <p:nvPr/>
+        </p:nvSpPr>
+        <p:spPr>
+          <a:xfrm>
+            <a:off x="0" y="0"/>
+            <a:ext cx="164592" cy="1371600"/>
+          </a:xfrm>
+          <a:prstGeom prst="rect">
+            <a:avLst/>
+          </a:prstGeom>
+          <a:solidFill>
+            <a:srgbClr val="D99A07"/>
+          </a:solidFill>
+          <a:ln>
+            <a:noFill/>
+          </a:ln>
+          <a:effectLst/>
+        </p:spPr>
+        <p:style>
+          <a:lnRef idx="1">
+            <a:schemeClr val="accent1"/>
+          </a:lnRef>
+          <a:fillRef idx="3">
+            <a:schemeClr val="accent1"/>
+          </a:fillRef>
+          <a:effectRef idx="2">
+            <a:schemeClr val="accent1"/>
+          </a:effectRef>
+          <a:fontRef idx="minor">
+            <a:schemeClr val="lt1"/>
+          </a:fontRef>
+        </p:style>
+        <p:txBody>
+          <a:bodyPr rtlCol="0" anchor="ctr"/>
+          <a:lstStyle/>
+          <a:p>
+            <a:pPr algn="ctr"/>
+          </a:p>
+        </p:txBody>
+      </p:sp>
+      <p:sp>
+        <p:nvSpPr>
+          <p:cNvPr id="5" name="TextBox 4"/>
+          <p:cNvSpPr txBox="1"/>
+          <p:nvPr/>
+        </p:nvSpPr>
+        <p:spPr>
+          <a:xfrm>
+            <a:off x="411480" y="146304"/>
+            <a:ext cx="10058400" cy="292608"/>
+          </a:xfrm>
+          <a:prstGeom prst="rect">
+            <a:avLst/>
+          </a:prstGeom>
+          <a:noFill/>
+        </p:spPr>
+        <p:txBody>
+          <a:bodyPr wrap="square" anchor="t" lIns="25400" rIns="25400" tIns="12700" bIns="12700">
             <a:spAutoFit/>
           </a:bodyPr>
           <a:lstStyle/>
           <a:p>
             <a:pPr algn="l"/>
             <a:r>
-              <a:rPr sz="1100" b="1" i="0">
-                <a:solidFill>
-                  <a:srgbClr val="E0A800"/>
-                </a:solidFill>
+              <a:rPr sz="1150" b="1" i="0">
+                <a:solidFill>
+                  <a:srgbClr val="D99A07"/>
+                </a:solidFill>
+                <a:latin typeface="Calibri"/>
               </a:rPr>
               <a:t>ALAN 2 &amp; 3</a:t>
             </a:r>
@@ -6425,32 +6740,33 @@
       </p:sp>
       <p:sp>
         <p:nvSpPr>
-          <p:cNvPr id="5" name="TextBox 4"/>
-          <p:cNvSpPr txBox="1"/>
-          <p:nvPr/>
-        </p:nvSpPr>
-        <p:spPr>
-          <a:xfrm>
-            <a:off x="365760" y="402336"/>
-            <a:ext cx="11430000" cy="640080"/>
-          </a:xfrm>
-          <a:prstGeom prst="rect">
-            <a:avLst/>
-          </a:prstGeom>
-          <a:noFill/>
-        </p:spPr>
-        <p:txBody>
-          <a:bodyPr wrap="square">
+          <p:cNvPr id="6" name="TextBox 5"/>
+          <p:cNvSpPr txBox="1"/>
+          <p:nvPr/>
+        </p:nvSpPr>
+        <p:spPr>
+          <a:xfrm>
+            <a:off x="411480" y="420624"/>
+            <a:ext cx="11338560" cy="603504"/>
+          </a:xfrm>
+          <a:prstGeom prst="rect">
+            <a:avLst/>
+          </a:prstGeom>
+          <a:noFill/>
+        </p:spPr>
+        <p:txBody>
+          <a:bodyPr wrap="square" anchor="t" lIns="25400" rIns="25400" tIns="12700" bIns="12700">
             <a:spAutoFit/>
           </a:bodyPr>
           <a:lstStyle/>
           <a:p>
             <a:pPr algn="l"/>
             <a:r>
-              <a:rPr sz="2400" b="1" i="0">
+              <a:rPr sz="2300" b="1" i="0">
                 <a:solidFill>
                   <a:srgbClr val="FFFFFF"/>
                 </a:solidFill>
+                <a:latin typeface="Calibri"/>
               </a:rPr>
               <a:t>Üretken Müzik Sistemleri ve YZ Müzik Tespiti</a:t>
             </a:r>
@@ -6459,22 +6775,22 @@
       </p:sp>
       <p:sp>
         <p:nvSpPr>
-          <p:cNvPr id="6" name="TextBox 5"/>
+          <p:cNvPr id="7" name="TextBox 6"/>
           <p:cNvSpPr txBox="1"/>
           <p:nvPr/>
         </p:nvSpPr>
         <p:spPr>
           <a:xfrm>
             <a:off x="365760" y="1508760"/>
-            <a:ext cx="5577840" cy="365760"/>
-          </a:xfrm>
-          <a:prstGeom prst="rect">
-            <a:avLst/>
-          </a:prstGeom>
-          <a:noFill/>
-        </p:spPr>
-        <p:txBody>
-          <a:bodyPr wrap="square">
+            <a:ext cx="5577840" cy="347472"/>
+          </a:xfrm>
+          <a:prstGeom prst="rect">
+            <a:avLst/>
+          </a:prstGeom>
+          <a:noFill/>
+        </p:spPr>
+        <p:txBody>
+          <a:bodyPr wrap="square" anchor="t" lIns="25400" rIns="25400" tIns="12700" bIns="12700">
             <a:spAutoFit/>
           </a:bodyPr>
           <a:lstStyle/>
@@ -6483,8 +6799,9 @@
             <a:r>
               <a:rPr sz="1400" b="1" i="0">
                 <a:solidFill>
-                  <a:srgbClr val="0D2B55"/>
-                </a:solidFill>
+                  <a:srgbClr val="102A4C"/>
+                </a:solidFill>
+                <a:latin typeface="Calibri"/>
               </a:rPr>
               <a:t>Üretici Sistemler</a:t>
             </a:r>
@@ -6493,13 +6810,13 @@
       </p:sp>
       <p:sp>
         <p:nvSpPr>
-          <p:cNvPr id="7" name="Rectangle 6"/>
+          <p:cNvPr id="8" name="Rectangle 7"/>
           <p:cNvSpPr/>
           <p:nvPr/>
         </p:nvSpPr>
         <p:spPr>
           <a:xfrm>
-            <a:off x="365760" y="1965960"/>
+            <a:off x="365760" y="1938528"/>
             <a:ext cx="5577840" cy="868680"/>
           </a:xfrm>
           <a:prstGeom prst="rect">
@@ -6510,9 +6827,10 @@
           </a:solidFill>
           <a:ln w="12700">
             <a:solidFill>
-              <a:srgbClr val="007A87"/>
+              <a:srgbClr val="0A808C"/>
             </a:solidFill>
           </a:ln>
+          <a:effectLst/>
         </p:spPr>
         <p:style>
           <a:lnRef idx="1">
@@ -6538,22 +6856,22 @@
       </p:sp>
       <p:sp>
         <p:nvSpPr>
-          <p:cNvPr id="8" name="TextBox 7"/>
-          <p:cNvSpPr txBox="1"/>
-          <p:nvPr/>
-        </p:nvSpPr>
-        <p:spPr>
-          <a:xfrm>
-            <a:off x="502920" y="2057400"/>
-            <a:ext cx="5303520" cy="320040"/>
-          </a:xfrm>
-          <a:prstGeom prst="rect">
-            <a:avLst/>
-          </a:prstGeom>
-          <a:noFill/>
-        </p:spPr>
-        <p:txBody>
-          <a:bodyPr wrap="square">
+          <p:cNvPr id="9" name="TextBox 8"/>
+          <p:cNvSpPr txBox="1"/>
+          <p:nvPr/>
+        </p:nvSpPr>
+        <p:spPr>
+          <a:xfrm>
+            <a:off x="502920" y="2029968"/>
+            <a:ext cx="5303520" cy="310896"/>
+          </a:xfrm>
+          <a:prstGeom prst="rect">
+            <a:avLst/>
+          </a:prstGeom>
+          <a:noFill/>
+        </p:spPr>
+        <p:txBody>
+          <a:bodyPr wrap="square" anchor="t" lIns="25400" rIns="25400" tIns="12700" bIns="12700">
             <a:spAutoFit/>
           </a:bodyPr>
           <a:lstStyle/>
@@ -6562,8 +6880,9 @@
             <a:r>
               <a:rPr sz="1250" b="1" i="0">
                 <a:solidFill>
-                  <a:srgbClr val="007A87"/>
-                </a:solidFill>
+                  <a:srgbClr val="0A808C"/>
+                </a:solidFill>
+                <a:latin typeface="Calibri"/>
               </a:rPr>
               <a:t>MusicGen [1]</a:t>
             </a:r>
@@ -6572,13 +6891,13 @@
       </p:sp>
       <p:sp>
         <p:nvSpPr>
-          <p:cNvPr id="9" name="TextBox 8"/>
-          <p:cNvSpPr txBox="1"/>
-          <p:nvPr/>
-        </p:nvSpPr>
-        <p:spPr>
-          <a:xfrm>
-            <a:off x="502920" y="2386584"/>
+          <p:cNvPr id="10" name="TextBox 9"/>
+          <p:cNvSpPr txBox="1"/>
+          <p:nvPr/>
+        </p:nvSpPr>
+        <p:spPr>
+          <a:xfrm>
+            <a:off x="502920" y="2359152"/>
             <a:ext cx="5303520" cy="384048"/>
           </a:xfrm>
           <a:prstGeom prst="rect">
@@ -6587,7 +6906,7 @@
           <a:noFill/>
         </p:spPr>
         <p:txBody>
-          <a:bodyPr wrap="square">
+          <a:bodyPr wrap="square" anchor="t" lIns="25400" rIns="25400" tIns="12700" bIns="12700">
             <a:spAutoFit/>
           </a:bodyPr>
           <a:lstStyle/>
@@ -6596,23 +6915,24 @@
             <a:r>
               <a:rPr sz="1100" b="0" i="0">
                 <a:solidFill>
-                  <a:srgbClr val="2A2A2A"/>
-                </a:solidFill>
-              </a:rPr>
-              <a:t>Copet vd., 2023 — Meta; metne koşullu, tek aşamalı transformer</a:t>
-            </a:r>
-          </a:p>
-        </p:txBody>
-      </p:sp>
-      <p:sp>
-        <p:nvSpPr>
-          <p:cNvPr id="10" name="Rectangle 9"/>
+                  <a:srgbClr val="242A30"/>
+                </a:solidFill>
+                <a:latin typeface="Calibri"/>
+              </a:rPr>
+              <a:t>Copet vd., 2023 (Meta) — metne koşullu, tek aşamalı transformer</a:t>
+            </a:r>
+          </a:p>
+        </p:txBody>
+      </p:sp>
+      <p:sp>
+        <p:nvSpPr>
+          <p:cNvPr id="11" name="Rectangle 10"/>
           <p:cNvSpPr/>
           <p:nvPr/>
         </p:nvSpPr>
         <p:spPr>
           <a:xfrm>
-            <a:off x="365760" y="2926080"/>
+            <a:off x="365760" y="2916936"/>
             <a:ext cx="5577840" cy="868680"/>
           </a:xfrm>
           <a:prstGeom prst="rect">
@@ -6623,9 +6943,10 @@
           </a:solidFill>
           <a:ln w="12700">
             <a:solidFill>
-              <a:srgbClr val="007A87"/>
+              <a:srgbClr val="0A808C"/>
             </a:solidFill>
           </a:ln>
+          <a:effectLst/>
         </p:spPr>
         <p:style>
           <a:lnRef idx="1">
@@ -6651,22 +6972,22 @@
       </p:sp>
       <p:sp>
         <p:nvSpPr>
-          <p:cNvPr id="11" name="TextBox 10"/>
-          <p:cNvSpPr txBox="1"/>
-          <p:nvPr/>
-        </p:nvSpPr>
-        <p:spPr>
-          <a:xfrm>
-            <a:off x="502920" y="3017520"/>
-            <a:ext cx="5303520" cy="320040"/>
-          </a:xfrm>
-          <a:prstGeom prst="rect">
-            <a:avLst/>
-          </a:prstGeom>
-          <a:noFill/>
-        </p:spPr>
-        <p:txBody>
-          <a:bodyPr wrap="square">
+          <p:cNvPr id="12" name="TextBox 11"/>
+          <p:cNvSpPr txBox="1"/>
+          <p:nvPr/>
+        </p:nvSpPr>
+        <p:spPr>
+          <a:xfrm>
+            <a:off x="502920" y="3008376"/>
+            <a:ext cx="5303520" cy="310896"/>
+          </a:xfrm>
+          <a:prstGeom prst="rect">
+            <a:avLst/>
+          </a:prstGeom>
+          <a:noFill/>
+        </p:spPr>
+        <p:txBody>
+          <a:bodyPr wrap="square" anchor="t" lIns="25400" rIns="25400" tIns="12700" bIns="12700">
             <a:spAutoFit/>
           </a:bodyPr>
           <a:lstStyle/>
@@ -6675,8 +6996,9 @@
             <a:r>
               <a:rPr sz="1250" b="1" i="0">
                 <a:solidFill>
-                  <a:srgbClr val="007A87"/>
-                </a:solidFill>
+                  <a:srgbClr val="0A808C"/>
+                </a:solidFill>
+                <a:latin typeface="Calibri"/>
               </a:rPr>
               <a:t>AudioLDM2 [2]</a:t>
             </a:r>
@@ -6685,13 +7007,13 @@
       </p:sp>
       <p:sp>
         <p:nvSpPr>
-          <p:cNvPr id="12" name="TextBox 11"/>
-          <p:cNvSpPr txBox="1"/>
-          <p:nvPr/>
-        </p:nvSpPr>
-        <p:spPr>
-          <a:xfrm>
-            <a:off x="502920" y="3346704"/>
+          <p:cNvPr id="13" name="TextBox 12"/>
+          <p:cNvSpPr txBox="1"/>
+          <p:nvPr/>
+        </p:nvSpPr>
+        <p:spPr>
+          <a:xfrm>
+            <a:off x="502920" y="3337560"/>
             <a:ext cx="5303520" cy="384048"/>
           </a:xfrm>
           <a:prstGeom prst="rect">
@@ -6700,7 +7022,7 @@
           <a:noFill/>
         </p:spPr>
         <p:txBody>
-          <a:bodyPr wrap="square">
+          <a:bodyPr wrap="square" anchor="t" lIns="25400" rIns="25400" tIns="12700" bIns="12700">
             <a:spAutoFit/>
           </a:bodyPr>
           <a:lstStyle/>
@@ -6709,23 +7031,24 @@
             <a:r>
               <a:rPr sz="1100" b="0" i="0">
                 <a:solidFill>
-                  <a:srgbClr val="2A2A2A"/>
-                </a:solidFill>
-              </a:rPr>
-              <a:t>Liu vd., 2023; latent difüzyon tabanlı üretim</a:t>
-            </a:r>
-          </a:p>
-        </p:txBody>
-      </p:sp>
-      <p:sp>
-        <p:nvSpPr>
-          <p:cNvPr id="13" name="Rectangle 12"/>
+                  <a:srgbClr val="242A30"/>
+                </a:solidFill>
+                <a:latin typeface="Calibri"/>
+              </a:rPr>
+              <a:t>Liu vd., 2023 — latent difüzyon tabanlı üretim</a:t>
+            </a:r>
+          </a:p>
+        </p:txBody>
+      </p:sp>
+      <p:sp>
+        <p:nvSpPr>
+          <p:cNvPr id="14" name="Rectangle 13"/>
           <p:cNvSpPr/>
           <p:nvPr/>
         </p:nvSpPr>
         <p:spPr>
           <a:xfrm>
-            <a:off x="365760" y="3886200"/>
+            <a:off x="365760" y="3895344"/>
             <a:ext cx="5577840" cy="868680"/>
           </a:xfrm>
           <a:prstGeom prst="rect">
@@ -6736,9 +7059,10 @@
           </a:solidFill>
           <a:ln w="12700">
             <a:solidFill>
-              <a:srgbClr val="007A87"/>
+              <a:srgbClr val="0A808C"/>
             </a:solidFill>
           </a:ln>
+          <a:effectLst/>
         </p:spPr>
         <p:style>
           <a:lnRef idx="1">
@@ -6764,22 +7088,22 @@
       </p:sp>
       <p:sp>
         <p:nvSpPr>
-          <p:cNvPr id="14" name="TextBox 13"/>
-          <p:cNvSpPr txBox="1"/>
-          <p:nvPr/>
-        </p:nvSpPr>
-        <p:spPr>
-          <a:xfrm>
-            <a:off x="502920" y="3977639"/>
-            <a:ext cx="5303520" cy="320040"/>
-          </a:xfrm>
-          <a:prstGeom prst="rect">
-            <a:avLst/>
-          </a:prstGeom>
-          <a:noFill/>
-        </p:spPr>
-        <p:txBody>
-          <a:bodyPr wrap="square">
+          <p:cNvPr id="15" name="TextBox 14"/>
+          <p:cNvSpPr txBox="1"/>
+          <p:nvPr/>
+        </p:nvSpPr>
+        <p:spPr>
+          <a:xfrm>
+            <a:off x="502920" y="3986783"/>
+            <a:ext cx="5303520" cy="310896"/>
+          </a:xfrm>
+          <a:prstGeom prst="rect">
+            <a:avLst/>
+          </a:prstGeom>
+          <a:noFill/>
+        </p:spPr>
+        <p:txBody>
+          <a:bodyPr wrap="square" anchor="t" lIns="25400" rIns="25400" tIns="12700" bIns="12700">
             <a:spAutoFit/>
           </a:bodyPr>
           <a:lstStyle/>
@@ -6788,8 +7112,9 @@
             <a:r>
               <a:rPr sz="1250" b="1" i="0">
                 <a:solidFill>
-                  <a:srgbClr val="007A87"/>
-                </a:solidFill>
+                  <a:srgbClr val="0A808C"/>
+                </a:solidFill>
+                <a:latin typeface="Calibri"/>
               </a:rPr>
               <a:t>Suno / Udio</a:t>
             </a:r>
@@ -6798,13 +7123,13 @@
       </p:sp>
       <p:sp>
         <p:nvSpPr>
-          <p:cNvPr id="15" name="TextBox 14"/>
-          <p:cNvSpPr txBox="1"/>
-          <p:nvPr/>
-        </p:nvSpPr>
-        <p:spPr>
-          <a:xfrm>
-            <a:off x="502920" y="4306824"/>
+          <p:cNvPr id="16" name="TextBox 15"/>
+          <p:cNvSpPr txBox="1"/>
+          <p:nvPr/>
+        </p:nvSpPr>
+        <p:spPr>
+          <a:xfrm>
+            <a:off x="502920" y="4315968"/>
             <a:ext cx="5303520" cy="384048"/>
           </a:xfrm>
           <a:prstGeom prst="rect">
@@ -6813,7 +7138,7 @@
           <a:noFill/>
         </p:spPr>
         <p:txBody>
-          <a:bodyPr wrap="square">
+          <a:bodyPr wrap="square" anchor="t" lIns="25400" rIns="25400" tIns="12700" bIns="12700">
             <a:spAutoFit/>
           </a:bodyPr>
           <a:lstStyle/>
@@ -6822,23 +7147,24 @@
             <a:r>
               <a:rPr sz="1100" b="0" i="0">
                 <a:solidFill>
-                  <a:srgbClr val="2A2A2A"/>
-                </a:solidFill>
-              </a:rPr>
-              <a:t>Ticari sistemler, 2024; yüksek kaliteli şarkı üretimi</a:t>
-            </a:r>
-          </a:p>
-        </p:txBody>
-      </p:sp>
-      <p:sp>
-        <p:nvSpPr>
-          <p:cNvPr id="16" name="Rectangle 15"/>
+                  <a:srgbClr val="242A30"/>
+                </a:solidFill>
+                <a:latin typeface="Calibri"/>
+              </a:rPr>
+              <a:t>Ticari sistemler, 2024 — yüksek kaliteli şarkı üretimi</a:t>
+            </a:r>
+          </a:p>
+        </p:txBody>
+      </p:sp>
+      <p:sp>
+        <p:nvSpPr>
+          <p:cNvPr id="17" name="Rectangle 16"/>
           <p:cNvSpPr/>
           <p:nvPr/>
         </p:nvSpPr>
         <p:spPr>
           <a:xfrm>
-            <a:off x="365760" y="4846320"/>
+            <a:off x="365760" y="4873752"/>
             <a:ext cx="5577840" cy="868680"/>
           </a:xfrm>
           <a:prstGeom prst="rect">
@@ -6849,9 +7175,10 @@
           </a:solidFill>
           <a:ln w="12700">
             <a:solidFill>
-              <a:srgbClr val="007A87"/>
+              <a:srgbClr val="0A808C"/>
             </a:solidFill>
           </a:ln>
+          <a:effectLst/>
         </p:spPr>
         <p:style>
           <a:lnRef idx="1">
@@ -6877,22 +7204,22 @@
       </p:sp>
       <p:sp>
         <p:nvSpPr>
-          <p:cNvPr id="17" name="TextBox 16"/>
-          <p:cNvSpPr txBox="1"/>
-          <p:nvPr/>
-        </p:nvSpPr>
-        <p:spPr>
-          <a:xfrm>
-            <a:off x="502920" y="4937760"/>
-            <a:ext cx="5303520" cy="320040"/>
-          </a:xfrm>
-          <a:prstGeom prst="rect">
-            <a:avLst/>
-          </a:prstGeom>
-          <a:noFill/>
-        </p:spPr>
-        <p:txBody>
-          <a:bodyPr wrap="square">
+          <p:cNvPr id="18" name="TextBox 17"/>
+          <p:cNvSpPr txBox="1"/>
+          <p:nvPr/>
+        </p:nvSpPr>
+        <p:spPr>
+          <a:xfrm>
+            <a:off x="502920" y="4965192"/>
+            <a:ext cx="5303520" cy="310896"/>
+          </a:xfrm>
+          <a:prstGeom prst="rect">
+            <a:avLst/>
+          </a:prstGeom>
+          <a:noFill/>
+        </p:spPr>
+        <p:txBody>
+          <a:bodyPr wrap="square" anchor="t" lIns="25400" rIns="25400" tIns="12700" bIns="12700">
             <a:spAutoFit/>
           </a:bodyPr>
           <a:lstStyle/>
@@ -6901,8 +7228,9 @@
             <a:r>
               <a:rPr sz="1250" b="1" i="0">
                 <a:solidFill>
-                  <a:srgbClr val="007A87"/>
-                </a:solidFill>
+                  <a:srgbClr val="0A808C"/>
+                </a:solidFill>
+                <a:latin typeface="Calibri"/>
               </a:rPr>
               <a:t>Stable Audio / Riffusion</a:t>
             </a:r>
@@ -6911,13 +7239,13 @@
       </p:sp>
       <p:sp>
         <p:nvSpPr>
-          <p:cNvPr id="18" name="TextBox 17"/>
-          <p:cNvSpPr txBox="1"/>
-          <p:nvPr/>
-        </p:nvSpPr>
-        <p:spPr>
-          <a:xfrm>
-            <a:off x="502920" y="5266944"/>
+          <p:cNvPr id="19" name="TextBox 18"/>
+          <p:cNvSpPr txBox="1"/>
+          <p:nvPr/>
+        </p:nvSpPr>
+        <p:spPr>
+          <a:xfrm>
+            <a:off x="502920" y="5294376"/>
             <a:ext cx="5303520" cy="384048"/>
           </a:xfrm>
           <a:prstGeom prst="rect">
@@ -6926,7 +7254,7 @@
           <a:noFill/>
         </p:spPr>
         <p:txBody>
-          <a:bodyPr wrap="square">
+          <a:bodyPr wrap="square" anchor="t" lIns="25400" rIns="25400" tIns="12700" bIns="12700">
             <a:spAutoFit/>
           </a:bodyPr>
           <a:lstStyle/>
@@ -6935,8 +7263,9 @@
             <a:r>
               <a:rPr sz="1100" b="0" i="0">
                 <a:solidFill>
-                  <a:srgbClr val="2A2A2A"/>
-                </a:solidFill>
+                  <a:srgbClr val="242A30"/>
+                </a:solidFill>
+                <a:latin typeface="Calibri"/>
               </a:rPr>
               <a:t>Difüzyon tabanlı açık sistemler</a:t>
             </a:r>
@@ -6945,22 +7274,22 @@
       </p:sp>
       <p:sp>
         <p:nvSpPr>
-          <p:cNvPr id="19" name="TextBox 18"/>
+          <p:cNvPr id="20" name="TextBox 19"/>
           <p:cNvSpPr txBox="1"/>
           <p:nvPr/>
         </p:nvSpPr>
         <p:spPr>
           <a:xfrm>
             <a:off x="6263640" y="1508760"/>
-            <a:ext cx="5486400" cy="365760"/>
-          </a:xfrm>
-          <a:prstGeom prst="rect">
-            <a:avLst/>
-          </a:prstGeom>
-          <a:noFill/>
-        </p:spPr>
-        <p:txBody>
-          <a:bodyPr wrap="square">
+            <a:ext cx="5486400" cy="347472"/>
+          </a:xfrm>
+          <a:prstGeom prst="rect">
+            <a:avLst/>
+          </a:prstGeom>
+          <a:noFill/>
+        </p:spPr>
+        <p:txBody>
+          <a:bodyPr wrap="square" anchor="t" lIns="25400" rIns="25400" tIns="12700" bIns="12700">
             <a:spAutoFit/>
           </a:bodyPr>
           <a:lstStyle/>
@@ -6969,8 +7298,9 @@
             <a:r>
               <a:rPr sz="1400" b="1" i="0">
                 <a:solidFill>
-                  <a:srgbClr val="0D2B55"/>
-                </a:solidFill>
+                  <a:srgbClr val="102A4C"/>
+                </a:solidFill>
+                <a:latin typeface="Calibri"/>
               </a:rPr>
               <a:t>Doğrudan İlgili Tespit Çalışmaları</a:t>
             </a:r>
@@ -6979,14 +7309,14 @@
       </p:sp>
       <p:sp>
         <p:nvSpPr>
-          <p:cNvPr id="20" name="Rectangle 19"/>
+          <p:cNvPr id="21" name="Rectangle 20"/>
           <p:cNvSpPr/>
           <p:nvPr/>
         </p:nvSpPr>
         <p:spPr>
           <a:xfrm>
-            <a:off x="6263640" y="1965960"/>
-            <a:ext cx="5486400" cy="685800"/>
+            <a:off x="6263640" y="1938528"/>
+            <a:ext cx="5559552" cy="694944"/>
           </a:xfrm>
           <a:prstGeom prst="rect">
             <a:avLst/>
@@ -6996,9 +7326,10 @@
           </a:solidFill>
           <a:ln w="12700">
             <a:solidFill>
-              <a:srgbClr val="E0A800"/>
+              <a:srgbClr val="D99A07"/>
             </a:solidFill>
           </a:ln>
+          <a:effectLst/>
         </p:spPr>
         <p:style>
           <a:lnRef idx="1">
@@ -7024,22 +7355,22 @@
       </p:sp>
       <p:sp>
         <p:nvSpPr>
-          <p:cNvPr id="21" name="TextBox 20"/>
-          <p:cNvSpPr txBox="1"/>
-          <p:nvPr/>
-        </p:nvSpPr>
-        <p:spPr>
-          <a:xfrm>
-            <a:off x="6400800" y="2029967"/>
-            <a:ext cx="5212080" cy="292608"/>
-          </a:xfrm>
-          <a:prstGeom prst="rect">
-            <a:avLst/>
-          </a:prstGeom>
-          <a:noFill/>
-        </p:spPr>
-        <p:txBody>
-          <a:bodyPr wrap="square">
+          <p:cNvPr id="22" name="TextBox 21"/>
+          <p:cNvSpPr txBox="1"/>
+          <p:nvPr/>
+        </p:nvSpPr>
+        <p:spPr>
+          <a:xfrm>
+            <a:off x="6400800" y="2002536"/>
+            <a:ext cx="5303520" cy="292608"/>
+          </a:xfrm>
+          <a:prstGeom prst="rect">
+            <a:avLst/>
+          </a:prstGeom>
+          <a:noFill/>
+        </p:spPr>
+        <p:txBody>
+          <a:bodyPr wrap="square" anchor="t" lIns="25400" rIns="25400" tIns="12700" bIns="12700">
             <a:spAutoFit/>
           </a:bodyPr>
           <a:lstStyle/>
@@ -7048,32 +7379,33 @@
             <a:r>
               <a:rPr sz="1150" b="1" i="0">
                 <a:solidFill>
-                  <a:srgbClr val="9A7300"/>
-                </a:solidFill>
-              </a:rPr>
-              <a:t>Afchar vd. [5] (2025)</a:t>
-            </a:r>
-          </a:p>
-        </p:txBody>
-      </p:sp>
-      <p:sp>
-        <p:nvSpPr>
-          <p:cNvPr id="22" name="TextBox 21"/>
-          <p:cNvSpPr txBox="1"/>
-          <p:nvPr/>
-        </p:nvSpPr>
-        <p:spPr>
-          <a:xfrm>
-            <a:off x="6400800" y="2313432"/>
-            <a:ext cx="5212080" cy="310896"/>
-          </a:xfrm>
-          <a:prstGeom prst="rect">
-            <a:avLst/>
-          </a:prstGeom>
-          <a:noFill/>
-        </p:spPr>
-        <p:txBody>
-          <a:bodyPr wrap="square">
+                  <a:srgbClr val="8A6600"/>
+                </a:solidFill>
+                <a:latin typeface="Calibri"/>
+              </a:rPr>
+              <a:t>Afchar vd. [5] · 2025</a:t>
+            </a:r>
+          </a:p>
+        </p:txBody>
+      </p:sp>
+      <p:sp>
+        <p:nvSpPr>
+          <p:cNvPr id="23" name="TextBox 22"/>
+          <p:cNvSpPr txBox="1"/>
+          <p:nvPr/>
+        </p:nvSpPr>
+        <p:spPr>
+          <a:xfrm>
+            <a:off x="6400800" y="2286000"/>
+            <a:ext cx="5303520" cy="310896"/>
+          </a:xfrm>
+          <a:prstGeom prst="rect">
+            <a:avLst/>
+          </a:prstGeom>
+          <a:noFill/>
+        </p:spPr>
+        <p:txBody>
+          <a:bodyPr wrap="square" anchor="t" lIns="25400" rIns="25400" tIns="12700" bIns="12700">
             <a:spAutoFit/>
           </a:bodyPr>
           <a:lstStyle/>
@@ -7082,24 +7414,25 @@
             <a:r>
               <a:rPr sz="1050" b="0" i="0">
                 <a:solidFill>
-                  <a:srgbClr val="2A2A2A"/>
-                </a:solidFill>
-              </a:rPr>
-              <a:t>Oto-kodlayıcı artefaktı; aynı üreticiye %99,8, farklı üreticide ciddi düşüş</a:t>
-            </a:r>
-          </a:p>
-        </p:txBody>
-      </p:sp>
-      <p:sp>
-        <p:nvSpPr>
-          <p:cNvPr id="23" name="Rectangle 22"/>
+                  <a:srgbClr val="242A30"/>
+                </a:solidFill>
+                <a:latin typeface="Calibri"/>
+              </a:rPr>
+              <a:t>Oto-kodlayıcı artefaktı; aynı üreticide %99,8, farklı üreticide ciddi düşüş</a:t>
+            </a:r>
+          </a:p>
+        </p:txBody>
+      </p:sp>
+      <p:sp>
+        <p:nvSpPr>
+          <p:cNvPr id="24" name="Rectangle 23"/>
           <p:cNvSpPr/>
           <p:nvPr/>
         </p:nvSpPr>
         <p:spPr>
           <a:xfrm>
-            <a:off x="6263640" y="2724912"/>
-            <a:ext cx="5486400" cy="685800"/>
+            <a:off x="6263640" y="2715768"/>
+            <a:ext cx="5559552" cy="694944"/>
           </a:xfrm>
           <a:prstGeom prst="rect">
             <a:avLst/>
@@ -7109,9 +7442,10 @@
           </a:solidFill>
           <a:ln w="12700">
             <a:solidFill>
-              <a:srgbClr val="E0A800"/>
+              <a:srgbClr val="D99A07"/>
             </a:solidFill>
           </a:ln>
+          <a:effectLst/>
         </p:spPr>
         <p:style>
           <a:lnRef idx="1">
@@ -7137,22 +7471,22 @@
       </p:sp>
       <p:sp>
         <p:nvSpPr>
-          <p:cNvPr id="24" name="TextBox 23"/>
-          <p:cNvSpPr txBox="1"/>
-          <p:nvPr/>
-        </p:nvSpPr>
-        <p:spPr>
-          <a:xfrm>
-            <a:off x="6400800" y="2788920"/>
-            <a:ext cx="5212080" cy="292608"/>
-          </a:xfrm>
-          <a:prstGeom prst="rect">
-            <a:avLst/>
-          </a:prstGeom>
-          <a:noFill/>
-        </p:spPr>
-        <p:txBody>
-          <a:bodyPr wrap="square">
+          <p:cNvPr id="25" name="TextBox 24"/>
+          <p:cNvSpPr txBox="1"/>
+          <p:nvPr/>
+        </p:nvSpPr>
+        <p:spPr>
+          <a:xfrm>
+            <a:off x="6400800" y="2779776"/>
+            <a:ext cx="5303520" cy="292608"/>
+          </a:xfrm>
+          <a:prstGeom prst="rect">
+            <a:avLst/>
+          </a:prstGeom>
+          <a:noFill/>
+        </p:spPr>
+        <p:txBody>
+          <a:bodyPr wrap="square" anchor="t" lIns="25400" rIns="25400" tIns="12700" bIns="12700">
             <a:spAutoFit/>
           </a:bodyPr>
           <a:lstStyle/>
@@ -7161,32 +7495,33 @@
             <a:r>
               <a:rPr sz="1150" b="1" i="0">
                 <a:solidFill>
-                  <a:srgbClr val="9A7300"/>
-                </a:solidFill>
-              </a:rPr>
-              <a:t>Cros Vila vd. [33] (2025)</a:t>
-            </a:r>
-          </a:p>
-        </p:txBody>
-      </p:sp>
-      <p:sp>
-        <p:nvSpPr>
-          <p:cNvPr id="25" name="TextBox 24"/>
-          <p:cNvSpPr txBox="1"/>
-          <p:nvPr/>
-        </p:nvSpPr>
-        <p:spPr>
-          <a:xfrm>
-            <a:off x="6400800" y="3072384"/>
-            <a:ext cx="5212080" cy="310896"/>
-          </a:xfrm>
-          <a:prstGeom prst="rect">
-            <a:avLst/>
-          </a:prstGeom>
-          <a:noFill/>
-        </p:spPr>
-        <p:txBody>
-          <a:bodyPr wrap="square">
+                  <a:srgbClr val="8A6600"/>
+                </a:solidFill>
+                <a:latin typeface="Calibri"/>
+              </a:rPr>
+              <a:t>Cros Vila vd. [33] · 2025</a:t>
+            </a:r>
+          </a:p>
+        </p:txBody>
+      </p:sp>
+      <p:sp>
+        <p:nvSpPr>
+          <p:cNvPr id="26" name="TextBox 25"/>
+          <p:cNvSpPr txBox="1"/>
+          <p:nvPr/>
+        </p:nvSpPr>
+        <p:spPr>
+          <a:xfrm>
+            <a:off x="6400800" y="3063240"/>
+            <a:ext cx="5303520" cy="310896"/>
+          </a:xfrm>
+          <a:prstGeom prst="rect">
+            <a:avLst/>
+          </a:prstGeom>
+          <a:noFill/>
+        </p:spPr>
+        <p:txBody>
+          <a:bodyPr wrap="square" anchor="t" lIns="25400" rIns="25400" tIns="12700" bIns="12700">
             <a:spAutoFit/>
           </a:bodyPr>
           <a:lstStyle/>
@@ -7195,8 +7530,9 @@
             <a:r>
               <a:rPr sz="1050" b="0" i="0">
                 <a:solidFill>
-                  <a:srgbClr val="2A2A2A"/>
-                </a:solidFill>
+                  <a:srgbClr val="242A30"/>
+                </a:solidFill>
+                <a:latin typeface="Calibri"/>
               </a:rPr>
               <a:t>Spektral + ritmik öznitelik + SVM; müzik-spesifik</a:t>
             </a:r>
@@ -7205,14 +7541,14 @@
       </p:sp>
       <p:sp>
         <p:nvSpPr>
-          <p:cNvPr id="26" name="Rectangle 25"/>
+          <p:cNvPr id="27" name="Rectangle 26"/>
           <p:cNvSpPr/>
           <p:nvPr/>
         </p:nvSpPr>
         <p:spPr>
           <a:xfrm>
-            <a:off x="6263640" y="3483863"/>
-            <a:ext cx="5486400" cy="685800"/>
+            <a:off x="6263640" y="3493008"/>
+            <a:ext cx="5559552" cy="694944"/>
           </a:xfrm>
           <a:prstGeom prst="rect">
             <a:avLst/>
@@ -7222,9 +7558,10 @@
           </a:solidFill>
           <a:ln w="12700">
             <a:solidFill>
-              <a:srgbClr val="E0A800"/>
+              <a:srgbClr val="D99A07"/>
             </a:solidFill>
           </a:ln>
+          <a:effectLst/>
         </p:spPr>
         <p:style>
           <a:lnRef idx="1">
@@ -7250,22 +7587,22 @@
       </p:sp>
       <p:sp>
         <p:nvSpPr>
-          <p:cNvPr id="27" name="TextBox 26"/>
-          <p:cNvSpPr txBox="1"/>
-          <p:nvPr/>
-        </p:nvSpPr>
-        <p:spPr>
-          <a:xfrm>
-            <a:off x="6400800" y="3547871"/>
-            <a:ext cx="5212080" cy="292608"/>
-          </a:xfrm>
-          <a:prstGeom prst="rect">
-            <a:avLst/>
-          </a:prstGeom>
-          <a:noFill/>
-        </p:spPr>
-        <p:txBody>
-          <a:bodyPr wrap="square">
+          <p:cNvPr id="28" name="TextBox 27"/>
+          <p:cNvSpPr txBox="1"/>
+          <p:nvPr/>
+        </p:nvSpPr>
+        <p:spPr>
+          <a:xfrm>
+            <a:off x="6400800" y="3557016"/>
+            <a:ext cx="5303520" cy="292608"/>
+          </a:xfrm>
+          <a:prstGeom prst="rect">
+            <a:avLst/>
+          </a:prstGeom>
+          <a:noFill/>
+        </p:spPr>
+        <p:txBody>
+          <a:bodyPr wrap="square" anchor="t" lIns="25400" rIns="25400" tIns="12700" bIns="12700">
             <a:spAutoFit/>
           </a:bodyPr>
           <a:lstStyle/>
@@ -7274,32 +7611,33 @@
             <a:r>
               <a:rPr sz="1150" b="1" i="0">
                 <a:solidFill>
-                  <a:srgbClr val="9A7300"/>
-                </a:solidFill>
-              </a:rPr>
-              <a:t>Li vd. [22] (2026)</a:t>
-            </a:r>
-          </a:p>
-        </p:txBody>
-      </p:sp>
-      <p:sp>
-        <p:nvSpPr>
-          <p:cNvPr id="28" name="TextBox 27"/>
-          <p:cNvSpPr txBox="1"/>
-          <p:nvPr/>
-        </p:nvSpPr>
-        <p:spPr>
-          <a:xfrm>
-            <a:off x="6400800" y="3831335"/>
-            <a:ext cx="5212080" cy="310896"/>
-          </a:xfrm>
-          <a:prstGeom prst="rect">
-            <a:avLst/>
-          </a:prstGeom>
-          <a:noFill/>
-        </p:spPr>
-        <p:txBody>
-          <a:bodyPr wrap="square">
+                  <a:srgbClr val="8A6600"/>
+                </a:solidFill>
+                <a:latin typeface="Calibri"/>
+              </a:rPr>
+              <a:t>Li vd. [22] · 2026</a:t>
+            </a:r>
+          </a:p>
+        </p:txBody>
+      </p:sp>
+      <p:sp>
+        <p:nvSpPr>
+          <p:cNvPr id="29" name="TextBox 28"/>
+          <p:cNvSpPr txBox="1"/>
+          <p:nvPr/>
+        </p:nvSpPr>
+        <p:spPr>
+          <a:xfrm>
+            <a:off x="6400800" y="3840480"/>
+            <a:ext cx="5303520" cy="310896"/>
+          </a:xfrm>
+          <a:prstGeom prst="rect">
+            <a:avLst/>
+          </a:prstGeom>
+          <a:noFill/>
+        </p:spPr>
+        <p:txBody>
+          <a:bodyPr wrap="square" anchor="t" lIns="25400" rIns="25400" tIns="12700" bIns="12700">
             <a:spAutoFit/>
           </a:bodyPr>
           <a:lstStyle/>
@@ -7308,24 +7646,25 @@
             <a:r>
               <a:rPr sz="1050" b="0" i="0">
                 <a:solidFill>
-                  <a:srgbClr val="2A2A2A"/>
-                </a:solidFill>
-              </a:rPr>
-              <a:t>Açıklanabilir öznitelik tabanlı erken sistematik değerlendirme</a:t>
-            </a:r>
-          </a:p>
-        </p:txBody>
-      </p:sp>
-      <p:sp>
-        <p:nvSpPr>
-          <p:cNvPr id="29" name="Rectangle 28"/>
+                  <a:srgbClr val="242A30"/>
+                </a:solidFill>
+                <a:latin typeface="Calibri"/>
+              </a:rPr>
+              <a:t>Açıklanabilir öznitelik tabanlı erken değerlendirme</a:t>
+            </a:r>
+          </a:p>
+        </p:txBody>
+      </p:sp>
+      <p:sp>
+        <p:nvSpPr>
+          <p:cNvPr id="30" name="Rectangle 29"/>
           <p:cNvSpPr/>
           <p:nvPr/>
         </p:nvSpPr>
         <p:spPr>
           <a:xfrm>
-            <a:off x="6263640" y="4242816"/>
-            <a:ext cx="5486400" cy="685800"/>
+            <a:off x="6263640" y="4270248"/>
+            <a:ext cx="5559552" cy="694944"/>
           </a:xfrm>
           <a:prstGeom prst="rect">
             <a:avLst/>
@@ -7335,9 +7674,10 @@
           </a:solidFill>
           <a:ln w="12700">
             <a:solidFill>
-              <a:srgbClr val="E0A800"/>
+              <a:srgbClr val="D99A07"/>
             </a:solidFill>
           </a:ln>
+          <a:effectLst/>
         </p:spPr>
         <p:style>
           <a:lnRef idx="1">
@@ -7363,22 +7703,22 @@
       </p:sp>
       <p:sp>
         <p:nvSpPr>
-          <p:cNvPr id="30" name="TextBox 29"/>
-          <p:cNvSpPr txBox="1"/>
-          <p:nvPr/>
-        </p:nvSpPr>
-        <p:spPr>
-          <a:xfrm>
-            <a:off x="6400800" y="4306824"/>
-            <a:ext cx="5212080" cy="292608"/>
-          </a:xfrm>
-          <a:prstGeom prst="rect">
-            <a:avLst/>
-          </a:prstGeom>
-          <a:noFill/>
-        </p:spPr>
-        <p:txBody>
-          <a:bodyPr wrap="square">
+          <p:cNvPr id="31" name="TextBox 30"/>
+          <p:cNvSpPr txBox="1"/>
+          <p:nvPr/>
+        </p:nvSpPr>
+        <p:spPr>
+          <a:xfrm>
+            <a:off x="6400800" y="4334256"/>
+            <a:ext cx="5303520" cy="292608"/>
+          </a:xfrm>
+          <a:prstGeom prst="rect">
+            <a:avLst/>
+          </a:prstGeom>
+          <a:noFill/>
+        </p:spPr>
+        <p:txBody>
+          <a:bodyPr wrap="square" anchor="t" lIns="25400" rIns="25400" tIns="12700" bIns="12700">
             <a:spAutoFit/>
           </a:bodyPr>
           <a:lstStyle/>
@@ -7387,32 +7727,33 @@
             <a:r>
               <a:rPr sz="1150" b="1" i="0">
                 <a:solidFill>
-                  <a:srgbClr val="9A7300"/>
-                </a:solidFill>
-              </a:rPr>
-              <a:t>SONICS [34] (2025)</a:t>
-            </a:r>
-          </a:p>
-        </p:txBody>
-      </p:sp>
-      <p:sp>
-        <p:nvSpPr>
-          <p:cNvPr id="31" name="TextBox 30"/>
-          <p:cNvSpPr txBox="1"/>
-          <p:nvPr/>
-        </p:nvSpPr>
-        <p:spPr>
-          <a:xfrm>
-            <a:off x="6400800" y="4590288"/>
-            <a:ext cx="5212080" cy="310896"/>
-          </a:xfrm>
-          <a:prstGeom prst="rect">
-            <a:avLst/>
-          </a:prstGeom>
-          <a:noFill/>
-        </p:spPr>
-        <p:txBody>
-          <a:bodyPr wrap="square">
+                  <a:srgbClr val="8A6600"/>
+                </a:solidFill>
+                <a:latin typeface="Calibri"/>
+              </a:rPr>
+              <a:t>SONICS [34] · 2025</a:t>
+            </a:r>
+          </a:p>
+        </p:txBody>
+      </p:sp>
+      <p:sp>
+        <p:nvSpPr>
+          <p:cNvPr id="32" name="TextBox 31"/>
+          <p:cNvSpPr txBox="1"/>
+          <p:nvPr/>
+        </p:nvSpPr>
+        <p:spPr>
+          <a:xfrm>
+            <a:off x="6400800" y="4617720"/>
+            <a:ext cx="5303520" cy="310896"/>
+          </a:xfrm>
+          <a:prstGeom prst="rect">
+            <a:avLst/>
+          </a:prstGeom>
+          <a:noFill/>
+        </p:spPr>
+        <p:txBody>
+          <a:bodyPr wrap="square" anchor="t" lIns="25400" rIns="25400" tIns="12700" bIns="12700">
             <a:spAutoFit/>
           </a:bodyPr>
           <a:lstStyle/>
@@ -7421,8 +7762,9 @@
             <a:r>
               <a:rPr sz="1050" b="0" i="0">
                 <a:solidFill>
-                  <a:srgbClr val="2A2A2A"/>
-                </a:solidFill>
+                  <a:srgbClr val="242A30"/>
+                </a:solidFill>
+                <a:latin typeface="Calibri"/>
               </a:rPr>
               <a:t>Transformer DL; 97k şarkılık büyük veri kümesi</a:t>
             </a:r>
@@ -7431,14 +7773,14 @@
       </p:sp>
       <p:sp>
         <p:nvSpPr>
-          <p:cNvPr id="32" name="Rectangle 31"/>
+          <p:cNvPr id="33" name="Rectangle 32"/>
           <p:cNvSpPr/>
           <p:nvPr/>
         </p:nvSpPr>
         <p:spPr>
           <a:xfrm>
-            <a:off x="6263640" y="5001768"/>
-            <a:ext cx="5486400" cy="685800"/>
+            <a:off x="6263640" y="5047488"/>
+            <a:ext cx="5559552" cy="694944"/>
           </a:xfrm>
           <a:prstGeom prst="rect">
             <a:avLst/>
@@ -7448,9 +7790,10 @@
           </a:solidFill>
           <a:ln w="12700">
             <a:solidFill>
-              <a:srgbClr val="E0A800"/>
+              <a:srgbClr val="D99A07"/>
             </a:solidFill>
           </a:ln>
+          <a:effectLst/>
         </p:spPr>
         <p:style>
           <a:lnRef idx="1">
@@ -7476,22 +7819,22 @@
       </p:sp>
       <p:sp>
         <p:nvSpPr>
-          <p:cNvPr id="33" name="TextBox 32"/>
-          <p:cNvSpPr txBox="1"/>
-          <p:nvPr/>
-        </p:nvSpPr>
-        <p:spPr>
-          <a:xfrm>
-            <a:off x="6400800" y="5065776"/>
-            <a:ext cx="5212080" cy="292608"/>
-          </a:xfrm>
-          <a:prstGeom prst="rect">
-            <a:avLst/>
-          </a:prstGeom>
-          <a:noFill/>
-        </p:spPr>
-        <p:txBody>
-          <a:bodyPr wrap="square">
+          <p:cNvPr id="34" name="TextBox 33"/>
+          <p:cNvSpPr txBox="1"/>
+          <p:nvPr/>
+        </p:nvSpPr>
+        <p:spPr>
+          <a:xfrm>
+            <a:off x="6400800" y="5111496"/>
+            <a:ext cx="5303520" cy="292608"/>
+          </a:xfrm>
+          <a:prstGeom prst="rect">
+            <a:avLst/>
+          </a:prstGeom>
+          <a:noFill/>
+        </p:spPr>
+        <p:txBody>
+          <a:bodyPr wrap="square" anchor="t" lIns="25400" rIns="25400" tIns="12700" bIns="12700">
             <a:spAutoFit/>
           </a:bodyPr>
           <a:lstStyle/>
@@ -7500,32 +7843,33 @@
             <a:r>
               <a:rPr sz="1150" b="1" i="0">
                 <a:solidFill>
-                  <a:srgbClr val="9A7300"/>
-                </a:solidFill>
-              </a:rPr>
-              <a:t>FakeMusicCaps [35] (2025)</a:t>
-            </a:r>
-          </a:p>
-        </p:txBody>
-      </p:sp>
-      <p:sp>
-        <p:nvSpPr>
-          <p:cNvPr id="34" name="TextBox 33"/>
-          <p:cNvSpPr txBox="1"/>
-          <p:nvPr/>
-        </p:nvSpPr>
-        <p:spPr>
-          <a:xfrm>
-            <a:off x="6400800" y="5349240"/>
-            <a:ext cx="5212080" cy="310896"/>
-          </a:xfrm>
-          <a:prstGeom prst="rect">
-            <a:avLst/>
-          </a:prstGeom>
-          <a:noFill/>
-        </p:spPr>
-        <p:txBody>
-          <a:bodyPr wrap="square">
+                  <a:srgbClr val="8A6600"/>
+                </a:solidFill>
+                <a:latin typeface="Calibri"/>
+              </a:rPr>
+              <a:t>FakeMusicCaps [35] · 2025</a:t>
+            </a:r>
+          </a:p>
+        </p:txBody>
+      </p:sp>
+      <p:sp>
+        <p:nvSpPr>
+          <p:cNvPr id="35" name="TextBox 34"/>
+          <p:cNvSpPr txBox="1"/>
+          <p:nvPr/>
+        </p:nvSpPr>
+        <p:spPr>
+          <a:xfrm>
+            <a:off x="6400800" y="5394959"/>
+            <a:ext cx="5303520" cy="310896"/>
+          </a:xfrm>
+          <a:prstGeom prst="rect">
+            <a:avLst/>
+          </a:prstGeom>
+          <a:noFill/>
+        </p:spPr>
+        <p:txBody>
+          <a:bodyPr wrap="square" anchor="t" lIns="25400" rIns="25400" tIns="12700" bIns="12700">
             <a:spAutoFit/>
           </a:bodyPr>
           <a:lstStyle/>
@@ -7534,8 +7878,9 @@
             <a:r>
               <a:rPr sz="1050" b="0" i="0">
                 <a:solidFill>
-                  <a:srgbClr val="2A2A2A"/>
-                </a:solidFill>
+                  <a:srgbClr val="242A30"/>
+                </a:solidFill>
+                <a:latin typeface="Calibri"/>
               </a:rPr>
               <a:t>Metin→müzik tespiti ve atıf veri kümesi</a:t>
             </a:r>
@@ -7544,22 +7889,66 @@
       </p:sp>
       <p:sp>
         <p:nvSpPr>
-          <p:cNvPr id="35" name="TextBox 34"/>
-          <p:cNvSpPr txBox="1"/>
-          <p:nvPr/>
-        </p:nvSpPr>
-        <p:spPr>
-          <a:xfrm>
-            <a:off x="365760" y="6510528"/>
-            <a:ext cx="8229600" cy="301752"/>
-          </a:xfrm>
-          <a:prstGeom prst="rect">
-            <a:avLst/>
-          </a:prstGeom>
-          <a:noFill/>
-        </p:spPr>
-        <p:txBody>
-          <a:bodyPr wrap="square">
+          <p:cNvPr id="36" name="Rectangle 35"/>
+          <p:cNvSpPr/>
+          <p:nvPr/>
+        </p:nvSpPr>
+        <p:spPr>
+          <a:xfrm>
+            <a:off x="365760" y="6419088"/>
+            <a:ext cx="11457432" cy="10972"/>
+          </a:xfrm>
+          <a:prstGeom prst="rect">
+            <a:avLst/>
+          </a:prstGeom>
+          <a:solidFill>
+            <a:srgbClr val="D2D9E0"/>
+          </a:solidFill>
+          <a:ln>
+            <a:noFill/>
+          </a:ln>
+          <a:effectLst/>
+        </p:spPr>
+        <p:style>
+          <a:lnRef idx="1">
+            <a:schemeClr val="accent1"/>
+          </a:lnRef>
+          <a:fillRef idx="3">
+            <a:schemeClr val="accent1"/>
+          </a:fillRef>
+          <a:effectRef idx="2">
+            <a:schemeClr val="accent1"/>
+          </a:effectRef>
+          <a:fontRef idx="minor">
+            <a:schemeClr val="lt1"/>
+          </a:fontRef>
+        </p:style>
+        <p:txBody>
+          <a:bodyPr rtlCol="0" anchor="ctr"/>
+          <a:lstStyle/>
+          <a:p>
+            <a:pPr algn="ctr"/>
+          </a:p>
+        </p:txBody>
+      </p:sp>
+      <p:sp>
+        <p:nvSpPr>
+          <p:cNvPr id="37" name="TextBox 36"/>
+          <p:cNvSpPr txBox="1"/>
+          <p:nvPr/>
+        </p:nvSpPr>
+        <p:spPr>
+          <a:xfrm>
+            <a:off x="365760" y="6473952"/>
+            <a:ext cx="7772400" cy="292608"/>
+          </a:xfrm>
+          <a:prstGeom prst="rect">
+            <a:avLst/>
+          </a:prstGeom>
+          <a:noFill/>
+        </p:spPr>
+        <p:txBody>
+          <a:bodyPr wrap="square" anchor="t" lIns="25400" rIns="25400" tIns="12700" bIns="12700">
             <a:spAutoFit/>
           </a:bodyPr>
           <a:lstStyle/>
@@ -7568,32 +7957,33 @@
             <a:r>
               <a:rPr sz="900" b="0" i="0">
                 <a:solidFill>
-                  <a:srgbClr val="66707A"/>
-                </a:solidFill>
-              </a:rPr>
-              <a:t>AURIS  ·  Hasan Arthur Altuntaş  ·  BM498 Mezuniyet Tezi</a:t>
-            </a:r>
-          </a:p>
-        </p:txBody>
-      </p:sp>
-      <p:sp>
-        <p:nvSpPr>
-          <p:cNvPr id="36" name="TextBox 35"/>
-          <p:cNvSpPr txBox="1"/>
-          <p:nvPr/>
-        </p:nvSpPr>
-        <p:spPr>
-          <a:xfrm>
-            <a:off x="8595360" y="6510528"/>
-            <a:ext cx="3200400" cy="301752"/>
-          </a:xfrm>
-          <a:prstGeom prst="rect">
-            <a:avLst/>
-          </a:prstGeom>
-          <a:noFill/>
-        </p:spPr>
-        <p:txBody>
-          <a:bodyPr wrap="square">
+                  <a:srgbClr val="6A7480"/>
+                </a:solidFill>
+                <a:latin typeface="Calibri"/>
+              </a:rPr>
+              <a:t>AURIS  ·  Yapay Zekâ Üretimli Müzik Tespiti</a:t>
+            </a:r>
+          </a:p>
+        </p:txBody>
+      </p:sp>
+      <p:sp>
+        <p:nvSpPr>
+          <p:cNvPr id="38" name="TextBox 37"/>
+          <p:cNvSpPr txBox="1"/>
+          <p:nvPr/>
+        </p:nvSpPr>
+        <p:spPr>
+          <a:xfrm>
+            <a:off x="5029200" y="6473952"/>
+            <a:ext cx="6793992" cy="292608"/>
+          </a:xfrm>
+          <a:prstGeom prst="rect">
+            <a:avLst/>
+          </a:prstGeom>
+          <a:noFill/>
+        </p:spPr>
+        <p:txBody>
+          <a:bodyPr wrap="square" anchor="t" lIns="25400" rIns="25400" tIns="12700" bIns="12700">
             <a:spAutoFit/>
           </a:bodyPr>
           <a:lstStyle/>
@@ -7602,10 +7992,11 @@
             <a:r>
               <a:rPr sz="900" b="0" i="0">
                 <a:solidFill>
-                  <a:srgbClr val="66707A"/>
-                </a:solidFill>
-              </a:rPr>
-              <a:t>Düzce Üniversitesi · 2025-2026</a:t>
+                  <a:srgbClr val="6A7480"/>
+                </a:solidFill>
+                <a:latin typeface="Calibri"/>
+              </a:rPr>
+              <a:t>Hasan Arthur Altuntaş  ·  BM498  ·  Düzce Üniversitesi  ·  2025-2026</a:t>
             </a:r>
           </a:p>
         </p:txBody>
@@ -7624,7 +8015,7 @@
     <p:bg>
       <p:bgPr>
         <a:solidFill>
-          <a:srgbClr val="F4F6F8"/>
+          <a:srgbClr val="F6F8FA"/>
         </a:solidFill>
         <a:effectLst/>
       </p:bgPr>
@@ -7651,11 +8042,12 @@
             <a:avLst/>
           </a:prstGeom>
           <a:solidFill>
-            <a:srgbClr val="0D2B55"/>
+            <a:srgbClr val="102A4C"/>
           </a:solidFill>
           <a:ln>
             <a:noFill/>
           </a:ln>
+          <a:effectLst/>
         </p:spPr>
         <p:style>
           <a:lnRef idx="1">
@@ -7688,17 +8080,18 @@
         <p:spPr>
           <a:xfrm>
             <a:off x="0" y="1371600"/>
-            <a:ext cx="12188952" cy="54864"/>
+            <a:ext cx="12188952" cy="50292"/>
           </a:xfrm>
           <a:prstGeom prst="rect">
             <a:avLst/>
           </a:prstGeom>
           <a:solidFill>
-            <a:srgbClr val="E0A800"/>
+            <a:srgbClr val="D99A07"/>
           </a:solidFill>
           <a:ln>
             <a:noFill/>
           </a:ln>
+          <a:effectLst/>
         </p:spPr>
         <p:style>
           <a:lnRef idx="1">
@@ -7724,128 +8117,25 @@
       </p:sp>
       <p:sp>
         <p:nvSpPr>
-          <p:cNvPr id="4" name="TextBox 3"/>
-          <p:cNvSpPr txBox="1"/>
-          <p:nvPr/>
-        </p:nvSpPr>
-        <p:spPr>
-          <a:xfrm>
-            <a:off x="365760" y="109728"/>
-            <a:ext cx="11430000" cy="320040"/>
-          </a:xfrm>
-          <a:prstGeom prst="rect">
-            <a:avLst/>
-          </a:prstGeom>
-          <a:noFill/>
-        </p:spPr>
-        <p:txBody>
-          <a:bodyPr wrap="square">
-            <a:spAutoFit/>
-          </a:bodyPr>
-          <a:lstStyle/>
-          <a:p>
-            <a:pPr algn="l"/>
-            <a:r>
-              <a:rPr sz="1100" b="1" i="0">
-                <a:solidFill>
-                  <a:srgbClr val="E0A800"/>
-                </a:solidFill>
-              </a:rPr>
-              <a:t>SENTEZ</a:t>
-            </a:r>
-          </a:p>
-        </p:txBody>
-      </p:sp>
-      <p:sp>
-        <p:nvSpPr>
-          <p:cNvPr id="5" name="TextBox 4"/>
-          <p:cNvSpPr txBox="1"/>
-          <p:nvPr/>
-        </p:nvSpPr>
-        <p:spPr>
-          <a:xfrm>
-            <a:off x="365760" y="402336"/>
-            <a:ext cx="11430000" cy="640080"/>
-          </a:xfrm>
-          <a:prstGeom prst="rect">
-            <a:avLst/>
-          </a:prstGeom>
-          <a:noFill/>
-        </p:spPr>
-        <p:txBody>
-          <a:bodyPr wrap="square">
-            <a:spAutoFit/>
-          </a:bodyPr>
-          <a:lstStyle/>
-          <a:p>
-            <a:pPr algn="l"/>
-            <a:r>
-              <a:rPr sz="2400" b="1" i="0">
-                <a:solidFill>
-                  <a:srgbClr val="FFFFFF"/>
-                </a:solidFill>
-              </a:rPr>
-              <a:t>Literatür Boşluğu ve AURIS'in Konumu</a:t>
-            </a:r>
-          </a:p>
-        </p:txBody>
-      </p:sp>
-      <p:sp>
-        <p:nvSpPr>
-          <p:cNvPr id="6" name="TextBox 5"/>
-          <p:cNvSpPr txBox="1"/>
-          <p:nvPr/>
-        </p:nvSpPr>
-        <p:spPr>
-          <a:xfrm>
-            <a:off x="365760" y="1554480"/>
-            <a:ext cx="5669280" cy="411480"/>
-          </a:xfrm>
-          <a:prstGeom prst="rect">
-            <a:avLst/>
-          </a:prstGeom>
-          <a:noFill/>
-        </p:spPr>
-        <p:txBody>
-          <a:bodyPr wrap="square">
-            <a:spAutoFit/>
-          </a:bodyPr>
-          <a:lstStyle/>
-          <a:p>
-            <a:pPr algn="l"/>
-            <a:r>
-              <a:rPr sz="1500" b="1" i="0">
-                <a:solidFill>
-                  <a:srgbClr val="B52A2A"/>
-                </a:solidFill>
-              </a:rPr>
-              <a:t>Tespit Edilen Boşluklar</a:t>
-            </a:r>
-          </a:p>
-        </p:txBody>
-      </p:sp>
-      <p:sp>
-        <p:nvSpPr>
-          <p:cNvPr id="7" name="Rectangle 6"/>
+          <p:cNvPr id="4" name="Rectangle 3"/>
           <p:cNvSpPr/>
           <p:nvPr/>
         </p:nvSpPr>
         <p:spPr>
           <a:xfrm>
-            <a:off x="365760" y="2011680"/>
-            <a:ext cx="5669280" cy="713232"/>
+            <a:off x="0" y="0"/>
+            <a:ext cx="164592" cy="1371600"/>
           </a:xfrm>
           <a:prstGeom prst="rect">
             <a:avLst/>
           </a:prstGeom>
           <a:solidFill>
-            <a:srgbClr val="FDECEC"/>
+            <a:srgbClr val="D99A07"/>
           </a:solidFill>
-          <a:ln w="12700">
-            <a:solidFill>
-              <a:srgbClr val="B52A2A"/>
-            </a:solidFill>
+          <a:ln>
+            <a:noFill/>
           </a:ln>
+          <a:effectLst/>
         </p:spPr>
         <p:style>
           <a:lnRef idx="1">
@@ -7871,94 +8161,132 @@
       </p:sp>
       <p:sp>
         <p:nvSpPr>
-          <p:cNvPr id="8" name="TextBox 7"/>
-          <p:cNvSpPr txBox="1"/>
-          <p:nvPr/>
-        </p:nvSpPr>
-        <p:spPr>
-          <a:xfrm>
-            <a:off x="502920" y="2066544"/>
-            <a:ext cx="457200" cy="603504"/>
-          </a:xfrm>
-          <a:prstGeom prst="rect">
-            <a:avLst/>
-          </a:prstGeom>
-          <a:noFill/>
-        </p:spPr>
-        <p:txBody>
-          <a:bodyPr wrap="square" anchor="ctr">
+          <p:cNvPr id="5" name="TextBox 4"/>
+          <p:cNvSpPr txBox="1"/>
+          <p:nvPr/>
+        </p:nvSpPr>
+        <p:spPr>
+          <a:xfrm>
+            <a:off x="411480" y="146304"/>
+            <a:ext cx="10058400" cy="292608"/>
+          </a:xfrm>
+          <a:prstGeom prst="rect">
+            <a:avLst/>
+          </a:prstGeom>
+          <a:noFill/>
+        </p:spPr>
+        <p:txBody>
+          <a:bodyPr wrap="square" anchor="t" lIns="25400" rIns="25400" tIns="12700" bIns="12700">
             <a:spAutoFit/>
           </a:bodyPr>
           <a:lstStyle/>
           <a:p>
             <a:pPr algn="l"/>
             <a:r>
-              <a:rPr sz="1800" b="1" i="0">
-                <a:solidFill>
-                  <a:srgbClr val="B52A2A"/>
-                </a:solidFill>
-              </a:rPr>
-              <a:t>✗</a:t>
-            </a:r>
-          </a:p>
-        </p:txBody>
-      </p:sp>
-      <p:sp>
-        <p:nvSpPr>
-          <p:cNvPr id="9" name="TextBox 8"/>
-          <p:cNvSpPr txBox="1"/>
-          <p:nvPr/>
-        </p:nvSpPr>
-        <p:spPr>
-          <a:xfrm>
-            <a:off x="960120" y="2066544"/>
-            <a:ext cx="4937760" cy="603504"/>
-          </a:xfrm>
-          <a:prstGeom prst="rect">
-            <a:avLst/>
-          </a:prstGeom>
-          <a:noFill/>
-        </p:spPr>
-        <p:txBody>
-          <a:bodyPr wrap="square" anchor="ctr">
+              <a:rPr sz="1150" b="1" i="0">
+                <a:solidFill>
+                  <a:srgbClr val="D99A07"/>
+                </a:solidFill>
+                <a:latin typeface="Calibri"/>
+              </a:rPr>
+              <a:t>SENTEZ</a:t>
+            </a:r>
+          </a:p>
+        </p:txBody>
+      </p:sp>
+      <p:sp>
+        <p:nvSpPr>
+          <p:cNvPr id="6" name="TextBox 5"/>
+          <p:cNvSpPr txBox="1"/>
+          <p:nvPr/>
+        </p:nvSpPr>
+        <p:spPr>
+          <a:xfrm>
+            <a:off x="411480" y="420624"/>
+            <a:ext cx="11338560" cy="603504"/>
+          </a:xfrm>
+          <a:prstGeom prst="rect">
+            <a:avLst/>
+          </a:prstGeom>
+          <a:noFill/>
+        </p:spPr>
+        <p:txBody>
+          <a:bodyPr wrap="square" anchor="t" lIns="25400" rIns="25400" tIns="12700" bIns="12700">
             <a:spAutoFit/>
           </a:bodyPr>
           <a:lstStyle/>
           <a:p>
             <a:pPr algn="l"/>
             <a:r>
-              <a:rPr sz="1150" b="0" i="0">
-                <a:solidFill>
-                  <a:srgbClr val="2A2A2A"/>
-                </a:solidFill>
-              </a:rPr>
-              <a:t>Müzik için topluluk (ensemble) yaklaşımı yetersiz uygulanmış</a:t>
-            </a:r>
-          </a:p>
-        </p:txBody>
-      </p:sp>
-      <p:sp>
-        <p:nvSpPr>
-          <p:cNvPr id="10" name="Rectangle 9"/>
+              <a:rPr sz="2300" b="1" i="0">
+                <a:solidFill>
+                  <a:srgbClr val="FFFFFF"/>
+                </a:solidFill>
+                <a:latin typeface="Calibri"/>
+              </a:rPr>
+              <a:t>Literatür Boşluğu ve AURIS'in Konumu</a:t>
+            </a:r>
+          </a:p>
+        </p:txBody>
+      </p:sp>
+      <p:sp>
+        <p:nvSpPr>
+          <p:cNvPr id="7" name="TextBox 6"/>
+          <p:cNvSpPr txBox="1"/>
+          <p:nvPr/>
+        </p:nvSpPr>
+        <p:spPr>
+          <a:xfrm>
+            <a:off x="365760" y="1554480"/>
+            <a:ext cx="5623560" cy="365760"/>
+          </a:xfrm>
+          <a:prstGeom prst="rect">
+            <a:avLst/>
+          </a:prstGeom>
+          <a:noFill/>
+        </p:spPr>
+        <p:txBody>
+          <a:bodyPr wrap="square" anchor="t" lIns="25400" rIns="25400" tIns="12700" bIns="12700">
+            <a:spAutoFit/>
+          </a:bodyPr>
+          <a:lstStyle/>
+          <a:p>
+            <a:pPr algn="l"/>
+            <a:r>
+              <a:rPr sz="1500" b="1" i="0">
+                <a:solidFill>
+                  <a:srgbClr val="B32929"/>
+                </a:solidFill>
+                <a:latin typeface="Calibri"/>
+              </a:rPr>
+              <a:t>Tespit Edilen Boşluklar</a:t>
+            </a:r>
+          </a:p>
+        </p:txBody>
+      </p:sp>
+      <p:sp>
+        <p:nvSpPr>
+          <p:cNvPr id="8" name="Rectangle 7"/>
           <p:cNvSpPr/>
           <p:nvPr/>
         </p:nvSpPr>
         <p:spPr>
           <a:xfrm>
-            <a:off x="365760" y="2816352"/>
-            <a:ext cx="5669280" cy="713232"/>
+            <a:off x="365760" y="2011680"/>
+            <a:ext cx="5623560" cy="713232"/>
           </a:xfrm>
           <a:prstGeom prst="rect">
             <a:avLst/>
           </a:prstGeom>
           <a:solidFill>
-            <a:srgbClr val="FDECEC"/>
+            <a:srgbClr val="FCECEC"/>
           </a:solidFill>
           <a:ln w="12700">
             <a:solidFill>
-              <a:srgbClr val="B52A2A"/>
+              <a:srgbClr val="B32929"/>
             </a:solidFill>
           </a:ln>
+          <a:effectLst/>
         </p:spPr>
         <p:style>
           <a:lnRef idx="1">
@@ -7984,94 +8312,97 @@
       </p:sp>
       <p:sp>
         <p:nvSpPr>
-          <p:cNvPr id="11" name="TextBox 10"/>
-          <p:cNvSpPr txBox="1"/>
-          <p:nvPr/>
-        </p:nvSpPr>
-        <p:spPr>
-          <a:xfrm>
-            <a:off x="502920" y="2871216"/>
-            <a:ext cx="457200" cy="603504"/>
-          </a:xfrm>
-          <a:prstGeom prst="rect">
-            <a:avLst/>
-          </a:prstGeom>
-          <a:noFill/>
-        </p:spPr>
-        <p:txBody>
-          <a:bodyPr wrap="square" anchor="ctr">
+          <p:cNvPr id="9" name="TextBox 8"/>
+          <p:cNvSpPr txBox="1"/>
+          <p:nvPr/>
+        </p:nvSpPr>
+        <p:spPr>
+          <a:xfrm>
+            <a:off x="475488" y="2011680"/>
+            <a:ext cx="457200" cy="713232"/>
+          </a:xfrm>
+          <a:prstGeom prst="rect">
+            <a:avLst/>
+          </a:prstGeom>
+          <a:noFill/>
+        </p:spPr>
+        <p:txBody>
+          <a:bodyPr wrap="square" anchor="ctr" lIns="25400" rIns="25400" tIns="12700" bIns="12700">
+            <a:spAutoFit/>
+          </a:bodyPr>
+          <a:lstStyle/>
+          <a:p>
+            <a:pPr algn="ctr"/>
+            <a:r>
+              <a:rPr sz="1800" b="1" i="0">
+                <a:solidFill>
+                  <a:srgbClr val="B32929"/>
+                </a:solidFill>
+                <a:latin typeface="Calibri"/>
+              </a:rPr>
+              <a:t>✗</a:t>
+            </a:r>
+          </a:p>
+        </p:txBody>
+      </p:sp>
+      <p:sp>
+        <p:nvSpPr>
+          <p:cNvPr id="10" name="TextBox 9"/>
+          <p:cNvSpPr txBox="1"/>
+          <p:nvPr/>
+        </p:nvSpPr>
+        <p:spPr>
+          <a:xfrm>
+            <a:off x="960120" y="2011680"/>
+            <a:ext cx="4937760" cy="713232"/>
+          </a:xfrm>
+          <a:prstGeom prst="rect">
+            <a:avLst/>
+          </a:prstGeom>
+          <a:noFill/>
+        </p:spPr>
+        <p:txBody>
+          <a:bodyPr wrap="square" anchor="ctr" lIns="25400" rIns="25400" tIns="12700" bIns="12700">
             <a:spAutoFit/>
           </a:bodyPr>
           <a:lstStyle/>
           <a:p>
             <a:pPr algn="l"/>
             <a:r>
-              <a:rPr sz="1800" b="1" i="0">
-                <a:solidFill>
-                  <a:srgbClr val="B52A2A"/>
-                </a:solidFill>
-              </a:rPr>
-              <a:t>✗</a:t>
-            </a:r>
-          </a:p>
-        </p:txBody>
-      </p:sp>
-      <p:sp>
-        <p:nvSpPr>
-          <p:cNvPr id="12" name="TextBox 11"/>
-          <p:cNvSpPr txBox="1"/>
-          <p:nvPr/>
-        </p:nvSpPr>
-        <p:spPr>
-          <a:xfrm>
-            <a:off x="960120" y="2871216"/>
-            <a:ext cx="4937760" cy="603504"/>
-          </a:xfrm>
-          <a:prstGeom prst="rect">
-            <a:avLst/>
-          </a:prstGeom>
-          <a:noFill/>
-        </p:spPr>
-        <p:txBody>
-          <a:bodyPr wrap="square" anchor="ctr">
-            <a:spAutoFit/>
-          </a:bodyPr>
-          <a:lstStyle/>
-          <a:p>
-            <a:pPr algn="l"/>
-            <a:r>
               <a:rPr sz="1150" b="0" i="0">
                 <a:solidFill>
-                  <a:srgbClr val="2A2A2A"/>
-                </a:solidFill>
-              </a:rPr>
-              <a:t>47 boyutlu, beş aileli heterojen öznitelik vektörü kullanılmamış</a:t>
-            </a:r>
-          </a:p>
-        </p:txBody>
-      </p:sp>
-      <p:sp>
-        <p:nvSpPr>
-          <p:cNvPr id="13" name="Rectangle 12"/>
+                  <a:srgbClr val="242A30"/>
+                </a:solidFill>
+                <a:latin typeface="Calibri"/>
+              </a:rPr>
+              <a:t>Müzik için topluluk yaklaşımı yetersiz uygulanmış</a:t>
+            </a:r>
+          </a:p>
+        </p:txBody>
+      </p:sp>
+      <p:sp>
+        <p:nvSpPr>
+          <p:cNvPr id="11" name="Rectangle 10"/>
           <p:cNvSpPr/>
           <p:nvPr/>
         </p:nvSpPr>
         <p:spPr>
           <a:xfrm>
-            <a:off x="365760" y="3621024"/>
-            <a:ext cx="5669280" cy="713232"/>
+            <a:off x="365760" y="2834640"/>
+            <a:ext cx="5623560" cy="713232"/>
           </a:xfrm>
           <a:prstGeom prst="rect">
             <a:avLst/>
           </a:prstGeom>
           <a:solidFill>
-            <a:srgbClr val="FDECEC"/>
+            <a:srgbClr val="FCECEC"/>
           </a:solidFill>
           <a:ln w="12700">
             <a:solidFill>
-              <a:srgbClr val="B52A2A"/>
+              <a:srgbClr val="B32929"/>
             </a:solidFill>
           </a:ln>
+          <a:effectLst/>
         </p:spPr>
         <p:style>
           <a:lnRef idx="1">
@@ -8097,94 +8428,97 @@
       </p:sp>
       <p:sp>
         <p:nvSpPr>
-          <p:cNvPr id="14" name="TextBox 13"/>
-          <p:cNvSpPr txBox="1"/>
-          <p:nvPr/>
-        </p:nvSpPr>
-        <p:spPr>
-          <a:xfrm>
-            <a:off x="502920" y="3675887"/>
-            <a:ext cx="457200" cy="603504"/>
-          </a:xfrm>
-          <a:prstGeom prst="rect">
-            <a:avLst/>
-          </a:prstGeom>
-          <a:noFill/>
-        </p:spPr>
-        <p:txBody>
-          <a:bodyPr wrap="square" anchor="ctr">
+          <p:cNvPr id="12" name="TextBox 11"/>
+          <p:cNvSpPr txBox="1"/>
+          <p:nvPr/>
+        </p:nvSpPr>
+        <p:spPr>
+          <a:xfrm>
+            <a:off x="475488" y="2834640"/>
+            <a:ext cx="457200" cy="713232"/>
+          </a:xfrm>
+          <a:prstGeom prst="rect">
+            <a:avLst/>
+          </a:prstGeom>
+          <a:noFill/>
+        </p:spPr>
+        <p:txBody>
+          <a:bodyPr wrap="square" anchor="ctr" lIns="25400" rIns="25400" tIns="12700" bIns="12700">
+            <a:spAutoFit/>
+          </a:bodyPr>
+          <a:lstStyle/>
+          <a:p>
+            <a:pPr algn="ctr"/>
+            <a:r>
+              <a:rPr sz="1800" b="1" i="0">
+                <a:solidFill>
+                  <a:srgbClr val="B32929"/>
+                </a:solidFill>
+                <a:latin typeface="Calibri"/>
+              </a:rPr>
+              <a:t>✗</a:t>
+            </a:r>
+          </a:p>
+        </p:txBody>
+      </p:sp>
+      <p:sp>
+        <p:nvSpPr>
+          <p:cNvPr id="13" name="TextBox 12"/>
+          <p:cNvSpPr txBox="1"/>
+          <p:nvPr/>
+        </p:nvSpPr>
+        <p:spPr>
+          <a:xfrm>
+            <a:off x="960120" y="2834640"/>
+            <a:ext cx="4937760" cy="713232"/>
+          </a:xfrm>
+          <a:prstGeom prst="rect">
+            <a:avLst/>
+          </a:prstGeom>
+          <a:noFill/>
+        </p:spPr>
+        <p:txBody>
+          <a:bodyPr wrap="square" anchor="ctr" lIns="25400" rIns="25400" tIns="12700" bIns="12700">
             <a:spAutoFit/>
           </a:bodyPr>
           <a:lstStyle/>
           <a:p>
             <a:pPr algn="l"/>
             <a:r>
-              <a:rPr sz="1800" b="1" i="0">
-                <a:solidFill>
-                  <a:srgbClr val="B52A2A"/>
-                </a:solidFill>
-              </a:rPr>
-              <a:t>✗</a:t>
-            </a:r>
-          </a:p>
-        </p:txBody>
-      </p:sp>
-      <p:sp>
-        <p:nvSpPr>
-          <p:cNvPr id="15" name="TextBox 14"/>
-          <p:cNvSpPr txBox="1"/>
-          <p:nvPr/>
-        </p:nvSpPr>
-        <p:spPr>
-          <a:xfrm>
-            <a:off x="960120" y="3675887"/>
-            <a:ext cx="4937760" cy="603504"/>
-          </a:xfrm>
-          <a:prstGeom prst="rect">
-            <a:avLst/>
-          </a:prstGeom>
-          <a:noFill/>
-        </p:spPr>
-        <p:txBody>
-          <a:bodyPr wrap="square" anchor="ctr">
-            <a:spAutoFit/>
-          </a:bodyPr>
-          <a:lstStyle/>
-          <a:p>
-            <a:pPr algn="l"/>
-            <a:r>
               <a:rPr sz="1150" b="0" i="0">
                 <a:solidFill>
-                  <a:srgbClr val="2A2A2A"/>
-                </a:solidFill>
-              </a:rPr>
-              <a:t>Üretici/kaynak bazlı ayrıntılı performans analizi eksik</a:t>
-            </a:r>
-          </a:p>
-        </p:txBody>
-      </p:sp>
-      <p:sp>
-        <p:nvSpPr>
-          <p:cNvPr id="16" name="Rectangle 15"/>
+                  <a:srgbClr val="242A30"/>
+                </a:solidFill>
+                <a:latin typeface="Calibri"/>
+              </a:rPr>
+              <a:t>Çok aileli (47 boyut) heterojen öznitelik seti yok</a:t>
+            </a:r>
+          </a:p>
+        </p:txBody>
+      </p:sp>
+      <p:sp>
+        <p:nvSpPr>
+          <p:cNvPr id="14" name="Rectangle 13"/>
           <p:cNvSpPr/>
           <p:nvPr/>
         </p:nvSpPr>
         <p:spPr>
           <a:xfrm>
-            <a:off x="365760" y="4425696"/>
-            <a:ext cx="5669280" cy="713232"/>
+            <a:off x="365760" y="3657600"/>
+            <a:ext cx="5623560" cy="713232"/>
           </a:xfrm>
           <a:prstGeom prst="rect">
             <a:avLst/>
           </a:prstGeom>
           <a:solidFill>
-            <a:srgbClr val="FDECEC"/>
+            <a:srgbClr val="FCECEC"/>
           </a:solidFill>
           <a:ln w="12700">
             <a:solidFill>
-              <a:srgbClr val="B52A2A"/>
+              <a:srgbClr val="B32929"/>
             </a:solidFill>
           </a:ln>
+          <a:effectLst/>
         </p:spPr>
         <p:style>
           <a:lnRef idx="1">
@@ -8210,94 +8544,97 @@
       </p:sp>
       <p:sp>
         <p:nvSpPr>
-          <p:cNvPr id="17" name="TextBox 16"/>
-          <p:cNvSpPr txBox="1"/>
-          <p:nvPr/>
-        </p:nvSpPr>
-        <p:spPr>
-          <a:xfrm>
-            <a:off x="502920" y="4480559"/>
-            <a:ext cx="457200" cy="603504"/>
-          </a:xfrm>
-          <a:prstGeom prst="rect">
-            <a:avLst/>
-          </a:prstGeom>
-          <a:noFill/>
-        </p:spPr>
-        <p:txBody>
-          <a:bodyPr wrap="square" anchor="ctr">
+          <p:cNvPr id="15" name="TextBox 14"/>
+          <p:cNvSpPr txBox="1"/>
+          <p:nvPr/>
+        </p:nvSpPr>
+        <p:spPr>
+          <a:xfrm>
+            <a:off x="475488" y="3657600"/>
+            <a:ext cx="457200" cy="713232"/>
+          </a:xfrm>
+          <a:prstGeom prst="rect">
+            <a:avLst/>
+          </a:prstGeom>
+          <a:noFill/>
+        </p:spPr>
+        <p:txBody>
+          <a:bodyPr wrap="square" anchor="ctr" lIns="25400" rIns="25400" tIns="12700" bIns="12700">
+            <a:spAutoFit/>
+          </a:bodyPr>
+          <a:lstStyle/>
+          <a:p>
+            <a:pPr algn="ctr"/>
+            <a:r>
+              <a:rPr sz="1800" b="1" i="0">
+                <a:solidFill>
+                  <a:srgbClr val="B32929"/>
+                </a:solidFill>
+                <a:latin typeface="Calibri"/>
+              </a:rPr>
+              <a:t>✗</a:t>
+            </a:r>
+          </a:p>
+        </p:txBody>
+      </p:sp>
+      <p:sp>
+        <p:nvSpPr>
+          <p:cNvPr id="16" name="TextBox 15"/>
+          <p:cNvSpPr txBox="1"/>
+          <p:nvPr/>
+        </p:nvSpPr>
+        <p:spPr>
+          <a:xfrm>
+            <a:off x="960120" y="3657600"/>
+            <a:ext cx="4937760" cy="713232"/>
+          </a:xfrm>
+          <a:prstGeom prst="rect">
+            <a:avLst/>
+          </a:prstGeom>
+          <a:noFill/>
+        </p:spPr>
+        <p:txBody>
+          <a:bodyPr wrap="square" anchor="ctr" lIns="25400" rIns="25400" tIns="12700" bIns="12700">
             <a:spAutoFit/>
           </a:bodyPr>
           <a:lstStyle/>
           <a:p>
             <a:pPr algn="l"/>
             <a:r>
-              <a:rPr sz="1800" b="1" i="0">
-                <a:solidFill>
-                  <a:srgbClr val="B52A2A"/>
-                </a:solidFill>
-              </a:rPr>
-              <a:t>✗</a:t>
-            </a:r>
-          </a:p>
-        </p:txBody>
-      </p:sp>
-      <p:sp>
-        <p:nvSpPr>
-          <p:cNvPr id="18" name="TextBox 17"/>
-          <p:cNvSpPr txBox="1"/>
-          <p:nvPr/>
-        </p:nvSpPr>
-        <p:spPr>
-          <a:xfrm>
-            <a:off x="960120" y="4480559"/>
-            <a:ext cx="4937760" cy="603504"/>
-          </a:xfrm>
-          <a:prstGeom prst="rect">
-            <a:avLst/>
-          </a:prstGeom>
-          <a:noFill/>
-        </p:spPr>
-        <p:txBody>
-          <a:bodyPr wrap="square" anchor="ctr">
-            <a:spAutoFit/>
-          </a:bodyPr>
-          <a:lstStyle/>
-          <a:p>
-            <a:pPr algn="l"/>
-            <a:r>
               <a:rPr sz="1150" b="0" i="0">
                 <a:solidFill>
-                  <a:srgbClr val="2A2A2A"/>
-                </a:solidFill>
-              </a:rPr>
-              <a:t>SHAP/TreeSHAP açıklanabilirliği müzik tespitine taşınmamış</a:t>
-            </a:r>
-          </a:p>
-        </p:txBody>
-      </p:sp>
-      <p:sp>
-        <p:nvSpPr>
-          <p:cNvPr id="19" name="Rectangle 18"/>
+                  <a:srgbClr val="242A30"/>
+                </a:solidFill>
+                <a:latin typeface="Calibri"/>
+              </a:rPr>
+              <a:t>Üretici/kaynak bazlı performans analizi eksik</a:t>
+            </a:r>
+          </a:p>
+        </p:txBody>
+      </p:sp>
+      <p:sp>
+        <p:nvSpPr>
+          <p:cNvPr id="17" name="Rectangle 16"/>
           <p:cNvSpPr/>
           <p:nvPr/>
         </p:nvSpPr>
         <p:spPr>
           <a:xfrm>
-            <a:off x="365760" y="5230368"/>
-            <a:ext cx="5669280" cy="713232"/>
+            <a:off x="365760" y="4480560"/>
+            <a:ext cx="5623560" cy="713232"/>
           </a:xfrm>
           <a:prstGeom prst="rect">
             <a:avLst/>
           </a:prstGeom>
           <a:solidFill>
-            <a:srgbClr val="FDECEC"/>
+            <a:srgbClr val="FCECEC"/>
           </a:solidFill>
           <a:ln w="12700">
             <a:solidFill>
-              <a:srgbClr val="B52A2A"/>
+              <a:srgbClr val="B32929"/>
             </a:solidFill>
           </a:ln>
+          <a:effectLst/>
         </p:spPr>
         <p:style>
           <a:lnRef idx="1">
@@ -8323,128 +8660,97 @@
       </p:sp>
       <p:sp>
         <p:nvSpPr>
-          <p:cNvPr id="20" name="TextBox 19"/>
-          <p:cNvSpPr txBox="1"/>
-          <p:nvPr/>
-        </p:nvSpPr>
-        <p:spPr>
-          <a:xfrm>
-            <a:off x="502920" y="5285232"/>
-            <a:ext cx="457200" cy="603504"/>
-          </a:xfrm>
-          <a:prstGeom prst="rect">
-            <a:avLst/>
-          </a:prstGeom>
-          <a:noFill/>
-        </p:spPr>
-        <p:txBody>
-          <a:bodyPr wrap="square" anchor="ctr">
+          <p:cNvPr id="18" name="TextBox 17"/>
+          <p:cNvSpPr txBox="1"/>
+          <p:nvPr/>
+        </p:nvSpPr>
+        <p:spPr>
+          <a:xfrm>
+            <a:off x="475488" y="4480560"/>
+            <a:ext cx="457200" cy="713232"/>
+          </a:xfrm>
+          <a:prstGeom prst="rect">
+            <a:avLst/>
+          </a:prstGeom>
+          <a:noFill/>
+        </p:spPr>
+        <p:txBody>
+          <a:bodyPr wrap="square" anchor="ctr" lIns="25400" rIns="25400" tIns="12700" bIns="12700">
+            <a:spAutoFit/>
+          </a:bodyPr>
+          <a:lstStyle/>
+          <a:p>
+            <a:pPr algn="ctr"/>
+            <a:r>
+              <a:rPr sz="1800" b="1" i="0">
+                <a:solidFill>
+                  <a:srgbClr val="B32929"/>
+                </a:solidFill>
+                <a:latin typeface="Calibri"/>
+              </a:rPr>
+              <a:t>✗</a:t>
+            </a:r>
+          </a:p>
+        </p:txBody>
+      </p:sp>
+      <p:sp>
+        <p:nvSpPr>
+          <p:cNvPr id="19" name="TextBox 18"/>
+          <p:cNvSpPr txBox="1"/>
+          <p:nvPr/>
+        </p:nvSpPr>
+        <p:spPr>
+          <a:xfrm>
+            <a:off x="960120" y="4480560"/>
+            <a:ext cx="4937760" cy="713232"/>
+          </a:xfrm>
+          <a:prstGeom prst="rect">
+            <a:avLst/>
+          </a:prstGeom>
+          <a:noFill/>
+        </p:spPr>
+        <p:txBody>
+          <a:bodyPr wrap="square" anchor="ctr" lIns="25400" rIns="25400" tIns="12700" bIns="12700">
             <a:spAutoFit/>
           </a:bodyPr>
           <a:lstStyle/>
           <a:p>
             <a:pPr algn="l"/>
             <a:r>
-              <a:rPr sz="1800" b="1" i="0">
-                <a:solidFill>
-                  <a:srgbClr val="B52A2A"/>
-                </a:solidFill>
-              </a:rPr>
-              <a:t>✗</a:t>
-            </a:r>
-          </a:p>
-        </p:txBody>
-      </p:sp>
-      <p:sp>
-        <p:nvSpPr>
-          <p:cNvPr id="21" name="TextBox 20"/>
-          <p:cNvSpPr txBox="1"/>
-          <p:nvPr/>
-        </p:nvSpPr>
-        <p:spPr>
-          <a:xfrm>
-            <a:off x="960120" y="5285232"/>
-            <a:ext cx="4937760" cy="603504"/>
-          </a:xfrm>
-          <a:prstGeom prst="rect">
-            <a:avLst/>
-          </a:prstGeom>
-          <a:noFill/>
-        </p:spPr>
-        <p:txBody>
-          <a:bodyPr wrap="square" anchor="ctr">
-            <a:spAutoFit/>
-          </a:bodyPr>
-          <a:lstStyle/>
-          <a:p>
-            <a:pPr algn="l"/>
-            <a:r>
               <a:rPr sz="1150" b="0" i="0">
                 <a:solidFill>
-                  <a:srgbClr val="2A2A2A"/>
-                </a:solidFill>
-              </a:rPr>
-              <a:t>Youden J karar eşiği optimizasyonu uygulanmamış</a:t>
-            </a:r>
-          </a:p>
-        </p:txBody>
-      </p:sp>
-      <p:sp>
-        <p:nvSpPr>
-          <p:cNvPr id="22" name="TextBox 21"/>
-          <p:cNvSpPr txBox="1"/>
-          <p:nvPr/>
-        </p:nvSpPr>
-        <p:spPr>
-          <a:xfrm>
-            <a:off x="6355080" y="1554480"/>
-            <a:ext cx="5486400" cy="411480"/>
-          </a:xfrm>
-          <a:prstGeom prst="rect">
-            <a:avLst/>
-          </a:prstGeom>
-          <a:noFill/>
-        </p:spPr>
-        <p:txBody>
-          <a:bodyPr wrap="square">
-            <a:spAutoFit/>
-          </a:bodyPr>
-          <a:lstStyle/>
-          <a:p>
-            <a:pPr algn="l"/>
-            <a:r>
-              <a:rPr sz="1500" b="1" i="0">
-                <a:solidFill>
-                  <a:srgbClr val="1A6B3A"/>
-                </a:solidFill>
-              </a:rPr>
-              <a:t>AURIS'in Çözümü</a:t>
-            </a:r>
-          </a:p>
-        </p:txBody>
-      </p:sp>
-      <p:sp>
-        <p:nvSpPr>
-          <p:cNvPr id="23" name="Rectangle 22"/>
+                  <a:srgbClr val="242A30"/>
+                </a:solidFill>
+                <a:latin typeface="Calibri"/>
+              </a:rPr>
+              <a:t>SHAP/TreeSHAP açıklanabilirliği taşınmamış</a:t>
+            </a:r>
+          </a:p>
+        </p:txBody>
+      </p:sp>
+      <p:sp>
+        <p:nvSpPr>
+          <p:cNvPr id="20" name="Rectangle 19"/>
           <p:cNvSpPr/>
           <p:nvPr/>
         </p:nvSpPr>
         <p:spPr>
           <a:xfrm>
-            <a:off x="6355080" y="2011680"/>
-            <a:ext cx="5486400" cy="713232"/>
+            <a:off x="365760" y="5303520"/>
+            <a:ext cx="5623560" cy="713232"/>
           </a:xfrm>
           <a:prstGeom prst="rect">
             <a:avLst/>
           </a:prstGeom>
           <a:solidFill>
-            <a:srgbClr val="E9F6EC"/>
+            <a:srgbClr val="FCECEC"/>
           </a:solidFill>
           <a:ln w="12700">
             <a:solidFill>
-              <a:srgbClr val="1A6B3A"/>
+              <a:srgbClr val="B32929"/>
             </a:solidFill>
           </a:ln>
+          <a:effectLst/>
         </p:spPr>
         <p:style>
           <a:lnRef idx="1">
@@ -8470,94 +8776,132 @@
       </p:sp>
       <p:sp>
         <p:nvSpPr>
-          <p:cNvPr id="24" name="TextBox 23"/>
-          <p:cNvSpPr txBox="1"/>
-          <p:nvPr/>
-        </p:nvSpPr>
-        <p:spPr>
-          <a:xfrm>
-            <a:off x="6492240" y="2066544"/>
-            <a:ext cx="457200" cy="603504"/>
-          </a:xfrm>
-          <a:prstGeom prst="rect">
-            <a:avLst/>
-          </a:prstGeom>
-          <a:noFill/>
-        </p:spPr>
-        <p:txBody>
-          <a:bodyPr wrap="square" anchor="ctr">
+          <p:cNvPr id="21" name="TextBox 20"/>
+          <p:cNvSpPr txBox="1"/>
+          <p:nvPr/>
+        </p:nvSpPr>
+        <p:spPr>
+          <a:xfrm>
+            <a:off x="475488" y="5303520"/>
+            <a:ext cx="457200" cy="713232"/>
+          </a:xfrm>
+          <a:prstGeom prst="rect">
+            <a:avLst/>
+          </a:prstGeom>
+          <a:noFill/>
+        </p:spPr>
+        <p:txBody>
+          <a:bodyPr wrap="square" anchor="ctr" lIns="25400" rIns="25400" tIns="12700" bIns="12700">
+            <a:spAutoFit/>
+          </a:bodyPr>
+          <a:lstStyle/>
+          <a:p>
+            <a:pPr algn="ctr"/>
+            <a:r>
+              <a:rPr sz="1800" b="1" i="0">
+                <a:solidFill>
+                  <a:srgbClr val="B32929"/>
+                </a:solidFill>
+                <a:latin typeface="Calibri"/>
+              </a:rPr>
+              <a:t>✗</a:t>
+            </a:r>
+          </a:p>
+        </p:txBody>
+      </p:sp>
+      <p:sp>
+        <p:nvSpPr>
+          <p:cNvPr id="22" name="TextBox 21"/>
+          <p:cNvSpPr txBox="1"/>
+          <p:nvPr/>
+        </p:nvSpPr>
+        <p:spPr>
+          <a:xfrm>
+            <a:off x="960120" y="5303520"/>
+            <a:ext cx="4937760" cy="713232"/>
+          </a:xfrm>
+          <a:prstGeom prst="rect">
+            <a:avLst/>
+          </a:prstGeom>
+          <a:noFill/>
+        </p:spPr>
+        <p:txBody>
+          <a:bodyPr wrap="square" anchor="ctr" lIns="25400" rIns="25400" tIns="12700" bIns="12700">
             <a:spAutoFit/>
           </a:bodyPr>
           <a:lstStyle/>
           <a:p>
             <a:pPr algn="l"/>
             <a:r>
-              <a:rPr sz="1800" b="1" i="0">
-                <a:solidFill>
-                  <a:srgbClr val="1A6B3A"/>
-                </a:solidFill>
-              </a:rPr>
-              <a:t>✓</a:t>
-            </a:r>
-          </a:p>
-        </p:txBody>
-      </p:sp>
-      <p:sp>
-        <p:nvSpPr>
-          <p:cNvPr id="25" name="TextBox 24"/>
-          <p:cNvSpPr txBox="1"/>
-          <p:nvPr/>
-        </p:nvSpPr>
-        <p:spPr>
-          <a:xfrm>
-            <a:off x="6949440" y="2066544"/>
-            <a:ext cx="4754880" cy="603504"/>
-          </a:xfrm>
-          <a:prstGeom prst="rect">
-            <a:avLst/>
-          </a:prstGeom>
-          <a:noFill/>
-        </p:spPr>
-        <p:txBody>
-          <a:bodyPr wrap="square" anchor="ctr">
+              <a:rPr sz="1150" b="0" i="0">
+                <a:solidFill>
+                  <a:srgbClr val="242A30"/>
+                </a:solidFill>
+                <a:latin typeface="Calibri"/>
+              </a:rPr>
+              <a:t>Youden J karar eşiği optimizasyonu uygulanmamış</a:t>
+            </a:r>
+          </a:p>
+        </p:txBody>
+      </p:sp>
+      <p:sp>
+        <p:nvSpPr>
+          <p:cNvPr id="23" name="TextBox 22"/>
+          <p:cNvSpPr txBox="1"/>
+          <p:nvPr/>
+        </p:nvSpPr>
+        <p:spPr>
+          <a:xfrm>
+            <a:off x="6199632" y="1554480"/>
+            <a:ext cx="5623560" cy="365760"/>
+          </a:xfrm>
+          <a:prstGeom prst="rect">
+            <a:avLst/>
+          </a:prstGeom>
+          <a:noFill/>
+        </p:spPr>
+        <p:txBody>
+          <a:bodyPr wrap="square" anchor="t" lIns="25400" rIns="25400" tIns="12700" bIns="12700">
             <a:spAutoFit/>
           </a:bodyPr>
           <a:lstStyle/>
           <a:p>
             <a:pPr algn="l"/>
             <a:r>
-              <a:rPr sz="1100" b="0" i="0">
-                <a:solidFill>
-                  <a:srgbClr val="2A2A2A"/>
-                </a:solidFill>
-              </a:rPr>
-              <a:t>7 ML + 4 DL = 11 modelli topluluk öğrenmesi</a:t>
-            </a:r>
-          </a:p>
-        </p:txBody>
-      </p:sp>
-      <p:sp>
-        <p:nvSpPr>
-          <p:cNvPr id="26" name="Rectangle 25"/>
+              <a:rPr sz="1500" b="1" i="0">
+                <a:solidFill>
+                  <a:srgbClr val="1B6E3C"/>
+                </a:solidFill>
+                <a:latin typeface="Calibri"/>
+              </a:rPr>
+              <a:t>AURIS'in Çözümü</a:t>
+            </a:r>
+          </a:p>
+        </p:txBody>
+      </p:sp>
+      <p:sp>
+        <p:nvSpPr>
+          <p:cNvPr id="24" name="Rectangle 23"/>
           <p:cNvSpPr/>
           <p:nvPr/>
         </p:nvSpPr>
         <p:spPr>
           <a:xfrm>
-            <a:off x="6355080" y="2816352"/>
-            <a:ext cx="5486400" cy="713232"/>
+            <a:off x="6199632" y="2011680"/>
+            <a:ext cx="5623560" cy="713232"/>
           </a:xfrm>
           <a:prstGeom prst="rect">
             <a:avLst/>
           </a:prstGeom>
           <a:solidFill>
-            <a:srgbClr val="E9F6EC"/>
+            <a:srgbClr val="E8F5EB"/>
           </a:solidFill>
           <a:ln w="12700">
             <a:solidFill>
-              <a:srgbClr val="1A6B3A"/>
+              <a:srgbClr val="1B6E3C"/>
             </a:solidFill>
           </a:ln>
+          <a:effectLst/>
         </p:spPr>
         <p:style>
           <a:lnRef idx="1">
@@ -8583,94 +8927,97 @@
       </p:sp>
       <p:sp>
         <p:nvSpPr>
-          <p:cNvPr id="27" name="TextBox 26"/>
-          <p:cNvSpPr txBox="1"/>
-          <p:nvPr/>
-        </p:nvSpPr>
-        <p:spPr>
-          <a:xfrm>
-            <a:off x="6492240" y="2871216"/>
-            <a:ext cx="457200" cy="603504"/>
-          </a:xfrm>
-          <a:prstGeom prst="rect">
-            <a:avLst/>
-          </a:prstGeom>
-          <a:noFill/>
-        </p:spPr>
-        <p:txBody>
-          <a:bodyPr wrap="square" anchor="ctr">
+          <p:cNvPr id="25" name="TextBox 24"/>
+          <p:cNvSpPr txBox="1"/>
+          <p:nvPr/>
+        </p:nvSpPr>
+        <p:spPr>
+          <a:xfrm>
+            <a:off x="6309360" y="2011680"/>
+            <a:ext cx="457200" cy="713232"/>
+          </a:xfrm>
+          <a:prstGeom prst="rect">
+            <a:avLst/>
+          </a:prstGeom>
+          <a:noFill/>
+        </p:spPr>
+        <p:txBody>
+          <a:bodyPr wrap="square" anchor="ctr" lIns="25400" rIns="25400" tIns="12700" bIns="12700">
+            <a:spAutoFit/>
+          </a:bodyPr>
+          <a:lstStyle/>
+          <a:p>
+            <a:pPr algn="ctr"/>
+            <a:r>
+              <a:rPr sz="1800" b="1" i="0">
+                <a:solidFill>
+                  <a:srgbClr val="1B6E3C"/>
+                </a:solidFill>
+                <a:latin typeface="Calibri"/>
+              </a:rPr>
+              <a:t>✓</a:t>
+            </a:r>
+          </a:p>
+        </p:txBody>
+      </p:sp>
+      <p:sp>
+        <p:nvSpPr>
+          <p:cNvPr id="26" name="TextBox 25"/>
+          <p:cNvSpPr txBox="1"/>
+          <p:nvPr/>
+        </p:nvSpPr>
+        <p:spPr>
+          <a:xfrm>
+            <a:off x="6784848" y="2011680"/>
+            <a:ext cx="4937760" cy="713232"/>
+          </a:xfrm>
+          <a:prstGeom prst="rect">
+            <a:avLst/>
+          </a:prstGeom>
+          <a:noFill/>
+        </p:spPr>
+        <p:txBody>
+          <a:bodyPr wrap="square" anchor="ctr" lIns="25400" rIns="25400" tIns="12700" bIns="12700">
             <a:spAutoFit/>
           </a:bodyPr>
           <a:lstStyle/>
           <a:p>
             <a:pPr algn="l"/>
             <a:r>
-              <a:rPr sz="1800" b="1" i="0">
-                <a:solidFill>
-                  <a:srgbClr val="1A6B3A"/>
-                </a:solidFill>
-              </a:rPr>
-              <a:t>✓</a:t>
-            </a:r>
-          </a:p>
-        </p:txBody>
-      </p:sp>
-      <p:sp>
-        <p:nvSpPr>
-          <p:cNvPr id="28" name="TextBox 27"/>
-          <p:cNvSpPr txBox="1"/>
-          <p:nvPr/>
-        </p:nvSpPr>
-        <p:spPr>
-          <a:xfrm>
-            <a:off x="6949440" y="2871216"/>
-            <a:ext cx="4754880" cy="603504"/>
-          </a:xfrm>
-          <a:prstGeom prst="rect">
-            <a:avLst/>
-          </a:prstGeom>
-          <a:noFill/>
-        </p:spPr>
-        <p:txBody>
-          <a:bodyPr wrap="square" anchor="ctr">
-            <a:spAutoFit/>
-          </a:bodyPr>
-          <a:lstStyle/>
-          <a:p>
-            <a:pPr algn="l"/>
-            <a:r>
               <a:rPr sz="1100" b="0" i="0">
                 <a:solidFill>
-                  <a:srgbClr val="2A2A2A"/>
-                </a:solidFill>
-              </a:rPr>
-              <a:t>Spektral, zamansal, ritmik, harmonik, vokal — 5 aile / 47 boyut</a:t>
-            </a:r>
-          </a:p>
-        </p:txBody>
-      </p:sp>
-      <p:sp>
-        <p:nvSpPr>
-          <p:cNvPr id="29" name="Rectangle 28"/>
+                  <a:srgbClr val="242A30"/>
+                </a:solidFill>
+                <a:latin typeface="Calibri"/>
+              </a:rPr>
+              <a:t>7 ML + 4 DL = 11 modelli topluluk öğrenmesi</a:t>
+            </a:r>
+          </a:p>
+        </p:txBody>
+      </p:sp>
+      <p:sp>
+        <p:nvSpPr>
+          <p:cNvPr id="27" name="Rectangle 26"/>
           <p:cNvSpPr/>
           <p:nvPr/>
         </p:nvSpPr>
         <p:spPr>
           <a:xfrm>
-            <a:off x="6355080" y="3621024"/>
-            <a:ext cx="5486400" cy="713232"/>
+            <a:off x="6199632" y="2834640"/>
+            <a:ext cx="5623560" cy="713232"/>
           </a:xfrm>
           <a:prstGeom prst="rect">
             <a:avLst/>
           </a:prstGeom>
           <a:solidFill>
-            <a:srgbClr val="E9F6EC"/>
+            <a:srgbClr val="E8F5EB"/>
           </a:solidFill>
           <a:ln w="12700">
             <a:solidFill>
-              <a:srgbClr val="1A6B3A"/>
+              <a:srgbClr val="1B6E3C"/>
             </a:solidFill>
           </a:ln>
+          <a:effectLst/>
         </p:spPr>
         <p:style>
           <a:lnRef idx="1">
@@ -8696,94 +9043,97 @@
       </p:sp>
       <p:sp>
         <p:nvSpPr>
-          <p:cNvPr id="30" name="TextBox 29"/>
-          <p:cNvSpPr txBox="1"/>
-          <p:nvPr/>
-        </p:nvSpPr>
-        <p:spPr>
-          <a:xfrm>
-            <a:off x="6492240" y="3675887"/>
-            <a:ext cx="457200" cy="603504"/>
-          </a:xfrm>
-          <a:prstGeom prst="rect">
-            <a:avLst/>
-          </a:prstGeom>
-          <a:noFill/>
-        </p:spPr>
-        <p:txBody>
-          <a:bodyPr wrap="square" anchor="ctr">
+          <p:cNvPr id="28" name="TextBox 27"/>
+          <p:cNvSpPr txBox="1"/>
+          <p:nvPr/>
+        </p:nvSpPr>
+        <p:spPr>
+          <a:xfrm>
+            <a:off x="6309360" y="2834640"/>
+            <a:ext cx="457200" cy="713232"/>
+          </a:xfrm>
+          <a:prstGeom prst="rect">
+            <a:avLst/>
+          </a:prstGeom>
+          <a:noFill/>
+        </p:spPr>
+        <p:txBody>
+          <a:bodyPr wrap="square" anchor="ctr" lIns="25400" rIns="25400" tIns="12700" bIns="12700">
+            <a:spAutoFit/>
+          </a:bodyPr>
+          <a:lstStyle/>
+          <a:p>
+            <a:pPr algn="ctr"/>
+            <a:r>
+              <a:rPr sz="1800" b="1" i="0">
+                <a:solidFill>
+                  <a:srgbClr val="1B6E3C"/>
+                </a:solidFill>
+                <a:latin typeface="Calibri"/>
+              </a:rPr>
+              <a:t>✓</a:t>
+            </a:r>
+          </a:p>
+        </p:txBody>
+      </p:sp>
+      <p:sp>
+        <p:nvSpPr>
+          <p:cNvPr id="29" name="TextBox 28"/>
+          <p:cNvSpPr txBox="1"/>
+          <p:nvPr/>
+        </p:nvSpPr>
+        <p:spPr>
+          <a:xfrm>
+            <a:off x="6784848" y="2834640"/>
+            <a:ext cx="4937760" cy="713232"/>
+          </a:xfrm>
+          <a:prstGeom prst="rect">
+            <a:avLst/>
+          </a:prstGeom>
+          <a:noFill/>
+        </p:spPr>
+        <p:txBody>
+          <a:bodyPr wrap="square" anchor="ctr" lIns="25400" rIns="25400" tIns="12700" bIns="12700">
             <a:spAutoFit/>
           </a:bodyPr>
           <a:lstStyle/>
           <a:p>
             <a:pPr algn="l"/>
             <a:r>
-              <a:rPr sz="1800" b="1" i="0">
-                <a:solidFill>
-                  <a:srgbClr val="1A6B3A"/>
-                </a:solidFill>
-              </a:rPr>
-              <a:t>✓</a:t>
-            </a:r>
-          </a:p>
-        </p:txBody>
-      </p:sp>
-      <p:sp>
-        <p:nvSpPr>
-          <p:cNvPr id="31" name="TextBox 30"/>
-          <p:cNvSpPr txBox="1"/>
-          <p:nvPr/>
-        </p:nvSpPr>
-        <p:spPr>
-          <a:xfrm>
-            <a:off x="6949440" y="3675887"/>
-            <a:ext cx="4754880" cy="603504"/>
-          </a:xfrm>
-          <a:prstGeom prst="rect">
-            <a:avLst/>
-          </a:prstGeom>
-          <a:noFill/>
-        </p:spPr>
-        <p:txBody>
-          <a:bodyPr wrap="square" anchor="ctr">
-            <a:spAutoFit/>
-          </a:bodyPr>
-          <a:lstStyle/>
-          <a:p>
-            <a:pPr algn="l"/>
-            <a:r>
               <a:rPr sz="1100" b="0" i="0">
                 <a:solidFill>
-                  <a:srgbClr val="2A2A2A"/>
-                </a:solidFill>
-              </a:rPr>
-              <a:t>Sekiz kaynak için ayrı duyarlılık analizi (Suno %93,0, Echoes %88,6)</a:t>
-            </a:r>
-          </a:p>
-        </p:txBody>
-      </p:sp>
-      <p:sp>
-        <p:nvSpPr>
-          <p:cNvPr id="32" name="Rectangle 31"/>
+                  <a:srgbClr val="242A30"/>
+                </a:solidFill>
+                <a:latin typeface="Calibri"/>
+              </a:rPr>
+              <a:t>Spektral · zamansal · ritmik · harmonik · vokal (47 boyut)</a:t>
+            </a:r>
+          </a:p>
+        </p:txBody>
+      </p:sp>
+      <p:sp>
+        <p:nvSpPr>
+          <p:cNvPr id="30" name="Rectangle 29"/>
           <p:cNvSpPr/>
           <p:nvPr/>
         </p:nvSpPr>
         <p:spPr>
           <a:xfrm>
-            <a:off x="6355080" y="4425696"/>
-            <a:ext cx="5486400" cy="713232"/>
+            <a:off x="6199632" y="3657600"/>
+            <a:ext cx="5623560" cy="713232"/>
           </a:xfrm>
           <a:prstGeom prst="rect">
             <a:avLst/>
           </a:prstGeom>
           <a:solidFill>
-            <a:srgbClr val="E9F6EC"/>
+            <a:srgbClr val="E8F5EB"/>
           </a:solidFill>
           <a:ln w="12700">
             <a:solidFill>
-              <a:srgbClr val="1A6B3A"/>
+              <a:srgbClr val="1B6E3C"/>
             </a:solidFill>
           </a:ln>
+          <a:effectLst/>
         </p:spPr>
         <p:style>
           <a:lnRef idx="1">
@@ -8809,94 +9159,97 @@
       </p:sp>
       <p:sp>
         <p:nvSpPr>
-          <p:cNvPr id="33" name="TextBox 32"/>
-          <p:cNvSpPr txBox="1"/>
-          <p:nvPr/>
-        </p:nvSpPr>
-        <p:spPr>
-          <a:xfrm>
-            <a:off x="6492240" y="4480559"/>
-            <a:ext cx="457200" cy="603504"/>
-          </a:xfrm>
-          <a:prstGeom prst="rect">
-            <a:avLst/>
-          </a:prstGeom>
-          <a:noFill/>
-        </p:spPr>
-        <p:txBody>
-          <a:bodyPr wrap="square" anchor="ctr">
+          <p:cNvPr id="31" name="TextBox 30"/>
+          <p:cNvSpPr txBox="1"/>
+          <p:nvPr/>
+        </p:nvSpPr>
+        <p:spPr>
+          <a:xfrm>
+            <a:off x="6309360" y="3657600"/>
+            <a:ext cx="457200" cy="713232"/>
+          </a:xfrm>
+          <a:prstGeom prst="rect">
+            <a:avLst/>
+          </a:prstGeom>
+          <a:noFill/>
+        </p:spPr>
+        <p:txBody>
+          <a:bodyPr wrap="square" anchor="ctr" lIns="25400" rIns="25400" tIns="12700" bIns="12700">
+            <a:spAutoFit/>
+          </a:bodyPr>
+          <a:lstStyle/>
+          <a:p>
+            <a:pPr algn="ctr"/>
+            <a:r>
+              <a:rPr sz="1800" b="1" i="0">
+                <a:solidFill>
+                  <a:srgbClr val="1B6E3C"/>
+                </a:solidFill>
+                <a:latin typeface="Calibri"/>
+              </a:rPr>
+              <a:t>✓</a:t>
+            </a:r>
+          </a:p>
+        </p:txBody>
+      </p:sp>
+      <p:sp>
+        <p:nvSpPr>
+          <p:cNvPr id="32" name="TextBox 31"/>
+          <p:cNvSpPr txBox="1"/>
+          <p:nvPr/>
+        </p:nvSpPr>
+        <p:spPr>
+          <a:xfrm>
+            <a:off x="6784848" y="3657600"/>
+            <a:ext cx="4937760" cy="713232"/>
+          </a:xfrm>
+          <a:prstGeom prst="rect">
+            <a:avLst/>
+          </a:prstGeom>
+          <a:noFill/>
+        </p:spPr>
+        <p:txBody>
+          <a:bodyPr wrap="square" anchor="ctr" lIns="25400" rIns="25400" tIns="12700" bIns="12700">
             <a:spAutoFit/>
           </a:bodyPr>
           <a:lstStyle/>
           <a:p>
             <a:pPr algn="l"/>
             <a:r>
-              <a:rPr sz="1800" b="1" i="0">
-                <a:solidFill>
-                  <a:srgbClr val="1A6B3A"/>
-                </a:solidFill>
-              </a:rPr>
-              <a:t>✓</a:t>
-            </a:r>
-          </a:p>
-        </p:txBody>
-      </p:sp>
-      <p:sp>
-        <p:nvSpPr>
-          <p:cNvPr id="34" name="TextBox 33"/>
-          <p:cNvSpPr txBox="1"/>
-          <p:nvPr/>
-        </p:nvSpPr>
-        <p:spPr>
-          <a:xfrm>
-            <a:off x="6949440" y="4480559"/>
-            <a:ext cx="4754880" cy="603504"/>
-          </a:xfrm>
-          <a:prstGeom prst="rect">
-            <a:avLst/>
-          </a:prstGeom>
-          <a:noFill/>
-        </p:spPr>
-        <p:txBody>
-          <a:bodyPr wrap="square" anchor="ctr">
-            <a:spAutoFit/>
-          </a:bodyPr>
-          <a:lstStyle/>
-          <a:p>
-            <a:pPr algn="l"/>
-            <a:r>
               <a:rPr sz="1100" b="0" i="0">
                 <a:solidFill>
-                  <a:srgbClr val="2A2A2A"/>
-                </a:solidFill>
-              </a:rPr>
-              <a:t>TreeSHAP ile global ve yerel öznitelik etkisi</a:t>
-            </a:r>
-          </a:p>
-        </p:txBody>
-      </p:sp>
-      <p:sp>
-        <p:nvSpPr>
-          <p:cNvPr id="35" name="Rectangle 34"/>
+                  <a:srgbClr val="242A30"/>
+                </a:solidFill>
+                <a:latin typeface="Calibri"/>
+              </a:rPr>
+              <a:t>Sekiz kaynak için ayrı duyarlılık analizi</a:t>
+            </a:r>
+          </a:p>
+        </p:txBody>
+      </p:sp>
+      <p:sp>
+        <p:nvSpPr>
+          <p:cNvPr id="33" name="Rectangle 32"/>
           <p:cNvSpPr/>
           <p:nvPr/>
         </p:nvSpPr>
         <p:spPr>
           <a:xfrm>
-            <a:off x="6355080" y="5230368"/>
-            <a:ext cx="5486400" cy="713232"/>
+            <a:off x="6199632" y="4480560"/>
+            <a:ext cx="5623560" cy="713232"/>
           </a:xfrm>
           <a:prstGeom prst="rect">
             <a:avLst/>
           </a:prstGeom>
           <a:solidFill>
-            <a:srgbClr val="E9F6EC"/>
+            <a:srgbClr val="E8F5EB"/>
           </a:solidFill>
           <a:ln w="12700">
             <a:solidFill>
-              <a:srgbClr val="1A6B3A"/>
+              <a:srgbClr val="1B6E3C"/>
             </a:solidFill>
           </a:ln>
+          <a:effectLst/>
         </p:spPr>
         <p:style>
           <a:lnRef idx="1">
@@ -8922,32 +9275,149 @@
       </p:sp>
       <p:sp>
         <p:nvSpPr>
-          <p:cNvPr id="36" name="TextBox 35"/>
-          <p:cNvSpPr txBox="1"/>
-          <p:nvPr/>
-        </p:nvSpPr>
-        <p:spPr>
-          <a:xfrm>
-            <a:off x="6492240" y="5285232"/>
-            <a:ext cx="457200" cy="603504"/>
-          </a:xfrm>
-          <a:prstGeom prst="rect">
-            <a:avLst/>
-          </a:prstGeom>
-          <a:noFill/>
-        </p:spPr>
-        <p:txBody>
-          <a:bodyPr wrap="square" anchor="ctr">
+          <p:cNvPr id="34" name="TextBox 33"/>
+          <p:cNvSpPr txBox="1"/>
+          <p:nvPr/>
+        </p:nvSpPr>
+        <p:spPr>
+          <a:xfrm>
+            <a:off x="6309360" y="4480560"/>
+            <a:ext cx="457200" cy="713232"/>
+          </a:xfrm>
+          <a:prstGeom prst="rect">
+            <a:avLst/>
+          </a:prstGeom>
+          <a:noFill/>
+        </p:spPr>
+        <p:txBody>
+          <a:bodyPr wrap="square" anchor="ctr" lIns="25400" rIns="25400" tIns="12700" bIns="12700">
+            <a:spAutoFit/>
+          </a:bodyPr>
+          <a:lstStyle/>
+          <a:p>
+            <a:pPr algn="ctr"/>
+            <a:r>
+              <a:rPr sz="1800" b="1" i="0">
+                <a:solidFill>
+                  <a:srgbClr val="1B6E3C"/>
+                </a:solidFill>
+                <a:latin typeface="Calibri"/>
+              </a:rPr>
+              <a:t>✓</a:t>
+            </a:r>
+          </a:p>
+        </p:txBody>
+      </p:sp>
+      <p:sp>
+        <p:nvSpPr>
+          <p:cNvPr id="35" name="TextBox 34"/>
+          <p:cNvSpPr txBox="1"/>
+          <p:nvPr/>
+        </p:nvSpPr>
+        <p:spPr>
+          <a:xfrm>
+            <a:off x="6784848" y="4480560"/>
+            <a:ext cx="4937760" cy="713232"/>
+          </a:xfrm>
+          <a:prstGeom prst="rect">
+            <a:avLst/>
+          </a:prstGeom>
+          <a:noFill/>
+        </p:spPr>
+        <p:txBody>
+          <a:bodyPr wrap="square" anchor="ctr" lIns="25400" rIns="25400" tIns="12700" bIns="12700">
             <a:spAutoFit/>
           </a:bodyPr>
           <a:lstStyle/>
           <a:p>
             <a:pPr algn="l"/>
             <a:r>
+              <a:rPr sz="1100" b="0" i="0">
+                <a:solidFill>
+                  <a:srgbClr val="242A30"/>
+                </a:solidFill>
+                <a:latin typeface="Calibri"/>
+              </a:rPr>
+              <a:t>TreeSHAP ile global ve yerel öznitelik etkisi</a:t>
+            </a:r>
+          </a:p>
+        </p:txBody>
+      </p:sp>
+      <p:sp>
+        <p:nvSpPr>
+          <p:cNvPr id="36" name="Rectangle 35"/>
+          <p:cNvSpPr/>
+          <p:nvPr/>
+        </p:nvSpPr>
+        <p:spPr>
+          <a:xfrm>
+            <a:off x="6199632" y="5303520"/>
+            <a:ext cx="5623560" cy="713232"/>
+          </a:xfrm>
+          <a:prstGeom prst="rect">
+            <a:avLst/>
+          </a:prstGeom>
+          <a:solidFill>
+            <a:srgbClr val="E8F5EB"/>
+          </a:solidFill>
+          <a:ln w="12700">
+            <a:solidFill>
+              <a:srgbClr val="1B6E3C"/>
+            </a:solidFill>
+          </a:ln>
+          <a:effectLst/>
+        </p:spPr>
+        <p:style>
+          <a:lnRef idx="1">
+            <a:schemeClr val="accent1"/>
+          </a:lnRef>
+          <a:fillRef idx="3">
+            <a:schemeClr val="accent1"/>
+          </a:fillRef>
+          <a:effectRef idx="2">
+            <a:schemeClr val="accent1"/>
+          </a:effectRef>
+          <a:fontRef idx="minor">
+            <a:schemeClr val="lt1"/>
+          </a:fontRef>
+        </p:style>
+        <p:txBody>
+          <a:bodyPr rtlCol="0" anchor="ctr"/>
+          <a:lstStyle/>
+          <a:p>
+            <a:pPr algn="ctr"/>
+          </a:p>
+        </p:txBody>
+      </p:sp>
+      <p:sp>
+        <p:nvSpPr>
+          <p:cNvPr id="37" name="TextBox 36"/>
+          <p:cNvSpPr txBox="1"/>
+          <p:nvPr/>
+        </p:nvSpPr>
+        <p:spPr>
+          <a:xfrm>
+            <a:off x="6309360" y="5303520"/>
+            <a:ext cx="457200" cy="713232"/>
+          </a:xfrm>
+          <a:prstGeom prst="rect">
+            <a:avLst/>
+          </a:prstGeom>
+          <a:noFill/>
+        </p:spPr>
+        <p:txBody>
+          <a:bodyPr wrap="square" anchor="ctr" lIns="25400" rIns="25400" tIns="12700" bIns="12700">
+            <a:spAutoFit/>
+          </a:bodyPr>
+          <a:lstStyle/>
+          <a:p>
+            <a:pPr algn="ctr"/>
+            <a:r>
               <a:rPr sz="1800" b="1" i="0">
                 <a:solidFill>
-                  <a:srgbClr val="1A6B3A"/>
-                </a:solidFill>
+                  <a:srgbClr val="1B6E3C"/>
+                </a:solidFill>
+                <a:latin typeface="Calibri"/>
               </a:rPr>
               <a:t>✓</a:t>
             </a:r>
@@ -8956,22 +9426,22 @@
       </p:sp>
       <p:sp>
         <p:nvSpPr>
-          <p:cNvPr id="37" name="TextBox 36"/>
-          <p:cNvSpPr txBox="1"/>
-          <p:nvPr/>
-        </p:nvSpPr>
-        <p:spPr>
-          <a:xfrm>
-            <a:off x="6949440" y="5285232"/>
-            <a:ext cx="4754880" cy="603504"/>
-          </a:xfrm>
-          <a:prstGeom prst="rect">
-            <a:avLst/>
-          </a:prstGeom>
-          <a:noFill/>
-        </p:spPr>
-        <p:txBody>
-          <a:bodyPr wrap="square" anchor="ctr">
+          <p:cNvPr id="38" name="TextBox 37"/>
+          <p:cNvSpPr txBox="1"/>
+          <p:nvPr/>
+        </p:nvSpPr>
+        <p:spPr>
+          <a:xfrm>
+            <a:off x="6784848" y="5303520"/>
+            <a:ext cx="4937760" cy="713232"/>
+          </a:xfrm>
+          <a:prstGeom prst="rect">
+            <a:avLst/>
+          </a:prstGeom>
+          <a:noFill/>
+        </p:spPr>
+        <p:txBody>
+          <a:bodyPr wrap="square" anchor="ctr" lIns="25400" rIns="25400" tIns="12700" bIns="12700">
             <a:spAutoFit/>
           </a:bodyPr>
           <a:lstStyle/>
@@ -8980,8 +9450,9 @@
             <a:r>
               <a:rPr sz="1100" b="0" i="0">
                 <a:solidFill>
-                  <a:srgbClr val="2A2A2A"/>
-                </a:solidFill>
+                  <a:srgbClr val="242A30"/>
+                </a:solidFill>
+                <a:latin typeface="Calibri"/>
               </a:rPr>
               <a:t>θ* = 0,4316 ile dengeli karar eşiği</a:t>
             </a:r>
@@ -8990,22 +9461,66 @@
       </p:sp>
       <p:sp>
         <p:nvSpPr>
-          <p:cNvPr id="38" name="TextBox 37"/>
-          <p:cNvSpPr txBox="1"/>
-          <p:nvPr/>
-        </p:nvSpPr>
-        <p:spPr>
-          <a:xfrm>
-            <a:off x="365760" y="6510528"/>
-            <a:ext cx="8229600" cy="301752"/>
-          </a:xfrm>
-          <a:prstGeom prst="rect">
-            <a:avLst/>
-          </a:prstGeom>
-          <a:noFill/>
-        </p:spPr>
-        <p:txBody>
-          <a:bodyPr wrap="square">
+          <p:cNvPr id="39" name="Rectangle 38"/>
+          <p:cNvSpPr/>
+          <p:nvPr/>
+        </p:nvSpPr>
+        <p:spPr>
+          <a:xfrm>
+            <a:off x="365760" y="6419088"/>
+            <a:ext cx="11457432" cy="10972"/>
+          </a:xfrm>
+          <a:prstGeom prst="rect">
+            <a:avLst/>
+          </a:prstGeom>
+          <a:solidFill>
+            <a:srgbClr val="D2D9E0"/>
+          </a:solidFill>
+          <a:ln>
+            <a:noFill/>
+          </a:ln>
+          <a:effectLst/>
+        </p:spPr>
+        <p:style>
+          <a:lnRef idx="1">
+            <a:schemeClr val="accent1"/>
+          </a:lnRef>
+          <a:fillRef idx="3">
+            <a:schemeClr val="accent1"/>
+          </a:fillRef>
+          <a:effectRef idx="2">
+            <a:schemeClr val="accent1"/>
+          </a:effectRef>
+          <a:fontRef idx="minor">
+            <a:schemeClr val="lt1"/>
+          </a:fontRef>
+        </p:style>
+        <p:txBody>
+          <a:bodyPr rtlCol="0" anchor="ctr"/>
+          <a:lstStyle/>
+          <a:p>
+            <a:pPr algn="ctr"/>
+          </a:p>
+        </p:txBody>
+      </p:sp>
+      <p:sp>
+        <p:nvSpPr>
+          <p:cNvPr id="40" name="TextBox 39"/>
+          <p:cNvSpPr txBox="1"/>
+          <p:nvPr/>
+        </p:nvSpPr>
+        <p:spPr>
+          <a:xfrm>
+            <a:off x="365760" y="6473952"/>
+            <a:ext cx="7772400" cy="292608"/>
+          </a:xfrm>
+          <a:prstGeom prst="rect">
+            <a:avLst/>
+          </a:prstGeom>
+          <a:noFill/>
+        </p:spPr>
+        <p:txBody>
+          <a:bodyPr wrap="square" anchor="t" lIns="25400" rIns="25400" tIns="12700" bIns="12700">
             <a:spAutoFit/>
           </a:bodyPr>
           <a:lstStyle/>
@@ -9014,32 +9529,33 @@
             <a:r>
               <a:rPr sz="900" b="0" i="0">
                 <a:solidFill>
-                  <a:srgbClr val="66707A"/>
-                </a:solidFill>
-              </a:rPr>
-              <a:t>AURIS  ·  Hasan Arthur Altuntaş  ·  BM498 Mezuniyet Tezi</a:t>
-            </a:r>
-          </a:p>
-        </p:txBody>
-      </p:sp>
-      <p:sp>
-        <p:nvSpPr>
-          <p:cNvPr id="39" name="TextBox 38"/>
-          <p:cNvSpPr txBox="1"/>
-          <p:nvPr/>
-        </p:nvSpPr>
-        <p:spPr>
-          <a:xfrm>
-            <a:off x="8595360" y="6510528"/>
-            <a:ext cx="3200400" cy="301752"/>
-          </a:xfrm>
-          <a:prstGeom prst="rect">
-            <a:avLst/>
-          </a:prstGeom>
-          <a:noFill/>
-        </p:spPr>
-        <p:txBody>
-          <a:bodyPr wrap="square">
+                  <a:srgbClr val="6A7480"/>
+                </a:solidFill>
+                <a:latin typeface="Calibri"/>
+              </a:rPr>
+              <a:t>AURIS  ·  Yapay Zekâ Üretimli Müzik Tespiti</a:t>
+            </a:r>
+          </a:p>
+        </p:txBody>
+      </p:sp>
+      <p:sp>
+        <p:nvSpPr>
+          <p:cNvPr id="41" name="TextBox 40"/>
+          <p:cNvSpPr txBox="1"/>
+          <p:nvPr/>
+        </p:nvSpPr>
+        <p:spPr>
+          <a:xfrm>
+            <a:off x="5029200" y="6473952"/>
+            <a:ext cx="6793992" cy="292608"/>
+          </a:xfrm>
+          <a:prstGeom prst="rect">
+            <a:avLst/>
+          </a:prstGeom>
+          <a:noFill/>
+        </p:spPr>
+        <p:txBody>
+          <a:bodyPr wrap="square" anchor="t" lIns="25400" rIns="25400" tIns="12700" bIns="12700">
             <a:spAutoFit/>
           </a:bodyPr>
           <a:lstStyle/>
@@ -9048,10 +9564,11 @@
             <a:r>
               <a:rPr sz="900" b="0" i="0">
                 <a:solidFill>
-                  <a:srgbClr val="66707A"/>
-                </a:solidFill>
-              </a:rPr>
-              <a:t>Düzce Üniversitesi · 2025-2026</a:t>
+                  <a:srgbClr val="6A7480"/>
+                </a:solidFill>
+                <a:latin typeface="Calibri"/>
+              </a:rPr>
+              <a:t>Hasan Arthur Altuntaş  ·  BM498  ·  Düzce Üniversitesi  ·  2025-2026</a:t>
             </a:r>
           </a:p>
         </p:txBody>
@@ -9070,7 +9587,7 @@
     <p:bg>
       <p:bgPr>
         <a:solidFill>
-          <a:srgbClr val="F4F6F8"/>
+          <a:srgbClr val="F6F8FA"/>
         </a:solidFill>
         <a:effectLst/>
       </p:bgPr>
@@ -9097,11 +9614,12 @@
             <a:avLst/>
           </a:prstGeom>
           <a:solidFill>
-            <a:srgbClr val="0D2B55"/>
+            <a:srgbClr val="102A4C"/>
           </a:solidFill>
           <a:ln>
             <a:noFill/>
           </a:ln>
+          <a:effectLst/>
         </p:spPr>
         <p:style>
           <a:lnRef idx="1">
@@ -9133,16 +9651,16 @@
         </p:nvSpPr>
         <p:spPr>
           <a:xfrm>
-            <a:off x="320040" y="64008"/>
-            <a:ext cx="11521440" cy="347472"/>
-          </a:xfrm>
-          <a:prstGeom prst="rect">
-            <a:avLst/>
-          </a:prstGeom>
-          <a:noFill/>
-        </p:spPr>
-        <p:txBody>
-          <a:bodyPr wrap="square">
+            <a:off x="365760" y="64008"/>
+            <a:ext cx="11430000" cy="347472"/>
+          </a:xfrm>
+          <a:prstGeom prst="rect">
+            <a:avLst/>
+          </a:prstGeom>
+          <a:noFill/>
+        </p:spPr>
+        <p:txBody>
+          <a:bodyPr wrap="square" anchor="ctr" lIns="25400" rIns="25400" tIns="12700" bIns="12700">
             <a:spAutoFit/>
           </a:bodyPr>
           <a:lstStyle/>
@@ -9153,8 +9671,9 @@
                 <a:solidFill>
                   <a:srgbClr val="FFFFFF"/>
                 </a:solidFill>
-              </a:rPr>
-              <a:t>BM498 — 02: Literatür Taraması Sunumu</a:t>
+                <a:latin typeface="Calibri"/>
+              </a:rPr>
+              <a:t>BM498 Mezuniyet Tezi — 02: Literatür Taraması Sunumu</a:t>
             </a:r>
           </a:p>
         </p:txBody>
@@ -9167,8 +9686,8 @@
         </p:nvSpPr>
         <p:spPr>
           <a:xfrm>
-            <a:off x="2286000" y="960120"/>
-            <a:ext cx="7589520" cy="5440680"/>
+            <a:off x="2194560" y="960120"/>
+            <a:ext cx="7772400" cy="5440680"/>
           </a:xfrm>
           <a:prstGeom prst="rect">
             <a:avLst/>
@@ -9178,9 +9697,10 @@
           </a:solidFill>
           <a:ln w="19050">
             <a:solidFill>
-              <a:srgbClr val="007A87"/>
+              <a:srgbClr val="0A808C"/>
             </a:solidFill>
           </a:ln>
+          <a:effectLst/>
         </p:spPr>
         <p:style>
           <a:lnRef idx="1">
@@ -9206,57 +9726,25 @@
       </p:sp>
       <p:sp>
         <p:nvSpPr>
-          <p:cNvPr id="5" name="TextBox 4"/>
-          <p:cNvSpPr txBox="1"/>
-          <p:nvPr/>
-        </p:nvSpPr>
-        <p:spPr>
-          <a:xfrm>
-            <a:off x="2377440" y="1078992"/>
-            <a:ext cx="7406640" cy="502920"/>
-          </a:xfrm>
-          <a:prstGeom prst="rect">
-            <a:avLst/>
-          </a:prstGeom>
-          <a:noFill/>
-        </p:spPr>
-        <p:txBody>
-          <a:bodyPr wrap="square">
-            <a:spAutoFit/>
-          </a:bodyPr>
-          <a:lstStyle/>
-          <a:p>
-            <a:pPr algn="ctr"/>
-            <a:r>
-              <a:rPr sz="1700" b="1" i="0">
-                <a:solidFill>
-                  <a:srgbClr val="0D2B55"/>
-                </a:solidFill>
-              </a:rPr>
-              <a:t>ÖĞRENCİ İMZA SAYFASI</a:t>
-            </a:r>
-          </a:p>
-        </p:txBody>
-      </p:sp>
-      <p:sp>
-        <p:nvSpPr>
-          <p:cNvPr id="6" name="Rectangle 5"/>
+          <p:cNvPr id="5" name="Rectangle 4"/>
           <p:cNvSpPr/>
           <p:nvPr/>
         </p:nvSpPr>
         <p:spPr>
           <a:xfrm>
-            <a:off x="2377440" y="1627632"/>
-            <a:ext cx="7406640" cy="0"/>
-          </a:xfrm>
-          <a:prstGeom prst="rect">
-            <a:avLst/>
-          </a:prstGeom>
-          <a:ln w="19050">
-            <a:solidFill>
-              <a:srgbClr val="007A87"/>
-            </a:solidFill>
+            <a:off x="2194560" y="960120"/>
+            <a:ext cx="7772400" cy="640080"/>
+          </a:xfrm>
+          <a:prstGeom prst="rect">
+            <a:avLst/>
+          </a:prstGeom>
+          <a:solidFill>
+            <a:srgbClr val="102A4C"/>
+          </a:solidFill>
+          <a:ln>
+            <a:noFill/>
           </a:ln>
+          <a:effectLst/>
         </p:spPr>
         <p:style>
           <a:lnRef idx="1">
@@ -9282,13 +9770,48 @@
       </p:sp>
       <p:sp>
         <p:nvSpPr>
+          <p:cNvPr id="6" name="TextBox 5"/>
+          <p:cNvSpPr txBox="1"/>
+          <p:nvPr/>
+        </p:nvSpPr>
+        <p:spPr>
+          <a:xfrm>
+            <a:off x="2194560" y="960120"/>
+            <a:ext cx="7772400" cy="640080"/>
+          </a:xfrm>
+          <a:prstGeom prst="rect">
+            <a:avLst/>
+          </a:prstGeom>
+          <a:noFill/>
+        </p:spPr>
+        <p:txBody>
+          <a:bodyPr wrap="square" anchor="ctr" lIns="25400" rIns="25400" tIns="12700" bIns="12700">
+            <a:spAutoFit/>
+          </a:bodyPr>
+          <a:lstStyle/>
+          <a:p>
+            <a:pPr algn="ctr"/>
+            <a:r>
+              <a:rPr sz="1700" b="1" i="0">
+                <a:solidFill>
+                  <a:srgbClr val="FFFFFF"/>
+                </a:solidFill>
+                <a:latin typeface="Calibri"/>
+              </a:rPr>
+              <a:t>ÖĞRENCİ İMZA SAYFASI</a:t>
+            </a:r>
+          </a:p>
+        </p:txBody>
+      </p:sp>
+      <p:sp>
+        <p:nvSpPr>
           <p:cNvPr id="7" name="TextBox 6"/>
           <p:cNvSpPr txBox="1"/>
           <p:nvPr/>
         </p:nvSpPr>
         <p:spPr>
           <a:xfrm>
-            <a:off x="2468880" y="1810512"/>
+            <a:off x="2514600" y="1920240"/>
             <a:ext cx="2834640" cy="320040"/>
           </a:xfrm>
           <a:prstGeom prst="rect">
@@ -9297,7 +9820,7 @@
           <a:noFill/>
         </p:spPr>
         <p:txBody>
-          <a:bodyPr wrap="square">
+          <a:bodyPr wrap="square" anchor="t" lIns="25400" rIns="25400" tIns="12700" bIns="12700">
             <a:spAutoFit/>
           </a:bodyPr>
           <a:lstStyle/>
@@ -9306,8 +9829,9 @@
             <a:r>
               <a:rPr sz="1200" b="1" i="0">
                 <a:solidFill>
-                  <a:srgbClr val="0D2B55"/>
-                </a:solidFill>
+                  <a:srgbClr val="102A4C"/>
+                </a:solidFill>
+                <a:latin typeface="Calibri"/>
               </a:rPr>
               <a:t>Öğrenci Adı Soyadı:</a:t>
             </a:r>
@@ -9322,16 +9846,16 @@
         </p:nvSpPr>
         <p:spPr>
           <a:xfrm>
-            <a:off x="5394960" y="1810512"/>
-            <a:ext cx="4297680" cy="320040"/>
-          </a:xfrm>
-          <a:prstGeom prst="rect">
-            <a:avLst/>
-          </a:prstGeom>
-          <a:noFill/>
-        </p:spPr>
-        <p:txBody>
-          <a:bodyPr wrap="square">
+            <a:off x="5440680" y="1920240"/>
+            <a:ext cx="4206240" cy="320040"/>
+          </a:xfrm>
+          <a:prstGeom prst="rect">
+            <a:avLst/>
+          </a:prstGeom>
+          <a:noFill/>
+        </p:spPr>
+        <p:txBody>
+          <a:bodyPr wrap="square" anchor="t" lIns="25400" rIns="25400" tIns="12700" bIns="12700">
             <a:spAutoFit/>
           </a:bodyPr>
           <a:lstStyle/>
@@ -9340,8 +9864,9 @@
             <a:r>
               <a:rPr sz="1200" b="0" i="0">
                 <a:solidFill>
-                  <a:srgbClr val="2A2A2A"/>
-                </a:solidFill>
+                  <a:srgbClr val="242A30"/>
+                </a:solidFill>
+                <a:latin typeface="Calibri"/>
               </a:rPr>
               <a:t>Hasan Arthur Altuntaş</a:t>
             </a:r>
@@ -9356,17 +9881,19 @@
         </p:nvSpPr>
         <p:spPr>
           <a:xfrm>
-            <a:off x="5349240" y="2148840"/>
-            <a:ext cx="4343400" cy="0"/>
-          </a:xfrm>
-          <a:prstGeom prst="rect">
-            <a:avLst/>
-          </a:prstGeom>
-          <a:ln w="12700">
-            <a:solidFill>
-              <a:srgbClr val="CCCCCC"/>
-            </a:solidFill>
+            <a:off x="5394960" y="2249424"/>
+            <a:ext cx="4297680" cy="10972"/>
+          </a:xfrm>
+          <a:prstGeom prst="rect">
+            <a:avLst/>
+          </a:prstGeom>
+          <a:solidFill>
+            <a:srgbClr val="D2D9E0"/>
+          </a:solidFill>
+          <a:ln>
+            <a:noFill/>
           </a:ln>
+          <a:effectLst/>
         </p:spPr>
         <p:style>
           <a:lnRef idx="1">
@@ -9398,7 +9925,7 @@
         </p:nvSpPr>
         <p:spPr>
           <a:xfrm>
-            <a:off x="2468880" y="2377440"/>
+            <a:off x="2514600" y="2468880"/>
             <a:ext cx="2834640" cy="320040"/>
           </a:xfrm>
           <a:prstGeom prst="rect">
@@ -9407,7 +9934,7 @@
           <a:noFill/>
         </p:spPr>
         <p:txBody>
-          <a:bodyPr wrap="square">
+          <a:bodyPr wrap="square" anchor="t" lIns="25400" rIns="25400" tIns="12700" bIns="12700">
             <a:spAutoFit/>
           </a:bodyPr>
           <a:lstStyle/>
@@ -9416,8 +9943,9 @@
             <a:r>
               <a:rPr sz="1200" b="1" i="0">
                 <a:solidFill>
-                  <a:srgbClr val="0D2B55"/>
-                </a:solidFill>
+                  <a:srgbClr val="102A4C"/>
+                </a:solidFill>
+                <a:latin typeface="Calibri"/>
               </a:rPr>
               <a:t>Öğrenci Numarası:</a:t>
             </a:r>
@@ -9432,16 +9960,16 @@
         </p:nvSpPr>
         <p:spPr>
           <a:xfrm>
-            <a:off x="5394960" y="2377440"/>
-            <a:ext cx="4297680" cy="320040"/>
-          </a:xfrm>
-          <a:prstGeom prst="rect">
-            <a:avLst/>
-          </a:prstGeom>
-          <a:noFill/>
-        </p:spPr>
-        <p:txBody>
-          <a:bodyPr wrap="square">
+            <a:off x="5440680" y="2468880"/>
+            <a:ext cx="4206240" cy="320040"/>
+          </a:xfrm>
+          <a:prstGeom prst="rect">
+            <a:avLst/>
+          </a:prstGeom>
+          <a:noFill/>
+        </p:spPr>
+        <p:txBody>
+          <a:bodyPr wrap="square" anchor="t" lIns="25400" rIns="25400" tIns="12700" bIns="12700">
             <a:spAutoFit/>
           </a:bodyPr>
           <a:lstStyle/>
@@ -9450,8 +9978,9 @@
             <a:r>
               <a:rPr sz="1200" b="0" i="0">
                 <a:solidFill>
-                  <a:srgbClr val="2A2A2A"/>
-                </a:solidFill>
+                  <a:srgbClr val="242A30"/>
+                </a:solidFill>
+                <a:latin typeface="Calibri"/>
               </a:rPr>
               <a:t/>
             </a:r>
@@ -9466,17 +9995,19 @@
         </p:nvSpPr>
         <p:spPr>
           <a:xfrm>
-            <a:off x="5349240" y="2715768"/>
-            <a:ext cx="4343400" cy="0"/>
-          </a:xfrm>
-          <a:prstGeom prst="rect">
-            <a:avLst/>
-          </a:prstGeom>
-          <a:ln w="12700">
-            <a:solidFill>
-              <a:srgbClr val="CCCCCC"/>
-            </a:solidFill>
+            <a:off x="5394960" y="2798064"/>
+            <a:ext cx="4297680" cy="10972"/>
+          </a:xfrm>
+          <a:prstGeom prst="rect">
+            <a:avLst/>
+          </a:prstGeom>
+          <a:solidFill>
+            <a:srgbClr val="D2D9E0"/>
+          </a:solidFill>
+          <a:ln>
+            <a:noFill/>
           </a:ln>
+          <a:effectLst/>
         </p:spPr>
         <p:style>
           <a:lnRef idx="1">
@@ -9508,7 +10039,7 @@
         </p:nvSpPr>
         <p:spPr>
           <a:xfrm>
-            <a:off x="2468880" y="2944368"/>
+            <a:off x="2514600" y="3017520"/>
             <a:ext cx="2834640" cy="320040"/>
           </a:xfrm>
           <a:prstGeom prst="rect">
@@ -9517,7 +10048,7 @@
           <a:noFill/>
         </p:spPr>
         <p:txBody>
-          <a:bodyPr wrap="square">
+          <a:bodyPr wrap="square" anchor="t" lIns="25400" rIns="25400" tIns="12700" bIns="12700">
             <a:spAutoFit/>
           </a:bodyPr>
           <a:lstStyle/>
@@ -9526,8 +10057,9 @@
             <a:r>
               <a:rPr sz="1200" b="1" i="0">
                 <a:solidFill>
-                  <a:srgbClr val="0D2B55"/>
-                </a:solidFill>
+                  <a:srgbClr val="102A4C"/>
+                </a:solidFill>
+                <a:latin typeface="Calibri"/>
               </a:rPr>
               <a:t>Bölüm:</a:t>
             </a:r>
@@ -9542,16 +10074,16 @@
         </p:nvSpPr>
         <p:spPr>
           <a:xfrm>
-            <a:off x="5394960" y="2944368"/>
-            <a:ext cx="4297680" cy="320040"/>
-          </a:xfrm>
-          <a:prstGeom prst="rect">
-            <a:avLst/>
-          </a:prstGeom>
-          <a:noFill/>
-        </p:spPr>
-        <p:txBody>
-          <a:bodyPr wrap="square">
+            <a:off x="5440680" y="3017520"/>
+            <a:ext cx="4206240" cy="320040"/>
+          </a:xfrm>
+          <a:prstGeom prst="rect">
+            <a:avLst/>
+          </a:prstGeom>
+          <a:noFill/>
+        </p:spPr>
+        <p:txBody>
+          <a:bodyPr wrap="square" anchor="t" lIns="25400" rIns="25400" tIns="12700" bIns="12700">
             <a:spAutoFit/>
           </a:bodyPr>
           <a:lstStyle/>
@@ -9560,8 +10092,9 @@
             <a:r>
               <a:rPr sz="1200" b="0" i="0">
                 <a:solidFill>
-                  <a:srgbClr val="2A2A2A"/>
-                </a:solidFill>
+                  <a:srgbClr val="242A30"/>
+                </a:solidFill>
+                <a:latin typeface="Calibri"/>
               </a:rPr>
               <a:t>Bilgisayar Mühendisliği</a:t>
             </a:r>
@@ -9576,17 +10109,19 @@
         </p:nvSpPr>
         <p:spPr>
           <a:xfrm>
-            <a:off x="5349240" y="3282696"/>
-            <a:ext cx="4343400" cy="0"/>
-          </a:xfrm>
-          <a:prstGeom prst="rect">
-            <a:avLst/>
-          </a:prstGeom>
-          <a:ln w="12700">
-            <a:solidFill>
-              <a:srgbClr val="CCCCCC"/>
-            </a:solidFill>
+            <a:off x="5394960" y="3346703"/>
+            <a:ext cx="4297680" cy="10972"/>
+          </a:xfrm>
+          <a:prstGeom prst="rect">
+            <a:avLst/>
+          </a:prstGeom>
+          <a:solidFill>
+            <a:srgbClr val="D2D9E0"/>
+          </a:solidFill>
+          <a:ln>
+            <a:noFill/>
           </a:ln>
+          <a:effectLst/>
         </p:spPr>
         <p:style>
           <a:lnRef idx="1">
@@ -9618,7 +10153,7 @@
         </p:nvSpPr>
         <p:spPr>
           <a:xfrm>
-            <a:off x="2468880" y="3511296"/>
+            <a:off x="2514600" y="3566160"/>
             <a:ext cx="2834640" cy="320040"/>
           </a:xfrm>
           <a:prstGeom prst="rect">
@@ -9627,7 +10162,7 @@
           <a:noFill/>
         </p:spPr>
         <p:txBody>
-          <a:bodyPr wrap="square">
+          <a:bodyPr wrap="square" anchor="t" lIns="25400" rIns="25400" tIns="12700" bIns="12700">
             <a:spAutoFit/>
           </a:bodyPr>
           <a:lstStyle/>
@@ -9636,8 +10171,9 @@
             <a:r>
               <a:rPr sz="1200" b="1" i="0">
                 <a:solidFill>
-                  <a:srgbClr val="0D2B55"/>
-                </a:solidFill>
+                  <a:srgbClr val="102A4C"/>
+                </a:solidFill>
+                <a:latin typeface="Calibri"/>
               </a:rPr>
               <a:t>Danışman:</a:t>
             </a:r>
@@ -9652,16 +10188,16 @@
         </p:nvSpPr>
         <p:spPr>
           <a:xfrm>
-            <a:off x="5394960" y="3511296"/>
-            <a:ext cx="4297680" cy="320040"/>
-          </a:xfrm>
-          <a:prstGeom prst="rect">
-            <a:avLst/>
-          </a:prstGeom>
-          <a:noFill/>
-        </p:spPr>
-        <p:txBody>
-          <a:bodyPr wrap="square">
+            <a:off x="5440680" y="3566160"/>
+            <a:ext cx="4206240" cy="320040"/>
+          </a:xfrm>
+          <a:prstGeom prst="rect">
+            <a:avLst/>
+          </a:prstGeom>
+          <a:noFill/>
+        </p:spPr>
+        <p:txBody>
+          <a:bodyPr wrap="square" anchor="t" lIns="25400" rIns="25400" tIns="12700" bIns="12700">
             <a:spAutoFit/>
           </a:bodyPr>
           <a:lstStyle/>
@@ -9670,8 +10206,9 @@
             <a:r>
               <a:rPr sz="1200" b="0" i="0">
                 <a:solidFill>
-                  <a:srgbClr val="2A2A2A"/>
-                </a:solidFill>
+                  <a:srgbClr val="242A30"/>
+                </a:solidFill>
+                <a:latin typeface="Calibri"/>
               </a:rPr>
               <a:t/>
             </a:r>
@@ -9686,17 +10223,19 @@
         </p:nvSpPr>
         <p:spPr>
           <a:xfrm>
-            <a:off x="5349240" y="3849624"/>
-            <a:ext cx="4343400" cy="0"/>
-          </a:xfrm>
-          <a:prstGeom prst="rect">
-            <a:avLst/>
-          </a:prstGeom>
-          <a:ln w="12700">
-            <a:solidFill>
-              <a:srgbClr val="CCCCCC"/>
-            </a:solidFill>
+            <a:off x="5394960" y="3895344"/>
+            <a:ext cx="4297680" cy="10972"/>
+          </a:xfrm>
+          <a:prstGeom prst="rect">
+            <a:avLst/>
+          </a:prstGeom>
+          <a:solidFill>
+            <a:srgbClr val="D2D9E0"/>
+          </a:solidFill>
+          <a:ln>
+            <a:noFill/>
           </a:ln>
+          <a:effectLst/>
         </p:spPr>
         <p:style>
           <a:lnRef idx="1">
@@ -9728,7 +10267,7 @@
         </p:nvSpPr>
         <p:spPr>
           <a:xfrm>
-            <a:off x="2468880" y="4078224"/>
+            <a:off x="2514600" y="4114800"/>
             <a:ext cx="2834640" cy="320040"/>
           </a:xfrm>
           <a:prstGeom prst="rect">
@@ -9737,7 +10276,7 @@
           <a:noFill/>
         </p:spPr>
         <p:txBody>
-          <a:bodyPr wrap="square">
+          <a:bodyPr wrap="square" anchor="t" lIns="25400" rIns="25400" tIns="12700" bIns="12700">
             <a:spAutoFit/>
           </a:bodyPr>
           <a:lstStyle/>
@@ -9746,8 +10285,9 @@
             <a:r>
               <a:rPr sz="1200" b="1" i="0">
                 <a:solidFill>
-                  <a:srgbClr val="0D2B55"/>
-                </a:solidFill>
+                  <a:srgbClr val="102A4C"/>
+                </a:solidFill>
+                <a:latin typeface="Calibri"/>
               </a:rPr>
               <a:t>Sunum Tarihi:</a:t>
             </a:r>
@@ -9762,16 +10302,16 @@
         </p:nvSpPr>
         <p:spPr>
           <a:xfrm>
-            <a:off x="5394960" y="4078224"/>
-            <a:ext cx="4297680" cy="320040"/>
-          </a:xfrm>
-          <a:prstGeom prst="rect">
-            <a:avLst/>
-          </a:prstGeom>
-          <a:noFill/>
-        </p:spPr>
-        <p:txBody>
-          <a:bodyPr wrap="square">
+            <a:off x="5440680" y="4114800"/>
+            <a:ext cx="4206240" cy="320040"/>
+          </a:xfrm>
+          <a:prstGeom prst="rect">
+            <a:avLst/>
+          </a:prstGeom>
+          <a:noFill/>
+        </p:spPr>
+        <p:txBody>
+          <a:bodyPr wrap="square" anchor="t" lIns="25400" rIns="25400" tIns="12700" bIns="12700">
             <a:spAutoFit/>
           </a:bodyPr>
           <a:lstStyle/>
@@ -9780,8 +10320,9 @@
             <a:r>
               <a:rPr sz="1200" b="0" i="0">
                 <a:solidFill>
-                  <a:srgbClr val="2A2A2A"/>
-                </a:solidFill>
+                  <a:srgbClr val="242A30"/>
+                </a:solidFill>
+                <a:latin typeface="Calibri"/>
               </a:rPr>
               <a:t/>
             </a:r>
@@ -9796,17 +10337,19 @@
         </p:nvSpPr>
         <p:spPr>
           <a:xfrm>
-            <a:off x="5349240" y="4416552"/>
-            <a:ext cx="4343400" cy="0"/>
-          </a:xfrm>
-          <a:prstGeom prst="rect">
-            <a:avLst/>
-          </a:prstGeom>
-          <a:ln w="12700">
-            <a:solidFill>
-              <a:srgbClr val="CCCCCC"/>
-            </a:solidFill>
+            <a:off x="5394960" y="4443984"/>
+            <a:ext cx="4297680" cy="10972"/>
+          </a:xfrm>
+          <a:prstGeom prst="rect">
+            <a:avLst/>
+          </a:prstGeom>
+          <a:solidFill>
+            <a:srgbClr val="D2D9E0"/>
+          </a:solidFill>
+          <a:ln>
+            <a:noFill/>
           </a:ln>
+          <a:effectLst/>
         </p:spPr>
         <p:style>
           <a:lnRef idx="1">
@@ -9838,7 +10381,7 @@
         </p:nvSpPr>
         <p:spPr>
           <a:xfrm>
-            <a:off x="2468880" y="4645152"/>
+            <a:off x="2514600" y="4663440"/>
             <a:ext cx="2834640" cy="320040"/>
           </a:xfrm>
           <a:prstGeom prst="rect">
@@ -9847,7 +10390,7 @@
           <a:noFill/>
         </p:spPr>
         <p:txBody>
-          <a:bodyPr wrap="square">
+          <a:bodyPr wrap="square" anchor="t" lIns="25400" rIns="25400" tIns="12700" bIns="12700">
             <a:spAutoFit/>
           </a:bodyPr>
           <a:lstStyle/>
@@ -9856,8 +10399,9 @@
             <a:r>
               <a:rPr sz="1200" b="1" i="0">
                 <a:solidFill>
-                  <a:srgbClr val="0D2B55"/>
-                </a:solidFill>
+                  <a:srgbClr val="102A4C"/>
+                </a:solidFill>
+                <a:latin typeface="Calibri"/>
               </a:rPr>
               <a:t>Sunum Adı:</a:t>
             </a:r>
@@ -9872,16 +10416,16 @@
         </p:nvSpPr>
         <p:spPr>
           <a:xfrm>
-            <a:off x="5394960" y="4645152"/>
-            <a:ext cx="4297680" cy="320040"/>
-          </a:xfrm>
-          <a:prstGeom prst="rect">
-            <a:avLst/>
-          </a:prstGeom>
-          <a:noFill/>
-        </p:spPr>
-        <p:txBody>
-          <a:bodyPr wrap="square">
+            <a:off x="5440680" y="4663440"/>
+            <a:ext cx="4206240" cy="320040"/>
+          </a:xfrm>
+          <a:prstGeom prst="rect">
+            <a:avLst/>
+          </a:prstGeom>
+          <a:noFill/>
+        </p:spPr>
+        <p:txBody>
+          <a:bodyPr wrap="square" anchor="t" lIns="25400" rIns="25400" tIns="12700" bIns="12700">
             <a:spAutoFit/>
           </a:bodyPr>
           <a:lstStyle/>
@@ -9890,8 +10434,9 @@
             <a:r>
               <a:rPr sz="1200" b="0" i="0">
                 <a:solidFill>
-                  <a:srgbClr val="2A2A2A"/>
-                </a:solidFill>
+                  <a:srgbClr val="242A30"/>
+                </a:solidFill>
+                <a:latin typeface="Calibri"/>
               </a:rPr>
               <a:t>Literatür Taraması Sunumu</a:t>
             </a:r>
@@ -9906,17 +10451,19 @@
         </p:nvSpPr>
         <p:spPr>
           <a:xfrm>
-            <a:off x="5349240" y="4983480"/>
-            <a:ext cx="4343400" cy="0"/>
-          </a:xfrm>
-          <a:prstGeom prst="rect">
-            <a:avLst/>
-          </a:prstGeom>
-          <a:ln w="12700">
-            <a:solidFill>
-              <a:srgbClr val="CCCCCC"/>
-            </a:solidFill>
+            <a:off x="5394960" y="4992624"/>
+            <a:ext cx="4297680" cy="10972"/>
+          </a:xfrm>
+          <a:prstGeom prst="rect">
+            <a:avLst/>
+          </a:prstGeom>
+          <a:solidFill>
+            <a:srgbClr val="D2D9E0"/>
+          </a:solidFill>
+          <a:ln>
+            <a:noFill/>
           </a:ln>
+          <a:effectLst/>
         </p:spPr>
         <p:style>
           <a:lnRef idx="1">
@@ -9948,16 +10495,16 @@
         </p:nvSpPr>
         <p:spPr>
           <a:xfrm>
-            <a:off x="2468880" y="5440680"/>
-            <a:ext cx="2926080" cy="347472"/>
-          </a:xfrm>
-          <a:prstGeom prst="rect">
-            <a:avLst/>
-          </a:prstGeom>
-          <a:noFill/>
-        </p:spPr>
-        <p:txBody>
-          <a:bodyPr wrap="square">
+            <a:off x="2514600" y="5440680"/>
+            <a:ext cx="2743200" cy="347472"/>
+          </a:xfrm>
+          <a:prstGeom prst="rect">
+            <a:avLst/>
+          </a:prstGeom>
+          <a:noFill/>
+        </p:spPr>
+        <p:txBody>
+          <a:bodyPr wrap="square" anchor="t" lIns="25400" rIns="25400" tIns="12700" bIns="12700">
             <a:spAutoFit/>
           </a:bodyPr>
           <a:lstStyle/>
@@ -9966,8 +10513,9 @@
             <a:r>
               <a:rPr sz="1300" b="1" i="0">
                 <a:solidFill>
-                  <a:srgbClr val="0D2B55"/>
-                </a:solidFill>
+                  <a:srgbClr val="102A4C"/>
+                </a:solidFill>
+                <a:latin typeface="Calibri"/>
               </a:rPr>
               <a:t>İmza:</a:t>
             </a:r>
@@ -9982,17 +10530,19 @@
         </p:nvSpPr>
         <p:spPr>
           <a:xfrm>
-            <a:off x="3246120" y="5788152"/>
-            <a:ext cx="6080760" cy="0"/>
-          </a:xfrm>
-          <a:prstGeom prst="rect">
-            <a:avLst/>
-          </a:prstGeom>
-          <a:ln w="19050">
-            <a:solidFill>
-              <a:srgbClr val="2A2A2A"/>
-            </a:solidFill>
+            <a:off x="3291840" y="5797296"/>
+            <a:ext cx="6126480" cy="12801"/>
+          </a:xfrm>
+          <a:prstGeom prst="rect">
+            <a:avLst/>
+          </a:prstGeom>
+          <a:solidFill>
+            <a:srgbClr val="242A30"/>
+          </a:solidFill>
+          <a:ln>
+            <a:noFill/>
           </a:ln>
+          <a:effectLst/>
         </p:spPr>
         <p:style>
           <a:lnRef idx="1">
@@ -10024,16 +10574,16 @@
         </p:nvSpPr>
         <p:spPr>
           <a:xfrm>
-            <a:off x="3246120" y="5843016"/>
-            <a:ext cx="6080760" cy="274320"/>
-          </a:xfrm>
-          <a:prstGeom prst="rect">
-            <a:avLst/>
-          </a:prstGeom>
-          <a:noFill/>
-        </p:spPr>
-        <p:txBody>
-          <a:bodyPr wrap="square">
+            <a:off x="3291840" y="5852160"/>
+            <a:ext cx="6126480" cy="274320"/>
+          </a:xfrm>
+          <a:prstGeom prst="rect">
+            <a:avLst/>
+          </a:prstGeom>
+          <a:noFill/>
+        </p:spPr>
+        <p:txBody>
+          <a:bodyPr wrap="square" anchor="t" lIns="25400" rIns="25400" tIns="12700" bIns="12700">
             <a:spAutoFit/>
           </a:bodyPr>
           <a:lstStyle/>
@@ -10042,8 +10592,9 @@
             <a:r>
               <a:rPr sz="900" b="0" i="0">
                 <a:solidFill>
-                  <a:srgbClr val="66707A"/>
-                </a:solidFill>
+                  <a:srgbClr val="6A7480"/>
+                </a:solidFill>
+                <a:latin typeface="Calibri"/>
               </a:rPr>
               <a:t>(Öğrenci bu alanı imzalayarak sunumun kendisine ait olduğunu onaylar.)</a:t>
             </a:r>

--- a/docs/academic/TeslimEdilecekler/Sunumlar/02_Literatur_Taramasi_Sunumu.pptx
+++ b/docs/academic/TeslimEdilecekler/Sunumlar/02_Literatur_Taramasi_Sunumu.pptx
@@ -3812,7 +3812,7 @@
         <p:spPr>
           <a:xfrm>
             <a:off x="365760" y="6473952"/>
-            <a:ext cx="7772400" cy="292608"/>
+            <a:ext cx="4206240" cy="292608"/>
           </a:xfrm>
           <a:prstGeom prst="rect">
             <a:avLst/>
@@ -3833,7 +3833,7 @@
                 </a:solidFill>
                 <a:latin typeface="Calibri"/>
               </a:rPr>
-              <a:t>AURIS  ·  Yapay Zekâ Üretimli Müzik Tespiti</a:t>
+              <a:t>AURIS · YZ Üretimli Müzik Tespiti</a:t>
             </a:r>
           </a:p>
         </p:txBody>
@@ -3846,8 +3846,8 @@
         </p:nvSpPr>
         <p:spPr>
           <a:xfrm>
-            <a:off x="5029200" y="6473952"/>
-            <a:ext cx="6793992" cy="292608"/>
+            <a:off x="4663440" y="6473952"/>
+            <a:ext cx="7159752" cy="292608"/>
           </a:xfrm>
           <a:prstGeom prst="rect">
             <a:avLst/>
@@ -6484,7 +6484,7 @@
         <p:spPr>
           <a:xfrm>
             <a:off x="365760" y="6473952"/>
-            <a:ext cx="7772400" cy="292608"/>
+            <a:ext cx="4206240" cy="292608"/>
           </a:xfrm>
           <a:prstGeom prst="rect">
             <a:avLst/>
@@ -6505,7 +6505,7 @@
                 </a:solidFill>
                 <a:latin typeface="Calibri"/>
               </a:rPr>
-              <a:t>AURIS  ·  Yapay Zekâ Üretimli Müzik Tespiti</a:t>
+              <a:t>AURIS · YZ Üretimli Müzik Tespiti</a:t>
             </a:r>
           </a:p>
         </p:txBody>
@@ -6518,8 +6518,8 @@
         </p:nvSpPr>
         <p:spPr>
           <a:xfrm>
-            <a:off x="5029200" y="6473952"/>
-            <a:ext cx="6793992" cy="292608"/>
+            <a:off x="4663440" y="6473952"/>
+            <a:ext cx="7159752" cy="292608"/>
           </a:xfrm>
           <a:prstGeom prst="rect">
             <a:avLst/>
@@ -7940,7 +7940,7 @@
         <p:spPr>
           <a:xfrm>
             <a:off x="365760" y="6473952"/>
-            <a:ext cx="7772400" cy="292608"/>
+            <a:ext cx="4206240" cy="292608"/>
           </a:xfrm>
           <a:prstGeom prst="rect">
             <a:avLst/>
@@ -7961,7 +7961,7 @@
                 </a:solidFill>
                 <a:latin typeface="Calibri"/>
               </a:rPr>
-              <a:t>AURIS  ·  Yapay Zekâ Üretimli Müzik Tespiti</a:t>
+              <a:t>AURIS · YZ Üretimli Müzik Tespiti</a:t>
             </a:r>
           </a:p>
         </p:txBody>
@@ -7974,8 +7974,8 @@
         </p:nvSpPr>
         <p:spPr>
           <a:xfrm>
-            <a:off x="5029200" y="6473952"/>
-            <a:ext cx="6793992" cy="292608"/>
+            <a:off x="4663440" y="6473952"/>
+            <a:ext cx="7159752" cy="292608"/>
           </a:xfrm>
           <a:prstGeom prst="rect">
             <a:avLst/>
@@ -9512,7 +9512,7 @@
         <p:spPr>
           <a:xfrm>
             <a:off x="365760" y="6473952"/>
-            <a:ext cx="7772400" cy="292608"/>
+            <a:ext cx="4206240" cy="292608"/>
           </a:xfrm>
           <a:prstGeom prst="rect">
             <a:avLst/>
@@ -9533,7 +9533,7 @@
                 </a:solidFill>
                 <a:latin typeface="Calibri"/>
               </a:rPr>
-              <a:t>AURIS  ·  Yapay Zekâ Üretimli Müzik Tespiti</a:t>
+              <a:t>AURIS · YZ Üretimli Müzik Tespiti</a:t>
             </a:r>
           </a:p>
         </p:txBody>
@@ -9546,8 +9546,8 @@
         </p:nvSpPr>
         <p:spPr>
           <a:xfrm>
-            <a:off x="5029200" y="6473952"/>
-            <a:ext cx="6793992" cy="292608"/>
+            <a:off x="4663440" y="6473952"/>
+            <a:ext cx="7159752" cy="292608"/>
           </a:xfrm>
           <a:prstGeom prst="rect">
             <a:avLst/>
